--- a/doc/プリント.pptx
+++ b/doc/プリント.pptx
@@ -5,10 +5,10 @@
     <p:sldMasterId id="2147483648" r:id="rId4"/>
   </p:sldMasterIdLst>
   <p:notesMasterIdLst>
-    <p:notesMasterId r:id="rId33"/>
+    <p:notesMasterId r:id="rId31"/>
   </p:notesMasterIdLst>
   <p:handoutMasterIdLst>
-    <p:handoutMasterId r:id="rId34"/>
+    <p:handoutMasterId r:id="rId32"/>
   </p:handoutMasterIdLst>
   <p:sldIdLst>
     <p:sldId id="346" r:id="rId5"/>
@@ -23,25 +23,23 @@
     <p:sldId id="358" r:id="rId14"/>
     <p:sldId id="359" r:id="rId15"/>
     <p:sldId id="360" r:id="rId16"/>
-    <p:sldId id="361" r:id="rId17"/>
-    <p:sldId id="364" r:id="rId18"/>
-    <p:sldId id="366" r:id="rId19"/>
-    <p:sldId id="363" r:id="rId20"/>
-    <p:sldId id="368" r:id="rId21"/>
-    <p:sldId id="367" r:id="rId22"/>
-    <p:sldId id="369" r:id="rId23"/>
-    <p:sldId id="370" r:id="rId24"/>
-    <p:sldId id="371" r:id="rId25"/>
-    <p:sldId id="373" r:id="rId26"/>
-    <p:sldId id="374" r:id="rId27"/>
-    <p:sldId id="375" r:id="rId28"/>
-    <p:sldId id="377" r:id="rId29"/>
-    <p:sldId id="378" r:id="rId30"/>
-    <p:sldId id="379" r:id="rId31"/>
-    <p:sldId id="380" r:id="rId32"/>
+    <p:sldId id="364" r:id="rId17"/>
+    <p:sldId id="366" r:id="rId18"/>
+    <p:sldId id="363" r:id="rId19"/>
+    <p:sldId id="368" r:id="rId20"/>
+    <p:sldId id="380" r:id="rId21"/>
+    <p:sldId id="369" r:id="rId22"/>
+    <p:sldId id="370" r:id="rId23"/>
+    <p:sldId id="371" r:id="rId24"/>
+    <p:sldId id="373" r:id="rId25"/>
+    <p:sldId id="374" r:id="rId26"/>
+    <p:sldId id="375" r:id="rId27"/>
+    <p:sldId id="377" r:id="rId28"/>
+    <p:sldId id="378" r:id="rId29"/>
+    <p:sldId id="379" r:id="rId30"/>
   </p:sldIdLst>
   <p:sldSz cx="9144000" cy="6858000" type="screen4x3"/>
-  <p:notesSz cx="6858000" cy="9144000"/>
+  <p:notesSz cx="9601200" cy="7315200"/>
   <p:defaultTextStyle>
     <a:defPPr>
       <a:defRPr lang="en-US"/>
@@ -152,1912 +150,6 @@
 <p188:authorLst xmlns:a="http://schemas.openxmlformats.org/drawingml/2006/main" xmlns:r="http://schemas.openxmlformats.org/officeDocument/2006/relationships" xmlns:p188="http://schemas.microsoft.com/office/powerpoint/2018/8/main">
   <p188:author id="{00000000-0000-0000-0000-000000000000}" name="Author" initials="A" userId="Author" providerId="AD"/>
 </p188:authorLst>
-</file>
-
-<file path=ppt/revisionInfo.xml><?xml version="1.0" encoding="utf-8"?>
-<p1510:revInfo xmlns:a="http://schemas.openxmlformats.org/drawingml/2006/main" xmlns:r="http://schemas.openxmlformats.org/officeDocument/2006/relationships" xmlns:p1510="http://schemas.microsoft.com/office/powerpoint/2015/10/main">
-  <p1510:revLst>
-    <p1510:client id="{59857A4D-6101-475A-9106-2CC481DC496D}" v="1606" dt="2026-08-17T23:35:49.604"/>
-  </p1510:revLst>
-</p1510:revInfo>
-</file>
-
-<file path=ppt/changesInfos/changesInfo1.xml><?xml version="1.0" encoding="utf-8"?>
-<pc:chgInfo xmlns:a="http://schemas.openxmlformats.org/drawingml/2006/main" xmlns:r="http://schemas.openxmlformats.org/officeDocument/2006/relationships" xmlns:ac="http://schemas.microsoft.com/office/drawing/2013/main/command" xmlns:pc="http://schemas.microsoft.com/office/powerpoint/2013/main/command">
-  <pc:docChgLst>
-    <pc:chgData name="Mohd Hafizuddin Bin Kamilin (宇部)" userId="dcc12b03-11b8-42c5-b91a-420a12a1d1e2" providerId="ADAL" clId="{C208E6D6-5F29-4ACC-84C5-187E083BCA60}"/>
-    <pc:docChg chg="undo redo custSel addSld delSld modSld sldOrd modMainMaster modNotesMaster">
-      <pc:chgData name="Mohd Hafizuddin Bin Kamilin (宇部)" userId="dcc12b03-11b8-42c5-b91a-420a12a1d1e2" providerId="ADAL" clId="{C208E6D6-5F29-4ACC-84C5-187E083BCA60}" dt="2026-08-17T23:40:09.832" v="52292" actId="207"/>
-      <pc:docMkLst>
-        <pc:docMk/>
-      </pc:docMkLst>
-      <pc:sldChg chg="addSp delSp modSp new mod ord modClrScheme chgLayout modNotesTx">
-        <pc:chgData name="Mohd Hafizuddin Bin Kamilin (宇部)" userId="dcc12b03-11b8-42c5-b91a-420a12a1d1e2" providerId="ADAL" clId="{C208E6D6-5F29-4ACC-84C5-187E083BCA60}" dt="2026-08-07T13:31:45.990" v="52084" actId="20577"/>
-        <pc:sldMkLst>
-          <pc:docMk/>
-          <pc:sldMk cId="2291722223" sldId="346"/>
-        </pc:sldMkLst>
-        <pc:spChg chg="mod ord">
-          <ac:chgData name="Mohd Hafizuddin Bin Kamilin (宇部)" userId="dcc12b03-11b8-42c5-b91a-420a12a1d1e2" providerId="ADAL" clId="{C208E6D6-5F29-4ACC-84C5-187E083BCA60}" dt="2026-07-30T00:50:22.534" v="41172" actId="242"/>
-          <ac:spMkLst>
-            <pc:docMk/>
-            <pc:sldMk cId="2291722223" sldId="346"/>
-            <ac:spMk id="4" creationId="{CF743A26-720F-3540-4190-875C7BE058DF}"/>
-          </ac:spMkLst>
-        </pc:spChg>
-        <pc:spChg chg="add mod ord">
-          <ac:chgData name="Mohd Hafizuddin Bin Kamilin (宇部)" userId="dcc12b03-11b8-42c5-b91a-420a12a1d1e2" providerId="ADAL" clId="{C208E6D6-5F29-4ACC-84C5-187E083BCA60}" dt="2026-07-30T00:50:22.534" v="41172" actId="242"/>
-          <ac:spMkLst>
-            <pc:docMk/>
-            <pc:sldMk cId="2291722223" sldId="346"/>
-            <ac:spMk id="5" creationId="{0FA70003-2CA5-6DBC-62FC-E95D9C2F7613}"/>
-          </ac:spMkLst>
-        </pc:spChg>
-        <pc:spChg chg="add mod ord">
-          <ac:chgData name="Mohd Hafizuddin Bin Kamilin (宇部)" userId="dcc12b03-11b8-42c5-b91a-420a12a1d1e2" providerId="ADAL" clId="{C208E6D6-5F29-4ACC-84C5-187E083BCA60}" dt="2026-08-07T02:31:40.665" v="51825" actId="20577"/>
-          <ac:spMkLst>
-            <pc:docMk/>
-            <pc:sldMk cId="2291722223" sldId="346"/>
-            <ac:spMk id="6" creationId="{78C8E755-1569-4E6B-5BAD-094FDDCF14AE}"/>
-          </ac:spMkLst>
-        </pc:spChg>
-        <pc:spChg chg="add mod ord">
-          <ac:chgData name="Mohd Hafizuddin Bin Kamilin (宇部)" userId="dcc12b03-11b8-42c5-b91a-420a12a1d1e2" providerId="ADAL" clId="{C208E6D6-5F29-4ACC-84C5-187E083BCA60}" dt="2026-08-07T04:03:16.182" v="52016" actId="20577"/>
-          <ac:spMkLst>
-            <pc:docMk/>
-            <pc:sldMk cId="2291722223" sldId="346"/>
-            <ac:spMk id="7" creationId="{AF2BCF99-412D-5987-4E2D-7DE404AF9F7B}"/>
-          </ac:spMkLst>
-        </pc:spChg>
-      </pc:sldChg>
-      <pc:sldChg chg="addSp delSp modSp new mod modClrScheme modAnim chgLayout">
-        <pc:chgData name="Mohd Hafizuddin Bin Kamilin (宇部)" userId="dcc12b03-11b8-42c5-b91a-420a12a1d1e2" providerId="ADAL" clId="{C208E6D6-5F29-4ACC-84C5-187E083BCA60}" dt="2026-07-30T05:51:50.381" v="41660"/>
-        <pc:sldMkLst>
-          <pc:docMk/>
-          <pc:sldMk cId="1814170624" sldId="347"/>
-        </pc:sldMkLst>
-        <pc:spChg chg="mod ord">
-          <ac:chgData name="Mohd Hafizuddin Bin Kamilin (宇部)" userId="dcc12b03-11b8-42c5-b91a-420a12a1d1e2" providerId="ADAL" clId="{C208E6D6-5F29-4ACC-84C5-187E083BCA60}" dt="2026-07-30T01:23:51.780" v="41183" actId="700"/>
-          <ac:spMkLst>
-            <pc:docMk/>
-            <pc:sldMk cId="1814170624" sldId="347"/>
-            <ac:spMk id="4" creationId="{6D7D1FA0-4073-D0BB-A7A3-11B1784BC8AA}"/>
-          </ac:spMkLst>
-        </pc:spChg>
-        <pc:spChg chg="add mod ord">
-          <ac:chgData name="Mohd Hafizuddin Bin Kamilin (宇部)" userId="dcc12b03-11b8-42c5-b91a-420a12a1d1e2" providerId="ADAL" clId="{C208E6D6-5F29-4ACC-84C5-187E083BCA60}" dt="2026-07-30T01:27:06.306" v="41211" actId="20577"/>
-          <ac:spMkLst>
-            <pc:docMk/>
-            <pc:sldMk cId="1814170624" sldId="347"/>
-            <ac:spMk id="5" creationId="{217F5B5B-410F-6732-970F-1877F90F2FDD}"/>
-          </ac:spMkLst>
-        </pc:spChg>
-        <pc:spChg chg="add mod ord">
-          <ac:chgData name="Mohd Hafizuddin Bin Kamilin (宇部)" userId="dcc12b03-11b8-42c5-b91a-420a12a1d1e2" providerId="ADAL" clId="{C208E6D6-5F29-4ACC-84C5-187E083BCA60}" dt="2026-07-30T05:51:50.381" v="41660"/>
-          <ac:spMkLst>
-            <pc:docMk/>
-            <pc:sldMk cId="1814170624" sldId="347"/>
-            <ac:spMk id="6" creationId="{DABF8F09-E3BE-26B5-DED6-9C131156EA8E}"/>
-          </ac:spMkLst>
-        </pc:spChg>
-        <pc:spChg chg="add mod ord">
-          <ac:chgData name="Mohd Hafizuddin Bin Kamilin (宇部)" userId="dcc12b03-11b8-42c5-b91a-420a12a1d1e2" providerId="ADAL" clId="{C208E6D6-5F29-4ACC-84C5-187E083BCA60}" dt="2026-07-30T03:58:20.077" v="41613" actId="207"/>
-          <ac:spMkLst>
-            <pc:docMk/>
-            <pc:sldMk cId="1814170624" sldId="347"/>
-            <ac:spMk id="7" creationId="{016C750F-DBC7-D1E3-79FF-536632ACF00F}"/>
-          </ac:spMkLst>
-        </pc:spChg>
-        <pc:spChg chg="add mod">
-          <ac:chgData name="Mohd Hafizuddin Bin Kamilin (宇部)" userId="dcc12b03-11b8-42c5-b91a-420a12a1d1e2" providerId="ADAL" clId="{C208E6D6-5F29-4ACC-84C5-187E083BCA60}" dt="2026-07-30T03:48:20.837" v="41432" actId="1076"/>
-          <ac:spMkLst>
-            <pc:docMk/>
-            <pc:sldMk cId="1814170624" sldId="347"/>
-            <ac:spMk id="18" creationId="{E05863FC-20A6-B28A-373A-F6511172C165}"/>
-          </ac:spMkLst>
-        </pc:spChg>
-        <pc:spChg chg="add mod">
-          <ac:chgData name="Mohd Hafizuddin Bin Kamilin (宇部)" userId="dcc12b03-11b8-42c5-b91a-420a12a1d1e2" providerId="ADAL" clId="{C208E6D6-5F29-4ACC-84C5-187E083BCA60}" dt="2026-07-30T03:48:43.343" v="41471" actId="1076"/>
-          <ac:spMkLst>
-            <pc:docMk/>
-            <pc:sldMk cId="1814170624" sldId="347"/>
-            <ac:spMk id="20" creationId="{6A19DB01-88A9-D5A1-02ED-68439B8B960C}"/>
-          </ac:spMkLst>
-        </pc:spChg>
-        <pc:spChg chg="add mod">
-          <ac:chgData name="Mohd Hafizuddin Bin Kamilin (宇部)" userId="dcc12b03-11b8-42c5-b91a-420a12a1d1e2" providerId="ADAL" clId="{C208E6D6-5F29-4ACC-84C5-187E083BCA60}" dt="2026-07-30T03:49:19.804" v="41490" actId="1076"/>
-          <ac:spMkLst>
-            <pc:docMk/>
-            <pc:sldMk cId="1814170624" sldId="347"/>
-            <ac:spMk id="22" creationId="{0484DD36-B5E5-3029-7B07-F2B8D88E817A}"/>
-          </ac:spMkLst>
-        </pc:spChg>
-        <pc:spChg chg="add mod">
-          <ac:chgData name="Mohd Hafizuddin Bin Kamilin (宇部)" userId="dcc12b03-11b8-42c5-b91a-420a12a1d1e2" providerId="ADAL" clId="{C208E6D6-5F29-4ACC-84C5-187E083BCA60}" dt="2026-07-30T03:49:56.841" v="41508" actId="1076"/>
-          <ac:spMkLst>
-            <pc:docMk/>
-            <pc:sldMk cId="1814170624" sldId="347"/>
-            <ac:spMk id="24" creationId="{E7987BDF-0F3A-099A-816B-536FE6CF5107}"/>
-          </ac:spMkLst>
-        </pc:spChg>
-        <pc:picChg chg="add mod">
-          <ac:chgData name="Mohd Hafizuddin Bin Kamilin (宇部)" userId="dcc12b03-11b8-42c5-b91a-420a12a1d1e2" providerId="ADAL" clId="{C208E6D6-5F29-4ACC-84C5-187E083BCA60}" dt="2026-07-30T03:48:03.179" v="41413" actId="1035"/>
-          <ac:picMkLst>
-            <pc:docMk/>
-            <pc:sldMk cId="1814170624" sldId="347"/>
-            <ac:picMk id="11" creationId="{AF099447-0039-3F40-C292-11359CB3DB23}"/>
-          </ac:picMkLst>
-        </pc:picChg>
-        <pc:picChg chg="add mod">
-          <ac:chgData name="Mohd Hafizuddin Bin Kamilin (宇部)" userId="dcc12b03-11b8-42c5-b91a-420a12a1d1e2" providerId="ADAL" clId="{C208E6D6-5F29-4ACC-84C5-187E083BCA60}" dt="2026-07-30T03:48:03.179" v="41413" actId="1035"/>
-          <ac:picMkLst>
-            <pc:docMk/>
-            <pc:sldMk cId="1814170624" sldId="347"/>
-            <ac:picMk id="13" creationId="{E53DC56C-2E93-ED58-BFC2-DC48D427D6F0}"/>
-          </ac:picMkLst>
-        </pc:picChg>
-        <pc:picChg chg="add mod">
-          <ac:chgData name="Mohd Hafizuddin Bin Kamilin (宇部)" userId="dcc12b03-11b8-42c5-b91a-420a12a1d1e2" providerId="ADAL" clId="{C208E6D6-5F29-4ACC-84C5-187E083BCA60}" dt="2026-07-30T03:48:03.179" v="41413" actId="1035"/>
-          <ac:picMkLst>
-            <pc:docMk/>
-            <pc:sldMk cId="1814170624" sldId="347"/>
-            <ac:picMk id="15" creationId="{93FFA03F-2853-BEF3-8FD3-A31983AEA2F7}"/>
-          </ac:picMkLst>
-        </pc:picChg>
-        <pc:picChg chg="add mod">
-          <ac:chgData name="Mohd Hafizuddin Bin Kamilin (宇部)" userId="dcc12b03-11b8-42c5-b91a-420a12a1d1e2" providerId="ADAL" clId="{C208E6D6-5F29-4ACC-84C5-187E083BCA60}" dt="2026-07-30T03:48:03.179" v="41413" actId="1035"/>
-          <ac:picMkLst>
-            <pc:docMk/>
-            <pc:sldMk cId="1814170624" sldId="347"/>
-            <ac:picMk id="17" creationId="{5B33EDA2-7B3E-D3CD-039B-84ED70E80305}"/>
-          </ac:picMkLst>
-        </pc:picChg>
-        <pc:picChg chg="add mod">
-          <ac:chgData name="Mohd Hafizuddin Bin Kamilin (宇部)" userId="dcc12b03-11b8-42c5-b91a-420a12a1d1e2" providerId="ADAL" clId="{C208E6D6-5F29-4ACC-84C5-187E083BCA60}" dt="2026-07-30T03:55:11.672" v="41592" actId="1076"/>
-          <ac:picMkLst>
-            <pc:docMk/>
-            <pc:sldMk cId="1814170624" sldId="347"/>
-            <ac:picMk id="32" creationId="{969B1371-F205-4649-9105-63FED3507531}"/>
-          </ac:picMkLst>
-        </pc:picChg>
-        <pc:picChg chg="add mod">
-          <ac:chgData name="Mohd Hafizuddin Bin Kamilin (宇部)" userId="dcc12b03-11b8-42c5-b91a-420a12a1d1e2" providerId="ADAL" clId="{C208E6D6-5F29-4ACC-84C5-187E083BCA60}" dt="2026-07-30T03:54:06.444" v="41580" actId="1076"/>
-          <ac:picMkLst>
-            <pc:docMk/>
-            <pc:sldMk cId="1814170624" sldId="347"/>
-            <ac:picMk id="34" creationId="{63E4C97F-F5C0-D00F-8503-551269FC63FC}"/>
-          </ac:picMkLst>
-        </pc:picChg>
-        <pc:picChg chg="add mod">
-          <ac:chgData name="Mohd Hafizuddin Bin Kamilin (宇部)" userId="dcc12b03-11b8-42c5-b91a-420a12a1d1e2" providerId="ADAL" clId="{C208E6D6-5F29-4ACC-84C5-187E083BCA60}" dt="2026-07-30T03:54:19.289" v="41582" actId="1076"/>
-          <ac:picMkLst>
-            <pc:docMk/>
-            <pc:sldMk cId="1814170624" sldId="347"/>
-            <ac:picMk id="36" creationId="{02036FC8-2F25-939E-8DAC-0055DCAE5CBE}"/>
-          </ac:picMkLst>
-        </pc:picChg>
-        <pc:picChg chg="add mod">
-          <ac:chgData name="Mohd Hafizuddin Bin Kamilin (宇部)" userId="dcc12b03-11b8-42c5-b91a-420a12a1d1e2" providerId="ADAL" clId="{C208E6D6-5F29-4ACC-84C5-187E083BCA60}" dt="2026-07-30T03:55:02.329" v="41590" actId="1076"/>
-          <ac:picMkLst>
-            <pc:docMk/>
-            <pc:sldMk cId="1814170624" sldId="347"/>
-            <ac:picMk id="38" creationId="{043703BF-1864-FB36-5751-27EDC168ED14}"/>
-          </ac:picMkLst>
-        </pc:picChg>
-      </pc:sldChg>
-      <pc:sldChg chg="addSp delSp modSp new mod modClrScheme chgLayout">
-        <pc:chgData name="Mohd Hafizuddin Bin Kamilin (宇部)" userId="dcc12b03-11b8-42c5-b91a-420a12a1d1e2" providerId="ADAL" clId="{C208E6D6-5F29-4ACC-84C5-187E083BCA60}" dt="2026-08-07T13:36:28.813" v="52085" actId="14826"/>
-        <pc:sldMkLst>
-          <pc:docMk/>
-          <pc:sldMk cId="938725292" sldId="348"/>
-        </pc:sldMkLst>
-        <pc:spChg chg="mod ord">
-          <ac:chgData name="Mohd Hafizuddin Bin Kamilin (宇部)" userId="dcc12b03-11b8-42c5-b91a-420a12a1d1e2" providerId="ADAL" clId="{C208E6D6-5F29-4ACC-84C5-187E083BCA60}" dt="2026-07-30T02:15:59.823" v="41330" actId="700"/>
-          <ac:spMkLst>
-            <pc:docMk/>
-            <pc:sldMk cId="938725292" sldId="348"/>
-            <ac:spMk id="5" creationId="{264E7844-7F64-8F2C-9B24-54E1EEC4479F}"/>
-          </ac:spMkLst>
-        </pc:spChg>
-        <pc:spChg chg="add mod ord">
-          <ac:chgData name="Mohd Hafizuddin Bin Kamilin (宇部)" userId="dcc12b03-11b8-42c5-b91a-420a12a1d1e2" providerId="ADAL" clId="{C208E6D6-5F29-4ACC-84C5-187E083BCA60}" dt="2026-07-30T06:25:16.062" v="41891" actId="20577"/>
-          <ac:spMkLst>
-            <pc:docMk/>
-            <pc:sldMk cId="938725292" sldId="348"/>
-            <ac:spMk id="6" creationId="{B78594C3-465C-8601-1920-AA298CE321BE}"/>
-          </ac:spMkLst>
-        </pc:spChg>
-        <pc:spChg chg="add mod">
-          <ac:chgData name="Mohd Hafizuddin Bin Kamilin (宇部)" userId="dcc12b03-11b8-42c5-b91a-420a12a1d1e2" providerId="ADAL" clId="{C208E6D6-5F29-4ACC-84C5-187E083BCA60}" dt="2026-07-30T06:35:10.957" v="41907" actId="123"/>
-          <ac:spMkLst>
-            <pc:docMk/>
-            <pc:sldMk cId="938725292" sldId="348"/>
-            <ac:spMk id="10" creationId="{3A3CBADD-E650-D643-8D0C-DADE0C8B30D5}"/>
-          </ac:spMkLst>
-        </pc:spChg>
-        <pc:picChg chg="add mod">
-          <ac:chgData name="Mohd Hafizuddin Bin Kamilin (宇部)" userId="dcc12b03-11b8-42c5-b91a-420a12a1d1e2" providerId="ADAL" clId="{C208E6D6-5F29-4ACC-84C5-187E083BCA60}" dt="2026-08-07T13:36:28.813" v="52085" actId="14826"/>
-          <ac:picMkLst>
-            <pc:docMk/>
-            <pc:sldMk cId="938725292" sldId="348"/>
-            <ac:picMk id="9" creationId="{E5AC6189-7EE8-4AF2-2A48-AD19F2980FD6}"/>
-          </ac:picMkLst>
-        </pc:picChg>
-      </pc:sldChg>
-      <pc:sldChg chg="addSp delSp modSp new mod ord modAnim">
-        <pc:chgData name="Mohd Hafizuddin Bin Kamilin (宇部)" userId="dcc12b03-11b8-42c5-b91a-420a12a1d1e2" providerId="ADAL" clId="{C208E6D6-5F29-4ACC-84C5-187E083BCA60}" dt="2026-08-17T23:35:02.366" v="52237" actId="14100"/>
-        <pc:sldMkLst>
-          <pc:docMk/>
-          <pc:sldMk cId="3803433797" sldId="349"/>
-        </pc:sldMkLst>
-        <pc:spChg chg="mod">
-          <ac:chgData name="Mohd Hafizuddin Bin Kamilin (宇部)" userId="dcc12b03-11b8-42c5-b91a-420a12a1d1e2" providerId="ADAL" clId="{C208E6D6-5F29-4ACC-84C5-187E083BCA60}" dt="2026-07-30T05:56:37.860" v="41688" actId="20577"/>
-          <ac:spMkLst>
-            <pc:docMk/>
-            <pc:sldMk cId="3803433797" sldId="349"/>
-            <ac:spMk id="2" creationId="{E2B08723-E5A5-BA28-534A-F827C1429227}"/>
-          </ac:spMkLst>
-        </pc:spChg>
-        <pc:spChg chg="mod">
-          <ac:chgData name="Mohd Hafizuddin Bin Kamilin (宇部)" userId="dcc12b03-11b8-42c5-b91a-420a12a1d1e2" providerId="ADAL" clId="{C208E6D6-5F29-4ACC-84C5-187E083BCA60}" dt="2026-07-30T06:06:08.844" v="41713" actId="207"/>
-          <ac:spMkLst>
-            <pc:docMk/>
-            <pc:sldMk cId="3803433797" sldId="349"/>
-            <ac:spMk id="3" creationId="{64A59E28-68B9-619D-09FF-269DB618C3D8}"/>
-          </ac:spMkLst>
-        </pc:spChg>
-        <pc:spChg chg="add mod">
-          <ac:chgData name="Mohd Hafizuddin Bin Kamilin (宇部)" userId="dcc12b03-11b8-42c5-b91a-420a12a1d1e2" providerId="ADAL" clId="{C208E6D6-5F29-4ACC-84C5-187E083BCA60}" dt="2026-08-17T23:34:57.693" v="52236" actId="1076"/>
-          <ac:spMkLst>
-            <pc:docMk/>
-            <pc:sldMk cId="3803433797" sldId="349"/>
-            <ac:spMk id="32" creationId="{68001090-D4FE-15A5-5A76-4F56ABCA6696}"/>
-          </ac:spMkLst>
-        </pc:spChg>
-        <pc:picChg chg="add mod">
-          <ac:chgData name="Mohd Hafizuddin Bin Kamilin (宇部)" userId="dcc12b03-11b8-42c5-b91a-420a12a1d1e2" providerId="ADAL" clId="{C208E6D6-5F29-4ACC-84C5-187E083BCA60}" dt="2026-07-30T06:08:58.651" v="41757" actId="1036"/>
-          <ac:picMkLst>
-            <pc:docMk/>
-            <pc:sldMk cId="3803433797" sldId="349"/>
-            <ac:picMk id="28" creationId="{3F29FFE0-36C4-61A7-E912-ACFA49CC41F9}"/>
-          </ac:picMkLst>
-        </pc:picChg>
-        <pc:picChg chg="add mod">
-          <ac:chgData name="Mohd Hafizuddin Bin Kamilin (宇部)" userId="dcc12b03-11b8-42c5-b91a-420a12a1d1e2" providerId="ADAL" clId="{C208E6D6-5F29-4ACC-84C5-187E083BCA60}" dt="2026-07-30T06:10:40.033" v="41783" actId="1037"/>
-          <ac:picMkLst>
-            <pc:docMk/>
-            <pc:sldMk cId="3803433797" sldId="349"/>
-            <ac:picMk id="31" creationId="{A2F190B3-60EE-AD55-7E35-1B33FE2FC884}"/>
-          </ac:picMkLst>
-        </pc:picChg>
-        <pc:cxnChg chg="add mod">
-          <ac:chgData name="Mohd Hafizuddin Bin Kamilin (宇部)" userId="dcc12b03-11b8-42c5-b91a-420a12a1d1e2" providerId="ADAL" clId="{C208E6D6-5F29-4ACC-84C5-187E083BCA60}" dt="2026-08-17T23:35:02.366" v="52237" actId="14100"/>
-          <ac:cxnSpMkLst>
-            <pc:docMk/>
-            <pc:sldMk cId="3803433797" sldId="349"/>
-            <ac:cxnSpMk id="34" creationId="{AED899E4-6B8E-EF47-8631-A6854803A394}"/>
-          </ac:cxnSpMkLst>
-        </pc:cxnChg>
-      </pc:sldChg>
-      <pc:sldChg chg="addSp delSp modSp new mod modNotesTx">
-        <pc:chgData name="Mohd Hafizuddin Bin Kamilin (宇部)" userId="dcc12b03-11b8-42c5-b91a-420a12a1d1e2" providerId="ADAL" clId="{C208E6D6-5F29-4ACC-84C5-187E083BCA60}" dt="2026-08-07T13:37:49.786" v="52108" actId="20577"/>
-        <pc:sldMkLst>
-          <pc:docMk/>
-          <pc:sldMk cId="1947013266" sldId="350"/>
-        </pc:sldMkLst>
-        <pc:spChg chg="mod">
-          <ac:chgData name="Mohd Hafizuddin Bin Kamilin (宇部)" userId="dcc12b03-11b8-42c5-b91a-420a12a1d1e2" providerId="ADAL" clId="{C208E6D6-5F29-4ACC-84C5-187E083BCA60}" dt="2026-07-30T07:14:45.892" v="41948" actId="20577"/>
-          <ac:spMkLst>
-            <pc:docMk/>
-            <pc:sldMk cId="1947013266" sldId="350"/>
-            <ac:spMk id="2" creationId="{753FEC3F-36A2-EE99-4544-9292C2FDBB28}"/>
-          </ac:spMkLst>
-        </pc:spChg>
-        <pc:spChg chg="mod">
-          <ac:chgData name="Mohd Hafizuddin Bin Kamilin (宇部)" userId="dcc12b03-11b8-42c5-b91a-420a12a1d1e2" providerId="ADAL" clId="{C208E6D6-5F29-4ACC-84C5-187E083BCA60}" dt="2026-07-31T06:23:21.763" v="42066" actId="20577"/>
-          <ac:spMkLst>
-            <pc:docMk/>
-            <pc:sldMk cId="1947013266" sldId="350"/>
-            <ac:spMk id="3" creationId="{8BE47D9C-7F7B-E1BC-5BDE-19BC53D3E81E}"/>
-          </ac:spMkLst>
-        </pc:spChg>
-        <pc:picChg chg="add mod">
-          <ac:chgData name="Mohd Hafizuddin Bin Kamilin (宇部)" userId="dcc12b03-11b8-42c5-b91a-420a12a1d1e2" providerId="ADAL" clId="{C208E6D6-5F29-4ACC-84C5-187E083BCA60}" dt="2026-07-30T08:39:57.652" v="41953" actId="1076"/>
-          <ac:picMkLst>
-            <pc:docMk/>
-            <pc:sldMk cId="1947013266" sldId="350"/>
-            <ac:picMk id="6" creationId="{9DDBE26E-715A-F199-23D6-397C06FAFB15}"/>
-          </ac:picMkLst>
-        </pc:picChg>
-      </pc:sldChg>
-      <pc:sldChg chg="addSp delSp modSp new mod addAnim delAnim modAnim modNotesTx">
-        <pc:chgData name="Mohd Hafizuddin Bin Kamilin (宇部)" userId="dcc12b03-11b8-42c5-b91a-420a12a1d1e2" providerId="ADAL" clId="{C208E6D6-5F29-4ACC-84C5-187E083BCA60}" dt="2026-08-07T13:40:04.018" v="52132" actId="20577"/>
-        <pc:sldMkLst>
-          <pc:docMk/>
-          <pc:sldMk cId="3077917970" sldId="351"/>
-        </pc:sldMkLst>
-        <pc:spChg chg="mod">
-          <ac:chgData name="Mohd Hafizuddin Bin Kamilin (宇部)" userId="dcc12b03-11b8-42c5-b91a-420a12a1d1e2" providerId="ADAL" clId="{C208E6D6-5F29-4ACC-84C5-187E083BCA60}" dt="2026-08-03T04:32:06.608" v="43736" actId="20577"/>
-          <ac:spMkLst>
-            <pc:docMk/>
-            <pc:sldMk cId="3077917970" sldId="351"/>
-            <ac:spMk id="2" creationId="{64B47CE5-138A-6769-D82C-FB8230D44424}"/>
-          </ac:spMkLst>
-        </pc:spChg>
-        <pc:spChg chg="add mod">
-          <ac:chgData name="Mohd Hafizuddin Bin Kamilin (宇部)" userId="dcc12b03-11b8-42c5-b91a-420a12a1d1e2" providerId="ADAL" clId="{C208E6D6-5F29-4ACC-84C5-187E083BCA60}" dt="2026-08-05T01:43:28.229" v="46202" actId="1035"/>
-          <ac:spMkLst>
-            <pc:docMk/>
-            <pc:sldMk cId="3077917970" sldId="351"/>
-            <ac:spMk id="19" creationId="{7E08367F-D91E-E444-A693-6409D04FEAF3}"/>
-          </ac:spMkLst>
-        </pc:spChg>
-        <pc:spChg chg="add mod">
-          <ac:chgData name="Mohd Hafizuddin Bin Kamilin (宇部)" userId="dcc12b03-11b8-42c5-b91a-420a12a1d1e2" providerId="ADAL" clId="{C208E6D6-5F29-4ACC-84C5-187E083BCA60}" dt="2026-07-31T07:57:37.926" v="42973" actId="1036"/>
-          <ac:spMkLst>
-            <pc:docMk/>
-            <pc:sldMk cId="3077917970" sldId="351"/>
-            <ac:spMk id="30" creationId="{EE89FE1B-618B-AA2C-6380-F145D7A35BDD}"/>
-          </ac:spMkLst>
-        </pc:spChg>
-        <pc:spChg chg="add mod">
-          <ac:chgData name="Mohd Hafizuddin Bin Kamilin (宇部)" userId="dcc12b03-11b8-42c5-b91a-420a12a1d1e2" providerId="ADAL" clId="{C208E6D6-5F29-4ACC-84C5-187E083BCA60}" dt="2026-08-05T01:43:28.229" v="46202" actId="1035"/>
-          <ac:spMkLst>
-            <pc:docMk/>
-            <pc:sldMk cId="3077917970" sldId="351"/>
-            <ac:spMk id="31" creationId="{B3497867-EF23-4025-A354-D3ED2AC772F1}"/>
-          </ac:spMkLst>
-        </pc:spChg>
-        <pc:spChg chg="add mod">
-          <ac:chgData name="Mohd Hafizuddin Bin Kamilin (宇部)" userId="dcc12b03-11b8-42c5-b91a-420a12a1d1e2" providerId="ADAL" clId="{C208E6D6-5F29-4ACC-84C5-187E083BCA60}" dt="2026-07-31T07:57:37.926" v="42973" actId="1036"/>
-          <ac:spMkLst>
-            <pc:docMk/>
-            <pc:sldMk cId="3077917970" sldId="351"/>
-            <ac:spMk id="32" creationId="{6D7BC972-B8BF-C4F0-2664-55B44B61300B}"/>
-          </ac:spMkLst>
-        </pc:spChg>
-        <pc:spChg chg="add mod">
-          <ac:chgData name="Mohd Hafizuddin Bin Kamilin (宇部)" userId="dcc12b03-11b8-42c5-b91a-420a12a1d1e2" providerId="ADAL" clId="{C208E6D6-5F29-4ACC-84C5-187E083BCA60}" dt="2026-08-05T01:43:28.229" v="46202" actId="1035"/>
-          <ac:spMkLst>
-            <pc:docMk/>
-            <pc:sldMk cId="3077917970" sldId="351"/>
-            <ac:spMk id="33" creationId="{DAF02657-8FA2-6652-A012-CE013F5BEA52}"/>
-          </ac:spMkLst>
-        </pc:spChg>
-        <pc:spChg chg="add mod">
-          <ac:chgData name="Mohd Hafizuddin Bin Kamilin (宇部)" userId="dcc12b03-11b8-42c5-b91a-420a12a1d1e2" providerId="ADAL" clId="{C208E6D6-5F29-4ACC-84C5-187E083BCA60}" dt="2026-08-05T01:43:28.229" v="46202" actId="1035"/>
-          <ac:spMkLst>
-            <pc:docMk/>
-            <pc:sldMk cId="3077917970" sldId="351"/>
-            <ac:spMk id="37" creationId="{EE97C9B3-F9FB-547A-B0BD-C0CF6AA6F9E6}"/>
-          </ac:spMkLst>
-        </pc:spChg>
-        <pc:spChg chg="add mod">
-          <ac:chgData name="Mohd Hafizuddin Bin Kamilin (宇部)" userId="dcc12b03-11b8-42c5-b91a-420a12a1d1e2" providerId="ADAL" clId="{C208E6D6-5F29-4ACC-84C5-187E083BCA60}" dt="2026-08-05T01:43:28.229" v="46202" actId="1035"/>
-          <ac:spMkLst>
-            <pc:docMk/>
-            <pc:sldMk cId="3077917970" sldId="351"/>
-            <ac:spMk id="45" creationId="{2FA440D1-FDCD-3E6E-5EE1-88D690535D40}"/>
-          </ac:spMkLst>
-        </pc:spChg>
-        <pc:spChg chg="add mod">
-          <ac:chgData name="Mohd Hafizuddin Bin Kamilin (宇部)" userId="dcc12b03-11b8-42c5-b91a-420a12a1d1e2" providerId="ADAL" clId="{C208E6D6-5F29-4ACC-84C5-187E083BCA60}" dt="2026-08-05T01:43:28.229" v="46202" actId="1035"/>
-          <ac:spMkLst>
-            <pc:docMk/>
-            <pc:sldMk cId="3077917970" sldId="351"/>
-            <ac:spMk id="46" creationId="{8AB7DFC9-463D-8E68-0E6F-9474AFA7A821}"/>
-          </ac:spMkLst>
-        </pc:spChg>
-        <pc:spChg chg="add mod">
-          <ac:chgData name="Mohd Hafizuddin Bin Kamilin (宇部)" userId="dcc12b03-11b8-42c5-b91a-420a12a1d1e2" providerId="ADAL" clId="{C208E6D6-5F29-4ACC-84C5-187E083BCA60}" dt="2026-08-05T01:43:28.229" v="46202" actId="1035"/>
-          <ac:spMkLst>
-            <pc:docMk/>
-            <pc:sldMk cId="3077917970" sldId="351"/>
-            <ac:spMk id="48" creationId="{D08DA22B-83FA-7712-D569-C0102D928738}"/>
-          </ac:spMkLst>
-        </pc:spChg>
-        <pc:spChg chg="add mod">
-          <ac:chgData name="Mohd Hafizuddin Bin Kamilin (宇部)" userId="dcc12b03-11b8-42c5-b91a-420a12a1d1e2" providerId="ADAL" clId="{C208E6D6-5F29-4ACC-84C5-187E083BCA60}" dt="2026-08-05T01:43:28.229" v="46202" actId="1035"/>
-          <ac:spMkLst>
-            <pc:docMk/>
-            <pc:sldMk cId="3077917970" sldId="351"/>
-            <ac:spMk id="50" creationId="{E5A97642-5B5A-2C2A-D500-F35B4B71FE3B}"/>
-          </ac:spMkLst>
-        </pc:spChg>
-        <pc:spChg chg="add mod">
-          <ac:chgData name="Mohd Hafizuddin Bin Kamilin (宇部)" userId="dcc12b03-11b8-42c5-b91a-420a12a1d1e2" providerId="ADAL" clId="{C208E6D6-5F29-4ACC-84C5-187E083BCA60}" dt="2026-08-05T01:43:28.229" v="46202" actId="1035"/>
-          <ac:spMkLst>
-            <pc:docMk/>
-            <pc:sldMk cId="3077917970" sldId="351"/>
-            <ac:spMk id="52" creationId="{1B9397C4-C501-D2D8-BADD-9E2F45F3EE39}"/>
-          </ac:spMkLst>
-        </pc:spChg>
-        <pc:spChg chg="add mod">
-          <ac:chgData name="Mohd Hafizuddin Bin Kamilin (宇部)" userId="dcc12b03-11b8-42c5-b91a-420a12a1d1e2" providerId="ADAL" clId="{C208E6D6-5F29-4ACC-84C5-187E083BCA60}" dt="2026-08-05T01:43:28.229" v="46202" actId="1035"/>
-          <ac:spMkLst>
-            <pc:docMk/>
-            <pc:sldMk cId="3077917970" sldId="351"/>
-            <ac:spMk id="54" creationId="{3F1F5DD9-B2E7-BCE1-8645-723ADC770C20}"/>
-          </ac:spMkLst>
-        </pc:spChg>
-        <pc:spChg chg="add mod">
-          <ac:chgData name="Mohd Hafizuddin Bin Kamilin (宇部)" userId="dcc12b03-11b8-42c5-b91a-420a12a1d1e2" providerId="ADAL" clId="{C208E6D6-5F29-4ACC-84C5-187E083BCA60}" dt="2026-08-05T01:45:01.802" v="46241" actId="948"/>
-          <ac:spMkLst>
-            <pc:docMk/>
-            <pc:sldMk cId="3077917970" sldId="351"/>
-            <ac:spMk id="55" creationId="{C72BFA64-2316-CDEE-BE68-8C3866602321}"/>
-          </ac:spMkLst>
-        </pc:spChg>
-        <pc:picChg chg="add mod">
-          <ac:chgData name="Mohd Hafizuddin Bin Kamilin (宇部)" userId="dcc12b03-11b8-42c5-b91a-420a12a1d1e2" providerId="ADAL" clId="{C208E6D6-5F29-4ACC-84C5-187E083BCA60}" dt="2026-07-31T07:34:47.439" v="42731" actId="1035"/>
-          <ac:picMkLst>
-            <pc:docMk/>
-            <pc:sldMk cId="3077917970" sldId="351"/>
-            <ac:picMk id="6" creationId="{2F7FF532-D5C3-42FF-7A30-A74FC505EAE1}"/>
-          </ac:picMkLst>
-        </pc:picChg>
-        <pc:picChg chg="add mod">
-          <ac:chgData name="Mohd Hafizuddin Bin Kamilin (宇部)" userId="dcc12b03-11b8-42c5-b91a-420a12a1d1e2" providerId="ADAL" clId="{C208E6D6-5F29-4ACC-84C5-187E083BCA60}" dt="2026-07-31T07:36:14.578" v="42733" actId="1076"/>
-          <ac:picMkLst>
-            <pc:docMk/>
-            <pc:sldMk cId="3077917970" sldId="351"/>
-            <ac:picMk id="29" creationId="{A6C4A4E4-1968-CD98-5EA7-E2F78E07790C}"/>
-          </ac:picMkLst>
-        </pc:picChg>
-        <pc:picChg chg="add mod modCrop">
-          <ac:chgData name="Mohd Hafizuddin Bin Kamilin (宇部)" userId="dcc12b03-11b8-42c5-b91a-420a12a1d1e2" providerId="ADAL" clId="{C208E6D6-5F29-4ACC-84C5-187E083BCA60}" dt="2026-07-31T07:36:22.737" v="42735" actId="1076"/>
-          <ac:picMkLst>
-            <pc:docMk/>
-            <pc:sldMk cId="3077917970" sldId="351"/>
-            <ac:picMk id="39" creationId="{0DB94E8A-48FF-5F69-B3FA-818B212D9D29}"/>
-          </ac:picMkLst>
-        </pc:picChg>
-        <pc:picChg chg="add mod">
-          <ac:chgData name="Mohd Hafizuddin Bin Kamilin (宇部)" userId="dcc12b03-11b8-42c5-b91a-420a12a1d1e2" providerId="ADAL" clId="{C208E6D6-5F29-4ACC-84C5-187E083BCA60}" dt="2026-07-31T07:42:48.082" v="42787" actId="1076"/>
-          <ac:picMkLst>
-            <pc:docMk/>
-            <pc:sldMk cId="3077917970" sldId="351"/>
-            <ac:picMk id="43" creationId="{0AD127BD-73A3-7F86-5EDE-2C931659FED1}"/>
-          </ac:picMkLst>
-        </pc:picChg>
-      </pc:sldChg>
-      <pc:sldChg chg="addSp delSp modSp new mod ord delAnim modAnim">
-        <pc:chgData name="Mohd Hafizuddin Bin Kamilin (宇部)" userId="dcc12b03-11b8-42c5-b91a-420a12a1d1e2" providerId="ADAL" clId="{C208E6D6-5F29-4ACC-84C5-187E083BCA60}" dt="2026-08-17T23:35:34.610" v="52247" actId="20577"/>
-        <pc:sldMkLst>
-          <pc:docMk/>
-          <pc:sldMk cId="747962798" sldId="355"/>
-        </pc:sldMkLst>
-        <pc:spChg chg="mod">
-          <ac:chgData name="Mohd Hafizuddin Bin Kamilin (宇部)" userId="dcc12b03-11b8-42c5-b91a-420a12a1d1e2" providerId="ADAL" clId="{C208E6D6-5F29-4ACC-84C5-187E083BCA60}" dt="2026-08-03T04:37:58.936" v="43787" actId="20577"/>
-          <ac:spMkLst>
-            <pc:docMk/>
-            <pc:sldMk cId="747962798" sldId="355"/>
-            <ac:spMk id="2" creationId="{768E196E-1A92-BD57-5BB8-17F0202DDF86}"/>
-          </ac:spMkLst>
-        </pc:spChg>
-        <pc:spChg chg="add mod">
-          <ac:chgData name="Mohd Hafizuddin Bin Kamilin (宇部)" userId="dcc12b03-11b8-42c5-b91a-420a12a1d1e2" providerId="ADAL" clId="{C208E6D6-5F29-4ACC-84C5-187E083BCA60}" dt="2026-08-03T04:41:37.635" v="43815" actId="1036"/>
-          <ac:spMkLst>
-            <pc:docMk/>
-            <pc:sldMk cId="747962798" sldId="355"/>
-            <ac:spMk id="15" creationId="{919CAB37-4FC4-69F4-CAC2-1821B8A40935}"/>
-          </ac:spMkLst>
-        </pc:spChg>
-        <pc:spChg chg="add mod">
-          <ac:chgData name="Mohd Hafizuddin Bin Kamilin (宇部)" userId="dcc12b03-11b8-42c5-b91a-420a12a1d1e2" providerId="ADAL" clId="{C208E6D6-5F29-4ACC-84C5-187E083BCA60}" dt="2026-08-03T04:41:37.635" v="43815" actId="1036"/>
-          <ac:spMkLst>
-            <pc:docMk/>
-            <pc:sldMk cId="747962798" sldId="355"/>
-            <ac:spMk id="17" creationId="{CD96DBDD-76A2-2151-D3FF-7F40D554FDEF}"/>
-          </ac:spMkLst>
-        </pc:spChg>
-        <pc:spChg chg="add mod">
-          <ac:chgData name="Mohd Hafizuddin Bin Kamilin (宇部)" userId="dcc12b03-11b8-42c5-b91a-420a12a1d1e2" providerId="ADAL" clId="{C208E6D6-5F29-4ACC-84C5-187E083BCA60}" dt="2026-08-03T04:41:37.635" v="43815" actId="1036"/>
-          <ac:spMkLst>
-            <pc:docMk/>
-            <pc:sldMk cId="747962798" sldId="355"/>
-            <ac:spMk id="21" creationId="{A10B0E8B-189E-3AEB-8647-24DB774AE116}"/>
-          </ac:spMkLst>
-        </pc:spChg>
-        <pc:spChg chg="add mod">
-          <ac:chgData name="Mohd Hafizuddin Bin Kamilin (宇部)" userId="dcc12b03-11b8-42c5-b91a-420a12a1d1e2" providerId="ADAL" clId="{C208E6D6-5F29-4ACC-84C5-187E083BCA60}" dt="2026-08-03T04:41:37.635" v="43815" actId="1036"/>
-          <ac:spMkLst>
-            <pc:docMk/>
-            <pc:sldMk cId="747962798" sldId="355"/>
-            <ac:spMk id="23" creationId="{439FFB5F-2A29-0D4C-F93E-FF21E92FBEE0}"/>
-          </ac:spMkLst>
-        </pc:spChg>
-        <pc:graphicFrameChg chg="add mod modGraphic">
-          <ac:chgData name="Mohd Hafizuddin Bin Kamilin (宇部)" userId="dcc12b03-11b8-42c5-b91a-420a12a1d1e2" providerId="ADAL" clId="{C208E6D6-5F29-4ACC-84C5-187E083BCA60}" dt="2026-08-17T23:35:34.610" v="52247" actId="20577"/>
-          <ac:graphicFrameMkLst>
-            <pc:docMk/>
-            <pc:sldMk cId="747962798" sldId="355"/>
-            <ac:graphicFrameMk id="10" creationId="{34E6FB19-27BB-734A-A0CB-8694967562CC}"/>
-          </ac:graphicFrameMkLst>
-        </pc:graphicFrameChg>
-      </pc:sldChg>
-      <pc:sldChg chg="addSp modSp new mod ord modAnim">
-        <pc:chgData name="Mohd Hafizuddin Bin Kamilin (宇部)" userId="dcc12b03-11b8-42c5-b91a-420a12a1d1e2" providerId="ADAL" clId="{C208E6D6-5F29-4ACC-84C5-187E083BCA60}" dt="2026-08-03T07:01:41.031" v="44093" actId="20577"/>
-        <pc:sldMkLst>
-          <pc:docMk/>
-          <pc:sldMk cId="153813906" sldId="356"/>
-        </pc:sldMkLst>
-        <pc:spChg chg="mod">
-          <ac:chgData name="Mohd Hafizuddin Bin Kamilin (宇部)" userId="dcc12b03-11b8-42c5-b91a-420a12a1d1e2" providerId="ADAL" clId="{C208E6D6-5F29-4ACC-84C5-187E083BCA60}" dt="2026-08-03T04:38:04.678" v="43789" actId="20577"/>
-          <ac:spMkLst>
-            <pc:docMk/>
-            <pc:sldMk cId="153813906" sldId="356"/>
-            <ac:spMk id="2" creationId="{5931DD9F-C7E1-914C-7B49-212B85B02984}"/>
-          </ac:spMkLst>
-        </pc:spChg>
-        <pc:spChg chg="mod">
-          <ac:chgData name="Mohd Hafizuddin Bin Kamilin (宇部)" userId="dcc12b03-11b8-42c5-b91a-420a12a1d1e2" providerId="ADAL" clId="{C208E6D6-5F29-4ACC-84C5-187E083BCA60}" dt="2026-08-03T07:01:41.031" v="44093" actId="20577"/>
-          <ac:spMkLst>
-            <pc:docMk/>
-            <pc:sldMk cId="153813906" sldId="356"/>
-            <ac:spMk id="3" creationId="{DB20B12D-D6EA-394F-72D5-1F25A391B3D0}"/>
-          </ac:spMkLst>
-        </pc:spChg>
-        <pc:spChg chg="add mod">
-          <ac:chgData name="Mohd Hafizuddin Bin Kamilin (宇部)" userId="dcc12b03-11b8-42c5-b91a-420a12a1d1e2" providerId="ADAL" clId="{C208E6D6-5F29-4ACC-84C5-187E083BCA60}" dt="2026-08-03T04:43:53.342" v="43885" actId="1035"/>
-          <ac:spMkLst>
-            <pc:docMk/>
-            <pc:sldMk cId="153813906" sldId="356"/>
-            <ac:spMk id="25" creationId="{C8EBAEBD-5A08-E438-DF55-BD708D66F202}"/>
-          </ac:spMkLst>
-        </pc:spChg>
-        <pc:spChg chg="add mod">
-          <ac:chgData name="Mohd Hafizuddin Bin Kamilin (宇部)" userId="dcc12b03-11b8-42c5-b91a-420a12a1d1e2" providerId="ADAL" clId="{C208E6D6-5F29-4ACC-84C5-187E083BCA60}" dt="2026-08-03T04:42:52.466" v="43869" actId="1036"/>
-          <ac:spMkLst>
-            <pc:docMk/>
-            <pc:sldMk cId="153813906" sldId="356"/>
-            <ac:spMk id="27" creationId="{A918336A-90CB-9206-2014-F0326A6FFADC}"/>
-          </ac:spMkLst>
-        </pc:spChg>
-      </pc:sldChg>
-      <pc:sldChg chg="addSp delSp modSp new mod modClrScheme delAnim modAnim chgLayout">
-        <pc:chgData name="Mohd Hafizuddin Bin Kamilin (宇部)" userId="dcc12b03-11b8-42c5-b91a-420a12a1d1e2" providerId="ADAL" clId="{C208E6D6-5F29-4ACC-84C5-187E083BCA60}" dt="2026-08-17T23:35:49.603" v="52248" actId="207"/>
-        <pc:sldMkLst>
-          <pc:docMk/>
-          <pc:sldMk cId="1247763785" sldId="357"/>
-        </pc:sldMkLst>
-        <pc:spChg chg="mod ord">
-          <ac:chgData name="Mohd Hafizuddin Bin Kamilin (宇部)" userId="dcc12b03-11b8-42c5-b91a-420a12a1d1e2" providerId="ADAL" clId="{C208E6D6-5F29-4ACC-84C5-187E083BCA60}" dt="2026-08-03T04:48:50.602" v="43888" actId="700"/>
-          <ac:spMkLst>
-            <pc:docMk/>
-            <pc:sldMk cId="1247763785" sldId="357"/>
-            <ac:spMk id="4" creationId="{098F5C62-B648-B1F4-00E5-622D9D7E3DD5}"/>
-          </ac:spMkLst>
-        </pc:spChg>
-        <pc:spChg chg="add mod ord">
-          <ac:chgData name="Mohd Hafizuddin Bin Kamilin (宇部)" userId="dcc12b03-11b8-42c5-b91a-420a12a1d1e2" providerId="ADAL" clId="{C208E6D6-5F29-4ACC-84C5-187E083BCA60}" dt="2026-08-05T03:14:59.633" v="46482" actId="20577"/>
-          <ac:spMkLst>
-            <pc:docMk/>
-            <pc:sldMk cId="1247763785" sldId="357"/>
-            <ac:spMk id="5" creationId="{D60F7667-0AC0-A4DB-FFFE-BB7470E5318C}"/>
-          </ac:spMkLst>
-        </pc:spChg>
-        <pc:spChg chg="add mod ord">
-          <ac:chgData name="Mohd Hafizuddin Bin Kamilin (宇部)" userId="dcc12b03-11b8-42c5-b91a-420a12a1d1e2" providerId="ADAL" clId="{C208E6D6-5F29-4ACC-84C5-187E083BCA60}" dt="2026-08-03T05:42:43.111" v="44015"/>
-          <ac:spMkLst>
-            <pc:docMk/>
-            <pc:sldMk cId="1247763785" sldId="357"/>
-            <ac:spMk id="6" creationId="{BFF9D925-9303-95F8-0091-A8B257B55911}"/>
-          </ac:spMkLst>
-        </pc:spChg>
-        <pc:spChg chg="add mod ord">
-          <ac:chgData name="Mohd Hafizuddin Bin Kamilin (宇部)" userId="dcc12b03-11b8-42c5-b91a-420a12a1d1e2" providerId="ADAL" clId="{C208E6D6-5F29-4ACC-84C5-187E083BCA60}" dt="2026-08-17T23:35:49.603" v="52248" actId="207"/>
-          <ac:spMkLst>
-            <pc:docMk/>
-            <pc:sldMk cId="1247763785" sldId="357"/>
-            <ac:spMk id="7" creationId="{BABB0BCF-76F9-8E4B-D4C5-77586EE7272D}"/>
-          </ac:spMkLst>
-        </pc:spChg>
-        <pc:picChg chg="add mod">
-          <ac:chgData name="Mohd Hafizuddin Bin Kamilin (宇部)" userId="dcc12b03-11b8-42c5-b91a-420a12a1d1e2" providerId="ADAL" clId="{C208E6D6-5F29-4ACC-84C5-187E083BCA60}" dt="2026-08-07T00:58:13.602" v="50018" actId="14826"/>
-          <ac:picMkLst>
-            <pc:docMk/>
-            <pc:sldMk cId="1247763785" sldId="357"/>
-            <ac:picMk id="9" creationId="{8517AFE8-0A15-C324-95B1-98523561F807}"/>
-          </ac:picMkLst>
-        </pc:picChg>
-        <pc:picChg chg="mod">
-          <ac:chgData name="Mohd Hafizuddin Bin Kamilin (宇部)" userId="dcc12b03-11b8-42c5-b91a-420a12a1d1e2" providerId="ADAL" clId="{C208E6D6-5F29-4ACC-84C5-187E083BCA60}" dt="2026-08-07T01:00:19.946" v="50046" actId="1076"/>
-          <ac:picMkLst>
-            <pc:docMk/>
-            <pc:sldMk cId="1247763785" sldId="357"/>
-            <ac:picMk id="14" creationId="{688B751B-419F-EC1D-2222-7457248FA401}"/>
-          </ac:picMkLst>
-        </pc:picChg>
-      </pc:sldChg>
-      <pc:sldChg chg="addSp delSp modSp new mod modClrScheme delAnim modAnim chgLayout modNotesTx">
-        <pc:chgData name="Mohd Hafizuddin Bin Kamilin (宇部)" userId="dcc12b03-11b8-42c5-b91a-420a12a1d1e2" providerId="ADAL" clId="{C208E6D6-5F29-4ACC-84C5-187E083BCA60}" dt="2026-08-07T13:44:58.870" v="52150"/>
-        <pc:sldMkLst>
-          <pc:docMk/>
-          <pc:sldMk cId="607978216" sldId="358"/>
-        </pc:sldMkLst>
-        <pc:spChg chg="mod ord">
-          <ac:chgData name="Mohd Hafizuddin Bin Kamilin (宇部)" userId="dcc12b03-11b8-42c5-b91a-420a12a1d1e2" providerId="ADAL" clId="{C208E6D6-5F29-4ACC-84C5-187E083BCA60}" dt="2026-08-03T05:50:20.766" v="44081" actId="700"/>
-          <ac:spMkLst>
-            <pc:docMk/>
-            <pc:sldMk cId="607978216" sldId="358"/>
-            <ac:spMk id="5" creationId="{FC04CA26-8FDC-5E59-7FBE-C78E4712EB75}"/>
-          </ac:spMkLst>
-        </pc:spChg>
-        <pc:spChg chg="add mod ord">
-          <ac:chgData name="Mohd Hafizuddin Bin Kamilin (宇部)" userId="dcc12b03-11b8-42c5-b91a-420a12a1d1e2" providerId="ADAL" clId="{C208E6D6-5F29-4ACC-84C5-187E083BCA60}" dt="2026-08-04T12:49:03.110" v="44345" actId="1076"/>
-          <ac:spMkLst>
-            <pc:docMk/>
-            <pc:sldMk cId="607978216" sldId="358"/>
-            <ac:spMk id="6" creationId="{57FD9013-6C66-E9B7-8CE2-E65CE818F2B2}"/>
-          </ac:spMkLst>
-        </pc:spChg>
-        <pc:spChg chg="add mod ord">
-          <ac:chgData name="Mohd Hafizuddin Bin Kamilin (宇部)" userId="dcc12b03-11b8-42c5-b91a-420a12a1d1e2" providerId="ADAL" clId="{C208E6D6-5F29-4ACC-84C5-187E083BCA60}" dt="2026-08-07T13:44:58.870" v="52150"/>
-          <ac:spMkLst>
-            <pc:docMk/>
-            <pc:sldMk cId="607978216" sldId="358"/>
-            <ac:spMk id="7" creationId="{7636FB04-4ED9-F49B-88A6-783A59A4084B}"/>
-          </ac:spMkLst>
-        </pc:spChg>
-        <pc:graphicFrameChg chg="add mod modGraphic">
-          <ac:chgData name="Mohd Hafizuddin Bin Kamilin (宇部)" userId="dcc12b03-11b8-42c5-b91a-420a12a1d1e2" providerId="ADAL" clId="{C208E6D6-5F29-4ACC-84C5-187E083BCA60}" dt="2026-08-05T03:31:24.391" v="46763" actId="14100"/>
-          <ac:graphicFrameMkLst>
-            <pc:docMk/>
-            <pc:sldMk cId="607978216" sldId="358"/>
-            <ac:graphicFrameMk id="8" creationId="{5CD2AE3E-CFB0-DB6D-51AA-F025E3FD8A0D}"/>
-          </ac:graphicFrameMkLst>
-        </pc:graphicFrameChg>
-        <pc:picChg chg="add mod">
-          <ac:chgData name="Mohd Hafizuddin Bin Kamilin (宇部)" userId="dcc12b03-11b8-42c5-b91a-420a12a1d1e2" providerId="ADAL" clId="{C208E6D6-5F29-4ACC-84C5-187E083BCA60}" dt="2026-08-05T03:31:29.649" v="46771" actId="1037"/>
-          <ac:picMkLst>
-            <pc:docMk/>
-            <pc:sldMk cId="607978216" sldId="358"/>
-            <ac:picMk id="10" creationId="{D7FA812A-6180-3937-348D-526A48D3CFF3}"/>
-          </ac:picMkLst>
-        </pc:picChg>
-        <pc:picChg chg="add mod">
-          <ac:chgData name="Mohd Hafizuddin Bin Kamilin (宇部)" userId="dcc12b03-11b8-42c5-b91a-420a12a1d1e2" providerId="ADAL" clId="{C208E6D6-5F29-4ACC-84C5-187E083BCA60}" dt="2026-08-05T03:31:29.649" v="46771" actId="1037"/>
-          <ac:picMkLst>
-            <pc:docMk/>
-            <pc:sldMk cId="607978216" sldId="358"/>
-            <ac:picMk id="12" creationId="{BAE1C81E-76B9-59F0-35EE-543A38533188}"/>
-          </ac:picMkLst>
-        </pc:picChg>
-        <pc:picChg chg="add mod">
-          <ac:chgData name="Mohd Hafizuddin Bin Kamilin (宇部)" userId="dcc12b03-11b8-42c5-b91a-420a12a1d1e2" providerId="ADAL" clId="{C208E6D6-5F29-4ACC-84C5-187E083BCA60}" dt="2026-08-05T03:31:29.649" v="46771" actId="1037"/>
-          <ac:picMkLst>
-            <pc:docMk/>
-            <pc:sldMk cId="607978216" sldId="358"/>
-            <ac:picMk id="16" creationId="{8C5C9B05-E9B5-8071-1A07-08CA4CD58459}"/>
-          </ac:picMkLst>
-        </pc:picChg>
-        <pc:picChg chg="add mod">
-          <ac:chgData name="Mohd Hafizuddin Bin Kamilin (宇部)" userId="dcc12b03-11b8-42c5-b91a-420a12a1d1e2" providerId="ADAL" clId="{C208E6D6-5F29-4ACC-84C5-187E083BCA60}" dt="2026-08-05T03:31:29.649" v="46771" actId="1037"/>
-          <ac:picMkLst>
-            <pc:docMk/>
-            <pc:sldMk cId="607978216" sldId="358"/>
-            <ac:picMk id="18" creationId="{21A783EF-D137-2101-7620-46F0E2F546D2}"/>
-          </ac:picMkLst>
-        </pc:picChg>
-      </pc:sldChg>
-      <pc:sldChg chg="addSp delSp modSp new mod modClrScheme modAnim chgLayout">
-        <pc:chgData name="Mohd Hafizuddin Bin Kamilin (宇部)" userId="dcc12b03-11b8-42c5-b91a-420a12a1d1e2" providerId="ADAL" clId="{C208E6D6-5F29-4ACC-84C5-187E083BCA60}" dt="2026-08-07T13:45:49.481" v="52152"/>
-        <pc:sldMkLst>
-          <pc:docMk/>
-          <pc:sldMk cId="1076335816" sldId="359"/>
-        </pc:sldMkLst>
-        <pc:spChg chg="mod ord">
-          <ac:chgData name="Mohd Hafizuddin Bin Kamilin (宇部)" userId="dcc12b03-11b8-42c5-b91a-420a12a1d1e2" providerId="ADAL" clId="{C208E6D6-5F29-4ACC-84C5-187E083BCA60}" dt="2026-08-04T13:25:57.534" v="45128" actId="700"/>
-          <ac:spMkLst>
-            <pc:docMk/>
-            <pc:sldMk cId="1076335816" sldId="359"/>
-            <ac:spMk id="2" creationId="{DF8173F8-F0F6-3DFC-48BC-32C5F7A5C026}"/>
-          </ac:spMkLst>
-        </pc:spChg>
-        <pc:spChg chg="mod ord">
-          <ac:chgData name="Mohd Hafizuddin Bin Kamilin (宇部)" userId="dcc12b03-11b8-42c5-b91a-420a12a1d1e2" providerId="ADAL" clId="{C208E6D6-5F29-4ACC-84C5-187E083BCA60}" dt="2026-08-04T13:44:27.693" v="45364" actId="207"/>
-          <ac:spMkLst>
-            <pc:docMk/>
-            <pc:sldMk cId="1076335816" sldId="359"/>
-            <ac:spMk id="3" creationId="{31B05107-5D2C-67C8-E4FB-CA101663717D}"/>
-          </ac:spMkLst>
-        </pc:spChg>
-        <pc:spChg chg="mod ord">
-          <ac:chgData name="Mohd Hafizuddin Bin Kamilin (宇部)" userId="dcc12b03-11b8-42c5-b91a-420a12a1d1e2" providerId="ADAL" clId="{C208E6D6-5F29-4ACC-84C5-187E083BCA60}" dt="2026-08-04T13:25:57.534" v="45128" actId="700"/>
-          <ac:spMkLst>
-            <pc:docMk/>
-            <pc:sldMk cId="1076335816" sldId="359"/>
-            <ac:spMk id="4" creationId="{5331801C-462E-BF59-6045-11F9ED821414}"/>
-          </ac:spMkLst>
-        </pc:spChg>
-        <pc:spChg chg="add mod">
-          <ac:chgData name="Mohd Hafizuddin Bin Kamilin (宇部)" userId="dcc12b03-11b8-42c5-b91a-420a12a1d1e2" providerId="ADAL" clId="{C208E6D6-5F29-4ACC-84C5-187E083BCA60}" dt="2026-08-05T00:58:32.244" v="46075" actId="1036"/>
-          <ac:spMkLst>
-            <pc:docMk/>
-            <pc:sldMk cId="1076335816" sldId="359"/>
-            <ac:spMk id="5" creationId="{7FDD617C-FFAE-59C9-22B8-12C666642937}"/>
-          </ac:spMkLst>
-        </pc:spChg>
-        <pc:picChg chg="add mod">
-          <ac:chgData name="Mohd Hafizuddin Bin Kamilin (宇部)" userId="dcc12b03-11b8-42c5-b91a-420a12a1d1e2" providerId="ADAL" clId="{C208E6D6-5F29-4ACC-84C5-187E083BCA60}" dt="2026-08-05T00:58:26.266" v="46065" actId="1036"/>
-          <ac:picMkLst>
-            <pc:docMk/>
-            <pc:sldMk cId="1076335816" sldId="359"/>
-            <ac:picMk id="8" creationId="{2EAA1BB9-141F-F169-4888-CFF9F91BFC24}"/>
-          </ac:picMkLst>
-        </pc:picChg>
-      </pc:sldChg>
-      <pc:sldChg chg="addSp delSp modSp new mod modNotesTx">
-        <pc:chgData name="Mohd Hafizuddin Bin Kamilin (宇部)" userId="dcc12b03-11b8-42c5-b91a-420a12a1d1e2" providerId="ADAL" clId="{C208E6D6-5F29-4ACC-84C5-187E083BCA60}" dt="2026-08-17T23:38:52.179" v="52258" actId="207"/>
-        <pc:sldMkLst>
-          <pc:docMk/>
-          <pc:sldMk cId="4152483478" sldId="360"/>
-        </pc:sldMkLst>
-        <pc:spChg chg="mod">
-          <ac:chgData name="Mohd Hafizuddin Bin Kamilin (宇部)" userId="dcc12b03-11b8-42c5-b91a-420a12a1d1e2" providerId="ADAL" clId="{C208E6D6-5F29-4ACC-84C5-187E083BCA60}" dt="2026-08-05T00:13:54.562" v="45513"/>
-          <ac:spMkLst>
-            <pc:docMk/>
-            <pc:sldMk cId="4152483478" sldId="360"/>
-            <ac:spMk id="2" creationId="{39A8C604-B3EC-4F84-EC00-076FE4ACAFF1}"/>
-          </ac:spMkLst>
-        </pc:spChg>
-        <pc:spChg chg="mod">
-          <ac:chgData name="Mohd Hafizuddin Bin Kamilin (宇部)" userId="dcc12b03-11b8-42c5-b91a-420a12a1d1e2" providerId="ADAL" clId="{C208E6D6-5F29-4ACC-84C5-187E083BCA60}" dt="2026-08-05T00:18:08.473" v="45515"/>
-          <ac:spMkLst>
-            <pc:docMk/>
-            <pc:sldMk cId="4152483478" sldId="360"/>
-            <ac:spMk id="3" creationId="{72C06260-BD3B-9781-8A1F-44C0944AFF4C}"/>
-          </ac:spMkLst>
-        </pc:spChg>
-        <pc:graphicFrameChg chg="add mod modGraphic">
-          <ac:chgData name="Mohd Hafizuddin Bin Kamilin (宇部)" userId="dcc12b03-11b8-42c5-b91a-420a12a1d1e2" providerId="ADAL" clId="{C208E6D6-5F29-4ACC-84C5-187E083BCA60}" dt="2026-08-17T23:38:52.179" v="52258" actId="207"/>
-          <ac:graphicFrameMkLst>
-            <pc:docMk/>
-            <pc:sldMk cId="4152483478" sldId="360"/>
-            <ac:graphicFrameMk id="5" creationId="{9120A4A1-9124-CB22-399B-8649FF79FD5B}"/>
-          </ac:graphicFrameMkLst>
-        </pc:graphicFrameChg>
-        <pc:picChg chg="add mod">
-          <ac:chgData name="Mohd Hafizuddin Bin Kamilin (宇部)" userId="dcc12b03-11b8-42c5-b91a-420a12a1d1e2" providerId="ADAL" clId="{C208E6D6-5F29-4ACC-84C5-187E083BCA60}" dt="2026-08-05T00:13:15.079" v="45511" actId="1035"/>
-          <ac:picMkLst>
-            <pc:docMk/>
-            <pc:sldMk cId="4152483478" sldId="360"/>
-            <ac:picMk id="16" creationId="{7B68AFE1-34D6-6D09-B35A-1C799855DC3E}"/>
-          </ac:picMkLst>
-        </pc:picChg>
-      </pc:sldChg>
-      <pc:sldChg chg="addSp delSp modSp add mod">
-        <pc:chgData name="Mohd Hafizuddin Bin Kamilin (宇部)" userId="dcc12b03-11b8-42c5-b91a-420a12a1d1e2" providerId="ADAL" clId="{C208E6D6-5F29-4ACC-84C5-187E083BCA60}" dt="2026-08-05T00:46:34.949" v="45958" actId="242"/>
-        <pc:sldMkLst>
-          <pc:docMk/>
-          <pc:sldMk cId="1537417627" sldId="361"/>
-        </pc:sldMkLst>
-        <pc:spChg chg="mod">
-          <ac:chgData name="Mohd Hafizuddin Bin Kamilin (宇部)" userId="dcc12b03-11b8-42c5-b91a-420a12a1d1e2" providerId="ADAL" clId="{C208E6D6-5F29-4ACC-84C5-187E083BCA60}" dt="2026-08-05T00:38:18.994" v="45733" actId="207"/>
-          <ac:spMkLst>
-            <pc:docMk/>
-            <pc:sldMk cId="1537417627" sldId="361"/>
-            <ac:spMk id="2" creationId="{ED8BE9CC-6CEC-EDED-1097-DDF7694F8603}"/>
-          </ac:spMkLst>
-        </pc:spChg>
-        <pc:spChg chg="add mod">
-          <ac:chgData name="Mohd Hafizuddin Bin Kamilin (宇部)" userId="dcc12b03-11b8-42c5-b91a-420a12a1d1e2" providerId="ADAL" clId="{C208E6D6-5F29-4ACC-84C5-187E083BCA60}" dt="2026-08-05T00:46:19.762" v="45956" actId="1038"/>
-          <ac:spMkLst>
-            <pc:docMk/>
-            <pc:sldMk cId="1537417627" sldId="361"/>
-            <ac:spMk id="25" creationId="{AE39C11B-81A1-FE70-E356-F902CBCAD432}"/>
-          </ac:spMkLst>
-        </pc:spChg>
-        <pc:spChg chg="add mod">
-          <ac:chgData name="Mohd Hafizuddin Bin Kamilin (宇部)" userId="dcc12b03-11b8-42c5-b91a-420a12a1d1e2" providerId="ADAL" clId="{C208E6D6-5F29-4ACC-84C5-187E083BCA60}" dt="2026-08-05T00:46:19.762" v="45956" actId="1038"/>
-          <ac:spMkLst>
-            <pc:docMk/>
-            <pc:sldMk cId="1537417627" sldId="361"/>
-            <ac:spMk id="27" creationId="{A5D6018F-6D73-035B-E6FE-5B405103DC41}"/>
-          </ac:spMkLst>
-        </pc:spChg>
-        <pc:spChg chg="add mod">
-          <ac:chgData name="Mohd Hafizuddin Bin Kamilin (宇部)" userId="dcc12b03-11b8-42c5-b91a-420a12a1d1e2" providerId="ADAL" clId="{C208E6D6-5F29-4ACC-84C5-187E083BCA60}" dt="2026-08-05T00:46:19.762" v="45956" actId="1038"/>
-          <ac:spMkLst>
-            <pc:docMk/>
-            <pc:sldMk cId="1537417627" sldId="361"/>
-            <ac:spMk id="29" creationId="{E5C3F812-C6D5-26B9-36AA-4F61686F03B2}"/>
-          </ac:spMkLst>
-        </pc:spChg>
-        <pc:spChg chg="add mod">
-          <ac:chgData name="Mohd Hafizuddin Bin Kamilin (宇部)" userId="dcc12b03-11b8-42c5-b91a-420a12a1d1e2" providerId="ADAL" clId="{C208E6D6-5F29-4ACC-84C5-187E083BCA60}" dt="2026-08-05T00:46:19.762" v="45956" actId="1038"/>
-          <ac:spMkLst>
-            <pc:docMk/>
-            <pc:sldMk cId="1537417627" sldId="361"/>
-            <ac:spMk id="31" creationId="{DDC10C4A-8A8F-CB34-F3FD-FB6436E09412}"/>
-          </ac:spMkLst>
-        </pc:spChg>
-        <pc:spChg chg="add mod">
-          <ac:chgData name="Mohd Hafizuddin Bin Kamilin (宇部)" userId="dcc12b03-11b8-42c5-b91a-420a12a1d1e2" providerId="ADAL" clId="{C208E6D6-5F29-4ACC-84C5-187E083BCA60}" dt="2026-08-05T00:46:19.762" v="45956" actId="1038"/>
-          <ac:spMkLst>
-            <pc:docMk/>
-            <pc:sldMk cId="1537417627" sldId="361"/>
-            <ac:spMk id="33" creationId="{8EBAD16D-DE2F-02B3-85AC-608AD94EAEF6}"/>
-          </ac:spMkLst>
-        </pc:spChg>
-        <pc:graphicFrameChg chg="add mod modGraphic">
-          <ac:chgData name="Mohd Hafizuddin Bin Kamilin (宇部)" userId="dcc12b03-11b8-42c5-b91a-420a12a1d1e2" providerId="ADAL" clId="{C208E6D6-5F29-4ACC-84C5-187E083BCA60}" dt="2026-08-05T00:46:34.949" v="45958" actId="242"/>
-          <ac:graphicFrameMkLst>
-            <pc:docMk/>
-            <pc:sldMk cId="1537417627" sldId="361"/>
-            <ac:graphicFrameMk id="36" creationId="{2335404F-B11B-0EF7-288E-A01721CA6F54}"/>
-          </ac:graphicFrameMkLst>
-        </pc:graphicFrameChg>
-        <pc:cxnChg chg="add mod">
-          <ac:chgData name="Mohd Hafizuddin Bin Kamilin (宇部)" userId="dcc12b03-11b8-42c5-b91a-420a12a1d1e2" providerId="ADAL" clId="{C208E6D6-5F29-4ACC-84C5-187E083BCA60}" dt="2026-08-05T00:30:10.258" v="45650" actId="1036"/>
-          <ac:cxnSpMkLst>
-            <pc:docMk/>
-            <pc:sldMk cId="1537417627" sldId="361"/>
-            <ac:cxnSpMk id="7" creationId="{86435ECC-A934-5916-F7C9-D0BF5B5F7861}"/>
-          </ac:cxnSpMkLst>
-        </pc:cxnChg>
-        <pc:cxnChg chg="add mod">
-          <ac:chgData name="Mohd Hafizuddin Bin Kamilin (宇部)" userId="dcc12b03-11b8-42c5-b91a-420a12a1d1e2" providerId="ADAL" clId="{C208E6D6-5F29-4ACC-84C5-187E083BCA60}" dt="2026-08-05T00:30:04.278" v="45648" actId="14100"/>
-          <ac:cxnSpMkLst>
-            <pc:docMk/>
-            <pc:sldMk cId="1537417627" sldId="361"/>
-            <ac:cxnSpMk id="8" creationId="{86F368C7-8986-DA2B-88C0-55314024B5EB}"/>
-          </ac:cxnSpMkLst>
-        </pc:cxnChg>
-        <pc:cxnChg chg="add mod">
-          <ac:chgData name="Mohd Hafizuddin Bin Kamilin (宇部)" userId="dcc12b03-11b8-42c5-b91a-420a12a1d1e2" providerId="ADAL" clId="{C208E6D6-5F29-4ACC-84C5-187E083BCA60}" dt="2026-08-05T00:29:05.121" v="45628" actId="14100"/>
-          <ac:cxnSpMkLst>
-            <pc:docMk/>
-            <pc:sldMk cId="1537417627" sldId="361"/>
-            <ac:cxnSpMk id="15" creationId="{37075E67-8FFA-CA76-098B-845877398EC4}"/>
-          </ac:cxnSpMkLst>
-        </pc:cxnChg>
-        <pc:cxnChg chg="add mod">
-          <ac:chgData name="Mohd Hafizuddin Bin Kamilin (宇部)" userId="dcc12b03-11b8-42c5-b91a-420a12a1d1e2" providerId="ADAL" clId="{C208E6D6-5F29-4ACC-84C5-187E083BCA60}" dt="2026-08-05T00:43:42.407" v="45903" actId="1038"/>
-          <ac:cxnSpMkLst>
-            <pc:docMk/>
-            <pc:sldMk cId="1537417627" sldId="361"/>
-            <ac:cxnSpMk id="19" creationId="{DBA52E08-D0D2-EA8A-31CB-820A08753ED0}"/>
-          </ac:cxnSpMkLst>
-        </pc:cxnChg>
-      </pc:sldChg>
-      <pc:sldChg chg="addSp delSp modSp add mod">
-        <pc:chgData name="Mohd Hafizuddin Bin Kamilin (宇部)" userId="dcc12b03-11b8-42c5-b91a-420a12a1d1e2" providerId="ADAL" clId="{C208E6D6-5F29-4ACC-84C5-187E083BCA60}" dt="2026-08-05T00:52:38.065" v="46035"/>
-        <pc:sldMkLst>
-          <pc:docMk/>
-          <pc:sldMk cId="477999430" sldId="362"/>
-        </pc:sldMkLst>
-        <pc:spChg chg="mod">
-          <ac:chgData name="Mohd Hafizuddin Bin Kamilin (宇部)" userId="dcc12b03-11b8-42c5-b91a-420a12a1d1e2" providerId="ADAL" clId="{C208E6D6-5F29-4ACC-84C5-187E083BCA60}" dt="2026-08-05T00:52:36.113" v="46032" actId="207"/>
-          <ac:spMkLst>
-            <pc:docMk/>
-            <pc:sldMk cId="477999430" sldId="362"/>
-            <ac:spMk id="2" creationId="{82B7DD82-4DDA-ED93-BF89-1C7454A11C53}"/>
-          </ac:spMkLst>
-        </pc:spChg>
-        <pc:graphicFrameChg chg="add mod modGraphic">
-          <ac:chgData name="Mohd Hafizuddin Bin Kamilin (宇部)" userId="dcc12b03-11b8-42c5-b91a-420a12a1d1e2" providerId="ADAL" clId="{C208E6D6-5F29-4ACC-84C5-187E083BCA60}" dt="2026-08-05T00:51:42.957" v="45990"/>
-          <ac:graphicFrameMkLst>
-            <pc:docMk/>
-            <pc:sldMk cId="477999430" sldId="362"/>
-            <ac:graphicFrameMk id="18" creationId="{82490420-085B-5D81-D894-5F876EEA2BFA}"/>
-          </ac:graphicFrameMkLst>
-        </pc:graphicFrameChg>
-        <pc:cxnChg chg="add mod">
-          <ac:chgData name="Mohd Hafizuddin Bin Kamilin (宇部)" userId="dcc12b03-11b8-42c5-b91a-420a12a1d1e2" providerId="ADAL" clId="{C208E6D6-5F29-4ACC-84C5-187E083BCA60}" dt="2026-08-05T00:39:12.105" v="45748" actId="14100"/>
-          <ac:cxnSpMkLst>
-            <pc:docMk/>
-            <pc:sldMk cId="477999430" sldId="362"/>
-            <ac:cxnSpMk id="6" creationId="{5F70479F-232C-CC57-CEA6-42843A5F6D1E}"/>
-          </ac:cxnSpMkLst>
-        </pc:cxnChg>
-        <pc:cxnChg chg="add mod">
-          <ac:chgData name="Mohd Hafizuddin Bin Kamilin (宇部)" userId="dcc12b03-11b8-42c5-b91a-420a12a1d1e2" providerId="ADAL" clId="{C208E6D6-5F29-4ACC-84C5-187E083BCA60}" dt="2026-08-05T00:40:47.276" v="45816" actId="1038"/>
-          <ac:cxnSpMkLst>
-            <pc:docMk/>
-            <pc:sldMk cId="477999430" sldId="362"/>
-            <ac:cxnSpMk id="8" creationId="{4183C61F-EB28-55B7-F1A9-F6050F83E2EB}"/>
-          </ac:cxnSpMkLst>
-        </pc:cxnChg>
-        <pc:cxnChg chg="add mod">
-          <ac:chgData name="Mohd Hafizuddin Bin Kamilin (宇部)" userId="dcc12b03-11b8-42c5-b91a-420a12a1d1e2" providerId="ADAL" clId="{C208E6D6-5F29-4ACC-84C5-187E083BCA60}" dt="2026-08-05T00:43:21.782" v="45880" actId="14100"/>
-          <ac:cxnSpMkLst>
-            <pc:docMk/>
-            <pc:sldMk cId="477999430" sldId="362"/>
-            <ac:cxnSpMk id="10" creationId="{8FFFE332-1EF6-76CC-83EC-2E2E24D2FE85}"/>
-          </ac:cxnSpMkLst>
-        </pc:cxnChg>
-        <pc:cxnChg chg="add mod">
-          <ac:chgData name="Mohd Hafizuddin Bin Kamilin (宇部)" userId="dcc12b03-11b8-42c5-b91a-420a12a1d1e2" providerId="ADAL" clId="{C208E6D6-5F29-4ACC-84C5-187E083BCA60}" dt="2026-08-05T00:43:16.944" v="45879" actId="1038"/>
-          <ac:cxnSpMkLst>
-            <pc:docMk/>
-            <pc:sldMk cId="477999430" sldId="362"/>
-            <ac:cxnSpMk id="12" creationId="{96C016A4-7A4F-3124-EAA2-9C1EA0EBEC3D}"/>
-          </ac:cxnSpMkLst>
-        </pc:cxnChg>
-      </pc:sldChg>
-      <pc:sldChg chg="addSp delSp modSp new mod delAnim modAnim">
-        <pc:chgData name="Mohd Hafizuddin Bin Kamilin (宇部)" userId="dcc12b03-11b8-42c5-b91a-420a12a1d1e2" providerId="ADAL" clId="{C208E6D6-5F29-4ACC-84C5-187E083BCA60}" dt="2026-08-05T13:37:57.754" v="48334"/>
-        <pc:sldMkLst>
-          <pc:docMk/>
-          <pc:sldMk cId="668561330" sldId="363"/>
-        </pc:sldMkLst>
-        <pc:spChg chg="mod">
-          <ac:chgData name="Mohd Hafizuddin Bin Kamilin (宇部)" userId="dcc12b03-11b8-42c5-b91a-420a12a1d1e2" providerId="ADAL" clId="{C208E6D6-5F29-4ACC-84C5-187E083BCA60}" dt="2026-08-05T04:23:40.495" v="47130"/>
-          <ac:spMkLst>
-            <pc:docMk/>
-            <pc:sldMk cId="668561330" sldId="363"/>
-            <ac:spMk id="2" creationId="{D986F21F-8AB2-599E-595E-AE66790E4F60}"/>
-          </ac:spMkLst>
-        </pc:spChg>
-        <pc:spChg chg="mod">
-          <ac:chgData name="Mohd Hafizuddin Bin Kamilin (宇部)" userId="dcc12b03-11b8-42c5-b91a-420a12a1d1e2" providerId="ADAL" clId="{C208E6D6-5F29-4ACC-84C5-187E083BCA60}" dt="2026-08-05T05:03:24.469" v="47327" actId="20577"/>
-          <ac:spMkLst>
-            <pc:docMk/>
-            <pc:sldMk cId="668561330" sldId="363"/>
-            <ac:spMk id="3" creationId="{82540109-0654-2580-DEC9-B80C34FB9244}"/>
-          </ac:spMkLst>
-        </pc:spChg>
-        <pc:spChg chg="add mod">
-          <ac:chgData name="Mohd Hafizuddin Bin Kamilin (宇部)" userId="dcc12b03-11b8-42c5-b91a-420a12a1d1e2" providerId="ADAL" clId="{C208E6D6-5F29-4ACC-84C5-187E083BCA60}" dt="2026-08-05T05:00:17.936" v="47251"/>
-          <ac:spMkLst>
-            <pc:docMk/>
-            <pc:sldMk cId="668561330" sldId="363"/>
-            <ac:spMk id="30" creationId="{9F24902F-6BAF-1B5F-C5B1-6E52CAFEB2C9}"/>
-          </ac:spMkLst>
-        </pc:spChg>
-        <pc:spChg chg="add mod">
-          <ac:chgData name="Mohd Hafizuddin Bin Kamilin (宇部)" userId="dcc12b03-11b8-42c5-b91a-420a12a1d1e2" providerId="ADAL" clId="{C208E6D6-5F29-4ACC-84C5-187E083BCA60}" dt="2026-08-05T05:01:28.411" v="47300" actId="14100"/>
-          <ac:spMkLst>
-            <pc:docMk/>
-            <pc:sldMk cId="668561330" sldId="363"/>
-            <ac:spMk id="31" creationId="{08D979A2-3E63-5A97-341C-64FB9E6D636A}"/>
-          </ac:spMkLst>
-        </pc:spChg>
-        <pc:spChg chg="add mod">
-          <ac:chgData name="Mohd Hafizuddin Bin Kamilin (宇部)" userId="dcc12b03-11b8-42c5-b91a-420a12a1d1e2" providerId="ADAL" clId="{C208E6D6-5F29-4ACC-84C5-187E083BCA60}" dt="2026-08-05T04:58:40.470" v="47209" actId="2085"/>
-          <ac:spMkLst>
-            <pc:docMk/>
-            <pc:sldMk cId="668561330" sldId="363"/>
-            <ac:spMk id="33" creationId="{044D8BAC-A694-BA45-5BCC-7ED800F368FE}"/>
-          </ac:spMkLst>
-        </pc:spChg>
-        <pc:picChg chg="add mod">
-          <ac:chgData name="Mohd Hafizuddin Bin Kamilin (宇部)" userId="dcc12b03-11b8-42c5-b91a-420a12a1d1e2" providerId="ADAL" clId="{C208E6D6-5F29-4ACC-84C5-187E083BCA60}" dt="2026-08-05T04:24:56.504" v="47147" actId="1036"/>
-          <ac:picMkLst>
-            <pc:docMk/>
-            <pc:sldMk cId="668561330" sldId="363"/>
-            <ac:picMk id="26" creationId="{0726FB4A-1C63-0FAC-9A57-A15FE1D335AB}"/>
-          </ac:picMkLst>
-        </pc:picChg>
-        <pc:picChg chg="add mod">
-          <ac:chgData name="Mohd Hafizuddin Bin Kamilin (宇部)" userId="dcc12b03-11b8-42c5-b91a-420a12a1d1e2" providerId="ADAL" clId="{C208E6D6-5F29-4ACC-84C5-187E083BCA60}" dt="2026-08-05T04:28:39.049" v="47189" actId="14100"/>
-          <ac:picMkLst>
-            <pc:docMk/>
-            <pc:sldMk cId="668561330" sldId="363"/>
-            <ac:picMk id="29" creationId="{8F8FCE51-95F4-64A8-F213-F6E38373BA24}"/>
-          </ac:picMkLst>
-        </pc:picChg>
-        <pc:cxnChg chg="add mod">
-          <ac:chgData name="Mohd Hafizuddin Bin Kamilin (宇部)" userId="dcc12b03-11b8-42c5-b91a-420a12a1d1e2" providerId="ADAL" clId="{C208E6D6-5F29-4ACC-84C5-187E083BCA60}" dt="2026-08-05T05:01:28.411" v="47300" actId="14100"/>
-          <ac:cxnSpMkLst>
-            <pc:docMk/>
-            <pc:sldMk cId="668561330" sldId="363"/>
-            <ac:cxnSpMk id="37" creationId="{4716368D-E2E9-AE28-2C87-8FA9DE875537}"/>
-          </ac:cxnSpMkLst>
-        </pc:cxnChg>
-      </pc:sldChg>
-      <pc:sldChg chg="modSp add mod modAnim">
-        <pc:chgData name="Mohd Hafizuddin Bin Kamilin (宇部)" userId="dcc12b03-11b8-42c5-b91a-420a12a1d1e2" providerId="ADAL" clId="{C208E6D6-5F29-4ACC-84C5-187E083BCA60}" dt="2026-08-05T03:41:58.998" v="46835" actId="20577"/>
-        <pc:sldMkLst>
-          <pc:docMk/>
-          <pc:sldMk cId="2239796668" sldId="364"/>
-        </pc:sldMkLst>
-        <pc:spChg chg="mod">
-          <ac:chgData name="Mohd Hafizuddin Bin Kamilin (宇部)" userId="dcc12b03-11b8-42c5-b91a-420a12a1d1e2" providerId="ADAL" clId="{C208E6D6-5F29-4ACC-84C5-187E083BCA60}" dt="2026-08-05T01:11:32.559" v="46081" actId="20577"/>
-          <ac:spMkLst>
-            <pc:docMk/>
-            <pc:sldMk cId="2239796668" sldId="364"/>
-            <ac:spMk id="2" creationId="{ADD16252-9E1D-C330-2BE6-930970E71909}"/>
-          </ac:spMkLst>
-        </pc:spChg>
-        <pc:spChg chg="mod">
-          <ac:chgData name="Mohd Hafizuddin Bin Kamilin (宇部)" userId="dcc12b03-11b8-42c5-b91a-420a12a1d1e2" providerId="ADAL" clId="{C208E6D6-5F29-4ACC-84C5-187E083BCA60}" dt="2026-08-05T01:24:52.199" v="46135" actId="947"/>
-          <ac:spMkLst>
-            <pc:docMk/>
-            <pc:sldMk cId="2239796668" sldId="364"/>
-            <ac:spMk id="3" creationId="{0312FE99-944D-B808-BD76-12A82641422D}"/>
-          </ac:spMkLst>
-        </pc:spChg>
-        <pc:spChg chg="mod">
-          <ac:chgData name="Mohd Hafizuddin Bin Kamilin (宇部)" userId="dcc12b03-11b8-42c5-b91a-420a12a1d1e2" providerId="ADAL" clId="{C208E6D6-5F29-4ACC-84C5-187E083BCA60}" dt="2026-08-05T01:26:38.097" v="46173" actId="6549"/>
-          <ac:spMkLst>
-            <pc:docMk/>
-            <pc:sldMk cId="2239796668" sldId="364"/>
-            <ac:spMk id="25" creationId="{869004DB-7FD1-717B-3966-815BF95FA6A7}"/>
-          </ac:spMkLst>
-        </pc:spChg>
-        <pc:spChg chg="mod">
-          <ac:chgData name="Mohd Hafizuddin Bin Kamilin (宇部)" userId="dcc12b03-11b8-42c5-b91a-420a12a1d1e2" providerId="ADAL" clId="{C208E6D6-5F29-4ACC-84C5-187E083BCA60}" dt="2026-08-05T03:41:58.998" v="46835" actId="20577"/>
-          <ac:spMkLst>
-            <pc:docMk/>
-            <pc:sldMk cId="2239796668" sldId="364"/>
-            <ac:spMk id="27" creationId="{6CDF5003-CA28-A3DE-CA77-C2BB5836A422}"/>
-          </ac:spMkLst>
-        </pc:spChg>
-      </pc:sldChg>
-      <pc:sldChg chg="addSp delSp modSp new mod modClrScheme chgLayout">
-        <pc:chgData name="Mohd Hafizuddin Bin Kamilin (宇部)" userId="dcc12b03-11b8-42c5-b91a-420a12a1d1e2" providerId="ADAL" clId="{C208E6D6-5F29-4ACC-84C5-187E083BCA60}" dt="2026-08-05T03:23:33.878" v="46721" actId="20577"/>
-        <pc:sldMkLst>
-          <pc:docMk/>
-          <pc:sldMk cId="49735976" sldId="366"/>
-        </pc:sldMkLst>
-        <pc:spChg chg="mod ord">
-          <ac:chgData name="Mohd Hafizuddin Bin Kamilin (宇部)" userId="dcc12b03-11b8-42c5-b91a-420a12a1d1e2" providerId="ADAL" clId="{C208E6D6-5F29-4ACC-84C5-187E083BCA60}" dt="2026-08-05T02:03:45.880" v="46412" actId="700"/>
-          <ac:spMkLst>
-            <pc:docMk/>
-            <pc:sldMk cId="49735976" sldId="366"/>
-            <ac:spMk id="4" creationId="{A239E1EA-C9BC-E6F6-8417-284D3E3FEC0A}"/>
-          </ac:spMkLst>
-        </pc:spChg>
-        <pc:spChg chg="add mod ord">
-          <ac:chgData name="Mohd Hafizuddin Bin Kamilin (宇部)" userId="dcc12b03-11b8-42c5-b91a-420a12a1d1e2" providerId="ADAL" clId="{C208E6D6-5F29-4ACC-84C5-187E083BCA60}" dt="2026-08-05T02:09:04.382" v="46475" actId="20577"/>
-          <ac:spMkLst>
-            <pc:docMk/>
-            <pc:sldMk cId="49735976" sldId="366"/>
-            <ac:spMk id="8" creationId="{D25714AC-8946-6951-C3C0-E7B597F7B05C}"/>
-          </ac:spMkLst>
-        </pc:spChg>
-        <pc:spChg chg="add mod ord">
-          <ac:chgData name="Mohd Hafizuddin Bin Kamilin (宇部)" userId="dcc12b03-11b8-42c5-b91a-420a12a1d1e2" providerId="ADAL" clId="{C208E6D6-5F29-4ACC-84C5-187E083BCA60}" dt="2026-08-05T03:14:46.101" v="46481"/>
-          <ac:spMkLst>
-            <pc:docMk/>
-            <pc:sldMk cId="49735976" sldId="366"/>
-            <ac:spMk id="9" creationId="{44CF580D-B67C-4731-9698-9E448356C53A}"/>
-          </ac:spMkLst>
-        </pc:spChg>
-        <pc:spChg chg="add mod ord">
-          <ac:chgData name="Mohd Hafizuddin Bin Kamilin (宇部)" userId="dcc12b03-11b8-42c5-b91a-420a12a1d1e2" providerId="ADAL" clId="{C208E6D6-5F29-4ACC-84C5-187E083BCA60}" dt="2026-08-05T03:23:21.550" v="46720" actId="6549"/>
-          <ac:spMkLst>
-            <pc:docMk/>
-            <pc:sldMk cId="49735976" sldId="366"/>
-            <ac:spMk id="10" creationId="{9FB5F60F-351E-D576-99DD-4AF68FA75562}"/>
-          </ac:spMkLst>
-        </pc:spChg>
-        <pc:graphicFrameChg chg="add mod modGraphic">
-          <ac:chgData name="Mohd Hafizuddin Bin Kamilin (宇部)" userId="dcc12b03-11b8-42c5-b91a-420a12a1d1e2" providerId="ADAL" clId="{C208E6D6-5F29-4ACC-84C5-187E083BCA60}" dt="2026-08-05T03:23:33.878" v="46721" actId="20577"/>
-          <ac:graphicFrameMkLst>
-            <pc:docMk/>
-            <pc:sldMk cId="49735976" sldId="366"/>
-            <ac:graphicFrameMk id="13" creationId="{0BA15751-2171-E362-DB23-71CE40972D14}"/>
-          </ac:graphicFrameMkLst>
-        </pc:graphicFrameChg>
-      </pc:sldChg>
-      <pc:sldChg chg="addSp delSp modSp new mod delAnim modAnim">
-        <pc:chgData name="Mohd Hafizuddin Bin Kamilin (宇部)" userId="dcc12b03-11b8-42c5-b91a-420a12a1d1e2" providerId="ADAL" clId="{C208E6D6-5F29-4ACC-84C5-187E083BCA60}" dt="2026-08-17T23:40:09.832" v="52292" actId="207"/>
-        <pc:sldMkLst>
-          <pc:docMk/>
-          <pc:sldMk cId="1522849761" sldId="367"/>
-        </pc:sldMkLst>
-        <pc:spChg chg="mod">
-          <ac:chgData name="Mohd Hafizuddin Bin Kamilin (宇部)" userId="dcc12b03-11b8-42c5-b91a-420a12a1d1e2" providerId="ADAL" clId="{C208E6D6-5F29-4ACC-84C5-187E083BCA60}" dt="2026-08-05T15:00:35.835" v="49275" actId="20577"/>
-          <ac:spMkLst>
-            <pc:docMk/>
-            <pc:sldMk cId="1522849761" sldId="367"/>
-            <ac:spMk id="2" creationId="{86AB4AE3-45C8-374C-9562-A53652BF783A}"/>
-          </ac:spMkLst>
-        </pc:spChg>
-        <pc:spChg chg="mod">
-          <ac:chgData name="Mohd Hafizuddin Bin Kamilin (宇部)" userId="dcc12b03-11b8-42c5-b91a-420a12a1d1e2" providerId="ADAL" clId="{C208E6D6-5F29-4ACC-84C5-187E083BCA60}" dt="2026-08-06T13:32:48.583" v="49816"/>
-          <ac:spMkLst>
-            <pc:docMk/>
-            <pc:sldMk cId="1522849761" sldId="367"/>
-            <ac:spMk id="3" creationId="{B45B740F-D084-6394-E739-FFC08BEB350B}"/>
-          </ac:spMkLst>
-        </pc:spChg>
-        <pc:spChg chg="add mod ord">
-          <ac:chgData name="Mohd Hafizuddin Bin Kamilin (宇部)" userId="dcc12b03-11b8-42c5-b91a-420a12a1d1e2" providerId="ADAL" clId="{C208E6D6-5F29-4ACC-84C5-187E083BCA60}" dt="2026-08-06T13:32:15.076" v="49808" actId="207"/>
-          <ac:spMkLst>
-            <pc:docMk/>
-            <pc:sldMk cId="1522849761" sldId="367"/>
-            <ac:spMk id="9" creationId="{D318986D-B128-0FDF-5C16-6A4054C73F0C}"/>
-          </ac:spMkLst>
-        </pc:spChg>
-        <pc:spChg chg="add mod">
-          <ac:chgData name="Mohd Hafizuddin Bin Kamilin (宇部)" userId="dcc12b03-11b8-42c5-b91a-420a12a1d1e2" providerId="ADAL" clId="{C208E6D6-5F29-4ACC-84C5-187E083BCA60}" dt="2026-08-17T23:39:47.815" v="52259" actId="14861"/>
-          <ac:spMkLst>
-            <pc:docMk/>
-            <pc:sldMk cId="1522849761" sldId="367"/>
-            <ac:spMk id="26" creationId="{7EEC068B-11F7-031C-F6A9-0042C1526870}"/>
-          </ac:spMkLst>
-        </pc:spChg>
-        <pc:spChg chg="add mod">
-          <ac:chgData name="Mohd Hafizuddin Bin Kamilin (宇部)" userId="dcc12b03-11b8-42c5-b91a-420a12a1d1e2" providerId="ADAL" clId="{C208E6D6-5F29-4ACC-84C5-187E083BCA60}" dt="2026-08-17T23:40:09.832" v="52292" actId="207"/>
-          <ac:spMkLst>
-            <pc:docMk/>
-            <pc:sldMk cId="1522849761" sldId="367"/>
-            <ac:spMk id="28" creationId="{44552B4E-7007-2438-44EE-C42BFB04143B}"/>
-          </ac:spMkLst>
-        </pc:spChg>
-        <pc:spChg chg="add mod">
-          <ac:chgData name="Mohd Hafizuddin Bin Kamilin (宇部)" userId="dcc12b03-11b8-42c5-b91a-420a12a1d1e2" providerId="ADAL" clId="{C208E6D6-5F29-4ACC-84C5-187E083BCA60}" dt="2026-08-17T23:40:09.832" v="52292" actId="207"/>
-          <ac:spMkLst>
-            <pc:docMk/>
-            <pc:sldMk cId="1522849761" sldId="367"/>
-            <ac:spMk id="30" creationId="{6275BF6D-C69E-19FB-03AD-22D3531C6B0A}"/>
-          </ac:spMkLst>
-        </pc:spChg>
-        <pc:spChg chg="add mod">
-          <ac:chgData name="Mohd Hafizuddin Bin Kamilin (宇部)" userId="dcc12b03-11b8-42c5-b91a-420a12a1d1e2" providerId="ADAL" clId="{C208E6D6-5F29-4ACC-84C5-187E083BCA60}" dt="2026-08-17T23:40:09.832" v="52292" actId="207"/>
-          <ac:spMkLst>
-            <pc:docMk/>
-            <pc:sldMk cId="1522849761" sldId="367"/>
-            <ac:spMk id="32" creationId="{D22B5208-21A7-147D-939C-08DD3FCA76E4}"/>
-          </ac:spMkLst>
-        </pc:spChg>
-        <pc:spChg chg="add mod ord">
-          <ac:chgData name="Mohd Hafizuddin Bin Kamilin (宇部)" userId="dcc12b03-11b8-42c5-b91a-420a12a1d1e2" providerId="ADAL" clId="{C208E6D6-5F29-4ACC-84C5-187E083BCA60}" dt="2026-08-06T01:26:41.666" v="49499" actId="1037"/>
-          <ac:spMkLst>
-            <pc:docMk/>
-            <pc:sldMk cId="1522849761" sldId="367"/>
-            <ac:spMk id="39" creationId="{ADCBB55A-90BE-B92E-C65A-B08D003DD802}"/>
-          </ac:spMkLst>
-        </pc:spChg>
-        <pc:spChg chg="add mod ord">
-          <ac:chgData name="Mohd Hafizuddin Bin Kamilin (宇部)" userId="dcc12b03-11b8-42c5-b91a-420a12a1d1e2" providerId="ADAL" clId="{C208E6D6-5F29-4ACC-84C5-187E083BCA60}" dt="2026-08-06T01:26:41.666" v="49499" actId="1037"/>
-          <ac:spMkLst>
-            <pc:docMk/>
-            <pc:sldMk cId="1522849761" sldId="367"/>
-            <ac:spMk id="45" creationId="{E8D449A4-60F2-900E-DFB4-0F13FDBC9973}"/>
-          </ac:spMkLst>
-        </pc:spChg>
-        <pc:spChg chg="add mod">
-          <ac:chgData name="Mohd Hafizuddin Bin Kamilin (宇部)" userId="dcc12b03-11b8-42c5-b91a-420a12a1d1e2" providerId="ADAL" clId="{C208E6D6-5F29-4ACC-84C5-187E083BCA60}" dt="2026-08-06T01:26:41.666" v="49499" actId="1037"/>
-          <ac:spMkLst>
-            <pc:docMk/>
-            <pc:sldMk cId="1522849761" sldId="367"/>
-            <ac:spMk id="77" creationId="{6106ADB9-6A8D-9452-3260-1A892426B490}"/>
-          </ac:spMkLst>
-        </pc:spChg>
-        <pc:spChg chg="add mod">
-          <ac:chgData name="Mohd Hafizuddin Bin Kamilin (宇部)" userId="dcc12b03-11b8-42c5-b91a-420a12a1d1e2" providerId="ADAL" clId="{C208E6D6-5F29-4ACC-84C5-187E083BCA60}" dt="2026-08-06T01:26:41.666" v="49499" actId="1037"/>
-          <ac:spMkLst>
-            <pc:docMk/>
-            <pc:sldMk cId="1522849761" sldId="367"/>
-            <ac:spMk id="79" creationId="{D5D84E73-A83E-742D-3618-4E893DF0AB80}"/>
-          </ac:spMkLst>
-        </pc:spChg>
-        <pc:spChg chg="add mod ord">
-          <ac:chgData name="Mohd Hafizuddin Bin Kamilin (宇部)" userId="dcc12b03-11b8-42c5-b91a-420a12a1d1e2" providerId="ADAL" clId="{C208E6D6-5F29-4ACC-84C5-187E083BCA60}" dt="2026-08-06T01:26:41.666" v="49499" actId="1037"/>
-          <ac:spMkLst>
-            <pc:docMk/>
-            <pc:sldMk cId="1522849761" sldId="367"/>
-            <ac:spMk id="80" creationId="{8F0D57FC-B672-5084-535B-DFFC80AC4C2F}"/>
-          </ac:spMkLst>
-        </pc:spChg>
-        <pc:spChg chg="add mod ord">
-          <ac:chgData name="Mohd Hafizuddin Bin Kamilin (宇部)" userId="dcc12b03-11b8-42c5-b91a-420a12a1d1e2" providerId="ADAL" clId="{C208E6D6-5F29-4ACC-84C5-187E083BCA60}" dt="2026-08-06T13:32:04.703" v="49806" actId="207"/>
-          <ac:spMkLst>
-            <pc:docMk/>
-            <pc:sldMk cId="1522849761" sldId="367"/>
-            <ac:spMk id="82" creationId="{4F5FD394-EA07-0B4A-8399-EEFD6DF67799}"/>
-          </ac:spMkLst>
-        </pc:spChg>
-        <pc:picChg chg="add mod">
-          <ac:chgData name="Mohd Hafizuddin Bin Kamilin (宇部)" userId="dcc12b03-11b8-42c5-b91a-420a12a1d1e2" providerId="ADAL" clId="{C208E6D6-5F29-4ACC-84C5-187E083BCA60}" dt="2026-08-05T13:45:56.192" v="48468" actId="1076"/>
-          <ac:picMkLst>
-            <pc:docMk/>
-            <pc:sldMk cId="1522849761" sldId="367"/>
-            <ac:picMk id="38" creationId="{A3D23BA8-3647-EEBD-24B0-DE19C41CF45E}"/>
-          </ac:picMkLst>
-        </pc:picChg>
-        <pc:picChg chg="add del mod">
-          <ac:chgData name="Mohd Hafizuddin Bin Kamilin (宇部)" userId="dcc12b03-11b8-42c5-b91a-420a12a1d1e2" providerId="ADAL" clId="{C208E6D6-5F29-4ACC-84C5-187E083BCA60}" dt="2026-08-05T14:22:47.352" v="48710" actId="21"/>
-          <ac:picMkLst>
-            <pc:docMk/>
-            <pc:sldMk cId="1522849761" sldId="367"/>
-            <ac:picMk id="44" creationId="{BA33CC9A-9D19-A41C-7B09-B62C8F91D49D}"/>
-          </ac:picMkLst>
-        </pc:picChg>
-        <pc:picChg chg="add mod">
-          <ac:chgData name="Mohd Hafizuddin Bin Kamilin (宇部)" userId="dcc12b03-11b8-42c5-b91a-420a12a1d1e2" providerId="ADAL" clId="{C208E6D6-5F29-4ACC-84C5-187E083BCA60}" dt="2026-08-05T13:46:33.199" v="48481" actId="1076"/>
-          <ac:picMkLst>
-            <pc:docMk/>
-            <pc:sldMk cId="1522849761" sldId="367"/>
-            <ac:picMk id="46" creationId="{A0DFB144-9B24-2AB6-2EC9-C417D648447B}"/>
-          </ac:picMkLst>
-        </pc:picChg>
-        <pc:picChg chg="add mod">
-          <ac:chgData name="Mohd Hafizuddin Bin Kamilin (宇部)" userId="dcc12b03-11b8-42c5-b91a-420a12a1d1e2" providerId="ADAL" clId="{C208E6D6-5F29-4ACC-84C5-187E083BCA60}" dt="2026-08-05T13:46:47.677" v="48512" actId="1038"/>
-          <ac:picMkLst>
-            <pc:docMk/>
-            <pc:sldMk cId="1522849761" sldId="367"/>
-            <ac:picMk id="48" creationId="{51130A4F-AB45-197C-BAF7-F0AB64B1A50C}"/>
-          </ac:picMkLst>
-        </pc:picChg>
-        <pc:picChg chg="add mod">
-          <ac:chgData name="Mohd Hafizuddin Bin Kamilin (宇部)" userId="dcc12b03-11b8-42c5-b91a-420a12a1d1e2" providerId="ADAL" clId="{C208E6D6-5F29-4ACC-84C5-187E083BCA60}" dt="2026-08-05T13:46:47.677" v="48512" actId="1038"/>
-          <ac:picMkLst>
-            <pc:docMk/>
-            <pc:sldMk cId="1522849761" sldId="367"/>
-            <ac:picMk id="50" creationId="{433D333D-C5F5-457B-C806-8541BCF89066}"/>
-          </ac:picMkLst>
-        </pc:picChg>
-        <pc:picChg chg="add mod">
-          <ac:chgData name="Mohd Hafizuddin Bin Kamilin (宇部)" userId="dcc12b03-11b8-42c5-b91a-420a12a1d1e2" providerId="ADAL" clId="{C208E6D6-5F29-4ACC-84C5-187E083BCA60}" dt="2026-08-05T13:46:47.677" v="48512" actId="1038"/>
-          <ac:picMkLst>
-            <pc:docMk/>
-            <pc:sldMk cId="1522849761" sldId="367"/>
-            <ac:picMk id="52" creationId="{D297A4FA-1B6C-E3D2-F030-AF6817DB267D}"/>
-          </ac:picMkLst>
-        </pc:picChg>
-        <pc:picChg chg="add mod">
-          <ac:chgData name="Mohd Hafizuddin Bin Kamilin (宇部)" userId="dcc12b03-11b8-42c5-b91a-420a12a1d1e2" providerId="ADAL" clId="{C208E6D6-5F29-4ACC-84C5-187E083BCA60}" dt="2026-08-05T13:47:05.947" v="48538" actId="1038"/>
-          <ac:picMkLst>
-            <pc:docMk/>
-            <pc:sldMk cId="1522849761" sldId="367"/>
-            <ac:picMk id="54" creationId="{F7EF73D7-DBC8-8155-514C-7D1F8B777B72}"/>
-          </ac:picMkLst>
-        </pc:picChg>
-        <pc:picChg chg="add mod">
-          <ac:chgData name="Mohd Hafizuddin Bin Kamilin (宇部)" userId="dcc12b03-11b8-42c5-b91a-420a12a1d1e2" providerId="ADAL" clId="{C208E6D6-5F29-4ACC-84C5-187E083BCA60}" dt="2026-08-05T13:47:05.947" v="48538" actId="1038"/>
-          <ac:picMkLst>
-            <pc:docMk/>
-            <pc:sldMk cId="1522849761" sldId="367"/>
-            <ac:picMk id="56" creationId="{68A5B96C-55C8-6B35-7278-9D69884146DF}"/>
-          </ac:picMkLst>
-        </pc:picChg>
-        <pc:picChg chg="add mod">
-          <ac:chgData name="Mohd Hafizuddin Bin Kamilin (宇部)" userId="dcc12b03-11b8-42c5-b91a-420a12a1d1e2" providerId="ADAL" clId="{C208E6D6-5F29-4ACC-84C5-187E083BCA60}" dt="2026-08-05T13:47:05.947" v="48538" actId="1038"/>
-          <ac:picMkLst>
-            <pc:docMk/>
-            <pc:sldMk cId="1522849761" sldId="367"/>
-            <ac:picMk id="58" creationId="{EC57F16F-2103-AD36-6DE5-7E0E11B7C01A}"/>
-          </ac:picMkLst>
-        </pc:picChg>
-        <pc:picChg chg="add mod">
-          <ac:chgData name="Mohd Hafizuddin Bin Kamilin (宇部)" userId="dcc12b03-11b8-42c5-b91a-420a12a1d1e2" providerId="ADAL" clId="{C208E6D6-5F29-4ACC-84C5-187E083BCA60}" dt="2026-08-05T13:47:34.196" v="48555" actId="1036"/>
-          <ac:picMkLst>
-            <pc:docMk/>
-            <pc:sldMk cId="1522849761" sldId="367"/>
-            <ac:picMk id="60" creationId="{F42982BA-278E-A71F-65FF-9AB1994F8C61}"/>
-          </ac:picMkLst>
-        </pc:picChg>
-        <pc:picChg chg="add del mod">
-          <ac:chgData name="Mohd Hafizuddin Bin Kamilin (宇部)" userId="dcc12b03-11b8-42c5-b91a-420a12a1d1e2" providerId="ADAL" clId="{C208E6D6-5F29-4ACC-84C5-187E083BCA60}" dt="2026-08-05T14:25:43.080" v="48761" actId="478"/>
-          <ac:picMkLst>
-            <pc:docMk/>
-            <pc:sldMk cId="1522849761" sldId="367"/>
-            <ac:picMk id="62" creationId="{4D3F7527-94A8-3177-4A01-02636A990763}"/>
-          </ac:picMkLst>
-        </pc:picChg>
-        <pc:picChg chg="add mod">
-          <ac:chgData name="Mohd Hafizuddin Bin Kamilin (宇部)" userId="dcc12b03-11b8-42c5-b91a-420a12a1d1e2" providerId="ADAL" clId="{C208E6D6-5F29-4ACC-84C5-187E083BCA60}" dt="2026-08-05T13:47:59.766" v="48574" actId="1037"/>
-          <ac:picMkLst>
-            <pc:docMk/>
-            <pc:sldMk cId="1522849761" sldId="367"/>
-            <ac:picMk id="64" creationId="{9E716C99-8622-972A-62EB-DFC04237AC96}"/>
-          </ac:picMkLst>
-        </pc:picChg>
-        <pc:picChg chg="add mod">
-          <ac:chgData name="Mohd Hafizuddin Bin Kamilin (宇部)" userId="dcc12b03-11b8-42c5-b91a-420a12a1d1e2" providerId="ADAL" clId="{C208E6D6-5F29-4ACC-84C5-187E083BCA60}" dt="2026-08-05T13:48:13.627" v="48581" actId="1035"/>
-          <ac:picMkLst>
-            <pc:docMk/>
-            <pc:sldMk cId="1522849761" sldId="367"/>
-            <ac:picMk id="66" creationId="{B7B54922-85F8-C0C6-8A94-82CBBE837158}"/>
-          </ac:picMkLst>
-        </pc:picChg>
-        <pc:picChg chg="add mod">
-          <ac:chgData name="Mohd Hafizuddin Bin Kamilin (宇部)" userId="dcc12b03-11b8-42c5-b91a-420a12a1d1e2" providerId="ADAL" clId="{C208E6D6-5F29-4ACC-84C5-187E083BCA60}" dt="2026-08-05T13:48:13.627" v="48581" actId="1035"/>
-          <ac:picMkLst>
-            <pc:docMk/>
-            <pc:sldMk cId="1522849761" sldId="367"/>
-            <ac:picMk id="70" creationId="{F9D642D9-17E1-AA15-AB32-5A902913FE07}"/>
-          </ac:picMkLst>
-        </pc:picChg>
-        <pc:picChg chg="add mod">
-          <ac:chgData name="Mohd Hafizuddin Bin Kamilin (宇部)" userId="dcc12b03-11b8-42c5-b91a-420a12a1d1e2" providerId="ADAL" clId="{C208E6D6-5F29-4ACC-84C5-187E083BCA60}" dt="2026-08-05T14:22:55.300" v="48712" actId="1076"/>
-          <ac:picMkLst>
-            <pc:docMk/>
-            <pc:sldMk cId="1522849761" sldId="367"/>
-            <ac:picMk id="72" creationId="{BF3041BF-C79A-FE43-CA51-B0628444E1D5}"/>
-          </ac:picMkLst>
-        </pc:picChg>
-        <pc:picChg chg="add mod">
-          <ac:chgData name="Mohd Hafizuddin Bin Kamilin (宇部)" userId="dcc12b03-11b8-42c5-b91a-420a12a1d1e2" providerId="ADAL" clId="{C208E6D6-5F29-4ACC-84C5-187E083BCA60}" dt="2026-08-05T13:48:50.366" v="48596" actId="1076"/>
-          <ac:picMkLst>
-            <pc:docMk/>
-            <pc:sldMk cId="1522849761" sldId="367"/>
-            <ac:picMk id="74" creationId="{97C9DAAD-9F6E-0BC4-136A-DDF937550C3D}"/>
-          </ac:picMkLst>
-        </pc:picChg>
-        <pc:picChg chg="add mod">
-          <ac:chgData name="Mohd Hafizuddin Bin Kamilin (宇部)" userId="dcc12b03-11b8-42c5-b91a-420a12a1d1e2" providerId="ADAL" clId="{C208E6D6-5F29-4ACC-84C5-187E083BCA60}" dt="2026-08-05T14:27:07.750" v="48804" actId="1076"/>
-          <ac:picMkLst>
-            <pc:docMk/>
-            <pc:sldMk cId="1522849761" sldId="367"/>
-            <ac:picMk id="76" creationId="{499939E5-2B57-0020-5126-2750C0B2327E}"/>
-          </ac:picMkLst>
-        </pc:picChg>
-        <pc:cxnChg chg="add mod ord">
-          <ac:chgData name="Mohd Hafizuddin Bin Kamilin (宇部)" userId="dcc12b03-11b8-42c5-b91a-420a12a1d1e2" providerId="ADAL" clId="{C208E6D6-5F29-4ACC-84C5-187E083BCA60}" dt="2026-08-06T01:25:17.505" v="49464" actId="1036"/>
-          <ac:cxnSpMkLst>
-            <pc:docMk/>
-            <pc:sldMk cId="1522849761" sldId="367"/>
-            <ac:cxnSpMk id="41" creationId="{6EBF4D9E-6C75-0D41-1C67-E65F08B7EA91}"/>
-          </ac:cxnSpMkLst>
-        </pc:cxnChg>
-      </pc:sldChg>
-      <pc:sldChg chg="addSp modSp new mod addAnim delAnim modAnim">
-        <pc:chgData name="Mohd Hafizuddin Bin Kamilin (宇部)" userId="dcc12b03-11b8-42c5-b91a-420a12a1d1e2" providerId="ADAL" clId="{C208E6D6-5F29-4ACC-84C5-187E083BCA60}" dt="2026-08-07T13:53:27.223" v="52182"/>
-        <pc:sldMkLst>
-          <pc:docMk/>
-          <pc:sldMk cId="2370406166" sldId="368"/>
-        </pc:sldMkLst>
-        <pc:spChg chg="mod">
-          <ac:chgData name="Mohd Hafizuddin Bin Kamilin (宇部)" userId="dcc12b03-11b8-42c5-b91a-420a12a1d1e2" providerId="ADAL" clId="{C208E6D6-5F29-4ACC-84C5-187E083BCA60}" dt="2026-08-05T07:00:38.890" v="47354"/>
-          <ac:spMkLst>
-            <pc:docMk/>
-            <pc:sldMk cId="2370406166" sldId="368"/>
-            <ac:spMk id="2" creationId="{DF66F307-E55B-DD27-3808-52520CF083C9}"/>
-          </ac:spMkLst>
-        </pc:spChg>
-        <pc:spChg chg="mod">
-          <ac:chgData name="Mohd Hafizuddin Bin Kamilin (宇部)" userId="dcc12b03-11b8-42c5-b91a-420a12a1d1e2" providerId="ADAL" clId="{C208E6D6-5F29-4ACC-84C5-187E083BCA60}" dt="2026-08-05T13:35:24.897" v="48328" actId="207"/>
-          <ac:spMkLst>
-            <pc:docMk/>
-            <pc:sldMk cId="2370406166" sldId="368"/>
-            <ac:spMk id="3" creationId="{78C7B63F-79C9-31C1-8729-D04B56780B1A}"/>
-          </ac:spMkLst>
-        </pc:spChg>
-        <pc:spChg chg="add mod">
-          <ac:chgData name="Mohd Hafizuddin Bin Kamilin (宇部)" userId="dcc12b03-11b8-42c5-b91a-420a12a1d1e2" providerId="ADAL" clId="{C208E6D6-5F29-4ACC-84C5-187E083BCA60}" dt="2026-08-06T13:29:45.705" v="49789" actId="207"/>
-          <ac:spMkLst>
-            <pc:docMk/>
-            <pc:sldMk cId="2370406166" sldId="368"/>
-            <ac:spMk id="5" creationId="{6683DD3B-E033-48D8-1EDD-BC08DD9D9B28}"/>
-          </ac:spMkLst>
-        </pc:spChg>
-        <pc:spChg chg="add mod">
-          <ac:chgData name="Mohd Hafizuddin Bin Kamilin (宇部)" userId="dcc12b03-11b8-42c5-b91a-420a12a1d1e2" providerId="ADAL" clId="{C208E6D6-5F29-4ACC-84C5-187E083BCA60}" dt="2026-08-05T13:31:30.846" v="48189" actId="1035"/>
-          <ac:spMkLst>
-            <pc:docMk/>
-            <pc:sldMk cId="2370406166" sldId="368"/>
-            <ac:spMk id="6" creationId="{69468322-F2B8-A76B-EB4C-3509153C0C49}"/>
-          </ac:spMkLst>
-        </pc:spChg>
-        <pc:spChg chg="add mod">
-          <ac:chgData name="Mohd Hafizuddin Bin Kamilin (宇部)" userId="dcc12b03-11b8-42c5-b91a-420a12a1d1e2" providerId="ADAL" clId="{C208E6D6-5F29-4ACC-84C5-187E083BCA60}" dt="2026-08-05T14:19:35.951" v="48650" actId="1076"/>
-          <ac:spMkLst>
-            <pc:docMk/>
-            <pc:sldMk cId="2370406166" sldId="368"/>
-            <ac:spMk id="7" creationId="{1B88B91E-A5F1-3AB9-A9F3-09F490FAD2B6}"/>
-          </ac:spMkLst>
-        </pc:spChg>
-        <pc:spChg chg="add mod">
-          <ac:chgData name="Mohd Hafizuddin Bin Kamilin (宇部)" userId="dcc12b03-11b8-42c5-b91a-420a12a1d1e2" providerId="ADAL" clId="{C208E6D6-5F29-4ACC-84C5-187E083BCA60}" dt="2026-08-05T13:31:30.846" v="48189" actId="1035"/>
-          <ac:spMkLst>
-            <pc:docMk/>
-            <pc:sldMk cId="2370406166" sldId="368"/>
-            <ac:spMk id="9" creationId="{E48AA45F-025B-713A-4198-5FED40DE204D}"/>
-          </ac:spMkLst>
-        </pc:spChg>
-        <pc:spChg chg="add mod">
-          <ac:chgData name="Mohd Hafizuddin Bin Kamilin (宇部)" userId="dcc12b03-11b8-42c5-b91a-420a12a1d1e2" providerId="ADAL" clId="{C208E6D6-5F29-4ACC-84C5-187E083BCA60}" dt="2026-08-05T13:31:30.846" v="48189" actId="1035"/>
-          <ac:spMkLst>
-            <pc:docMk/>
-            <pc:sldMk cId="2370406166" sldId="368"/>
-            <ac:spMk id="12" creationId="{13AB354E-25D6-0F43-78C1-CD92D453C518}"/>
-          </ac:spMkLst>
-        </pc:spChg>
-        <pc:spChg chg="add mod">
-          <ac:chgData name="Mohd Hafizuddin Bin Kamilin (宇部)" userId="dcc12b03-11b8-42c5-b91a-420a12a1d1e2" providerId="ADAL" clId="{C208E6D6-5F29-4ACC-84C5-187E083BCA60}" dt="2026-08-05T13:31:30.846" v="48189" actId="1035"/>
-          <ac:spMkLst>
-            <pc:docMk/>
-            <pc:sldMk cId="2370406166" sldId="368"/>
-            <ac:spMk id="14" creationId="{2502FED0-BC37-F375-380F-0A9A85DDDA55}"/>
-          </ac:spMkLst>
-        </pc:spChg>
-        <pc:spChg chg="add mod">
-          <ac:chgData name="Mohd Hafizuddin Bin Kamilin (宇部)" userId="dcc12b03-11b8-42c5-b91a-420a12a1d1e2" providerId="ADAL" clId="{C208E6D6-5F29-4ACC-84C5-187E083BCA60}" dt="2026-08-06T13:29:49.345" v="49790" actId="207"/>
-          <ac:spMkLst>
-            <pc:docMk/>
-            <pc:sldMk cId="2370406166" sldId="368"/>
-            <ac:spMk id="20" creationId="{9ED6E620-361C-6D27-1DD2-E0E8B327B636}"/>
-          </ac:spMkLst>
-        </pc:spChg>
-        <pc:spChg chg="add mod">
-          <ac:chgData name="Mohd Hafizuddin Bin Kamilin (宇部)" userId="dcc12b03-11b8-42c5-b91a-420a12a1d1e2" providerId="ADAL" clId="{C208E6D6-5F29-4ACC-84C5-187E083BCA60}" dt="2026-08-05T13:31:30.846" v="48189" actId="1035"/>
-          <ac:spMkLst>
-            <pc:docMk/>
-            <pc:sldMk cId="2370406166" sldId="368"/>
-            <ac:spMk id="26" creationId="{F74024C5-BDAF-E1B2-FE7E-A19E4028281F}"/>
-          </ac:spMkLst>
-        </pc:spChg>
-        <pc:spChg chg="add mod">
-          <ac:chgData name="Mohd Hafizuddin Bin Kamilin (宇部)" userId="dcc12b03-11b8-42c5-b91a-420a12a1d1e2" providerId="ADAL" clId="{C208E6D6-5F29-4ACC-84C5-187E083BCA60}" dt="2026-08-05T13:31:30.846" v="48189" actId="1035"/>
-          <ac:spMkLst>
-            <pc:docMk/>
-            <pc:sldMk cId="2370406166" sldId="368"/>
-            <ac:spMk id="31" creationId="{7F62D839-03F1-2B1F-64C8-77563CDC32C2}"/>
-          </ac:spMkLst>
-        </pc:spChg>
-        <pc:spChg chg="add mod">
-          <ac:chgData name="Mohd Hafizuddin Bin Kamilin (宇部)" userId="dcc12b03-11b8-42c5-b91a-420a12a1d1e2" providerId="ADAL" clId="{C208E6D6-5F29-4ACC-84C5-187E083BCA60}" dt="2026-08-05T13:31:30.846" v="48189" actId="1035"/>
-          <ac:spMkLst>
-            <pc:docMk/>
-            <pc:sldMk cId="2370406166" sldId="368"/>
-            <ac:spMk id="33" creationId="{799EE138-8947-16E6-FC66-908CA6151CF3}"/>
-          </ac:spMkLst>
-        </pc:spChg>
-        <pc:spChg chg="add mod">
-          <ac:chgData name="Mohd Hafizuddin Bin Kamilin (宇部)" userId="dcc12b03-11b8-42c5-b91a-420a12a1d1e2" providerId="ADAL" clId="{C208E6D6-5F29-4ACC-84C5-187E083BCA60}" dt="2026-08-05T13:34:35.253" v="48325" actId="20577"/>
-          <ac:spMkLst>
-            <pc:docMk/>
-            <pc:sldMk cId="2370406166" sldId="368"/>
-            <ac:spMk id="34" creationId="{B88ABCA7-D5CA-DDF2-31C7-3D0B00C0CF2A}"/>
-          </ac:spMkLst>
-        </pc:spChg>
-        <pc:cxnChg chg="add mod">
-          <ac:chgData name="Mohd Hafizuddin Bin Kamilin (宇部)" userId="dcc12b03-11b8-42c5-b91a-420a12a1d1e2" providerId="ADAL" clId="{C208E6D6-5F29-4ACC-84C5-187E083BCA60}" dt="2026-08-05T13:24:50.335" v="48008" actId="208"/>
-          <ac:cxnSpMkLst>
-            <pc:docMk/>
-            <pc:sldMk cId="2370406166" sldId="368"/>
-            <ac:cxnSpMk id="8" creationId="{20FB9377-572D-4233-42D5-FD4762207BA7}"/>
-          </ac:cxnSpMkLst>
-        </pc:cxnChg>
-        <pc:cxnChg chg="add mod">
-          <ac:chgData name="Mohd Hafizuddin Bin Kamilin (宇部)" userId="dcc12b03-11b8-42c5-b91a-420a12a1d1e2" providerId="ADAL" clId="{C208E6D6-5F29-4ACC-84C5-187E083BCA60}" dt="2026-08-05T13:14:14.544" v="47917" actId="208"/>
-          <ac:cxnSpMkLst>
-            <pc:docMk/>
-            <pc:sldMk cId="2370406166" sldId="368"/>
-            <ac:cxnSpMk id="11" creationId="{B7A5763C-8D92-E32D-6F13-A02DF96D57B7}"/>
-          </ac:cxnSpMkLst>
-        </pc:cxnChg>
-        <pc:cxnChg chg="add mod">
-          <ac:chgData name="Mohd Hafizuddin Bin Kamilin (宇部)" userId="dcc12b03-11b8-42c5-b91a-420a12a1d1e2" providerId="ADAL" clId="{C208E6D6-5F29-4ACC-84C5-187E083BCA60}" dt="2026-08-05T13:24:50.335" v="48008" actId="208"/>
-          <ac:cxnSpMkLst>
-            <pc:docMk/>
-            <pc:sldMk cId="2370406166" sldId="368"/>
-            <ac:cxnSpMk id="15" creationId="{221EE93E-6E62-6744-976A-52A75E6EC1B3}"/>
-          </ac:cxnSpMkLst>
-        </pc:cxnChg>
-        <pc:cxnChg chg="add mod">
-          <ac:chgData name="Mohd Hafizuddin Bin Kamilin (宇部)" userId="dcc12b03-11b8-42c5-b91a-420a12a1d1e2" providerId="ADAL" clId="{C208E6D6-5F29-4ACC-84C5-187E083BCA60}" dt="2026-08-06T13:29:53.156" v="49791" actId="208"/>
-          <ac:cxnSpMkLst>
-            <pc:docMk/>
-            <pc:sldMk cId="2370406166" sldId="368"/>
-            <ac:cxnSpMk id="18" creationId="{3BA9776B-6EE3-A497-EDD0-67EB728AB244}"/>
-          </ac:cxnSpMkLst>
-        </pc:cxnChg>
-        <pc:cxnChg chg="add mod">
-          <ac:chgData name="Mohd Hafizuddin Bin Kamilin (宇部)" userId="dcc12b03-11b8-42c5-b91a-420a12a1d1e2" providerId="ADAL" clId="{C208E6D6-5F29-4ACC-84C5-187E083BCA60}" dt="2026-08-05T13:24:50.335" v="48008" actId="208"/>
-          <ac:cxnSpMkLst>
-            <pc:docMk/>
-            <pc:sldMk cId="2370406166" sldId="368"/>
-            <ac:cxnSpMk id="27" creationId="{8388EAB2-B810-BC22-35C3-0455CC96BBBA}"/>
-          </ac:cxnSpMkLst>
-        </pc:cxnChg>
-      </pc:sldChg>
-      <pc:sldChg chg="addSp delSp modSp new mod modAnim modNotesTx">
-        <pc:chgData name="Mohd Hafizuddin Bin Kamilin (宇部)" userId="dcc12b03-11b8-42c5-b91a-420a12a1d1e2" providerId="ADAL" clId="{C208E6D6-5F29-4ACC-84C5-187E083BCA60}" dt="2026-08-07T13:57:16.512" v="52190" actId="20577"/>
-        <pc:sldMkLst>
-          <pc:docMk/>
-          <pc:sldMk cId="2451767138" sldId="369"/>
-        </pc:sldMkLst>
-        <pc:spChg chg="mod">
-          <ac:chgData name="Mohd Hafizuddin Bin Kamilin (宇部)" userId="dcc12b03-11b8-42c5-b91a-420a12a1d1e2" providerId="ADAL" clId="{C208E6D6-5F29-4ACC-84C5-187E083BCA60}" dt="2026-08-05T15:01:25.872" v="49281" actId="20577"/>
-          <ac:spMkLst>
-            <pc:docMk/>
-            <pc:sldMk cId="2451767138" sldId="369"/>
-            <ac:spMk id="2" creationId="{9152A047-E17C-C4B1-AC50-7D5B8A084541}"/>
-          </ac:spMkLst>
-        </pc:spChg>
-        <pc:spChg chg="mod">
-          <ac:chgData name="Mohd Hafizuddin Bin Kamilin (宇部)" userId="dcc12b03-11b8-42c5-b91a-420a12a1d1e2" providerId="ADAL" clId="{C208E6D6-5F29-4ACC-84C5-187E083BCA60}" dt="2026-08-06T02:36:48.167" v="49743" actId="20577"/>
-          <ac:spMkLst>
-            <pc:docMk/>
-            <pc:sldMk cId="2451767138" sldId="369"/>
-            <ac:spMk id="3" creationId="{FBD75D01-48D6-DE1A-715F-5C12B7146A37}"/>
-          </ac:spMkLst>
-        </pc:spChg>
-        <pc:spChg chg="add mod">
-          <ac:chgData name="Mohd Hafizuddin Bin Kamilin (宇部)" userId="dcc12b03-11b8-42c5-b91a-420a12a1d1e2" providerId="ADAL" clId="{C208E6D6-5F29-4ACC-84C5-187E083BCA60}" dt="2026-08-06T02:36:31.183" v="49738" actId="1035"/>
-          <ac:spMkLst>
-            <pc:docMk/>
-            <pc:sldMk cId="2451767138" sldId="369"/>
-            <ac:spMk id="5" creationId="{F400B8C1-3C9A-9887-462D-36BC28A6D2C0}"/>
-          </ac:spMkLst>
-        </pc:spChg>
-        <pc:picChg chg="add mod">
-          <ac:chgData name="Mohd Hafizuddin Bin Kamilin (宇部)" userId="dcc12b03-11b8-42c5-b91a-420a12a1d1e2" providerId="ADAL" clId="{C208E6D6-5F29-4ACC-84C5-187E083BCA60}" dt="2026-08-06T02:36:31.183" v="49738" actId="1035"/>
-          <ac:picMkLst>
-            <pc:docMk/>
-            <pc:sldMk cId="2451767138" sldId="369"/>
-            <ac:picMk id="7" creationId="{8302D74B-81A3-E3D0-1731-B8316A57AB65}"/>
-          </ac:picMkLst>
-        </pc:picChg>
-      </pc:sldChg>
-      <pc:sldChg chg="addSp delSp modSp new mod modClrScheme modAnim chgLayout">
-        <pc:chgData name="Mohd Hafizuddin Bin Kamilin (宇部)" userId="dcc12b03-11b8-42c5-b91a-420a12a1d1e2" providerId="ADAL" clId="{C208E6D6-5F29-4ACC-84C5-187E083BCA60}" dt="2026-08-07T01:07:02.762" v="50190" actId="1037"/>
-        <pc:sldMkLst>
-          <pc:docMk/>
-          <pc:sldMk cId="23337157" sldId="370"/>
-        </pc:sldMkLst>
-        <pc:spChg chg="add mod">
-          <ac:chgData name="Mohd Hafizuddin Bin Kamilin (宇部)" userId="dcc12b03-11b8-42c5-b91a-420a12a1d1e2" providerId="ADAL" clId="{C208E6D6-5F29-4ACC-84C5-187E083BCA60}" dt="2026-08-07T01:06:32.113" v="50143" actId="1037"/>
-          <ac:spMkLst>
-            <pc:docMk/>
-            <pc:sldMk cId="23337157" sldId="370"/>
-            <ac:spMk id="3" creationId="{A8A569CC-8E85-4F61-7282-3DB778282143}"/>
-          </ac:spMkLst>
-        </pc:spChg>
-        <pc:spChg chg="mod ord">
-          <ac:chgData name="Mohd Hafizuddin Bin Kamilin (宇部)" userId="dcc12b03-11b8-42c5-b91a-420a12a1d1e2" providerId="ADAL" clId="{C208E6D6-5F29-4ACC-84C5-187E083BCA60}" dt="2026-08-06T05:37:03.931" v="49748" actId="700"/>
-          <ac:spMkLst>
-            <pc:docMk/>
-            <pc:sldMk cId="23337157" sldId="370"/>
-            <ac:spMk id="4" creationId="{483C9804-6D20-069A-41FA-59095119DD15}"/>
-          </ac:spMkLst>
-        </pc:spChg>
-        <pc:spChg chg="add mod ord">
-          <ac:chgData name="Mohd Hafizuddin Bin Kamilin (宇部)" userId="dcc12b03-11b8-42c5-b91a-420a12a1d1e2" providerId="ADAL" clId="{C208E6D6-5F29-4ACC-84C5-187E083BCA60}" dt="2026-08-07T01:05:07.493" v="50056"/>
-          <ac:spMkLst>
-            <pc:docMk/>
-            <pc:sldMk cId="23337157" sldId="370"/>
-            <ac:spMk id="5" creationId="{0D092F16-23CB-A7F6-3211-FF886B106B2D}"/>
-          </ac:spMkLst>
-        </pc:spChg>
-        <pc:spChg chg="add mod ord">
-          <ac:chgData name="Mohd Hafizuddin Bin Kamilin (宇部)" userId="dcc12b03-11b8-42c5-b91a-420a12a1d1e2" providerId="ADAL" clId="{C208E6D6-5F29-4ACC-84C5-187E083BCA60}" dt="2026-08-07T01:06:00.502" v="50089" actId="20577"/>
-          <ac:spMkLst>
-            <pc:docMk/>
-            <pc:sldMk cId="23337157" sldId="370"/>
-            <ac:spMk id="6" creationId="{9A8C1015-DF36-91DB-C537-51AE6570CFD1}"/>
-          </ac:spMkLst>
-        </pc:spChg>
-        <pc:spChg chg="add mod">
-          <ac:chgData name="Mohd Hafizuddin Bin Kamilin (宇部)" userId="dcc12b03-11b8-42c5-b91a-420a12a1d1e2" providerId="ADAL" clId="{C208E6D6-5F29-4ACC-84C5-187E083BCA60}" dt="2026-08-07T01:06:48.669" v="50174" actId="1036"/>
-          <ac:spMkLst>
-            <pc:docMk/>
-            <pc:sldMk cId="23337157" sldId="370"/>
-            <ac:spMk id="9" creationId="{B661B9A8-1C0F-FE97-CEBE-6890E81A76C4}"/>
-          </ac:spMkLst>
-        </pc:spChg>
-        <pc:spChg chg="add mod">
-          <ac:chgData name="Mohd Hafizuddin Bin Kamilin (宇部)" userId="dcc12b03-11b8-42c5-b91a-420a12a1d1e2" providerId="ADAL" clId="{C208E6D6-5F29-4ACC-84C5-187E083BCA60}" dt="2026-08-07T01:07:02.762" v="50190" actId="1037"/>
-          <ac:spMkLst>
-            <pc:docMk/>
-            <pc:sldMk cId="23337157" sldId="370"/>
-            <ac:spMk id="11" creationId="{3786AF57-694E-3E5C-98FF-86AD6E383BCF}"/>
-          </ac:spMkLst>
-        </pc:spChg>
-        <pc:spChg chg="add mod">
-          <ac:chgData name="Mohd Hafizuddin Bin Kamilin (宇部)" userId="dcc12b03-11b8-42c5-b91a-420a12a1d1e2" providerId="ADAL" clId="{C208E6D6-5F29-4ACC-84C5-187E083BCA60}" dt="2026-08-07T01:06:32.113" v="50143" actId="1037"/>
-          <ac:spMkLst>
-            <pc:docMk/>
-            <pc:sldMk cId="23337157" sldId="370"/>
-            <ac:spMk id="13" creationId="{00378ABD-7F61-E98D-4202-B9EEC3806623}"/>
-          </ac:spMkLst>
-        </pc:spChg>
-        <pc:picChg chg="add mod">
-          <ac:chgData name="Mohd Hafizuddin Bin Kamilin (宇部)" userId="dcc12b03-11b8-42c5-b91a-420a12a1d1e2" providerId="ADAL" clId="{C208E6D6-5F29-4ACC-84C5-187E083BCA60}" dt="2026-08-07T01:06:22.827" v="50093" actId="1076"/>
-          <ac:picMkLst>
-            <pc:docMk/>
-            <pc:sldMk cId="23337157" sldId="370"/>
-            <ac:picMk id="2" creationId="{B95F119B-FE3A-D11B-D1C5-96F6900F06E6}"/>
-          </ac:picMkLst>
-        </pc:picChg>
-        <pc:cxnChg chg="add mod">
-          <ac:chgData name="Mohd Hafizuddin Bin Kamilin (宇部)" userId="dcc12b03-11b8-42c5-b91a-420a12a1d1e2" providerId="ADAL" clId="{C208E6D6-5F29-4ACC-84C5-187E083BCA60}" dt="2026-08-07T01:06:32.113" v="50143" actId="1037"/>
-          <ac:cxnSpMkLst>
-            <pc:docMk/>
-            <pc:sldMk cId="23337157" sldId="370"/>
-            <ac:cxnSpMk id="8" creationId="{463F7D10-29F4-103A-D2C7-735ED354128C}"/>
-          </ac:cxnSpMkLst>
-        </pc:cxnChg>
-        <pc:cxnChg chg="add mod">
-          <ac:chgData name="Mohd Hafizuddin Bin Kamilin (宇部)" userId="dcc12b03-11b8-42c5-b91a-420a12a1d1e2" providerId="ADAL" clId="{C208E6D6-5F29-4ACC-84C5-187E083BCA60}" dt="2026-08-07T01:06:48.669" v="50174" actId="1036"/>
-          <ac:cxnSpMkLst>
-            <pc:docMk/>
-            <pc:sldMk cId="23337157" sldId="370"/>
-            <ac:cxnSpMk id="10" creationId="{FFCEFFA6-C71A-14E1-B34F-565DD049E3F9}"/>
-          </ac:cxnSpMkLst>
-        </pc:cxnChg>
-        <pc:cxnChg chg="add mod">
-          <ac:chgData name="Mohd Hafizuddin Bin Kamilin (宇部)" userId="dcc12b03-11b8-42c5-b91a-420a12a1d1e2" providerId="ADAL" clId="{C208E6D6-5F29-4ACC-84C5-187E083BCA60}" dt="2026-08-07T01:07:02.762" v="50190" actId="1037"/>
-          <ac:cxnSpMkLst>
-            <pc:docMk/>
-            <pc:sldMk cId="23337157" sldId="370"/>
-            <ac:cxnSpMk id="12" creationId="{765039A5-76BF-B5F1-BF07-8BBF7A6761F8}"/>
-          </ac:cxnSpMkLst>
-        </pc:cxnChg>
-        <pc:cxnChg chg="add mod">
-          <ac:chgData name="Mohd Hafizuddin Bin Kamilin (宇部)" userId="dcc12b03-11b8-42c5-b91a-420a12a1d1e2" providerId="ADAL" clId="{C208E6D6-5F29-4ACC-84C5-187E083BCA60}" dt="2026-08-07T01:06:32.113" v="50143" actId="1037"/>
-          <ac:cxnSpMkLst>
-            <pc:docMk/>
-            <pc:sldMk cId="23337157" sldId="370"/>
-            <ac:cxnSpMk id="14" creationId="{1192147D-1DF3-5F95-AE37-1565387FFBC8}"/>
-          </ac:cxnSpMkLst>
-        </pc:cxnChg>
-      </pc:sldChg>
-      <pc:sldChg chg="addSp delSp modSp new mod modClrScheme delAnim modAnim chgLayout">
-        <pc:chgData name="Mohd Hafizuddin Bin Kamilin (宇部)" userId="dcc12b03-11b8-42c5-b91a-420a12a1d1e2" providerId="ADAL" clId="{C208E6D6-5F29-4ACC-84C5-187E083BCA60}" dt="2026-08-07T01:49:45.132" v="50899" actId="20577"/>
-        <pc:sldMkLst>
-          <pc:docMk/>
-          <pc:sldMk cId="850330468" sldId="371"/>
-        </pc:sldMkLst>
-        <pc:spChg chg="mod ord">
-          <ac:chgData name="Mohd Hafizuddin Bin Kamilin (宇部)" userId="dcc12b03-11b8-42c5-b91a-420a12a1d1e2" providerId="ADAL" clId="{C208E6D6-5F29-4ACC-84C5-187E083BCA60}" dt="2026-08-06T07:15:19.497" v="49750" actId="700"/>
-          <ac:spMkLst>
-            <pc:docMk/>
-            <pc:sldMk cId="850330468" sldId="371"/>
-            <ac:spMk id="5" creationId="{F1A624E9-8AA6-36FB-C891-BD4E3DC0751F}"/>
-          </ac:spMkLst>
-        </pc:spChg>
-        <pc:spChg chg="add mod ord">
-          <ac:chgData name="Mohd Hafizuddin Bin Kamilin (宇部)" userId="dcc12b03-11b8-42c5-b91a-420a12a1d1e2" providerId="ADAL" clId="{C208E6D6-5F29-4ACC-84C5-187E083BCA60}" dt="2026-08-07T01:08:09.690" v="50226" actId="20577"/>
-          <ac:spMkLst>
-            <pc:docMk/>
-            <pc:sldMk cId="850330468" sldId="371"/>
-            <ac:spMk id="6" creationId="{08CFE7D5-9684-5FEE-40B7-52FB7CDD7781}"/>
-          </ac:spMkLst>
-        </pc:spChg>
-        <pc:spChg chg="add mod">
-          <ac:chgData name="Mohd Hafizuddin Bin Kamilin (宇部)" userId="dcc12b03-11b8-42c5-b91a-420a12a1d1e2" providerId="ADAL" clId="{C208E6D6-5F29-4ACC-84C5-187E083BCA60}" dt="2026-08-07T01:49:45.132" v="50899" actId="20577"/>
-          <ac:spMkLst>
-            <pc:docMk/>
-            <pc:sldMk cId="850330468" sldId="371"/>
-            <ac:spMk id="15" creationId="{0731C881-A9CC-034B-DBE7-E59BD1FE968A}"/>
-          </ac:spMkLst>
-        </pc:spChg>
-        <pc:spChg chg="add mod">
-          <ac:chgData name="Mohd Hafizuddin Bin Kamilin (宇部)" userId="dcc12b03-11b8-42c5-b91a-420a12a1d1e2" providerId="ADAL" clId="{C208E6D6-5F29-4ACC-84C5-187E083BCA60}" dt="2026-08-07T01:34:35.093" v="50784" actId="1076"/>
-          <ac:spMkLst>
-            <pc:docMk/>
-            <pc:sldMk cId="850330468" sldId="371"/>
-            <ac:spMk id="18" creationId="{07AF6406-AAEF-9AAF-23A9-54ACEF214452}"/>
-          </ac:spMkLst>
-        </pc:spChg>
-        <pc:picChg chg="add mod">
-          <ac:chgData name="Mohd Hafizuddin Bin Kamilin (宇部)" userId="dcc12b03-11b8-42c5-b91a-420a12a1d1e2" providerId="ADAL" clId="{C208E6D6-5F29-4ACC-84C5-187E083BCA60}" dt="2026-08-07T01:33:48.056" v="50775" actId="1076"/>
-          <ac:picMkLst>
-            <pc:docMk/>
-            <pc:sldMk cId="850330468" sldId="371"/>
-            <ac:picMk id="7" creationId="{C1D36B97-C4F1-5171-FE47-BB2B2EC0CBFE}"/>
-          </ac:picMkLst>
-        </pc:picChg>
-      </pc:sldChg>
-      <pc:sldChg chg="addSp delSp modSp new mod modAnim">
-        <pc:chgData name="Mohd Hafizuddin Bin Kamilin (宇部)" userId="dcc12b03-11b8-42c5-b91a-420a12a1d1e2" providerId="ADAL" clId="{C208E6D6-5F29-4ACC-84C5-187E083BCA60}" dt="2026-08-07T01:35:51.648" v="50805" actId="20577"/>
-        <pc:sldMkLst>
-          <pc:docMk/>
-          <pc:sldMk cId="230404592" sldId="373"/>
-        </pc:sldMkLst>
-        <pc:spChg chg="mod">
-          <ac:chgData name="Mohd Hafizuddin Bin Kamilin (宇部)" userId="dcc12b03-11b8-42c5-b91a-420a12a1d1e2" providerId="ADAL" clId="{C208E6D6-5F29-4ACC-84C5-187E083BCA60}" dt="2026-08-07T01:35:51.648" v="50805" actId="20577"/>
-          <ac:spMkLst>
-            <pc:docMk/>
-            <pc:sldMk cId="230404592" sldId="373"/>
-            <ac:spMk id="2" creationId="{FABA6FCA-FD97-F9D1-7553-F0D741DD3755}"/>
-          </ac:spMkLst>
-        </pc:spChg>
-        <pc:spChg chg="add mod">
-          <ac:chgData name="Mohd Hafizuddin Bin Kamilin (宇部)" userId="dcc12b03-11b8-42c5-b91a-420a12a1d1e2" providerId="ADAL" clId="{C208E6D6-5F29-4ACC-84C5-187E083BCA60}" dt="2026-08-07T01:35:35.816" v="50792" actId="1076"/>
-          <ac:spMkLst>
-            <pc:docMk/>
-            <pc:sldMk cId="230404592" sldId="373"/>
-            <ac:spMk id="7" creationId="{329281BE-954B-2400-5E97-224EDC4CC60D}"/>
-          </ac:spMkLst>
-        </pc:spChg>
-        <pc:picChg chg="add mod">
-          <ac:chgData name="Mohd Hafizuddin Bin Kamilin (宇部)" userId="dcc12b03-11b8-42c5-b91a-420a12a1d1e2" providerId="ADAL" clId="{C208E6D6-5F29-4ACC-84C5-187E083BCA60}" dt="2026-08-07T01:35:08.773" v="50788" actId="1076"/>
-          <ac:picMkLst>
-            <pc:docMk/>
-            <pc:sldMk cId="230404592" sldId="373"/>
-            <ac:picMk id="6" creationId="{030E496C-EE99-BEBC-6DB8-3E5252E0956E}"/>
-          </ac:picMkLst>
-        </pc:picChg>
-        <pc:cxnChg chg="add mod">
-          <ac:chgData name="Mohd Hafizuddin Bin Kamilin (宇部)" userId="dcc12b03-11b8-42c5-b91a-420a12a1d1e2" providerId="ADAL" clId="{C208E6D6-5F29-4ACC-84C5-187E083BCA60}" dt="2026-08-07T01:35:35.816" v="50792" actId="1076"/>
-          <ac:cxnSpMkLst>
-            <pc:docMk/>
-            <pc:sldMk cId="230404592" sldId="373"/>
-            <ac:cxnSpMk id="8" creationId="{97984E5F-A58E-1E33-17A0-842771784C74}"/>
-          </ac:cxnSpMkLst>
-        </pc:cxnChg>
-      </pc:sldChg>
-      <pc:sldChg chg="addSp modSp new mod">
-        <pc:chgData name="Mohd Hafizuddin Bin Kamilin (宇部)" userId="dcc12b03-11b8-42c5-b91a-420a12a1d1e2" providerId="ADAL" clId="{C208E6D6-5F29-4ACC-84C5-187E083BCA60}" dt="2026-08-07T01:51:36.323" v="50912" actId="20577"/>
-        <pc:sldMkLst>
-          <pc:docMk/>
-          <pc:sldMk cId="2566536284" sldId="374"/>
-        </pc:sldMkLst>
-        <pc:spChg chg="mod">
-          <ac:chgData name="Mohd Hafizuddin Bin Kamilin (宇部)" userId="dcc12b03-11b8-42c5-b91a-420a12a1d1e2" providerId="ADAL" clId="{C208E6D6-5F29-4ACC-84C5-187E083BCA60}" dt="2026-08-07T01:51:36.323" v="50912" actId="20577"/>
-          <ac:spMkLst>
-            <pc:docMk/>
-            <pc:sldMk cId="2566536284" sldId="374"/>
-            <ac:spMk id="2" creationId="{CD37476E-F079-AE13-64AD-00CF481BD771}"/>
-          </ac:spMkLst>
-        </pc:spChg>
-        <pc:spChg chg="mod">
-          <ac:chgData name="Mohd Hafizuddin Bin Kamilin (宇部)" userId="dcc12b03-11b8-42c5-b91a-420a12a1d1e2" providerId="ADAL" clId="{C208E6D6-5F29-4ACC-84C5-187E083BCA60}" dt="2026-08-07T01:51:00.836" v="50900" actId="207"/>
-          <ac:spMkLst>
-            <pc:docMk/>
-            <pc:sldMk cId="2566536284" sldId="374"/>
-            <ac:spMk id="3" creationId="{F282FA91-2456-33D8-2EF5-C57FCAC5D4BD}"/>
-          </ac:spMkLst>
-        </pc:spChg>
-        <pc:picChg chg="add mod">
-          <ac:chgData name="Mohd Hafizuddin Bin Kamilin (宇部)" userId="dcc12b03-11b8-42c5-b91a-420a12a1d1e2" providerId="ADAL" clId="{C208E6D6-5F29-4ACC-84C5-187E083BCA60}" dt="2026-08-07T01:46:41.844" v="50864" actId="1076"/>
-          <ac:picMkLst>
-            <pc:docMk/>
-            <pc:sldMk cId="2566536284" sldId="374"/>
-            <ac:picMk id="6" creationId="{7C47D3FF-D2F7-85C7-B68B-FAC4D7C54857}"/>
-          </ac:picMkLst>
-        </pc:picChg>
-      </pc:sldChg>
-      <pc:sldChg chg="modSp add mod">
-        <pc:chgData name="Mohd Hafizuddin Bin Kamilin (宇部)" userId="dcc12b03-11b8-42c5-b91a-420a12a1d1e2" providerId="ADAL" clId="{C208E6D6-5F29-4ACC-84C5-187E083BCA60}" dt="2026-08-07T01:53:53.461" v="50921" actId="207"/>
-        <pc:sldMkLst>
-          <pc:docMk/>
-          <pc:sldMk cId="3977164638" sldId="375"/>
-        </pc:sldMkLst>
-        <pc:spChg chg="mod">
-          <ac:chgData name="Mohd Hafizuddin Bin Kamilin (宇部)" userId="dcc12b03-11b8-42c5-b91a-420a12a1d1e2" providerId="ADAL" clId="{C208E6D6-5F29-4ACC-84C5-187E083BCA60}" dt="2026-08-07T01:51:40.211" v="50915" actId="20577"/>
-          <ac:spMkLst>
-            <pc:docMk/>
-            <pc:sldMk cId="3977164638" sldId="375"/>
-            <ac:spMk id="2" creationId="{5AF72089-1A0B-5902-A305-2F93E1A881FE}"/>
-          </ac:spMkLst>
-        </pc:spChg>
-        <pc:spChg chg="mod">
-          <ac:chgData name="Mohd Hafizuddin Bin Kamilin (宇部)" userId="dcc12b03-11b8-42c5-b91a-420a12a1d1e2" providerId="ADAL" clId="{C208E6D6-5F29-4ACC-84C5-187E083BCA60}" dt="2026-08-07T01:53:53.461" v="50921" actId="207"/>
-          <ac:spMkLst>
-            <pc:docMk/>
-            <pc:sldMk cId="3977164638" sldId="375"/>
-            <ac:spMk id="3" creationId="{FB0A1BE8-A4C2-A75A-D07F-A321A6077826}"/>
-          </ac:spMkLst>
-        </pc:spChg>
-        <pc:picChg chg="mod">
-          <ac:chgData name="Mohd Hafizuddin Bin Kamilin (宇部)" userId="dcc12b03-11b8-42c5-b91a-420a12a1d1e2" providerId="ADAL" clId="{C208E6D6-5F29-4ACC-84C5-187E083BCA60}" dt="2026-08-07T01:52:10.701" v="50917" actId="14826"/>
-          <ac:picMkLst>
-            <pc:docMk/>
-            <pc:sldMk cId="3977164638" sldId="375"/>
-            <ac:picMk id="6" creationId="{C1CE0AF1-1837-7655-0195-6D75F9811950}"/>
-          </ac:picMkLst>
-        </pc:picChg>
-      </pc:sldChg>
-      <pc:sldChg chg="addSp delSp modSp add mod">
-        <pc:chgData name="Mohd Hafizuddin Bin Kamilin (宇部)" userId="dcc12b03-11b8-42c5-b91a-420a12a1d1e2" providerId="ADAL" clId="{C208E6D6-5F29-4ACC-84C5-187E083BCA60}" dt="2026-08-07T01:58:56.343" v="50971" actId="207"/>
-        <pc:sldMkLst>
-          <pc:docMk/>
-          <pc:sldMk cId="1418496962" sldId="377"/>
-        </pc:sldMkLst>
-        <pc:spChg chg="mod">
-          <ac:chgData name="Mohd Hafizuddin Bin Kamilin (宇部)" userId="dcc12b03-11b8-42c5-b91a-420a12a1d1e2" providerId="ADAL" clId="{C208E6D6-5F29-4ACC-84C5-187E083BCA60}" dt="2026-08-07T01:56:44.483" v="50965" actId="6549"/>
-          <ac:spMkLst>
-            <pc:docMk/>
-            <pc:sldMk cId="1418496962" sldId="377"/>
-            <ac:spMk id="2" creationId="{56C136FB-565F-3120-826E-1C19A712D670}"/>
-          </ac:spMkLst>
-        </pc:spChg>
-        <pc:spChg chg="mod">
-          <ac:chgData name="Mohd Hafizuddin Bin Kamilin (宇部)" userId="dcc12b03-11b8-42c5-b91a-420a12a1d1e2" providerId="ADAL" clId="{C208E6D6-5F29-4ACC-84C5-187E083BCA60}" dt="2026-08-07T01:58:56.343" v="50971" actId="207"/>
-          <ac:spMkLst>
-            <pc:docMk/>
-            <pc:sldMk cId="1418496962" sldId="377"/>
-            <ac:spMk id="3" creationId="{A12337F1-D612-92CC-0D40-04786023DA27}"/>
-          </ac:spMkLst>
-        </pc:spChg>
-        <pc:picChg chg="add mod">
-          <ac:chgData name="Mohd Hafizuddin Bin Kamilin (宇部)" userId="dcc12b03-11b8-42c5-b91a-420a12a1d1e2" providerId="ADAL" clId="{C208E6D6-5F29-4ACC-84C5-187E083BCA60}" dt="2026-08-07T01:57:18.920" v="50968" actId="14826"/>
-          <ac:picMkLst>
-            <pc:docMk/>
-            <pc:sldMk cId="1418496962" sldId="377"/>
-            <ac:picMk id="7" creationId="{65F11010-07E0-B79E-E6EE-97E89673BA70}"/>
-          </ac:picMkLst>
-        </pc:picChg>
-      </pc:sldChg>
-      <pc:sldChg chg="addSp modSp new mod modAnim">
-        <pc:chgData name="Mohd Hafizuddin Bin Kamilin (宇部)" userId="dcc12b03-11b8-42c5-b91a-420a12a1d1e2" providerId="ADAL" clId="{C208E6D6-5F29-4ACC-84C5-187E083BCA60}" dt="2026-08-07T14:01:20.019" v="52213" actId="1037"/>
-        <pc:sldMkLst>
-          <pc:docMk/>
-          <pc:sldMk cId="2645467627" sldId="378"/>
-        </pc:sldMkLst>
-        <pc:spChg chg="mod">
-          <ac:chgData name="Mohd Hafizuddin Bin Kamilin (宇部)" userId="dcc12b03-11b8-42c5-b91a-420a12a1d1e2" providerId="ADAL" clId="{C208E6D6-5F29-4ACC-84C5-187E083BCA60}" dt="2026-08-07T02:28:19.564" v="51672" actId="20577"/>
-          <ac:spMkLst>
-            <pc:docMk/>
-            <pc:sldMk cId="2645467627" sldId="378"/>
-            <ac:spMk id="2" creationId="{DB812061-6AF6-EA43-9189-49D355A14BAD}"/>
-          </ac:spMkLst>
-        </pc:spChg>
-        <pc:spChg chg="mod">
-          <ac:chgData name="Mohd Hafizuddin Bin Kamilin (宇部)" userId="dcc12b03-11b8-42c5-b91a-420a12a1d1e2" providerId="ADAL" clId="{C208E6D6-5F29-4ACC-84C5-187E083BCA60}" dt="2026-08-07T14:01:12.150" v="52193" actId="6549"/>
-          <ac:spMkLst>
-            <pc:docMk/>
-            <pc:sldMk cId="2645467627" sldId="378"/>
-            <ac:spMk id="3" creationId="{5D825431-9784-9AD1-D8D3-8D9FEE6EC9EE}"/>
-          </ac:spMkLst>
-        </pc:spChg>
-        <pc:spChg chg="add mod">
-          <ac:chgData name="Mohd Hafizuddin Bin Kamilin (宇部)" userId="dcc12b03-11b8-42c5-b91a-420a12a1d1e2" providerId="ADAL" clId="{C208E6D6-5F29-4ACC-84C5-187E083BCA60}" dt="2026-08-07T14:01:20.019" v="52213" actId="1037"/>
-          <ac:spMkLst>
-            <pc:docMk/>
-            <pc:sldMk cId="2645467627" sldId="378"/>
-            <ac:spMk id="5" creationId="{0C5C169A-CD52-E630-A80A-E718793238BA}"/>
-          </ac:spMkLst>
-        </pc:spChg>
-        <pc:spChg chg="add mod">
-          <ac:chgData name="Mohd Hafizuddin Bin Kamilin (宇部)" userId="dcc12b03-11b8-42c5-b91a-420a12a1d1e2" providerId="ADAL" clId="{C208E6D6-5F29-4ACC-84C5-187E083BCA60}" dt="2026-08-07T14:01:20.019" v="52213" actId="1037"/>
-          <ac:spMkLst>
-            <pc:docMk/>
-            <pc:sldMk cId="2645467627" sldId="378"/>
-            <ac:spMk id="7" creationId="{F89F0F2C-6167-27FE-8519-32CFE9237327}"/>
-          </ac:spMkLst>
-        </pc:spChg>
-        <pc:spChg chg="add mod">
-          <ac:chgData name="Mohd Hafizuddin Bin Kamilin (宇部)" userId="dcc12b03-11b8-42c5-b91a-420a12a1d1e2" providerId="ADAL" clId="{C208E6D6-5F29-4ACC-84C5-187E083BCA60}" dt="2026-08-07T14:01:20.019" v="52213" actId="1037"/>
-          <ac:spMkLst>
-            <pc:docMk/>
-            <pc:sldMk cId="2645467627" sldId="378"/>
-            <ac:spMk id="9" creationId="{F8A3559F-6C2F-8D67-E3A6-22411983FBF7}"/>
-          </ac:spMkLst>
-        </pc:spChg>
-      </pc:sldChg>
-      <pc:sldChg chg="addSp delSp modSp new mod modClrScheme modAnim chgLayout">
-        <pc:chgData name="Mohd Hafizuddin Bin Kamilin (宇部)" userId="dcc12b03-11b8-42c5-b91a-420a12a1d1e2" providerId="ADAL" clId="{C208E6D6-5F29-4ACC-84C5-187E083BCA60}" dt="2026-08-07T02:49:52.031" v="52008"/>
-        <pc:sldMkLst>
-          <pc:docMk/>
-          <pc:sldMk cId="2244619802" sldId="379"/>
-        </pc:sldMkLst>
-        <pc:spChg chg="mod ord">
-          <ac:chgData name="Mohd Hafizuddin Bin Kamilin (宇部)" userId="dcc12b03-11b8-42c5-b91a-420a12a1d1e2" providerId="ADAL" clId="{C208E6D6-5F29-4ACC-84C5-187E083BCA60}" dt="2026-08-07T02:36:49.200" v="51827" actId="700"/>
-          <ac:spMkLst>
-            <pc:docMk/>
-            <pc:sldMk cId="2244619802" sldId="379"/>
-            <ac:spMk id="4" creationId="{00843A22-BB90-6792-07BA-A0C48C1C1995}"/>
-          </ac:spMkLst>
-        </pc:spChg>
-        <pc:spChg chg="add mod ord">
-          <ac:chgData name="Mohd Hafizuddin Bin Kamilin (宇部)" userId="dcc12b03-11b8-42c5-b91a-420a12a1d1e2" providerId="ADAL" clId="{C208E6D6-5F29-4ACC-84C5-187E083BCA60}" dt="2026-08-07T02:37:10.841" v="51854" actId="20577"/>
-          <ac:spMkLst>
-            <pc:docMk/>
-            <pc:sldMk cId="2244619802" sldId="379"/>
-            <ac:spMk id="5" creationId="{5EAB012A-9122-B736-548A-4C8AED0509C3}"/>
-          </ac:spMkLst>
-        </pc:spChg>
-        <pc:spChg chg="add mod ord">
-          <ac:chgData name="Mohd Hafizuddin Bin Kamilin (宇部)" userId="dcc12b03-11b8-42c5-b91a-420a12a1d1e2" providerId="ADAL" clId="{C208E6D6-5F29-4ACC-84C5-187E083BCA60}" dt="2026-08-07T02:49:33.801" v="52001" actId="21"/>
-          <ac:spMkLst>
-            <pc:docMk/>
-            <pc:sldMk cId="2244619802" sldId="379"/>
-            <ac:spMk id="6" creationId="{15A0DB5B-B3A7-1710-2E0C-E2E34A82CDDC}"/>
-          </ac:spMkLst>
-        </pc:spChg>
-        <pc:spChg chg="add mod">
-          <ac:chgData name="Mohd Hafizuddin Bin Kamilin (宇部)" userId="dcc12b03-11b8-42c5-b91a-420a12a1d1e2" providerId="ADAL" clId="{C208E6D6-5F29-4ACC-84C5-187E083BCA60}" dt="2026-08-07T02:49:48.111" v="52007" actId="1076"/>
-          <ac:spMkLst>
-            <pc:docMk/>
-            <pc:sldMk cId="2244619802" sldId="379"/>
-            <ac:spMk id="11" creationId="{20981724-3127-FB67-D12E-B7F0A4BE63F1}"/>
-          </ac:spMkLst>
-        </pc:spChg>
-        <pc:picChg chg="add mod">
-          <ac:chgData name="Mohd Hafizuddin Bin Kamilin (宇部)" userId="dcc12b03-11b8-42c5-b91a-420a12a1d1e2" providerId="ADAL" clId="{C208E6D6-5F29-4ACC-84C5-187E083BCA60}" dt="2026-08-07T02:49:27.387" v="51997" actId="1076"/>
-          <ac:picMkLst>
-            <pc:docMk/>
-            <pc:sldMk cId="2244619802" sldId="379"/>
-            <ac:picMk id="10" creationId="{FE9D0E72-2D8C-164B-9BE5-CBFAB825E6F6}"/>
-          </ac:picMkLst>
-        </pc:picChg>
-      </pc:sldChg>
-    </pc:docChg>
-  </pc:docChgLst>
-</pc:chgInfo>
 </file>
 
 <file path=ppt/diagrams/colors1.xml><?xml version="1.0" encoding="utf-8"?>
@@ -4959,17 +3051,17 @@
         <p:spPr>
           <a:xfrm>
             <a:off x="0" y="0"/>
-            <a:ext cx="2971800" cy="458788"/>
+            <a:ext cx="4160520" cy="367030"/>
           </a:xfrm>
           <a:prstGeom prst="rect">
             <a:avLst/>
           </a:prstGeom>
         </p:spPr>
         <p:txBody>
-          <a:bodyPr vert="horz" lIns="91440" tIns="45720" rIns="91440" bIns="45720" rtlCol="0"/>
+          <a:bodyPr vert="horz" lIns="96661" tIns="48331" rIns="96661" bIns="48331" rtlCol="0"/>
           <a:lstStyle>
             <a:lvl1pPr algn="l">
-              <a:defRPr sz="1200"/>
+              <a:defRPr sz="1300"/>
             </a:lvl1pPr>
           </a:lstStyle>
           <a:p>
@@ -4995,24 +3087,24 @@
         </p:nvSpPr>
         <p:spPr>
           <a:xfrm>
-            <a:off x="3884613" y="0"/>
-            <a:ext cx="2971800" cy="458788"/>
+            <a:off x="5438458" y="0"/>
+            <a:ext cx="4160520" cy="367030"/>
           </a:xfrm>
           <a:prstGeom prst="rect">
             <a:avLst/>
           </a:prstGeom>
         </p:spPr>
         <p:txBody>
-          <a:bodyPr vert="horz" lIns="91440" tIns="45720" rIns="91440" bIns="45720" rtlCol="0"/>
+          <a:bodyPr vert="horz" lIns="96661" tIns="48331" rIns="96661" bIns="48331" rtlCol="0"/>
           <a:lstStyle>
             <a:lvl1pPr algn="r">
-              <a:defRPr sz="1200"/>
+              <a:defRPr sz="1300"/>
             </a:lvl1pPr>
           </a:lstStyle>
           <a:p>
             <a:fld id="{0DC994AA-C437-4EF4-8BEF-0B832D7FA420}" type="datetimeFigureOut">
               <a:rPr lang="en-US" smtClean="0"/>
-              <a:t>8/19/2026</a:t>
+              <a:t>10/16/2026</a:t>
             </a:fld>
             <a:endParaRPr lang="en-US" dirty="0"/>
           </a:p>
@@ -5036,18 +3128,18 @@
         </p:nvSpPr>
         <p:spPr>
           <a:xfrm>
-            <a:off x="0" y="8685213"/>
-            <a:ext cx="2971800" cy="458787"/>
+            <a:off x="0" y="6948171"/>
+            <a:ext cx="4160520" cy="367029"/>
           </a:xfrm>
           <a:prstGeom prst="rect">
             <a:avLst/>
           </a:prstGeom>
         </p:spPr>
         <p:txBody>
-          <a:bodyPr vert="horz" lIns="91440" tIns="45720" rIns="91440" bIns="45720" rtlCol="0" anchor="b"/>
+          <a:bodyPr vert="horz" lIns="96661" tIns="48331" rIns="96661" bIns="48331" rtlCol="0" anchor="b"/>
           <a:lstStyle>
             <a:lvl1pPr algn="l">
-              <a:defRPr sz="1200"/>
+              <a:defRPr sz="1300"/>
             </a:lvl1pPr>
           </a:lstStyle>
           <a:p>
@@ -5073,18 +3165,18 @@
         </p:nvSpPr>
         <p:spPr>
           <a:xfrm>
-            <a:off x="3884613" y="8685213"/>
-            <a:ext cx="2971800" cy="458787"/>
+            <a:off x="5438458" y="6948171"/>
+            <a:ext cx="4160520" cy="367029"/>
           </a:xfrm>
           <a:prstGeom prst="rect">
             <a:avLst/>
           </a:prstGeom>
         </p:spPr>
         <p:txBody>
-          <a:bodyPr vert="horz" lIns="91440" tIns="45720" rIns="91440" bIns="45720" rtlCol="0" anchor="b"/>
+          <a:bodyPr vert="horz" lIns="96661" tIns="48331" rIns="96661" bIns="48331" rtlCol="0" anchor="b"/>
           <a:lstStyle>
             <a:lvl1pPr algn="r">
-              <a:defRPr sz="1200"/>
+              <a:defRPr sz="1300"/>
             </a:lvl1pPr>
           </a:lstStyle>
           <a:p>
@@ -5142,17 +3234,17 @@
         <p:spPr>
           <a:xfrm>
             <a:off x="0" y="0"/>
-            <a:ext cx="2971800" cy="458788"/>
+            <a:ext cx="4160520" cy="367030"/>
           </a:xfrm>
           <a:prstGeom prst="rect">
             <a:avLst/>
           </a:prstGeom>
         </p:spPr>
         <p:txBody>
-          <a:bodyPr vert="horz" lIns="91440" tIns="45720" rIns="91440" bIns="45720" rtlCol="0"/>
+          <a:bodyPr vert="horz" lIns="96661" tIns="48331" rIns="96661" bIns="48331" rtlCol="0"/>
           <a:lstStyle>
             <a:lvl1pPr algn="l">
-              <a:defRPr sz="1200"/>
+              <a:defRPr sz="1300"/>
             </a:lvl1pPr>
           </a:lstStyle>
           <a:p>
@@ -5172,24 +3264,24 @@
         </p:nvSpPr>
         <p:spPr>
           <a:xfrm>
-            <a:off x="3884613" y="0"/>
-            <a:ext cx="2971800" cy="458788"/>
+            <a:off x="5438458" y="0"/>
+            <a:ext cx="4160520" cy="367030"/>
           </a:xfrm>
           <a:prstGeom prst="rect">
             <a:avLst/>
           </a:prstGeom>
         </p:spPr>
         <p:txBody>
-          <a:bodyPr vert="horz" lIns="91440" tIns="45720" rIns="91440" bIns="45720" rtlCol="0"/>
+          <a:bodyPr vert="horz" lIns="96661" tIns="48331" rIns="96661" bIns="48331" rtlCol="0"/>
           <a:lstStyle>
             <a:lvl1pPr algn="r">
-              <a:defRPr sz="1200"/>
+              <a:defRPr sz="1300"/>
             </a:lvl1pPr>
           </a:lstStyle>
           <a:p>
             <a:fld id="{FB20CE03-6C3A-EB4D-A9B1-7EFD38B58412}" type="datetimeFigureOut">
               <a:rPr lang="en-US" smtClean="0"/>
-              <a:t>8/19/2026</a:t>
+              <a:t>10/16/2026</a:t>
             </a:fld>
             <a:endParaRPr lang="en-US" dirty="0"/>
           </a:p>
@@ -5207,8 +3299,8 @@
         </p:nvSpPr>
         <p:spPr>
           <a:xfrm>
-            <a:off x="1371600" y="1143000"/>
-            <a:ext cx="4114800" cy="3086100"/>
+            <a:off x="3154363" y="914400"/>
+            <a:ext cx="3292475" cy="2468563"/>
           </a:xfrm>
           <a:prstGeom prst="rect">
             <a:avLst/>
@@ -5221,7 +3313,7 @@
           </a:ln>
         </p:spPr>
         <p:txBody>
-          <a:bodyPr vert="horz" lIns="91440" tIns="45720" rIns="91440" bIns="45720" rtlCol="0" anchor="ctr"/>
+          <a:bodyPr vert="horz" lIns="96661" tIns="48331" rIns="96661" bIns="48331" rtlCol="0" anchor="ctr"/>
           <a:lstStyle/>
           <a:p>
             <a:endParaRPr lang="en-US" dirty="0"/>
@@ -5240,15 +3332,15 @@
         </p:nvSpPr>
         <p:spPr>
           <a:xfrm>
-            <a:off x="685800" y="4400550"/>
-            <a:ext cx="5486400" cy="3600450"/>
+            <a:off x="960120" y="3520440"/>
+            <a:ext cx="7680960" cy="2880360"/>
           </a:xfrm>
           <a:prstGeom prst="rect">
             <a:avLst/>
           </a:prstGeom>
         </p:spPr>
         <p:txBody>
-          <a:bodyPr vert="horz" lIns="91440" tIns="45720" rIns="91440" bIns="45720" rtlCol="0"/>
+          <a:bodyPr vert="horz" lIns="96661" tIns="48331" rIns="96661" bIns="48331" rtlCol="0"/>
           <a:lstStyle/>
           <a:p>
             <a:pPr lvl="0"/>
@@ -5299,18 +3391,18 @@
         </p:nvSpPr>
         <p:spPr>
           <a:xfrm>
-            <a:off x="0" y="8685213"/>
-            <a:ext cx="2971800" cy="458787"/>
+            <a:off x="0" y="6948171"/>
+            <a:ext cx="4160520" cy="367029"/>
           </a:xfrm>
           <a:prstGeom prst="rect">
             <a:avLst/>
           </a:prstGeom>
         </p:spPr>
         <p:txBody>
-          <a:bodyPr vert="horz" lIns="91440" tIns="45720" rIns="91440" bIns="45720" rtlCol="0" anchor="b"/>
+          <a:bodyPr vert="horz" lIns="96661" tIns="48331" rIns="96661" bIns="48331" rtlCol="0" anchor="b"/>
           <a:lstStyle>
             <a:lvl1pPr algn="l">
-              <a:defRPr sz="1200"/>
+              <a:defRPr sz="1300"/>
             </a:lvl1pPr>
           </a:lstStyle>
           <a:p>
@@ -5330,18 +3422,18 @@
         </p:nvSpPr>
         <p:spPr>
           <a:xfrm>
-            <a:off x="3884613" y="8685213"/>
-            <a:ext cx="2971800" cy="458787"/>
+            <a:off x="5438458" y="6948171"/>
+            <a:ext cx="4160520" cy="367029"/>
           </a:xfrm>
           <a:prstGeom prst="rect">
             <a:avLst/>
           </a:prstGeom>
         </p:spPr>
         <p:txBody>
-          <a:bodyPr vert="horz" lIns="91440" tIns="45720" rIns="91440" bIns="45720" rtlCol="0" anchor="b"/>
+          <a:bodyPr vert="horz" lIns="96661" tIns="48331" rIns="96661" bIns="48331" rtlCol="0" anchor="b"/>
           <a:lstStyle>
             <a:lvl1pPr algn="r">
-              <a:defRPr sz="1200"/>
+              <a:defRPr sz="1300"/>
             </a:lvl1pPr>
           </a:lstStyle>
           <a:p>
@@ -5501,30 +3593,30 @@
           <a:lstStyle/>
           <a:p>
             <a:r>
-              <a:rPr lang="ja-JP" altLang="en-US" sz="1200" dirty="0"/>
+              <a:rPr lang="ja-JP" altLang="en-US" sz="1300" dirty="0"/>
               <a:t>題材</a:t>
             </a:r>
             <a:r>
-              <a:rPr lang="en-US" altLang="ja-JP" sz="1200" dirty="0"/>
+              <a:rPr lang="en-US" altLang="ja-JP" sz="1300" dirty="0"/>
               <a:t>=</a:t>
             </a:r>
             <a:r>
-              <a:rPr lang="ja-JP" altLang="en-US" sz="1200" dirty="0"/>
+              <a:rPr lang="ja-JP" altLang="en-US" sz="1300" dirty="0"/>
               <a:t>だいざい</a:t>
             </a:r>
-            <a:endParaRPr lang="en-US" altLang="ja-JP" sz="1200" dirty="0"/>
+            <a:endParaRPr lang="en-US" altLang="ja-JP" sz="1300" dirty="0"/>
           </a:p>
           <a:p>
             <a:r>
-              <a:rPr lang="ja-JP" altLang="en-US" sz="1200" dirty="0"/>
+              <a:rPr lang="ja-JP" altLang="en-US" sz="1300" dirty="0"/>
               <a:t>試行錯誤</a:t>
             </a:r>
             <a:r>
-              <a:rPr lang="en-US" altLang="ja-JP" sz="1200" dirty="0"/>
+              <a:rPr lang="en-US" altLang="ja-JP" sz="1300" dirty="0"/>
               <a:t>=</a:t>
             </a:r>
             <a:r>
-              <a:rPr lang="ja-JP" altLang="en-US" sz="1200" dirty="0"/>
+              <a:rPr lang="ja-JP" altLang="en-US" sz="1300" dirty="0"/>
               <a:t>しこうさくご</a:t>
             </a:r>
             <a:endParaRPr lang="en-US" dirty="0"/>
@@ -5995,13 +4087,8 @@
                 <a14:m>
                   <m:oMath xmlns:m="http://schemas.openxmlformats.org/officeDocument/2006/math">
                     <m:r>
-                      <a:rPr lang="en-US" sz="1200" i="1" kern="1200">
-                        <a:solidFill>
-                          <a:schemeClr val="tx1"/>
-                        </a:solidFill>
+                      <a:rPr lang="en-US" sz="1300" i="1">
                         <a:latin typeface="Cambria Math" panose="02040503050406030204" pitchFamily="18" charset="0"/>
-                        <a:ea typeface="+mn-ea"/>
-                        <a:cs typeface="+mn-cs"/>
                       </a:rPr>
                       <m:t>𝛼</m:t>
                     </m:r>
@@ -6031,49 +4118,29 @@
                     <m:sSub>
                       <m:sSubPr>
                         <m:ctrlPr>
-                          <a:rPr lang="en-US" sz="1200" i="1" kern="1200">
-                            <a:solidFill>
-                              <a:schemeClr val="tx1"/>
-                            </a:solidFill>
+                          <a:rPr lang="en-US" sz="1300" i="1">
                             <a:latin typeface="Cambria Math" panose="02040503050406030204" pitchFamily="18" charset="0"/>
-                            <a:ea typeface="+mn-ea"/>
-                            <a:cs typeface="+mn-cs"/>
                           </a:rPr>
                         </m:ctrlPr>
                       </m:sSubPr>
                       <m:e>
                         <m:r>
-                          <a:rPr lang="en-US" sz="1200" i="1" kern="1200">
-                            <a:solidFill>
-                              <a:schemeClr val="tx1"/>
-                            </a:solidFill>
+                          <a:rPr lang="en-US" sz="1300" i="1">
                             <a:latin typeface="Cambria Math" panose="02040503050406030204" pitchFamily="18" charset="0"/>
-                            <a:ea typeface="+mn-ea"/>
-                            <a:cs typeface="+mn-cs"/>
                           </a:rPr>
                           <m:t>𝑟</m:t>
                         </m:r>
                       </m:e>
                       <m:sub>
                         <m:r>
-                          <a:rPr lang="en-US" sz="1200" i="1" kern="1200">
-                            <a:solidFill>
-                              <a:schemeClr val="tx1"/>
-                            </a:solidFill>
+                          <a:rPr lang="en-US" sz="1300" i="1">
                             <a:latin typeface="Cambria Math" panose="02040503050406030204" pitchFamily="18" charset="0"/>
-                            <a:ea typeface="+mn-ea"/>
-                            <a:cs typeface="+mn-cs"/>
                           </a:rPr>
                           <m:t>𝑡</m:t>
                         </m:r>
                         <m:r>
-                          <a:rPr lang="en-US" sz="1200" i="0" kern="1200">
-                            <a:solidFill>
-                              <a:schemeClr val="tx1"/>
-                            </a:solidFill>
+                          <a:rPr lang="en-US" sz="1300">
                             <a:latin typeface="Cambria Math" panose="02040503050406030204" pitchFamily="18" charset="0"/>
-                            <a:ea typeface="+mn-ea"/>
-                            <a:cs typeface="+mn-cs"/>
                           </a:rPr>
                           <m:t>+1</m:t>
                         </m:r>
@@ -6099,13 +4166,8 @@
                 <a14:m>
                   <m:oMath xmlns:m="http://schemas.openxmlformats.org/officeDocument/2006/math">
                     <m:r>
-                      <a:rPr lang="en-US" sz="1200" i="1" kern="1200">
-                        <a:solidFill>
-                          <a:schemeClr val="tx1"/>
-                        </a:solidFill>
+                      <a:rPr lang="en-US" sz="1300" i="1">
                         <a:latin typeface="Cambria Math" panose="02040503050406030204" pitchFamily="18" charset="0"/>
-                        <a:ea typeface="+mn-ea"/>
-                        <a:cs typeface="+mn-cs"/>
                       </a:rPr>
                       <m:t>𝛾</m:t>
                     </m:r>
@@ -6135,13 +4197,8 @@
                     <m:sSub>
                       <m:sSubPr>
                         <m:ctrlPr>
-                          <a:rPr lang="en-US" sz="1200" kern="1200">
-                            <a:solidFill>
-                              <a:schemeClr val="tx1"/>
-                            </a:solidFill>
+                          <a:rPr lang="en-US" sz="1300">
                             <a:latin typeface="Cambria Math" panose="02040503050406030204" pitchFamily="18" charset="0"/>
-                            <a:ea typeface="+mn-ea"/>
-                            <a:cs typeface="+mn-cs"/>
                           </a:rPr>
                         </m:ctrlPr>
                       </m:sSubPr>
@@ -6150,13 +4207,8 @@
                           <m:rPr>
                             <m:sty m:val="p"/>
                           </m:rPr>
-                          <a:rPr lang="en-US" sz="1200" kern="1200">
-                            <a:solidFill>
-                              <a:schemeClr val="tx1"/>
-                            </a:solidFill>
+                          <a:rPr lang="en-US" sz="1300">
                             <a:latin typeface="Cambria Math" panose="02040503050406030204" pitchFamily="18" charset="0"/>
-                            <a:ea typeface="+mn-ea"/>
-                            <a:cs typeface="+mn-cs"/>
                           </a:rPr>
                           <m:t>max</m:t>
                         </m:r>
@@ -6165,38 +4217,23 @@
                         <m:sSup>
                           <m:sSupPr>
                             <m:ctrlPr>
-                              <a:rPr lang="en-US" sz="1200" i="1" kern="1200">
-                                <a:solidFill>
-                                  <a:schemeClr val="tx1"/>
-                                </a:solidFill>
+                              <a:rPr lang="en-US" sz="1300" i="1">
                                 <a:latin typeface="Cambria Math" panose="02040503050406030204" pitchFamily="18" charset="0"/>
-                                <a:ea typeface="+mn-ea"/>
-                                <a:cs typeface="+mn-cs"/>
                               </a:rPr>
                             </m:ctrlPr>
                           </m:sSupPr>
                           <m:e>
                             <m:r>
-                              <a:rPr lang="en-US" sz="1200" i="1" kern="1200">
-                                <a:solidFill>
-                                  <a:schemeClr val="tx1"/>
-                                </a:solidFill>
+                              <a:rPr lang="en-US" sz="1300" i="1">
                                 <a:latin typeface="Cambria Math" panose="02040503050406030204" pitchFamily="18" charset="0"/>
-                                <a:ea typeface="+mn-ea"/>
-                                <a:cs typeface="+mn-cs"/>
                               </a:rPr>
                               <m:t>𝑎</m:t>
                             </m:r>
                           </m:e>
                           <m:sup>
                             <m:r>
-                              <a:rPr lang="en-US" sz="1200" i="0" kern="1200">
-                                <a:solidFill>
-                                  <a:schemeClr val="tx1"/>
-                                </a:solidFill>
+                              <a:rPr lang="en-US" sz="1300">
                                 <a:latin typeface="Cambria Math" panose="02040503050406030204" pitchFamily="18" charset="0"/>
-                                <a:ea typeface="+mn-ea"/>
-                                <a:cs typeface="+mn-cs"/>
                               </a:rPr>
                               <m:t>′</m:t>
                             </m:r>
@@ -6205,13 +4242,8 @@
                       </m:sub>
                     </m:sSub>
                     <m:r>
-                      <a:rPr lang="en-US" sz="1200" i="1" kern="1200">
-                        <a:solidFill>
-                          <a:schemeClr val="tx1"/>
-                        </a:solidFill>
+                      <a:rPr lang="en-US" sz="1300" i="1">
                         <a:latin typeface="Cambria Math" panose="02040503050406030204" pitchFamily="18" charset="0"/>
-                        <a:ea typeface="+mn-ea"/>
-                        <a:cs typeface="+mn-cs"/>
                       </a:rPr>
                       <m:t>𝑄</m:t>
                     </m:r>
@@ -6219,13 +4251,8 @@
                       <m:dPr>
                         <m:sepChr m:val=","/>
                         <m:ctrlPr>
-                          <a:rPr lang="en-US" sz="1200" i="1" kern="1200">
-                            <a:solidFill>
-                              <a:schemeClr val="tx1"/>
-                            </a:solidFill>
+                          <a:rPr lang="en-US" sz="1300" i="1">
                             <a:latin typeface="Cambria Math" panose="02040503050406030204" pitchFamily="18" charset="0"/>
-                            <a:ea typeface="+mn-ea"/>
-                            <a:cs typeface="+mn-cs"/>
                           </a:rPr>
                         </m:ctrlPr>
                       </m:dPr>
@@ -6233,49 +4260,29 @@
                         <m:sSub>
                           <m:sSubPr>
                             <m:ctrlPr>
-                              <a:rPr lang="en-US" sz="1200" i="1" kern="1200">
-                                <a:solidFill>
-                                  <a:schemeClr val="tx1"/>
-                                </a:solidFill>
+                              <a:rPr lang="en-US" sz="1300" i="1">
                                 <a:latin typeface="Cambria Math" panose="02040503050406030204" pitchFamily="18" charset="0"/>
-                                <a:ea typeface="+mn-ea"/>
-                                <a:cs typeface="+mn-cs"/>
                               </a:rPr>
                             </m:ctrlPr>
                           </m:sSubPr>
                           <m:e>
                             <m:r>
-                              <a:rPr lang="en-US" sz="1200" i="1" kern="1200">
-                                <a:solidFill>
-                                  <a:schemeClr val="tx1"/>
-                                </a:solidFill>
+                              <a:rPr lang="en-US" sz="1300" i="1">
                                 <a:latin typeface="Cambria Math" panose="02040503050406030204" pitchFamily="18" charset="0"/>
-                                <a:ea typeface="+mn-ea"/>
-                                <a:cs typeface="+mn-cs"/>
                               </a:rPr>
                               <m:t>𝑠</m:t>
                             </m:r>
                           </m:e>
                           <m:sub>
                             <m:r>
-                              <a:rPr lang="en-US" sz="1200" i="1" kern="1200">
-                                <a:solidFill>
-                                  <a:schemeClr val="tx1"/>
-                                </a:solidFill>
+                              <a:rPr lang="en-US" sz="1300" i="1">
                                 <a:latin typeface="Cambria Math" panose="02040503050406030204" pitchFamily="18" charset="0"/>
-                                <a:ea typeface="+mn-ea"/>
-                                <a:cs typeface="+mn-cs"/>
                               </a:rPr>
                               <m:t>𝑡</m:t>
                             </m:r>
                             <m:r>
-                              <a:rPr lang="en-US" sz="1200" i="0" kern="1200">
-                                <a:solidFill>
-                                  <a:schemeClr val="tx1"/>
-                                </a:solidFill>
+                              <a:rPr lang="en-US" sz="1300">
                                 <a:latin typeface="Cambria Math" panose="02040503050406030204" pitchFamily="18" charset="0"/>
-                                <a:ea typeface="+mn-ea"/>
-                                <a:cs typeface="+mn-cs"/>
                               </a:rPr>
                               <m:t>+1</m:t>
                             </m:r>
@@ -6286,38 +4293,23 @@
                         <m:sSup>
                           <m:sSupPr>
                             <m:ctrlPr>
-                              <a:rPr lang="en-US" sz="1200" i="1" kern="1200">
-                                <a:solidFill>
-                                  <a:schemeClr val="tx1"/>
-                                </a:solidFill>
+                              <a:rPr lang="en-US" sz="1300" i="1">
                                 <a:latin typeface="Cambria Math" panose="02040503050406030204" pitchFamily="18" charset="0"/>
-                                <a:ea typeface="+mn-ea"/>
-                                <a:cs typeface="+mn-cs"/>
                               </a:rPr>
                             </m:ctrlPr>
                           </m:sSupPr>
                           <m:e>
                             <m:r>
-                              <a:rPr lang="en-US" sz="1200" i="1" kern="1200">
-                                <a:solidFill>
-                                  <a:schemeClr val="tx1"/>
-                                </a:solidFill>
+                              <a:rPr lang="en-US" sz="1300" i="1">
                                 <a:latin typeface="Cambria Math" panose="02040503050406030204" pitchFamily="18" charset="0"/>
-                                <a:ea typeface="+mn-ea"/>
-                                <a:cs typeface="+mn-cs"/>
                               </a:rPr>
                               <m:t>𝑎</m:t>
                             </m:r>
                           </m:e>
                           <m:sup>
                             <m:r>
-                              <a:rPr lang="en-US" sz="1200" i="0" kern="1200">
-                                <a:solidFill>
-                                  <a:schemeClr val="tx1"/>
-                                </a:solidFill>
+                              <a:rPr lang="en-US" sz="1300">
                                 <a:latin typeface="Cambria Math" panose="02040503050406030204" pitchFamily="18" charset="0"/>
-                                <a:ea typeface="+mn-ea"/>
-                                <a:cs typeface="+mn-cs"/>
                               </a:rPr>
                               <m:t>′</m:t>
                             </m:r>
@@ -6353,13 +4345,8 @@
                 <a14:m>
                   <m:oMath xmlns:m="http://schemas.openxmlformats.org/officeDocument/2006/math">
                     <m:r>
-                      <a:rPr lang="en-US" sz="1200" i="1" kern="1200">
-                        <a:solidFill>
-                          <a:schemeClr val="tx1"/>
-                        </a:solidFill>
+                      <a:rPr lang="en-US" sz="1300" i="1">
                         <a:latin typeface="Cambria Math" panose="02040503050406030204" pitchFamily="18" charset="0"/>
-                        <a:ea typeface="+mn-ea"/>
-                        <a:cs typeface="+mn-cs"/>
                       </a:rPr>
                       <m:t>𝑄</m:t>
                     </m:r>
@@ -6367,13 +4354,8 @@
                       <m:dPr>
                         <m:sepChr m:val=","/>
                         <m:ctrlPr>
-                          <a:rPr lang="en-US" sz="1200" i="1" kern="1200">
-                            <a:solidFill>
-                              <a:schemeClr val="tx1"/>
-                            </a:solidFill>
+                          <a:rPr lang="en-US" sz="1300" i="1">
                             <a:latin typeface="Cambria Math" panose="02040503050406030204" pitchFamily="18" charset="0"/>
-                            <a:ea typeface="+mn-ea"/>
-                            <a:cs typeface="+mn-cs"/>
                           </a:rPr>
                         </m:ctrlPr>
                       </m:dPr>
@@ -6381,38 +4363,23 @@
                         <m:sSub>
                           <m:sSubPr>
                             <m:ctrlPr>
-                              <a:rPr lang="en-US" sz="1200" i="1" kern="1200">
-                                <a:solidFill>
-                                  <a:schemeClr val="tx1"/>
-                                </a:solidFill>
+                              <a:rPr lang="en-US" sz="1300" i="1">
                                 <a:latin typeface="Cambria Math" panose="02040503050406030204" pitchFamily="18" charset="0"/>
-                                <a:ea typeface="+mn-ea"/>
-                                <a:cs typeface="+mn-cs"/>
                               </a:rPr>
                             </m:ctrlPr>
                           </m:sSubPr>
                           <m:e>
                             <m:r>
-                              <a:rPr lang="en-US" sz="1200" i="1" kern="1200">
-                                <a:solidFill>
-                                  <a:schemeClr val="tx1"/>
-                                </a:solidFill>
+                              <a:rPr lang="en-US" sz="1300" i="1">
                                 <a:latin typeface="Cambria Math" panose="02040503050406030204" pitchFamily="18" charset="0"/>
-                                <a:ea typeface="+mn-ea"/>
-                                <a:cs typeface="+mn-cs"/>
                               </a:rPr>
                               <m:t>𝑠</m:t>
                             </m:r>
                           </m:e>
                           <m:sub>
                             <m:r>
-                              <a:rPr lang="en-US" sz="1200" i="1" kern="1200">
-                                <a:solidFill>
-                                  <a:schemeClr val="tx1"/>
-                                </a:solidFill>
+                              <a:rPr lang="en-US" sz="1300" i="1">
                                 <a:latin typeface="Cambria Math" panose="02040503050406030204" pitchFamily="18" charset="0"/>
-                                <a:ea typeface="+mn-ea"/>
-                                <a:cs typeface="+mn-cs"/>
                               </a:rPr>
                               <m:t>𝑡</m:t>
                             </m:r>
@@ -6423,38 +4390,23 @@
                         <m:sSub>
                           <m:sSubPr>
                             <m:ctrlPr>
-                              <a:rPr lang="en-US" sz="1200" i="1" kern="1200">
-                                <a:solidFill>
-                                  <a:schemeClr val="tx1"/>
-                                </a:solidFill>
+                              <a:rPr lang="en-US" sz="1300" i="1">
                                 <a:latin typeface="Cambria Math" panose="02040503050406030204" pitchFamily="18" charset="0"/>
-                                <a:ea typeface="+mn-ea"/>
-                                <a:cs typeface="+mn-cs"/>
                               </a:rPr>
                             </m:ctrlPr>
                           </m:sSubPr>
                           <m:e>
                             <m:r>
-                              <a:rPr lang="en-US" sz="1200" i="1" kern="1200">
-                                <a:solidFill>
-                                  <a:schemeClr val="tx1"/>
-                                </a:solidFill>
+                              <a:rPr lang="en-US" sz="1300" i="1">
                                 <a:latin typeface="Cambria Math" panose="02040503050406030204" pitchFamily="18" charset="0"/>
-                                <a:ea typeface="+mn-ea"/>
-                                <a:cs typeface="+mn-cs"/>
                               </a:rPr>
                               <m:t>𝑎</m:t>
                             </m:r>
                           </m:e>
                           <m:sub>
                             <m:r>
-                              <a:rPr lang="en-US" sz="1200" i="1" kern="1200">
-                                <a:solidFill>
-                                  <a:schemeClr val="tx1"/>
-                                </a:solidFill>
+                              <a:rPr lang="en-US" sz="1300" i="1">
                                 <a:latin typeface="Cambria Math" panose="02040503050406030204" pitchFamily="18" charset="0"/>
-                                <a:ea typeface="+mn-ea"/>
-                                <a:cs typeface="+mn-cs"/>
                               </a:rPr>
                               <m:t>𝑡</m:t>
                             </m:r>
@@ -6681,7 +4633,7 @@
           <a:p>
             <a:fld id="{8B57D50D-BAA9-464B-B391-243138E078D8}" type="slidenum">
               <a:rPr lang="en-US" smtClean="0"/>
-              <a:t>17</a:t>
+              <a:t>16</a:t>
             </a:fld>
             <a:endParaRPr lang="en-US" dirty="0"/>
           </a:p>
@@ -6769,7 +4721,7 @@
           <a:p>
             <a:fld id="{8B57D50D-BAA9-464B-B391-243138E078D8}" type="slidenum">
               <a:rPr lang="en-US" smtClean="0"/>
-              <a:t>19</a:t>
+              <a:t>18</a:t>
             </a:fld>
             <a:endParaRPr lang="en-US" dirty="0"/>
           </a:p>
@@ -17729,8 +15681,16 @@
           <a:lstStyle/>
           <a:p>
             <a:r>
-              <a:rPr lang="ja-JP" altLang="en-US"/>
-              <a:t>第１回オープンキャンパス</a:t>
+              <a:rPr lang="ja-JP" altLang="en-US" dirty="0"/>
+              <a:t>第</a:t>
+            </a:r>
+            <a:r>
+              <a:rPr lang="en-US" altLang="ja-JP" dirty="0"/>
+              <a:t>2</a:t>
+            </a:r>
+            <a:r>
+              <a:rPr lang="ja-JP" altLang="en-US" dirty="0"/>
+              <a:t>回オープンキャンパス</a:t>
             </a:r>
             <a:endParaRPr lang="en-US" dirty="0"/>
           </a:p>
@@ -18992,6 +16952,64 @@
           </a:prstGeom>
         </p:spPr>
       </p:pic>
+      <p:sp>
+        <p:nvSpPr>
+          <p:cNvPr id="5" name="Star: 8 Points 4">
+            <a:extLst>
+              <a:ext uri="{FF2B5EF4-FFF2-40B4-BE49-F238E27FC236}">
+                <a16:creationId xmlns:a16="http://schemas.microsoft.com/office/drawing/2014/main" id="{7FDD617C-FFAE-59C9-22B8-12C666642937}"/>
+              </a:ext>
+            </a:extLst>
+          </p:cNvPr>
+          <p:cNvSpPr/>
+          <p:nvPr/>
+        </p:nvSpPr>
+        <p:spPr>
+          <a:xfrm>
+            <a:off x="6093311" y="5273739"/>
+            <a:ext cx="2438400" cy="914400"/>
+          </a:xfrm>
+          <a:prstGeom prst="star8">
+            <a:avLst/>
+          </a:prstGeom>
+        </p:spPr>
+        <p:style>
+          <a:lnRef idx="2">
+            <a:schemeClr val="accent1">
+              <a:shade val="15000"/>
+            </a:schemeClr>
+          </a:lnRef>
+          <a:fillRef idx="1">
+            <a:schemeClr val="accent1"/>
+          </a:fillRef>
+          <a:effectRef idx="0">
+            <a:schemeClr val="accent1"/>
+          </a:effectRef>
+          <a:fontRef idx="minor">
+            <a:schemeClr val="lt1"/>
+          </a:fontRef>
+        </p:style>
+        <p:txBody>
+          <a:bodyPr rtlCol="0" anchor="ctr"/>
+          <a:lstStyle/>
+          <a:p>
+            <a:pPr algn="ctr"/>
+            <a:r>
+              <a:rPr lang="ja-JP" altLang="en-US" dirty="0"/>
+              <a:t>最大</a:t>
+            </a:r>
+            <a:r>
+              <a:rPr lang="en-US" altLang="ja-JP" dirty="0"/>
+              <a:t>40</a:t>
+            </a:r>
+            <a:r>
+              <a:rPr lang="ja-JP" altLang="en-US" dirty="0"/>
+              <a:t>点</a:t>
+            </a:r>
+            <a:endParaRPr lang="en-US" dirty="0"/>
+          </a:p>
+        </p:txBody>
+      </p:sp>
     </p:spTree>
     <p:extLst>
       <p:ext uri="{BB962C8B-B14F-4D97-AF65-F5344CB8AC3E}">
@@ -19114,6 +17132,59 @@
                       </p:childTnLst>
                     </p:cTn>
                   </p:par>
+                  <p:par>
+                    <p:cTn id="11" fill="hold">
+                      <p:stCondLst>
+                        <p:cond delay="indefinite"/>
+                      </p:stCondLst>
+                      <p:childTnLst>
+                        <p:par>
+                          <p:cTn id="12" fill="hold">
+                            <p:stCondLst>
+                              <p:cond delay="0"/>
+                            </p:stCondLst>
+                            <p:childTnLst>
+                              <p:par>
+                                <p:cTn id="13" presetID="10" presetClass="entr" presetSubtype="0" fill="hold" grpId="0" nodeType="clickEffect">
+                                  <p:stCondLst>
+                                    <p:cond delay="0"/>
+                                  </p:stCondLst>
+                                  <p:childTnLst>
+                                    <p:set>
+                                      <p:cBhvr>
+                                        <p:cTn id="14" dur="1" fill="hold">
+                                          <p:stCondLst>
+                                            <p:cond delay="0"/>
+                                          </p:stCondLst>
+                                        </p:cTn>
+                                        <p:tgtEl>
+                                          <p:spTgt spid="5"/>
+                                        </p:tgtEl>
+                                        <p:attrNameLst>
+                                          <p:attrName>style.visibility</p:attrName>
+                                        </p:attrNameLst>
+                                      </p:cBhvr>
+                                      <p:to>
+                                        <p:strVal val="visible"/>
+                                      </p:to>
+                                    </p:set>
+                                    <p:animEffect transition="in" filter="fade">
+                                      <p:cBhvr>
+                                        <p:cTn id="15" dur="500"/>
+                                        <p:tgtEl>
+                                          <p:spTgt spid="5"/>
+                                        </p:tgtEl>
+                                      </p:cBhvr>
+                                    </p:animEffect>
+                                  </p:childTnLst>
+                                </p:cTn>
+                              </p:par>
+                            </p:childTnLst>
+                          </p:cTn>
+                        </p:par>
+                      </p:childTnLst>
+                    </p:cTn>
+                  </p:par>
                 </p:childTnLst>
               </p:cTn>
               <p:prevCondLst>
@@ -19135,6 +17206,9 @@
         </p:cTn>
       </p:par>
     </p:tnLst>
+    <p:bldLst>
+      <p:bldP spid="5" grpId="0" animBg="1"/>
+    </p:bldLst>
   </p:timing>
 </p:sld>
 </file>
@@ -19312,7 +17386,7 @@
           <p:nvPr>
             <p:extLst>
               <p:ext uri="{D42A27DB-BD31-4B8C-83A1-F6EECF244321}">
-                <p14:modId xmlns:p14="http://schemas.microsoft.com/office/powerpoint/2010/main" val="2271569277"/>
+                <p14:modId xmlns:p14="http://schemas.microsoft.com/office/powerpoint/2010/main" val="3272816921"/>
               </p:ext>
             </p:extLst>
           </p:nvPr>
@@ -19840,6 +17914,18 @@
                       <a:pPr algn="ctr" fontAlgn="b">
                         <a:buNone/>
                       </a:pPr>
+                      <a:r>
+                        <a:rPr lang="ja-JP" altLang="en-US" sz="2400" b="0" i="0" u="none" strike="noStrike" dirty="0">
+                          <a:solidFill>
+                            <a:schemeClr val="bg1">
+                              <a:lumMod val="50000"/>
+                            </a:schemeClr>
+                          </a:solidFill>
+                          <a:effectLst/>
+                          <a:latin typeface="Aptos Narrow" panose="020B0004020202020204" pitchFamily="34" charset="0"/>
+                        </a:rPr>
+                        <a:t>〇</a:t>
+                      </a:r>
                       <a:endParaRPr lang="en-US" sz="2400" b="0" i="0" u="none" strike="noStrike" dirty="0">
                         <a:solidFill>
                           <a:schemeClr val="bg1">
@@ -19895,40 +17981,12 @@
                     <a:bodyPr/>
                     <a:lstStyle/>
                     <a:p>
-                      <a:pPr marL="0" marR="0" lvl="0" indent="0" algn="ctr" defTabSz="685800" rtl="0" eaLnBrk="1" fontAlgn="b" latinLnBrk="0" hangingPunct="1">
-                        <a:lnSpc>
-                          <a:spcPct val="100000"/>
-                        </a:lnSpc>
-                        <a:spcBef>
-                          <a:spcPts val="0"/>
-                        </a:spcBef>
-                        <a:spcAft>
-                          <a:spcPts val="0"/>
-                        </a:spcAft>
-                        <a:buClrTx/>
-                        <a:buSzTx/>
-                        <a:buFontTx/>
+                      <a:pPr algn="ctr" fontAlgn="b">
                         <a:buNone/>
-                        <a:tabLst/>
-                        <a:defRPr/>
                       </a:pPr>
-                      <a:r>
-                        <a:rPr lang="ja-JP" altLang="en-US" sz="2400" b="0" i="0" u="none" strike="noStrike" dirty="0">
-                          <a:solidFill>
-                            <a:schemeClr val="bg1">
-                              <a:lumMod val="50000"/>
-                            </a:schemeClr>
-                          </a:solidFill>
-                          <a:effectLst/>
-                          <a:latin typeface="Aptos Narrow" panose="020B0004020202020204" pitchFamily="34" charset="0"/>
-                        </a:rPr>
-                        <a:t>〇</a:t>
-                      </a:r>
                       <a:endParaRPr lang="en-US" sz="2400" b="0" i="0" u="none" strike="noStrike" dirty="0">
                         <a:solidFill>
-                          <a:schemeClr val="bg1">
-                            <a:lumMod val="50000"/>
-                          </a:schemeClr>
+                          <a:srgbClr val="000000"/>
                         </a:solidFill>
                         <a:effectLst/>
                         <a:latin typeface="Aptos Narrow" panose="020B0004020202020204" pitchFamily="34" charset="0"/>
@@ -22644,4300 +20702,6 @@
         <p:cNvPr id="1" name="">
           <a:extLst>
             <a:ext uri="{FF2B5EF4-FFF2-40B4-BE49-F238E27FC236}">
-              <a16:creationId xmlns:a16="http://schemas.microsoft.com/office/drawing/2014/main" id="{13C97D3C-3475-2C94-7013-992B6CA8E7CF}"/>
-            </a:ext>
-          </a:extLst>
-        </p:cNvPr>
-        <p:cNvGrpSpPr/>
-        <p:nvPr/>
-      </p:nvGrpSpPr>
-      <p:grpSpPr>
-        <a:xfrm>
-          <a:off x="0" y="0"/>
-          <a:ext cx="0" cy="0"/>
-          <a:chOff x="0" y="0"/>
-          <a:chExt cx="0" cy="0"/>
-        </a:xfrm>
-      </p:grpSpPr>
-      <p:sp>
-        <p:nvSpPr>
-          <p:cNvPr id="2" name="Text Placeholder 1">
-            <a:extLst>
-              <a:ext uri="{FF2B5EF4-FFF2-40B4-BE49-F238E27FC236}">
-                <a16:creationId xmlns:a16="http://schemas.microsoft.com/office/drawing/2014/main" id="{ED8BE9CC-6CEC-EDED-1097-DDF7694F8603}"/>
-              </a:ext>
-            </a:extLst>
-          </p:cNvPr>
-          <p:cNvSpPr>
-            <a:spLocks noGrp="1"/>
-          </p:cNvSpPr>
-          <p:nvPr>
-            <p:ph type="body" sz="quarter" idx="11"/>
-          </p:nvPr>
-        </p:nvSpPr>
-        <p:spPr/>
-        <p:txBody>
-          <a:bodyPr/>
-          <a:lstStyle/>
-          <a:p>
-            <a:r>
-              <a:rPr lang="en-US" dirty="0"/>
-              <a:t>2-4 </a:t>
-            </a:r>
-            <a:r>
-              <a:rPr lang="en-US" altLang="ja-JP" dirty="0"/>
-              <a:t>Q</a:t>
-            </a:r>
-            <a:r>
-              <a:rPr lang="ja-JP" altLang="en-US" dirty="0"/>
-              <a:t>テーブルを埋めてみよう！（</a:t>
-            </a:r>
-            <a:r>
-              <a:rPr lang="ja-JP" altLang="en-US" dirty="0">
-                <a:solidFill>
-                  <a:srgbClr val="FF0000"/>
-                </a:solidFill>
-              </a:rPr>
-              <a:t>非最適</a:t>
-            </a:r>
-            <a:r>
-              <a:rPr lang="ja-JP" altLang="en-US" dirty="0"/>
-              <a:t>の記入例）</a:t>
-            </a:r>
-            <a:endParaRPr lang="en-US" dirty="0"/>
-          </a:p>
-        </p:txBody>
-      </p:sp>
-      <p:sp>
-        <p:nvSpPr>
-          <p:cNvPr id="3" name="Text Placeholder 2">
-            <a:extLst>
-              <a:ext uri="{FF2B5EF4-FFF2-40B4-BE49-F238E27FC236}">
-                <a16:creationId xmlns:a16="http://schemas.microsoft.com/office/drawing/2014/main" id="{DCF46D47-3F75-3AFC-F17F-85585E002EB6}"/>
-              </a:ext>
-            </a:extLst>
-          </p:cNvPr>
-          <p:cNvSpPr>
-            <a:spLocks noGrp="1"/>
-          </p:cNvSpPr>
-          <p:nvPr>
-            <p:ph type="body" sz="quarter" idx="13"/>
-          </p:nvPr>
-        </p:nvSpPr>
-        <p:spPr>
-          <a:xfrm>
-            <a:off x="85832" y="1133473"/>
-            <a:ext cx="8972331" cy="1158965"/>
-          </a:xfrm>
-        </p:spPr>
-        <p:txBody>
-          <a:bodyPr>
-            <a:normAutofit/>
-          </a:bodyPr>
-          <a:lstStyle/>
-          <a:p>
-            <a:pPr marL="0" indent="0" algn="just">
-              <a:buNone/>
-            </a:pPr>
-            <a:r>
-              <a:rPr lang="ja-JP" altLang="en-US" dirty="0"/>
-              <a:t>迷路を見ながら、各マスで進む方向を考える。「上・下・左・右」の中から、進みたい方向に〇をつける。</a:t>
-            </a:r>
-          </a:p>
-        </p:txBody>
-      </p:sp>
-      <p:sp>
-        <p:nvSpPr>
-          <p:cNvPr id="4" name="Slide Number Placeholder 3">
-            <a:extLst>
-              <a:ext uri="{FF2B5EF4-FFF2-40B4-BE49-F238E27FC236}">
-                <a16:creationId xmlns:a16="http://schemas.microsoft.com/office/drawing/2014/main" id="{EE6359F3-6CA1-E56E-5B73-CCA923B75D92}"/>
-              </a:ext>
-            </a:extLst>
-          </p:cNvPr>
-          <p:cNvSpPr>
-            <a:spLocks noGrp="1"/>
-          </p:cNvSpPr>
-          <p:nvPr>
-            <p:ph type="sldNum" sz="quarter" idx="15"/>
-          </p:nvPr>
-        </p:nvSpPr>
-        <p:spPr/>
-        <p:txBody>
-          <a:bodyPr/>
-          <a:lstStyle/>
-          <a:p>
-            <a:fld id="{CBD12358-51D2-46B3-9BDE-DF29528B9454}" type="slidenum">
-              <a:rPr lang="en-US" smtClean="0"/>
-              <a:pPr/>
-              <a:t>13</a:t>
-            </a:fld>
-            <a:endParaRPr lang="en-US" dirty="0"/>
-          </a:p>
-        </p:txBody>
-      </p:sp>
-      <p:pic>
-        <p:nvPicPr>
-          <p:cNvPr id="16" name="Picture 15">
-            <a:extLst>
-              <a:ext uri="{FF2B5EF4-FFF2-40B4-BE49-F238E27FC236}">
-                <a16:creationId xmlns:a16="http://schemas.microsoft.com/office/drawing/2014/main" id="{5815D4F1-87B9-6B8C-7070-9E15FD390B66}"/>
-              </a:ext>
-            </a:extLst>
-          </p:cNvPr>
-          <p:cNvPicPr>
-            <a:picLocks noChangeAspect="1"/>
-          </p:cNvPicPr>
-          <p:nvPr/>
-        </p:nvPicPr>
-        <p:blipFill>
-          <a:blip r:embed="rId2">
-            <a:extLst>
-              <a:ext uri="{28A0092B-C50C-407E-A947-70E740481C1C}">
-                <a14:useLocalDpi xmlns:a14="http://schemas.microsoft.com/office/drawing/2010/main" val="0"/>
-              </a:ext>
-            </a:extLst>
-          </a:blip>
-          <a:stretch>
-            <a:fillRect/>
-          </a:stretch>
-        </p:blipFill>
-        <p:spPr>
-          <a:xfrm>
-            <a:off x="4356300" y="2003978"/>
-            <a:ext cx="4408778" cy="4408778"/>
-          </a:xfrm>
-          <a:prstGeom prst="rect">
-            <a:avLst/>
-          </a:prstGeom>
-        </p:spPr>
-      </p:pic>
-      <p:cxnSp>
-        <p:nvCxnSpPr>
-          <p:cNvPr id="7" name="Straight Connector 6">
-            <a:extLst>
-              <a:ext uri="{FF2B5EF4-FFF2-40B4-BE49-F238E27FC236}">
-                <a16:creationId xmlns:a16="http://schemas.microsoft.com/office/drawing/2014/main" id="{86435ECC-A934-5916-F7C9-D0BF5B5F7861}"/>
-              </a:ext>
-            </a:extLst>
-          </p:cNvPr>
-          <p:cNvCxnSpPr>
-            <a:cxnSpLocks/>
-          </p:cNvCxnSpPr>
-          <p:nvPr/>
-        </p:nvCxnSpPr>
-        <p:spPr>
-          <a:xfrm>
-            <a:off x="5010150" y="2483783"/>
-            <a:ext cx="619462" cy="0"/>
-          </a:xfrm>
-          <a:prstGeom prst="line">
-            <a:avLst/>
-          </a:prstGeom>
-          <a:ln w="57150" cap="rnd">
-            <a:solidFill>
-              <a:srgbClr val="22BA67"/>
-            </a:solidFill>
-          </a:ln>
-        </p:spPr>
-        <p:style>
-          <a:lnRef idx="2">
-            <a:schemeClr val="accent1"/>
-          </a:lnRef>
-          <a:fillRef idx="0">
-            <a:schemeClr val="accent1"/>
-          </a:fillRef>
-          <a:effectRef idx="1">
-            <a:schemeClr val="accent1"/>
-          </a:effectRef>
-          <a:fontRef idx="minor">
-            <a:schemeClr val="tx1"/>
-          </a:fontRef>
-        </p:style>
-      </p:cxnSp>
-      <p:cxnSp>
-        <p:nvCxnSpPr>
-          <p:cNvPr id="8" name="Straight Connector 7">
-            <a:extLst>
-              <a:ext uri="{FF2B5EF4-FFF2-40B4-BE49-F238E27FC236}">
-                <a16:creationId xmlns:a16="http://schemas.microsoft.com/office/drawing/2014/main" id="{86F368C7-8986-DA2B-88C0-55314024B5EB}"/>
-              </a:ext>
-            </a:extLst>
-          </p:cNvPr>
-          <p:cNvCxnSpPr>
-            <a:cxnSpLocks/>
-          </p:cNvCxnSpPr>
-          <p:nvPr/>
-        </p:nvCxnSpPr>
-        <p:spPr>
-          <a:xfrm flipH="1" flipV="1">
-            <a:off x="5639786" y="2455069"/>
-            <a:ext cx="18064" cy="3138487"/>
-          </a:xfrm>
-          <a:prstGeom prst="line">
-            <a:avLst/>
-          </a:prstGeom>
-          <a:ln w="57150">
-            <a:solidFill>
-              <a:srgbClr val="22BA67"/>
-            </a:solidFill>
-          </a:ln>
-        </p:spPr>
-        <p:style>
-          <a:lnRef idx="2">
-            <a:schemeClr val="accent1"/>
-          </a:lnRef>
-          <a:fillRef idx="0">
-            <a:schemeClr val="accent1"/>
-          </a:fillRef>
-          <a:effectRef idx="1">
-            <a:schemeClr val="accent1"/>
-          </a:effectRef>
-          <a:fontRef idx="minor">
-            <a:schemeClr val="tx1"/>
-          </a:fontRef>
-        </p:style>
-      </p:cxnSp>
-      <p:cxnSp>
-        <p:nvCxnSpPr>
-          <p:cNvPr id="15" name="Straight Connector 14">
-            <a:extLst>
-              <a:ext uri="{FF2B5EF4-FFF2-40B4-BE49-F238E27FC236}">
-                <a16:creationId xmlns:a16="http://schemas.microsoft.com/office/drawing/2014/main" id="{37075E67-8FFA-CA76-098B-845877398EC4}"/>
-              </a:ext>
-            </a:extLst>
-          </p:cNvPr>
-          <p:cNvCxnSpPr>
-            <a:cxnSpLocks/>
-          </p:cNvCxnSpPr>
-          <p:nvPr/>
-        </p:nvCxnSpPr>
-        <p:spPr>
-          <a:xfrm>
-            <a:off x="5629612" y="5566708"/>
-            <a:ext cx="1850688" cy="0"/>
-          </a:xfrm>
-          <a:prstGeom prst="line">
-            <a:avLst/>
-          </a:prstGeom>
-          <a:ln w="57150">
-            <a:solidFill>
-              <a:srgbClr val="22BA67"/>
-            </a:solidFill>
-          </a:ln>
-        </p:spPr>
-        <p:style>
-          <a:lnRef idx="2">
-            <a:schemeClr val="accent1"/>
-          </a:lnRef>
-          <a:fillRef idx="0">
-            <a:schemeClr val="accent1"/>
-          </a:fillRef>
-          <a:effectRef idx="1">
-            <a:schemeClr val="accent1"/>
-          </a:effectRef>
-          <a:fontRef idx="minor">
-            <a:schemeClr val="tx1"/>
-          </a:fontRef>
-        </p:style>
-      </p:cxnSp>
-      <p:cxnSp>
-        <p:nvCxnSpPr>
-          <p:cNvPr id="19" name="Straight Connector 18">
-            <a:extLst>
-              <a:ext uri="{FF2B5EF4-FFF2-40B4-BE49-F238E27FC236}">
-                <a16:creationId xmlns:a16="http://schemas.microsoft.com/office/drawing/2014/main" id="{DBA52E08-D0D2-EA8A-31CB-820A08753ED0}"/>
-              </a:ext>
-            </a:extLst>
-          </p:cNvPr>
-          <p:cNvCxnSpPr>
-            <a:cxnSpLocks/>
-          </p:cNvCxnSpPr>
-          <p:nvPr/>
-        </p:nvCxnSpPr>
-        <p:spPr>
-          <a:xfrm flipV="1">
-            <a:off x="7473950" y="4438650"/>
-            <a:ext cx="0" cy="1154906"/>
-          </a:xfrm>
-          <a:prstGeom prst="line">
-            <a:avLst/>
-          </a:prstGeom>
-          <a:ln w="57150">
-            <a:solidFill>
-              <a:srgbClr val="22BA67"/>
-            </a:solidFill>
-            <a:tailEnd type="triangle"/>
-          </a:ln>
-        </p:spPr>
-        <p:style>
-          <a:lnRef idx="2">
-            <a:schemeClr val="accent1"/>
-          </a:lnRef>
-          <a:fillRef idx="0">
-            <a:schemeClr val="accent1"/>
-          </a:fillRef>
-          <a:effectRef idx="1">
-            <a:schemeClr val="accent1"/>
-          </a:effectRef>
-          <a:fontRef idx="minor">
-            <a:schemeClr val="tx1"/>
-          </a:fontRef>
-        </p:style>
-      </p:cxnSp>
-      <mc:AlternateContent xmlns:mc="http://schemas.openxmlformats.org/markup-compatibility/2006" xmlns:a14="http://schemas.microsoft.com/office/drawing/2010/main">
-        <mc:Choice Requires="a14">
-          <p:sp>
-            <p:nvSpPr>
-              <p:cNvPr id="25" name="TextBox 24">
-                <a:extLst>
-                  <a:ext uri="{FF2B5EF4-FFF2-40B4-BE49-F238E27FC236}">
-                    <a16:creationId xmlns:a16="http://schemas.microsoft.com/office/drawing/2014/main" id="{AE39C11B-81A1-FE70-E356-F902CBCAD432}"/>
-                  </a:ext>
-                </a:extLst>
-              </p:cNvPr>
-              <p:cNvSpPr txBox="1"/>
-              <p:nvPr/>
-            </p:nvSpPr>
-            <p:spPr>
-              <a:xfrm>
-                <a:off x="912613" y="5885024"/>
-                <a:ext cx="328936" cy="400110"/>
-              </a:xfrm>
-              <a:prstGeom prst="rect">
-                <a:avLst/>
-              </a:prstGeom>
-              <a:noFill/>
-            </p:spPr>
-            <p:txBody>
-              <a:bodyPr wrap="none" rtlCol="0">
-                <a:spAutoFit/>
-              </a:bodyPr>
-              <a:lstStyle/>
-              <a:p>
-                <a:pPr/>
-                <a14:m>
-                  <m:oMathPara xmlns:m="http://schemas.openxmlformats.org/officeDocument/2006/math">
-                    <m:oMath>
-                      <m:r>
-                        <a:rPr lang="en-US" sz="2000" i="1" smtClean="0">
-                          <a:latin typeface="Cambria Math" panose="02040503050406030204" pitchFamily="18" charset="0"/>
-                          <a:ea typeface="Cambria Math" panose="02040503050406030204" pitchFamily="18" charset="0"/>
-                        </a:rPr>
-                        <m:t>⋮</m:t>
-                      </m:r>
-                    </m:oMath>
-                  </m:oMathPara>
-                </a14:m>
-                <a:endParaRPr lang="en-US" sz="2000" dirty="0"/>
-              </a:p>
-            </p:txBody>
-          </p:sp>
-        </mc:Choice>
-        <mc:Fallback xmlns="">
-          <p:sp>
-            <p:nvSpPr>
-              <p:cNvPr id="25" name="TextBox 24">
-                <a:extLst>
-                  <a:ext uri="{FF2B5EF4-FFF2-40B4-BE49-F238E27FC236}">
-                    <a16:creationId xmlns:a16="http://schemas.microsoft.com/office/drawing/2014/main" id="{AE39C11B-81A1-FE70-E356-F902CBCAD432}"/>
-                  </a:ext>
-                </a:extLst>
-              </p:cNvPr>
-              <p:cNvSpPr txBox="1">
-                <a:spLocks noRot="1" noChangeAspect="1" noMove="1" noResize="1" noEditPoints="1" noAdjustHandles="1" noChangeArrowheads="1" noChangeShapeType="1" noTextEdit="1"/>
-              </p:cNvSpPr>
-              <p:nvPr/>
-            </p:nvSpPr>
-            <p:spPr>
-              <a:xfrm>
-                <a:off x="912613" y="5885024"/>
-                <a:ext cx="328936" cy="400110"/>
-              </a:xfrm>
-              <a:prstGeom prst="rect">
-                <a:avLst/>
-              </a:prstGeom>
-              <a:blipFill>
-                <a:blip r:embed="rId3"/>
-                <a:stretch>
-                  <a:fillRect/>
-                </a:stretch>
-              </a:blipFill>
-            </p:spPr>
-            <p:txBody>
-              <a:bodyPr/>
-              <a:lstStyle/>
-              <a:p>
-                <a:r>
-                  <a:rPr lang="en-US">
-                    <a:noFill/>
-                  </a:rPr>
-                  <a:t> </a:t>
-                </a:r>
-              </a:p>
-            </p:txBody>
-          </p:sp>
-        </mc:Fallback>
-      </mc:AlternateContent>
-      <mc:AlternateContent xmlns:mc="http://schemas.openxmlformats.org/markup-compatibility/2006" xmlns:a14="http://schemas.microsoft.com/office/drawing/2010/main">
-        <mc:Choice Requires="a14">
-          <p:sp>
-            <p:nvSpPr>
-              <p:cNvPr id="27" name="TextBox 26">
-                <a:extLst>
-                  <a:ext uri="{FF2B5EF4-FFF2-40B4-BE49-F238E27FC236}">
-                    <a16:creationId xmlns:a16="http://schemas.microsoft.com/office/drawing/2014/main" id="{A5D6018F-6D73-035B-E6FE-5B405103DC41}"/>
-                  </a:ext>
-                </a:extLst>
-              </p:cNvPr>
-              <p:cNvSpPr txBox="1"/>
-              <p:nvPr/>
-            </p:nvSpPr>
-            <p:spPr>
-              <a:xfrm>
-                <a:off x="1582522" y="5885023"/>
-                <a:ext cx="328936" cy="400110"/>
-              </a:xfrm>
-              <a:prstGeom prst="rect">
-                <a:avLst/>
-              </a:prstGeom>
-              <a:noFill/>
-            </p:spPr>
-            <p:txBody>
-              <a:bodyPr wrap="none" rtlCol="0">
-                <a:spAutoFit/>
-              </a:bodyPr>
-              <a:lstStyle/>
-              <a:p>
-                <a:pPr/>
-                <a14:m>
-                  <m:oMathPara xmlns:m="http://schemas.openxmlformats.org/officeDocument/2006/math">
-                    <m:oMath>
-                      <m:r>
-                        <a:rPr lang="en-US" sz="2000" i="1" smtClean="0">
-                          <a:latin typeface="Cambria Math" panose="02040503050406030204" pitchFamily="18" charset="0"/>
-                          <a:ea typeface="Cambria Math" panose="02040503050406030204" pitchFamily="18" charset="0"/>
-                        </a:rPr>
-                        <m:t>⋮</m:t>
-                      </m:r>
-                    </m:oMath>
-                  </m:oMathPara>
-                </a14:m>
-                <a:endParaRPr lang="en-US" sz="2000" dirty="0"/>
-              </a:p>
-            </p:txBody>
-          </p:sp>
-        </mc:Choice>
-        <mc:Fallback xmlns="">
-          <p:sp>
-            <p:nvSpPr>
-              <p:cNvPr id="27" name="TextBox 26">
-                <a:extLst>
-                  <a:ext uri="{FF2B5EF4-FFF2-40B4-BE49-F238E27FC236}">
-                    <a16:creationId xmlns:a16="http://schemas.microsoft.com/office/drawing/2014/main" id="{A5D6018F-6D73-035B-E6FE-5B405103DC41}"/>
-                  </a:ext>
-                </a:extLst>
-              </p:cNvPr>
-              <p:cNvSpPr txBox="1">
-                <a:spLocks noRot="1" noChangeAspect="1" noMove="1" noResize="1" noEditPoints="1" noAdjustHandles="1" noChangeArrowheads="1" noChangeShapeType="1" noTextEdit="1"/>
-              </p:cNvSpPr>
-              <p:nvPr/>
-            </p:nvSpPr>
-            <p:spPr>
-              <a:xfrm>
-                <a:off x="1582522" y="5885023"/>
-                <a:ext cx="328936" cy="400110"/>
-              </a:xfrm>
-              <a:prstGeom prst="rect">
-                <a:avLst/>
-              </a:prstGeom>
-              <a:blipFill>
-                <a:blip r:embed="rId4"/>
-                <a:stretch>
-                  <a:fillRect/>
-                </a:stretch>
-              </a:blipFill>
-            </p:spPr>
-            <p:txBody>
-              <a:bodyPr/>
-              <a:lstStyle/>
-              <a:p>
-                <a:r>
-                  <a:rPr lang="en-US">
-                    <a:noFill/>
-                  </a:rPr>
-                  <a:t> </a:t>
-                </a:r>
-              </a:p>
-            </p:txBody>
-          </p:sp>
-        </mc:Fallback>
-      </mc:AlternateContent>
-      <mc:AlternateContent xmlns:mc="http://schemas.openxmlformats.org/markup-compatibility/2006" xmlns:a14="http://schemas.microsoft.com/office/drawing/2010/main">
-        <mc:Choice Requires="a14">
-          <p:sp>
-            <p:nvSpPr>
-              <p:cNvPr id="29" name="TextBox 28">
-                <a:extLst>
-                  <a:ext uri="{FF2B5EF4-FFF2-40B4-BE49-F238E27FC236}">
-                    <a16:creationId xmlns:a16="http://schemas.microsoft.com/office/drawing/2014/main" id="{E5C3F812-C6D5-26B9-36AA-4F61686F03B2}"/>
-                  </a:ext>
-                </a:extLst>
-              </p:cNvPr>
-              <p:cNvSpPr txBox="1"/>
-              <p:nvPr/>
-            </p:nvSpPr>
-            <p:spPr>
-              <a:xfrm>
-                <a:off x="2075502" y="5885023"/>
-                <a:ext cx="328936" cy="400110"/>
-              </a:xfrm>
-              <a:prstGeom prst="rect">
-                <a:avLst/>
-              </a:prstGeom>
-              <a:noFill/>
-            </p:spPr>
-            <p:txBody>
-              <a:bodyPr wrap="none" rtlCol="0">
-                <a:spAutoFit/>
-              </a:bodyPr>
-              <a:lstStyle/>
-              <a:p>
-                <a:pPr/>
-                <a14:m>
-                  <m:oMathPara xmlns:m="http://schemas.openxmlformats.org/officeDocument/2006/math">
-                    <m:oMath>
-                      <m:r>
-                        <a:rPr lang="en-US" sz="2000" i="1" smtClean="0">
-                          <a:latin typeface="Cambria Math" panose="02040503050406030204" pitchFamily="18" charset="0"/>
-                          <a:ea typeface="Cambria Math" panose="02040503050406030204" pitchFamily="18" charset="0"/>
-                        </a:rPr>
-                        <m:t>⋮</m:t>
-                      </m:r>
-                    </m:oMath>
-                  </m:oMathPara>
-                </a14:m>
-                <a:endParaRPr lang="en-US" sz="2000" dirty="0"/>
-              </a:p>
-            </p:txBody>
-          </p:sp>
-        </mc:Choice>
-        <mc:Fallback xmlns="">
-          <p:sp>
-            <p:nvSpPr>
-              <p:cNvPr id="29" name="TextBox 28">
-                <a:extLst>
-                  <a:ext uri="{FF2B5EF4-FFF2-40B4-BE49-F238E27FC236}">
-                    <a16:creationId xmlns:a16="http://schemas.microsoft.com/office/drawing/2014/main" id="{E5C3F812-C6D5-26B9-36AA-4F61686F03B2}"/>
-                  </a:ext>
-                </a:extLst>
-              </p:cNvPr>
-              <p:cNvSpPr txBox="1">
-                <a:spLocks noRot="1" noChangeAspect="1" noMove="1" noResize="1" noEditPoints="1" noAdjustHandles="1" noChangeArrowheads="1" noChangeShapeType="1" noTextEdit="1"/>
-              </p:cNvSpPr>
-              <p:nvPr/>
-            </p:nvSpPr>
-            <p:spPr>
-              <a:xfrm>
-                <a:off x="2075502" y="5885023"/>
-                <a:ext cx="328936" cy="400110"/>
-              </a:xfrm>
-              <a:prstGeom prst="rect">
-                <a:avLst/>
-              </a:prstGeom>
-              <a:blipFill>
-                <a:blip r:embed="rId5"/>
-                <a:stretch>
-                  <a:fillRect/>
-                </a:stretch>
-              </a:blipFill>
-            </p:spPr>
-            <p:txBody>
-              <a:bodyPr/>
-              <a:lstStyle/>
-              <a:p>
-                <a:r>
-                  <a:rPr lang="en-US">
-                    <a:noFill/>
-                  </a:rPr>
-                  <a:t> </a:t>
-                </a:r>
-              </a:p>
-            </p:txBody>
-          </p:sp>
-        </mc:Fallback>
-      </mc:AlternateContent>
-      <mc:AlternateContent xmlns:mc="http://schemas.openxmlformats.org/markup-compatibility/2006" xmlns:a14="http://schemas.microsoft.com/office/drawing/2010/main">
-        <mc:Choice Requires="a14">
-          <p:sp>
-            <p:nvSpPr>
-              <p:cNvPr id="31" name="TextBox 30">
-                <a:extLst>
-                  <a:ext uri="{FF2B5EF4-FFF2-40B4-BE49-F238E27FC236}">
-                    <a16:creationId xmlns:a16="http://schemas.microsoft.com/office/drawing/2014/main" id="{DDC10C4A-8A8F-CB34-F3FD-FB6436E09412}"/>
-                  </a:ext>
-                </a:extLst>
-              </p:cNvPr>
-              <p:cNvSpPr txBox="1"/>
-              <p:nvPr/>
-            </p:nvSpPr>
-            <p:spPr>
-              <a:xfrm>
-                <a:off x="2583722" y="5885023"/>
-                <a:ext cx="328936" cy="400110"/>
-              </a:xfrm>
-              <a:prstGeom prst="rect">
-                <a:avLst/>
-              </a:prstGeom>
-              <a:noFill/>
-            </p:spPr>
-            <p:txBody>
-              <a:bodyPr wrap="none" rtlCol="0">
-                <a:spAutoFit/>
-              </a:bodyPr>
-              <a:lstStyle/>
-              <a:p>
-                <a:pPr/>
-                <a14:m>
-                  <m:oMathPara xmlns:m="http://schemas.openxmlformats.org/officeDocument/2006/math">
-                    <m:oMath>
-                      <m:r>
-                        <a:rPr lang="en-US" sz="2000" i="1" smtClean="0">
-                          <a:latin typeface="Cambria Math" panose="02040503050406030204" pitchFamily="18" charset="0"/>
-                          <a:ea typeface="Cambria Math" panose="02040503050406030204" pitchFamily="18" charset="0"/>
-                        </a:rPr>
-                        <m:t>⋮</m:t>
-                      </m:r>
-                    </m:oMath>
-                  </m:oMathPara>
-                </a14:m>
-                <a:endParaRPr lang="en-US" sz="2000" dirty="0"/>
-              </a:p>
-            </p:txBody>
-          </p:sp>
-        </mc:Choice>
-        <mc:Fallback xmlns="">
-          <p:sp>
-            <p:nvSpPr>
-              <p:cNvPr id="31" name="TextBox 30">
-                <a:extLst>
-                  <a:ext uri="{FF2B5EF4-FFF2-40B4-BE49-F238E27FC236}">
-                    <a16:creationId xmlns:a16="http://schemas.microsoft.com/office/drawing/2014/main" id="{DDC10C4A-8A8F-CB34-F3FD-FB6436E09412}"/>
-                  </a:ext>
-                </a:extLst>
-              </p:cNvPr>
-              <p:cNvSpPr txBox="1">
-                <a:spLocks noRot="1" noChangeAspect="1" noMove="1" noResize="1" noEditPoints="1" noAdjustHandles="1" noChangeArrowheads="1" noChangeShapeType="1" noTextEdit="1"/>
-              </p:cNvSpPr>
-              <p:nvPr/>
-            </p:nvSpPr>
-            <p:spPr>
-              <a:xfrm>
-                <a:off x="2583722" y="5885023"/>
-                <a:ext cx="328936" cy="400110"/>
-              </a:xfrm>
-              <a:prstGeom prst="rect">
-                <a:avLst/>
-              </a:prstGeom>
-              <a:blipFill>
-                <a:blip r:embed="rId6"/>
-                <a:stretch>
-                  <a:fillRect/>
-                </a:stretch>
-              </a:blipFill>
-            </p:spPr>
-            <p:txBody>
-              <a:bodyPr/>
-              <a:lstStyle/>
-              <a:p>
-                <a:r>
-                  <a:rPr lang="en-US">
-                    <a:noFill/>
-                  </a:rPr>
-                  <a:t> </a:t>
-                </a:r>
-              </a:p>
-            </p:txBody>
-          </p:sp>
-        </mc:Fallback>
-      </mc:AlternateContent>
-      <mc:AlternateContent xmlns:mc="http://schemas.openxmlformats.org/markup-compatibility/2006" xmlns:a14="http://schemas.microsoft.com/office/drawing/2010/main">
-        <mc:Choice Requires="a14">
-          <p:sp>
-            <p:nvSpPr>
-              <p:cNvPr id="33" name="TextBox 32">
-                <a:extLst>
-                  <a:ext uri="{FF2B5EF4-FFF2-40B4-BE49-F238E27FC236}">
-                    <a16:creationId xmlns:a16="http://schemas.microsoft.com/office/drawing/2014/main" id="{8EBAD16D-DE2F-02B3-85AC-608AD94EAEF6}"/>
-                  </a:ext>
-                </a:extLst>
-              </p:cNvPr>
-              <p:cNvSpPr txBox="1"/>
-              <p:nvPr/>
-            </p:nvSpPr>
-            <p:spPr>
-              <a:xfrm>
-                <a:off x="3073584" y="5885022"/>
-                <a:ext cx="328936" cy="400110"/>
-              </a:xfrm>
-              <a:prstGeom prst="rect">
-                <a:avLst/>
-              </a:prstGeom>
-              <a:noFill/>
-            </p:spPr>
-            <p:txBody>
-              <a:bodyPr wrap="none" rtlCol="0">
-                <a:spAutoFit/>
-              </a:bodyPr>
-              <a:lstStyle/>
-              <a:p>
-                <a:pPr/>
-                <a14:m>
-                  <m:oMathPara xmlns:m="http://schemas.openxmlformats.org/officeDocument/2006/math">
-                    <m:oMath>
-                      <m:r>
-                        <a:rPr lang="en-US" sz="2000" i="1" smtClean="0">
-                          <a:latin typeface="Cambria Math" panose="02040503050406030204" pitchFamily="18" charset="0"/>
-                          <a:ea typeface="Cambria Math" panose="02040503050406030204" pitchFamily="18" charset="0"/>
-                        </a:rPr>
-                        <m:t>⋮</m:t>
-                      </m:r>
-                    </m:oMath>
-                  </m:oMathPara>
-                </a14:m>
-                <a:endParaRPr lang="en-US" sz="2000" dirty="0"/>
-              </a:p>
-            </p:txBody>
-          </p:sp>
-        </mc:Choice>
-        <mc:Fallback xmlns="">
-          <p:sp>
-            <p:nvSpPr>
-              <p:cNvPr id="33" name="TextBox 32">
-                <a:extLst>
-                  <a:ext uri="{FF2B5EF4-FFF2-40B4-BE49-F238E27FC236}">
-                    <a16:creationId xmlns:a16="http://schemas.microsoft.com/office/drawing/2014/main" id="{8EBAD16D-DE2F-02B3-85AC-608AD94EAEF6}"/>
-                  </a:ext>
-                </a:extLst>
-              </p:cNvPr>
-              <p:cNvSpPr txBox="1">
-                <a:spLocks noRot="1" noChangeAspect="1" noMove="1" noResize="1" noEditPoints="1" noAdjustHandles="1" noChangeArrowheads="1" noChangeShapeType="1" noTextEdit="1"/>
-              </p:cNvSpPr>
-              <p:nvPr/>
-            </p:nvSpPr>
-            <p:spPr>
-              <a:xfrm>
-                <a:off x="3073584" y="5885022"/>
-                <a:ext cx="328936" cy="400110"/>
-              </a:xfrm>
-              <a:prstGeom prst="rect">
-                <a:avLst/>
-              </a:prstGeom>
-              <a:blipFill>
-                <a:blip r:embed="rId7"/>
-                <a:stretch>
-                  <a:fillRect/>
-                </a:stretch>
-              </a:blipFill>
-            </p:spPr>
-            <p:txBody>
-              <a:bodyPr/>
-              <a:lstStyle/>
-              <a:p>
-                <a:r>
-                  <a:rPr lang="en-US">
-                    <a:noFill/>
-                  </a:rPr>
-                  <a:t> </a:t>
-                </a:r>
-              </a:p>
-            </p:txBody>
-          </p:sp>
-        </mc:Fallback>
-      </mc:AlternateContent>
-      <p:graphicFrame>
-        <p:nvGraphicFramePr>
-          <p:cNvPr id="36" name="Table 35">
-            <a:extLst>
-              <a:ext uri="{FF2B5EF4-FFF2-40B4-BE49-F238E27FC236}">
-                <a16:creationId xmlns:a16="http://schemas.microsoft.com/office/drawing/2014/main" id="{2335404F-B11B-0EF7-288E-A01721CA6F54}"/>
-              </a:ext>
-            </a:extLst>
-          </p:cNvPr>
-          <p:cNvGraphicFramePr>
-            <a:graphicFrameLocks noGrp="1"/>
-          </p:cNvGraphicFramePr>
-          <p:nvPr>
-            <p:extLst>
-              <p:ext uri="{D42A27DB-BD31-4B8C-83A1-F6EECF244321}">
-                <p14:modId xmlns:p14="http://schemas.microsoft.com/office/powerpoint/2010/main" val="66579342"/>
-              </p:ext>
-            </p:extLst>
-          </p:nvPr>
-        </p:nvGraphicFramePr>
-        <p:xfrm>
-          <a:off x="646820" y="2144299"/>
-          <a:ext cx="2837177" cy="4128135"/>
-        </p:xfrm>
-        <a:graphic>
-          <a:graphicData uri="http://schemas.openxmlformats.org/drawingml/2006/table">
-            <a:tbl>
-              <a:tblPr>
-                <a:tableStyleId>{72833802-FEF1-4C79-8D5D-14CF1EAF98D9}</a:tableStyleId>
-              </a:tblPr>
-              <a:tblGrid>
-                <a:gridCol w="838661">
-                  <a:extLst>
-                    <a:ext uri="{9D8B030D-6E8A-4147-A177-3AD203B41FA5}">
-                      <a16:colId xmlns:a16="http://schemas.microsoft.com/office/drawing/2014/main" val="3533546938"/>
-                    </a:ext>
-                  </a:extLst>
-                </a:gridCol>
-                <a:gridCol w="499629">
-                  <a:extLst>
-                    <a:ext uri="{9D8B030D-6E8A-4147-A177-3AD203B41FA5}">
-                      <a16:colId xmlns:a16="http://schemas.microsoft.com/office/drawing/2014/main" val="3580453506"/>
-                    </a:ext>
-                  </a:extLst>
-                </a:gridCol>
-                <a:gridCol w="499629">
-                  <a:extLst>
-                    <a:ext uri="{9D8B030D-6E8A-4147-A177-3AD203B41FA5}">
-                      <a16:colId xmlns:a16="http://schemas.microsoft.com/office/drawing/2014/main" val="2656121914"/>
-                    </a:ext>
-                  </a:extLst>
-                </a:gridCol>
-                <a:gridCol w="499629">
-                  <a:extLst>
-                    <a:ext uri="{9D8B030D-6E8A-4147-A177-3AD203B41FA5}">
-                      <a16:colId xmlns:a16="http://schemas.microsoft.com/office/drawing/2014/main" val="3920388811"/>
-                    </a:ext>
-                  </a:extLst>
-                </a:gridCol>
-                <a:gridCol w="499629">
-                  <a:extLst>
-                    <a:ext uri="{9D8B030D-6E8A-4147-A177-3AD203B41FA5}">
-                      <a16:colId xmlns:a16="http://schemas.microsoft.com/office/drawing/2014/main" val="1388804421"/>
-                    </a:ext>
-                  </a:extLst>
-                </a:gridCol>
-              </a:tblGrid>
-              <a:tr h="190500">
-                <a:tc>
-                  <a:txBody>
-                    <a:bodyPr/>
-                    <a:lstStyle/>
-                    <a:p>
-                      <a:pPr algn="ctr" fontAlgn="b">
-                        <a:buNone/>
-                      </a:pPr>
-                      <a:r>
-                        <a:rPr lang="ja-JP" altLang="en-US" sz="2400" b="1" i="0" u="none" strike="noStrike" dirty="0">
-                          <a:solidFill>
-                            <a:schemeClr val="bg1"/>
-                          </a:solidFill>
-                          <a:effectLst/>
-                          <a:latin typeface="Aptos Narrow" panose="020B0004020202020204" pitchFamily="34" charset="0"/>
-                        </a:rPr>
-                        <a:t>一位</a:t>
-                      </a:r>
-                      <a:endParaRPr lang="en-US" sz="2400" b="1" i="0" u="none" strike="noStrike" dirty="0">
-                        <a:solidFill>
-                          <a:schemeClr val="bg1"/>
-                        </a:solidFill>
-                        <a:effectLst/>
-                        <a:latin typeface="Aptos Narrow" panose="020B0004020202020204" pitchFamily="34" charset="0"/>
-                      </a:endParaRPr>
-                    </a:p>
-                  </a:txBody>
-                  <a:tcPr marL="9525" marR="9525" marT="9525" marB="0" anchor="ctr">
-                    <a:lnL w="28575" cap="flat" cmpd="sng" algn="ctr">
-                      <a:solidFill>
-                        <a:schemeClr val="tx1"/>
-                      </a:solidFill>
-                      <a:prstDash val="solid"/>
-                      <a:round/>
-                      <a:headEnd type="none" w="med" len="med"/>
-                      <a:tailEnd type="none" w="med" len="med"/>
-                    </a:lnL>
-                    <a:lnR w="28575" cap="flat" cmpd="sng" algn="ctr">
-                      <a:solidFill>
-                        <a:schemeClr val="tx1"/>
-                      </a:solidFill>
-                      <a:prstDash val="solid"/>
-                      <a:round/>
-                      <a:headEnd type="none" w="med" len="med"/>
-                      <a:tailEnd type="none" w="med" len="med"/>
-                    </a:lnR>
-                    <a:lnT w="28575" cap="flat" cmpd="sng" algn="ctr">
-                      <a:solidFill>
-                        <a:schemeClr val="tx1"/>
-                      </a:solidFill>
-                      <a:prstDash val="solid"/>
-                      <a:round/>
-                      <a:headEnd type="none" w="med" len="med"/>
-                      <a:tailEnd type="none" w="med" len="med"/>
-                    </a:lnT>
-                    <a:lnB w="28575" cap="flat" cmpd="sng" algn="ctr">
-                      <a:solidFill>
-                        <a:schemeClr val="tx1"/>
-                      </a:solidFill>
-                      <a:prstDash val="solid"/>
-                      <a:round/>
-                      <a:headEnd type="none" w="med" len="med"/>
-                      <a:tailEnd type="none" w="med" len="med"/>
-                    </a:lnB>
-                    <a:solidFill>
-                      <a:schemeClr val="accent2"/>
-                    </a:solidFill>
-                  </a:tcPr>
-                </a:tc>
-                <a:tc>
-                  <a:txBody>
-                    <a:bodyPr/>
-                    <a:lstStyle/>
-                    <a:p>
-                      <a:pPr algn="ctr" fontAlgn="b">
-                        <a:buNone/>
-                      </a:pPr>
-                      <a:r>
-                        <a:rPr lang="en-US" sz="2400" b="1" u="none" strike="noStrike" dirty="0">
-                          <a:solidFill>
-                            <a:schemeClr val="bg1"/>
-                          </a:solidFill>
-                          <a:effectLst/>
-                        </a:rPr>
-                        <a:t>上</a:t>
-                      </a:r>
-                      <a:endParaRPr lang="en-US" sz="2400" b="1" i="0" u="none" strike="noStrike" dirty="0">
-                        <a:solidFill>
-                          <a:schemeClr val="bg1"/>
-                        </a:solidFill>
-                        <a:effectLst/>
-                        <a:latin typeface="Aptos Narrow" panose="020B0004020202020204" pitchFamily="34" charset="0"/>
-                      </a:endParaRPr>
-                    </a:p>
-                  </a:txBody>
-                  <a:tcPr marL="9525" marR="9525" marT="9525" marB="0" anchor="ctr">
-                    <a:lnL w="28575" cap="flat" cmpd="sng" algn="ctr">
-                      <a:solidFill>
-                        <a:schemeClr val="tx1"/>
-                      </a:solidFill>
-                      <a:prstDash val="solid"/>
-                      <a:round/>
-                      <a:headEnd type="none" w="med" len="med"/>
-                      <a:tailEnd type="none" w="med" len="med"/>
-                    </a:lnL>
-                    <a:lnR w="12700" cap="flat" cmpd="sng" algn="ctr">
-                      <a:solidFill>
-                        <a:schemeClr val="tx1"/>
-                      </a:solidFill>
-                      <a:prstDash val="solid"/>
-                      <a:round/>
-                      <a:headEnd type="none" w="med" len="med"/>
-                      <a:tailEnd type="none" w="med" len="med"/>
-                    </a:lnR>
-                    <a:lnT w="28575" cap="flat" cmpd="sng" algn="ctr">
-                      <a:solidFill>
-                        <a:schemeClr val="tx1"/>
-                      </a:solidFill>
-                      <a:prstDash val="solid"/>
-                      <a:round/>
-                      <a:headEnd type="none" w="med" len="med"/>
-                      <a:tailEnd type="none" w="med" len="med"/>
-                    </a:lnT>
-                    <a:lnB w="28575" cap="flat" cmpd="sng" algn="ctr">
-                      <a:solidFill>
-                        <a:schemeClr val="tx1"/>
-                      </a:solidFill>
-                      <a:prstDash val="solid"/>
-                      <a:round/>
-                      <a:headEnd type="none" w="med" len="med"/>
-                      <a:tailEnd type="none" w="med" len="med"/>
-                    </a:lnB>
-                    <a:solidFill>
-                      <a:schemeClr val="accent2"/>
-                    </a:solidFill>
-                  </a:tcPr>
-                </a:tc>
-                <a:tc>
-                  <a:txBody>
-                    <a:bodyPr/>
-                    <a:lstStyle/>
-                    <a:p>
-                      <a:pPr algn="ctr" fontAlgn="b">
-                        <a:buNone/>
-                      </a:pPr>
-                      <a:r>
-                        <a:rPr lang="en-US" sz="2400" b="1" u="none" strike="noStrike" dirty="0">
-                          <a:solidFill>
-                            <a:schemeClr val="bg1"/>
-                          </a:solidFill>
-                          <a:effectLst/>
-                        </a:rPr>
-                        <a:t>下</a:t>
-                      </a:r>
-                      <a:endParaRPr lang="en-US" sz="2400" b="1" i="0" u="none" strike="noStrike" dirty="0">
-                        <a:solidFill>
-                          <a:schemeClr val="bg1"/>
-                        </a:solidFill>
-                        <a:effectLst/>
-                        <a:latin typeface="Aptos Narrow" panose="020B0004020202020204" pitchFamily="34" charset="0"/>
-                      </a:endParaRPr>
-                    </a:p>
-                  </a:txBody>
-                  <a:tcPr marL="9525" marR="9525" marT="9525" marB="0" anchor="ctr">
-                    <a:lnL w="12700" cap="flat" cmpd="sng" algn="ctr">
-                      <a:solidFill>
-                        <a:schemeClr val="tx1"/>
-                      </a:solidFill>
-                      <a:prstDash val="solid"/>
-                      <a:round/>
-                      <a:headEnd type="none" w="med" len="med"/>
-                      <a:tailEnd type="none" w="med" len="med"/>
-                    </a:lnL>
-                    <a:lnR w="12700" cap="flat" cmpd="sng" algn="ctr">
-                      <a:solidFill>
-                        <a:schemeClr val="tx1"/>
-                      </a:solidFill>
-                      <a:prstDash val="solid"/>
-                      <a:round/>
-                      <a:headEnd type="none" w="med" len="med"/>
-                      <a:tailEnd type="none" w="med" len="med"/>
-                    </a:lnR>
-                    <a:lnT w="28575" cap="flat" cmpd="sng" algn="ctr">
-                      <a:solidFill>
-                        <a:schemeClr val="tx1"/>
-                      </a:solidFill>
-                      <a:prstDash val="solid"/>
-                      <a:round/>
-                      <a:headEnd type="none" w="med" len="med"/>
-                      <a:tailEnd type="none" w="med" len="med"/>
-                    </a:lnT>
-                    <a:lnB w="28575" cap="flat" cmpd="sng" algn="ctr">
-                      <a:solidFill>
-                        <a:schemeClr val="tx1"/>
-                      </a:solidFill>
-                      <a:prstDash val="solid"/>
-                      <a:round/>
-                      <a:headEnd type="none" w="med" len="med"/>
-                      <a:tailEnd type="none" w="med" len="med"/>
-                    </a:lnB>
-                    <a:solidFill>
-                      <a:schemeClr val="accent2"/>
-                    </a:solidFill>
-                  </a:tcPr>
-                </a:tc>
-                <a:tc>
-                  <a:txBody>
-                    <a:bodyPr/>
-                    <a:lstStyle/>
-                    <a:p>
-                      <a:pPr algn="ctr" fontAlgn="b">
-                        <a:buNone/>
-                      </a:pPr>
-                      <a:r>
-                        <a:rPr lang="en-US" sz="2400" b="1" u="none" strike="noStrike" dirty="0">
-                          <a:solidFill>
-                            <a:schemeClr val="bg1"/>
-                          </a:solidFill>
-                          <a:effectLst/>
-                        </a:rPr>
-                        <a:t>右</a:t>
-                      </a:r>
-                      <a:endParaRPr lang="en-US" sz="2400" b="1" i="0" u="none" strike="noStrike" dirty="0">
-                        <a:solidFill>
-                          <a:schemeClr val="bg1"/>
-                        </a:solidFill>
-                        <a:effectLst/>
-                        <a:latin typeface="Aptos Narrow" panose="020B0004020202020204" pitchFamily="34" charset="0"/>
-                      </a:endParaRPr>
-                    </a:p>
-                  </a:txBody>
-                  <a:tcPr marL="9525" marR="9525" marT="9525" marB="0" anchor="ctr">
-                    <a:lnL w="12700" cap="flat" cmpd="sng" algn="ctr">
-                      <a:solidFill>
-                        <a:schemeClr val="tx1"/>
-                      </a:solidFill>
-                      <a:prstDash val="solid"/>
-                      <a:round/>
-                      <a:headEnd type="none" w="med" len="med"/>
-                      <a:tailEnd type="none" w="med" len="med"/>
-                    </a:lnL>
-                    <a:lnR w="12700" cap="flat" cmpd="sng" algn="ctr">
-                      <a:solidFill>
-                        <a:schemeClr val="tx1"/>
-                      </a:solidFill>
-                      <a:prstDash val="solid"/>
-                      <a:round/>
-                      <a:headEnd type="none" w="med" len="med"/>
-                      <a:tailEnd type="none" w="med" len="med"/>
-                    </a:lnR>
-                    <a:lnT w="28575" cap="flat" cmpd="sng" algn="ctr">
-                      <a:solidFill>
-                        <a:schemeClr val="tx1"/>
-                      </a:solidFill>
-                      <a:prstDash val="solid"/>
-                      <a:round/>
-                      <a:headEnd type="none" w="med" len="med"/>
-                      <a:tailEnd type="none" w="med" len="med"/>
-                    </a:lnT>
-                    <a:lnB w="28575" cap="flat" cmpd="sng" algn="ctr">
-                      <a:solidFill>
-                        <a:schemeClr val="tx1"/>
-                      </a:solidFill>
-                      <a:prstDash val="solid"/>
-                      <a:round/>
-                      <a:headEnd type="none" w="med" len="med"/>
-                      <a:tailEnd type="none" w="med" len="med"/>
-                    </a:lnB>
-                    <a:solidFill>
-                      <a:schemeClr val="accent2"/>
-                    </a:solidFill>
-                  </a:tcPr>
-                </a:tc>
-                <a:tc>
-                  <a:txBody>
-                    <a:bodyPr/>
-                    <a:lstStyle/>
-                    <a:p>
-                      <a:pPr algn="ctr" fontAlgn="b">
-                        <a:buNone/>
-                      </a:pPr>
-                      <a:r>
-                        <a:rPr lang="en-US" sz="2400" b="1" u="none" strike="noStrike" dirty="0">
-                          <a:solidFill>
-                            <a:schemeClr val="bg1"/>
-                          </a:solidFill>
-                          <a:effectLst/>
-                        </a:rPr>
-                        <a:t>左</a:t>
-                      </a:r>
-                      <a:endParaRPr lang="en-US" sz="2400" b="1" i="0" u="none" strike="noStrike" dirty="0">
-                        <a:solidFill>
-                          <a:schemeClr val="bg1"/>
-                        </a:solidFill>
-                        <a:effectLst/>
-                        <a:latin typeface="Aptos Narrow" panose="020B0004020202020204" pitchFamily="34" charset="0"/>
-                      </a:endParaRPr>
-                    </a:p>
-                  </a:txBody>
-                  <a:tcPr marL="9525" marR="9525" marT="9525" marB="0" anchor="ctr">
-                    <a:lnL w="12700" cap="flat" cmpd="sng" algn="ctr">
-                      <a:solidFill>
-                        <a:schemeClr val="tx1"/>
-                      </a:solidFill>
-                      <a:prstDash val="solid"/>
-                      <a:round/>
-                      <a:headEnd type="none" w="med" len="med"/>
-                      <a:tailEnd type="none" w="med" len="med"/>
-                    </a:lnL>
-                    <a:lnR w="28575" cap="flat" cmpd="sng" algn="ctr">
-                      <a:solidFill>
-                        <a:schemeClr val="tx1"/>
-                      </a:solidFill>
-                      <a:prstDash val="solid"/>
-                      <a:round/>
-                      <a:headEnd type="none" w="med" len="med"/>
-                      <a:tailEnd type="none" w="med" len="med"/>
-                    </a:lnR>
-                    <a:lnT w="28575" cap="flat" cmpd="sng" algn="ctr">
-                      <a:solidFill>
-                        <a:schemeClr val="tx1"/>
-                      </a:solidFill>
-                      <a:prstDash val="solid"/>
-                      <a:round/>
-                      <a:headEnd type="none" w="med" len="med"/>
-                      <a:tailEnd type="none" w="med" len="med"/>
-                    </a:lnT>
-                    <a:lnB w="28575" cap="flat" cmpd="sng" algn="ctr">
-                      <a:solidFill>
-                        <a:schemeClr val="tx1"/>
-                      </a:solidFill>
-                      <a:prstDash val="solid"/>
-                      <a:round/>
-                      <a:headEnd type="none" w="med" len="med"/>
-                      <a:tailEnd type="none" w="med" len="med"/>
-                    </a:lnB>
-                    <a:solidFill>
-                      <a:schemeClr val="accent2"/>
-                    </a:solidFill>
-                  </a:tcPr>
-                </a:tc>
-                <a:extLst>
-                  <a:ext uri="{0D108BD9-81ED-4DB2-BD59-A6C34878D82A}">
-                    <a16:rowId xmlns:a16="http://schemas.microsoft.com/office/drawing/2014/main" val="1906582996"/>
-                  </a:ext>
-                </a:extLst>
-              </a:tr>
-              <a:tr h="190500">
-                <a:tc>
-                  <a:txBody>
-                    <a:bodyPr/>
-                    <a:lstStyle/>
-                    <a:p>
-                      <a:pPr algn="ctr" fontAlgn="b">
-                        <a:buNone/>
-                      </a:pPr>
-                      <a:r>
-                        <a:rPr lang="en-US" sz="2400" b="0" i="0" u="none" strike="noStrike" dirty="0">
-                          <a:solidFill>
-                            <a:srgbClr val="000000"/>
-                          </a:solidFill>
-                          <a:effectLst/>
-                          <a:latin typeface="Aptos Narrow" panose="020B0004020202020204" pitchFamily="34" charset="0"/>
-                        </a:rPr>
-                        <a:t>1</a:t>
-                      </a:r>
-                    </a:p>
-                  </a:txBody>
-                  <a:tcPr marL="9525" marR="9525" marT="9525" marB="0" anchor="ctr">
-                    <a:lnL w="28575" cap="flat" cmpd="sng" algn="ctr">
-                      <a:solidFill>
-                        <a:schemeClr val="tx1"/>
-                      </a:solidFill>
-                      <a:prstDash val="solid"/>
-                      <a:round/>
-                      <a:headEnd type="none" w="med" len="med"/>
-                      <a:tailEnd type="none" w="med" len="med"/>
-                    </a:lnL>
-                    <a:lnR w="28575" cap="flat" cmpd="sng" algn="ctr">
-                      <a:solidFill>
-                        <a:schemeClr val="tx1"/>
-                      </a:solidFill>
-                      <a:prstDash val="solid"/>
-                      <a:round/>
-                      <a:headEnd type="none" w="med" len="med"/>
-                      <a:tailEnd type="none" w="med" len="med"/>
-                    </a:lnR>
-                    <a:lnT w="28575" cap="flat" cmpd="sng" algn="ctr">
-                      <a:solidFill>
-                        <a:schemeClr val="tx1"/>
-                      </a:solidFill>
-                      <a:prstDash val="solid"/>
-                      <a:round/>
-                      <a:headEnd type="none" w="med" len="med"/>
-                      <a:tailEnd type="none" w="med" len="med"/>
-                    </a:lnT>
-                    <a:lnB w="12700" cap="flat" cmpd="sng" algn="ctr">
-                      <a:solidFill>
-                        <a:schemeClr val="tx1"/>
-                      </a:solidFill>
-                      <a:prstDash val="solid"/>
-                      <a:round/>
-                      <a:headEnd type="none" w="med" len="med"/>
-                      <a:tailEnd type="none" w="med" len="med"/>
-                    </a:lnB>
-                  </a:tcPr>
-                </a:tc>
-                <a:tc>
-                  <a:txBody>
-                    <a:bodyPr/>
-                    <a:lstStyle/>
-                    <a:p>
-                      <a:pPr algn="ctr" fontAlgn="b">
-                        <a:buNone/>
-                      </a:pPr>
-                      <a:endParaRPr lang="en-US" sz="2400" b="0" i="0" u="none" strike="noStrike" dirty="0">
-                        <a:solidFill>
-                          <a:srgbClr val="000000"/>
-                        </a:solidFill>
-                        <a:effectLst/>
-                        <a:latin typeface="Aptos Narrow" panose="020B0004020202020204" pitchFamily="34" charset="0"/>
-                      </a:endParaRPr>
-                    </a:p>
-                  </a:txBody>
-                  <a:tcPr marL="9525" marR="9525" marT="9525" marB="0" anchor="ctr">
-                    <a:lnL w="28575" cap="flat" cmpd="sng" algn="ctr">
-                      <a:solidFill>
-                        <a:schemeClr val="tx1"/>
-                      </a:solidFill>
-                      <a:prstDash val="solid"/>
-                      <a:round/>
-                      <a:headEnd type="none" w="med" len="med"/>
-                      <a:tailEnd type="none" w="med" len="med"/>
-                    </a:lnL>
-                    <a:lnR w="12700" cap="flat" cmpd="sng" algn="ctr">
-                      <a:solidFill>
-                        <a:schemeClr val="tx1"/>
-                      </a:solidFill>
-                      <a:prstDash val="solid"/>
-                      <a:round/>
-                      <a:headEnd type="none" w="med" len="med"/>
-                      <a:tailEnd type="none" w="med" len="med"/>
-                    </a:lnR>
-                    <a:lnT w="28575" cap="flat" cmpd="sng" algn="ctr">
-                      <a:solidFill>
-                        <a:schemeClr val="tx1"/>
-                      </a:solidFill>
-                      <a:prstDash val="solid"/>
-                      <a:round/>
-                      <a:headEnd type="none" w="med" len="med"/>
-                      <a:tailEnd type="none" w="med" len="med"/>
-                    </a:lnT>
-                    <a:lnB w="12700" cap="flat" cmpd="sng" algn="ctr">
-                      <a:solidFill>
-                        <a:schemeClr val="tx1"/>
-                      </a:solidFill>
-                      <a:prstDash val="solid"/>
-                      <a:round/>
-                      <a:headEnd type="none" w="med" len="med"/>
-                      <a:tailEnd type="none" w="med" len="med"/>
-                    </a:lnB>
-                  </a:tcPr>
-                </a:tc>
-                <a:tc>
-                  <a:txBody>
-                    <a:bodyPr/>
-                    <a:lstStyle/>
-                    <a:p>
-                      <a:pPr algn="ctr" fontAlgn="b">
-                        <a:buNone/>
-                      </a:pPr>
-                      <a:endParaRPr lang="en-US" sz="2400" b="0" i="0" u="none" strike="noStrike" dirty="0">
-                        <a:solidFill>
-                          <a:srgbClr val="000000"/>
-                        </a:solidFill>
-                        <a:effectLst/>
-                        <a:latin typeface="Aptos Narrow" panose="020B0004020202020204" pitchFamily="34" charset="0"/>
-                      </a:endParaRPr>
-                    </a:p>
-                  </a:txBody>
-                  <a:tcPr marL="9525" marR="9525" marT="9525" marB="0" anchor="ctr">
-                    <a:lnL w="12700" cap="flat" cmpd="sng" algn="ctr">
-                      <a:solidFill>
-                        <a:schemeClr val="tx1"/>
-                      </a:solidFill>
-                      <a:prstDash val="solid"/>
-                      <a:round/>
-                      <a:headEnd type="none" w="med" len="med"/>
-                      <a:tailEnd type="none" w="med" len="med"/>
-                    </a:lnL>
-                    <a:lnR w="12700" cap="flat" cmpd="sng" algn="ctr">
-                      <a:solidFill>
-                        <a:schemeClr val="tx1"/>
-                      </a:solidFill>
-                      <a:prstDash val="solid"/>
-                      <a:round/>
-                      <a:headEnd type="none" w="med" len="med"/>
-                      <a:tailEnd type="none" w="med" len="med"/>
-                    </a:lnR>
-                    <a:lnT w="28575" cap="flat" cmpd="sng" algn="ctr">
-                      <a:solidFill>
-                        <a:schemeClr val="tx1"/>
-                      </a:solidFill>
-                      <a:prstDash val="solid"/>
-                      <a:round/>
-                      <a:headEnd type="none" w="med" len="med"/>
-                      <a:tailEnd type="none" w="med" len="med"/>
-                    </a:lnT>
-                    <a:lnB w="12700" cap="flat" cmpd="sng" algn="ctr">
-                      <a:solidFill>
-                        <a:schemeClr val="tx1"/>
-                      </a:solidFill>
-                      <a:prstDash val="solid"/>
-                      <a:round/>
-                      <a:headEnd type="none" w="med" len="med"/>
-                      <a:tailEnd type="none" w="med" len="med"/>
-                    </a:lnB>
-                  </a:tcPr>
-                </a:tc>
-                <a:tc>
-                  <a:txBody>
-                    <a:bodyPr/>
-                    <a:lstStyle/>
-                    <a:p>
-                      <a:pPr algn="ctr" fontAlgn="b">
-                        <a:buNone/>
-                      </a:pPr>
-                      <a:r>
-                        <a:rPr lang="ja-JP" altLang="en-US" sz="2400" b="0" i="0" u="none" strike="noStrike" dirty="0">
-                          <a:solidFill>
-                            <a:srgbClr val="000000"/>
-                          </a:solidFill>
-                          <a:effectLst/>
-                          <a:latin typeface="Aptos Narrow" panose="020B0004020202020204" pitchFamily="34" charset="0"/>
-                        </a:rPr>
-                        <a:t>〇</a:t>
-                      </a:r>
-                      <a:endParaRPr lang="en-US" sz="2400" b="0" i="0" u="none" strike="noStrike" dirty="0">
-                        <a:solidFill>
-                          <a:srgbClr val="000000"/>
-                        </a:solidFill>
-                        <a:effectLst/>
-                        <a:latin typeface="Aptos Narrow" panose="020B0004020202020204" pitchFamily="34" charset="0"/>
-                      </a:endParaRPr>
-                    </a:p>
-                  </a:txBody>
-                  <a:tcPr marL="9525" marR="9525" marT="9525" marB="0" anchor="ctr">
-                    <a:lnL w="12700" cap="flat" cmpd="sng" algn="ctr">
-                      <a:solidFill>
-                        <a:schemeClr val="tx1"/>
-                      </a:solidFill>
-                      <a:prstDash val="solid"/>
-                      <a:round/>
-                      <a:headEnd type="none" w="med" len="med"/>
-                      <a:tailEnd type="none" w="med" len="med"/>
-                    </a:lnL>
-                    <a:lnR w="12700" cap="flat" cmpd="sng" algn="ctr">
-                      <a:solidFill>
-                        <a:schemeClr val="tx1"/>
-                      </a:solidFill>
-                      <a:prstDash val="solid"/>
-                      <a:round/>
-                      <a:headEnd type="none" w="med" len="med"/>
-                      <a:tailEnd type="none" w="med" len="med"/>
-                    </a:lnR>
-                    <a:lnT w="28575" cap="flat" cmpd="sng" algn="ctr">
-                      <a:solidFill>
-                        <a:schemeClr val="tx1"/>
-                      </a:solidFill>
-                      <a:prstDash val="solid"/>
-                      <a:round/>
-                      <a:headEnd type="none" w="med" len="med"/>
-                      <a:tailEnd type="none" w="med" len="med"/>
-                    </a:lnT>
-                    <a:lnB w="12700" cap="flat" cmpd="sng" algn="ctr">
-                      <a:solidFill>
-                        <a:schemeClr val="tx1"/>
-                      </a:solidFill>
-                      <a:prstDash val="solid"/>
-                      <a:round/>
-                      <a:headEnd type="none" w="med" len="med"/>
-                      <a:tailEnd type="none" w="med" len="med"/>
-                    </a:lnB>
-                  </a:tcPr>
-                </a:tc>
-                <a:tc>
-                  <a:txBody>
-                    <a:bodyPr/>
-                    <a:lstStyle/>
-                    <a:p>
-                      <a:pPr algn="ctr" fontAlgn="b">
-                        <a:buNone/>
-                      </a:pPr>
-                      <a:endParaRPr lang="en-US" sz="2400" b="0" i="0" u="none" strike="noStrike" dirty="0">
-                        <a:solidFill>
-                          <a:srgbClr val="000000"/>
-                        </a:solidFill>
-                        <a:effectLst/>
-                        <a:latin typeface="Aptos Narrow" panose="020B0004020202020204" pitchFamily="34" charset="0"/>
-                      </a:endParaRPr>
-                    </a:p>
-                  </a:txBody>
-                  <a:tcPr marL="9525" marR="9525" marT="9525" marB="0" anchor="ctr">
-                    <a:lnL w="12700" cap="flat" cmpd="sng" algn="ctr">
-                      <a:solidFill>
-                        <a:schemeClr val="tx1"/>
-                      </a:solidFill>
-                      <a:prstDash val="solid"/>
-                      <a:round/>
-                      <a:headEnd type="none" w="med" len="med"/>
-                      <a:tailEnd type="none" w="med" len="med"/>
-                    </a:lnL>
-                    <a:lnR w="28575" cap="flat" cmpd="sng" algn="ctr">
-                      <a:solidFill>
-                        <a:schemeClr val="tx1"/>
-                      </a:solidFill>
-                      <a:prstDash val="solid"/>
-                      <a:round/>
-                      <a:headEnd type="none" w="med" len="med"/>
-                      <a:tailEnd type="none" w="med" len="med"/>
-                    </a:lnR>
-                    <a:lnT w="28575" cap="flat" cmpd="sng" algn="ctr">
-                      <a:solidFill>
-                        <a:schemeClr val="tx1"/>
-                      </a:solidFill>
-                      <a:prstDash val="solid"/>
-                      <a:round/>
-                      <a:headEnd type="none" w="med" len="med"/>
-                      <a:tailEnd type="none" w="med" len="med"/>
-                    </a:lnT>
-                    <a:lnB w="12700" cap="flat" cmpd="sng" algn="ctr">
-                      <a:solidFill>
-                        <a:schemeClr val="tx1"/>
-                      </a:solidFill>
-                      <a:prstDash val="solid"/>
-                      <a:round/>
-                      <a:headEnd type="none" w="med" len="med"/>
-                      <a:tailEnd type="none" w="med" len="med"/>
-                    </a:lnB>
-                  </a:tcPr>
-                </a:tc>
-                <a:extLst>
-                  <a:ext uri="{0D108BD9-81ED-4DB2-BD59-A6C34878D82A}">
-                    <a16:rowId xmlns:a16="http://schemas.microsoft.com/office/drawing/2014/main" val="4180815852"/>
-                  </a:ext>
-                </a:extLst>
-              </a:tr>
-              <a:tr h="190500">
-                <a:tc>
-                  <a:txBody>
-                    <a:bodyPr/>
-                    <a:lstStyle/>
-                    <a:p>
-                      <a:pPr algn="ctr" fontAlgn="b">
-                        <a:buNone/>
-                      </a:pPr>
-                      <a:r>
-                        <a:rPr lang="en-US" sz="2400" b="0" i="0" u="none" strike="noStrike" dirty="0">
-                          <a:solidFill>
-                            <a:srgbClr val="000000"/>
-                          </a:solidFill>
-                          <a:effectLst/>
-                          <a:latin typeface="Aptos Narrow" panose="020B0004020202020204" pitchFamily="34" charset="0"/>
-                        </a:rPr>
-                        <a:t>2</a:t>
-                      </a:r>
-                    </a:p>
-                  </a:txBody>
-                  <a:tcPr marL="9525" marR="9525" marT="9525" marB="0" anchor="ctr">
-                    <a:lnL w="28575" cap="flat" cmpd="sng" algn="ctr">
-                      <a:solidFill>
-                        <a:schemeClr val="tx1"/>
-                      </a:solidFill>
-                      <a:prstDash val="solid"/>
-                      <a:round/>
-                      <a:headEnd type="none" w="med" len="med"/>
-                      <a:tailEnd type="none" w="med" len="med"/>
-                    </a:lnL>
-                    <a:lnR w="28575" cap="flat" cmpd="sng" algn="ctr">
-                      <a:solidFill>
-                        <a:schemeClr val="tx1"/>
-                      </a:solidFill>
-                      <a:prstDash val="solid"/>
-                      <a:round/>
-                      <a:headEnd type="none" w="med" len="med"/>
-                      <a:tailEnd type="none" w="med" len="med"/>
-                    </a:lnR>
-                    <a:lnT w="12700" cap="flat" cmpd="sng" algn="ctr">
-                      <a:solidFill>
-                        <a:schemeClr val="tx1"/>
-                      </a:solidFill>
-                      <a:prstDash val="solid"/>
-                      <a:round/>
-                      <a:headEnd type="none" w="med" len="med"/>
-                      <a:tailEnd type="none" w="med" len="med"/>
-                    </a:lnT>
-                    <a:lnB w="12700" cap="flat" cmpd="sng" algn="ctr">
-                      <a:solidFill>
-                        <a:schemeClr val="tx1"/>
-                      </a:solidFill>
-                      <a:prstDash val="solid"/>
-                      <a:round/>
-                      <a:headEnd type="none" w="med" len="med"/>
-                      <a:tailEnd type="none" w="med" len="med"/>
-                    </a:lnB>
-                  </a:tcPr>
-                </a:tc>
-                <a:tc>
-                  <a:txBody>
-                    <a:bodyPr/>
-                    <a:lstStyle/>
-                    <a:p>
-                      <a:pPr algn="ctr" fontAlgn="b">
-                        <a:buNone/>
-                      </a:pPr>
-                      <a:endParaRPr lang="en-US" sz="2400" b="0" i="0" u="none" strike="noStrike" dirty="0">
-                        <a:solidFill>
-                          <a:srgbClr val="000000"/>
-                        </a:solidFill>
-                        <a:effectLst/>
-                        <a:latin typeface="Aptos Narrow" panose="020B0004020202020204" pitchFamily="34" charset="0"/>
-                      </a:endParaRPr>
-                    </a:p>
-                  </a:txBody>
-                  <a:tcPr marL="9525" marR="9525" marT="9525" marB="0" anchor="ctr">
-                    <a:lnL w="28575" cap="flat" cmpd="sng" algn="ctr">
-                      <a:solidFill>
-                        <a:schemeClr val="tx1"/>
-                      </a:solidFill>
-                      <a:prstDash val="solid"/>
-                      <a:round/>
-                      <a:headEnd type="none" w="med" len="med"/>
-                      <a:tailEnd type="none" w="med" len="med"/>
-                    </a:lnL>
-                    <a:lnR w="12700" cap="flat" cmpd="sng" algn="ctr">
-                      <a:solidFill>
-                        <a:schemeClr val="tx1"/>
-                      </a:solidFill>
-                      <a:prstDash val="solid"/>
-                      <a:round/>
-                      <a:headEnd type="none" w="med" len="med"/>
-                      <a:tailEnd type="none" w="med" len="med"/>
-                    </a:lnR>
-                    <a:lnT w="12700" cap="flat" cmpd="sng" algn="ctr">
-                      <a:solidFill>
-                        <a:schemeClr val="tx1"/>
-                      </a:solidFill>
-                      <a:prstDash val="solid"/>
-                      <a:round/>
-                      <a:headEnd type="none" w="med" len="med"/>
-                      <a:tailEnd type="none" w="med" len="med"/>
-                    </a:lnT>
-                    <a:lnB w="12700" cap="flat" cmpd="sng" algn="ctr">
-                      <a:solidFill>
-                        <a:schemeClr val="tx1"/>
-                      </a:solidFill>
-                      <a:prstDash val="solid"/>
-                      <a:round/>
-                      <a:headEnd type="none" w="med" len="med"/>
-                      <a:tailEnd type="none" w="med" len="med"/>
-                    </a:lnB>
-                  </a:tcPr>
-                </a:tc>
-                <a:tc>
-                  <a:txBody>
-                    <a:bodyPr/>
-                    <a:lstStyle/>
-                    <a:p>
-                      <a:pPr marL="0" marR="0" lvl="0" indent="0" algn="ctr" defTabSz="685800" rtl="0" eaLnBrk="1" fontAlgn="b" latinLnBrk="0" hangingPunct="1">
-                        <a:lnSpc>
-                          <a:spcPct val="100000"/>
-                        </a:lnSpc>
-                        <a:spcBef>
-                          <a:spcPts val="0"/>
-                        </a:spcBef>
-                        <a:spcAft>
-                          <a:spcPts val="0"/>
-                        </a:spcAft>
-                        <a:buClrTx/>
-                        <a:buSzTx/>
-                        <a:buFontTx/>
-                        <a:buNone/>
-                        <a:tabLst/>
-                        <a:defRPr/>
-                      </a:pPr>
-                      <a:r>
-                        <a:rPr lang="ja-JP" altLang="en-US" sz="2400" b="0" i="0" u="none" strike="noStrike" dirty="0">
-                          <a:solidFill>
-                            <a:srgbClr val="000000"/>
-                          </a:solidFill>
-                          <a:effectLst/>
-                          <a:latin typeface="Aptos Narrow" panose="020B0004020202020204" pitchFamily="34" charset="0"/>
-                        </a:rPr>
-                        <a:t>〇</a:t>
-                      </a:r>
-                      <a:endParaRPr lang="en-US" sz="2400" b="0" i="0" u="none" strike="noStrike" dirty="0">
-                        <a:solidFill>
-                          <a:srgbClr val="000000"/>
-                        </a:solidFill>
-                        <a:effectLst/>
-                        <a:latin typeface="Aptos Narrow" panose="020B0004020202020204" pitchFamily="34" charset="0"/>
-                      </a:endParaRPr>
-                    </a:p>
-                  </a:txBody>
-                  <a:tcPr marL="9525" marR="9525" marT="9525" marB="0" anchor="ctr">
-                    <a:lnL w="12700" cap="flat" cmpd="sng" algn="ctr">
-                      <a:solidFill>
-                        <a:schemeClr val="tx1"/>
-                      </a:solidFill>
-                      <a:prstDash val="solid"/>
-                      <a:round/>
-                      <a:headEnd type="none" w="med" len="med"/>
-                      <a:tailEnd type="none" w="med" len="med"/>
-                    </a:lnL>
-                    <a:lnR w="12700" cap="flat" cmpd="sng" algn="ctr">
-                      <a:solidFill>
-                        <a:schemeClr val="tx1"/>
-                      </a:solidFill>
-                      <a:prstDash val="solid"/>
-                      <a:round/>
-                      <a:headEnd type="none" w="med" len="med"/>
-                      <a:tailEnd type="none" w="med" len="med"/>
-                    </a:lnR>
-                    <a:lnT w="12700" cap="flat" cmpd="sng" algn="ctr">
-                      <a:solidFill>
-                        <a:schemeClr val="tx1"/>
-                      </a:solidFill>
-                      <a:prstDash val="solid"/>
-                      <a:round/>
-                      <a:headEnd type="none" w="med" len="med"/>
-                      <a:tailEnd type="none" w="med" len="med"/>
-                    </a:lnT>
-                    <a:lnB w="12700" cap="flat" cmpd="sng" algn="ctr">
-                      <a:solidFill>
-                        <a:schemeClr val="tx1"/>
-                      </a:solidFill>
-                      <a:prstDash val="solid"/>
-                      <a:round/>
-                      <a:headEnd type="none" w="med" len="med"/>
-                      <a:tailEnd type="none" w="med" len="med"/>
-                    </a:lnB>
-                  </a:tcPr>
-                </a:tc>
-                <a:tc>
-                  <a:txBody>
-                    <a:bodyPr/>
-                    <a:lstStyle/>
-                    <a:p>
-                      <a:pPr algn="ctr" fontAlgn="b">
-                        <a:buNone/>
-                      </a:pPr>
-                      <a:endParaRPr lang="en-US" sz="2400" b="0" i="0" u="none" strike="noStrike" dirty="0">
-                        <a:solidFill>
-                          <a:srgbClr val="000000"/>
-                        </a:solidFill>
-                        <a:effectLst/>
-                        <a:latin typeface="Aptos Narrow" panose="020B0004020202020204" pitchFamily="34" charset="0"/>
-                      </a:endParaRPr>
-                    </a:p>
-                  </a:txBody>
-                  <a:tcPr marL="9525" marR="9525" marT="9525" marB="0" anchor="ctr">
-                    <a:lnL w="12700" cap="flat" cmpd="sng" algn="ctr">
-                      <a:solidFill>
-                        <a:schemeClr val="tx1"/>
-                      </a:solidFill>
-                      <a:prstDash val="solid"/>
-                      <a:round/>
-                      <a:headEnd type="none" w="med" len="med"/>
-                      <a:tailEnd type="none" w="med" len="med"/>
-                    </a:lnL>
-                    <a:lnR w="12700" cap="flat" cmpd="sng" algn="ctr">
-                      <a:solidFill>
-                        <a:schemeClr val="tx1"/>
-                      </a:solidFill>
-                      <a:prstDash val="solid"/>
-                      <a:round/>
-                      <a:headEnd type="none" w="med" len="med"/>
-                      <a:tailEnd type="none" w="med" len="med"/>
-                    </a:lnR>
-                    <a:lnT w="12700" cap="flat" cmpd="sng" algn="ctr">
-                      <a:solidFill>
-                        <a:schemeClr val="tx1"/>
-                      </a:solidFill>
-                      <a:prstDash val="solid"/>
-                      <a:round/>
-                      <a:headEnd type="none" w="med" len="med"/>
-                      <a:tailEnd type="none" w="med" len="med"/>
-                    </a:lnT>
-                    <a:lnB w="12700" cap="flat" cmpd="sng" algn="ctr">
-                      <a:solidFill>
-                        <a:schemeClr val="tx1"/>
-                      </a:solidFill>
-                      <a:prstDash val="solid"/>
-                      <a:round/>
-                      <a:headEnd type="none" w="med" len="med"/>
-                      <a:tailEnd type="none" w="med" len="med"/>
-                    </a:lnB>
-                  </a:tcPr>
-                </a:tc>
-                <a:tc>
-                  <a:txBody>
-                    <a:bodyPr/>
-                    <a:lstStyle/>
-                    <a:p>
-                      <a:pPr algn="ctr" fontAlgn="b">
-                        <a:buNone/>
-                      </a:pPr>
-                      <a:endParaRPr lang="en-US" sz="2400" b="0" i="0" u="none" strike="noStrike" dirty="0">
-                        <a:solidFill>
-                          <a:srgbClr val="000000"/>
-                        </a:solidFill>
-                        <a:effectLst/>
-                        <a:latin typeface="Aptos Narrow" panose="020B0004020202020204" pitchFamily="34" charset="0"/>
-                      </a:endParaRPr>
-                    </a:p>
-                  </a:txBody>
-                  <a:tcPr marL="9525" marR="9525" marT="9525" marB="0" anchor="ctr">
-                    <a:lnL w="12700" cap="flat" cmpd="sng" algn="ctr">
-                      <a:solidFill>
-                        <a:schemeClr val="tx1"/>
-                      </a:solidFill>
-                      <a:prstDash val="solid"/>
-                      <a:round/>
-                      <a:headEnd type="none" w="med" len="med"/>
-                      <a:tailEnd type="none" w="med" len="med"/>
-                    </a:lnL>
-                    <a:lnR w="28575" cap="flat" cmpd="sng" algn="ctr">
-                      <a:solidFill>
-                        <a:schemeClr val="tx1"/>
-                      </a:solidFill>
-                      <a:prstDash val="solid"/>
-                      <a:round/>
-                      <a:headEnd type="none" w="med" len="med"/>
-                      <a:tailEnd type="none" w="med" len="med"/>
-                    </a:lnR>
-                    <a:lnT w="12700" cap="flat" cmpd="sng" algn="ctr">
-                      <a:solidFill>
-                        <a:schemeClr val="tx1"/>
-                      </a:solidFill>
-                      <a:prstDash val="solid"/>
-                      <a:round/>
-                      <a:headEnd type="none" w="med" len="med"/>
-                      <a:tailEnd type="none" w="med" len="med"/>
-                    </a:lnT>
-                    <a:lnB w="12700" cap="flat" cmpd="sng" algn="ctr">
-                      <a:solidFill>
-                        <a:schemeClr val="tx1"/>
-                      </a:solidFill>
-                      <a:prstDash val="solid"/>
-                      <a:round/>
-                      <a:headEnd type="none" w="med" len="med"/>
-                      <a:tailEnd type="none" w="med" len="med"/>
-                    </a:lnB>
-                  </a:tcPr>
-                </a:tc>
-                <a:extLst>
-                  <a:ext uri="{0D108BD9-81ED-4DB2-BD59-A6C34878D82A}">
-                    <a16:rowId xmlns:a16="http://schemas.microsoft.com/office/drawing/2014/main" val="3575811316"/>
-                  </a:ext>
-                </a:extLst>
-              </a:tr>
-              <a:tr h="190500">
-                <a:tc>
-                  <a:txBody>
-                    <a:bodyPr/>
-                    <a:lstStyle/>
-                    <a:p>
-                      <a:pPr algn="ctr" fontAlgn="b">
-                        <a:buNone/>
-                      </a:pPr>
-                      <a:r>
-                        <a:rPr lang="en-US" sz="2400" b="0" i="0" u="none" strike="noStrike" dirty="0">
-                          <a:solidFill>
-                            <a:srgbClr val="000000"/>
-                          </a:solidFill>
-                          <a:effectLst/>
-                          <a:latin typeface="Aptos Narrow" panose="020B0004020202020204" pitchFamily="34" charset="0"/>
-                        </a:rPr>
-                        <a:t>10</a:t>
-                      </a:r>
-                    </a:p>
-                  </a:txBody>
-                  <a:tcPr marL="9525" marR="9525" marT="9525" marB="0" anchor="ctr">
-                    <a:lnL w="28575" cap="flat" cmpd="sng" algn="ctr">
-                      <a:solidFill>
-                        <a:schemeClr val="tx1"/>
-                      </a:solidFill>
-                      <a:prstDash val="solid"/>
-                      <a:round/>
-                      <a:headEnd type="none" w="med" len="med"/>
-                      <a:tailEnd type="none" w="med" len="med"/>
-                    </a:lnL>
-                    <a:lnR w="28575" cap="flat" cmpd="sng" algn="ctr">
-                      <a:solidFill>
-                        <a:schemeClr val="tx1"/>
-                      </a:solidFill>
-                      <a:prstDash val="solid"/>
-                      <a:round/>
-                      <a:headEnd type="none" w="med" len="med"/>
-                      <a:tailEnd type="none" w="med" len="med"/>
-                    </a:lnR>
-                    <a:lnT w="12700" cap="flat" cmpd="sng" algn="ctr">
-                      <a:solidFill>
-                        <a:schemeClr val="tx1"/>
-                      </a:solidFill>
-                      <a:prstDash val="solid"/>
-                      <a:round/>
-                      <a:headEnd type="none" w="med" len="med"/>
-                      <a:tailEnd type="none" w="med" len="med"/>
-                    </a:lnT>
-                    <a:lnB w="12700" cap="flat" cmpd="sng" algn="ctr">
-                      <a:solidFill>
-                        <a:schemeClr val="tx1"/>
-                      </a:solidFill>
-                      <a:prstDash val="solid"/>
-                      <a:round/>
-                      <a:headEnd type="none" w="med" len="med"/>
-                      <a:tailEnd type="none" w="med" len="med"/>
-                    </a:lnB>
-                  </a:tcPr>
-                </a:tc>
-                <a:tc>
-                  <a:txBody>
-                    <a:bodyPr/>
-                    <a:lstStyle/>
-                    <a:p>
-                      <a:pPr algn="ctr" fontAlgn="b">
-                        <a:buNone/>
-                      </a:pPr>
-                      <a:endParaRPr lang="en-US" sz="2400" b="0" i="0" u="none" strike="noStrike" dirty="0">
-                        <a:solidFill>
-                          <a:srgbClr val="000000"/>
-                        </a:solidFill>
-                        <a:effectLst/>
-                        <a:latin typeface="Aptos Narrow" panose="020B0004020202020204" pitchFamily="34" charset="0"/>
-                      </a:endParaRPr>
-                    </a:p>
-                  </a:txBody>
-                  <a:tcPr marL="9525" marR="9525" marT="9525" marB="0" anchor="ctr">
-                    <a:lnL w="28575" cap="flat" cmpd="sng" algn="ctr">
-                      <a:solidFill>
-                        <a:schemeClr val="tx1"/>
-                      </a:solidFill>
-                      <a:prstDash val="solid"/>
-                      <a:round/>
-                      <a:headEnd type="none" w="med" len="med"/>
-                      <a:tailEnd type="none" w="med" len="med"/>
-                    </a:lnL>
-                    <a:lnR w="12700" cap="flat" cmpd="sng" algn="ctr">
-                      <a:solidFill>
-                        <a:schemeClr val="tx1"/>
-                      </a:solidFill>
-                      <a:prstDash val="solid"/>
-                      <a:round/>
-                      <a:headEnd type="none" w="med" len="med"/>
-                      <a:tailEnd type="none" w="med" len="med"/>
-                    </a:lnR>
-                    <a:lnT w="12700" cap="flat" cmpd="sng" algn="ctr">
-                      <a:solidFill>
-                        <a:schemeClr val="tx1"/>
-                      </a:solidFill>
-                      <a:prstDash val="solid"/>
-                      <a:round/>
-                      <a:headEnd type="none" w="med" len="med"/>
-                      <a:tailEnd type="none" w="med" len="med"/>
-                    </a:lnT>
-                    <a:lnB w="12700" cap="flat" cmpd="sng" algn="ctr">
-                      <a:solidFill>
-                        <a:schemeClr val="tx1"/>
-                      </a:solidFill>
-                      <a:prstDash val="solid"/>
-                      <a:round/>
-                      <a:headEnd type="none" w="med" len="med"/>
-                      <a:tailEnd type="none" w="med" len="med"/>
-                    </a:lnB>
-                  </a:tcPr>
-                </a:tc>
-                <a:tc>
-                  <a:txBody>
-                    <a:bodyPr/>
-                    <a:lstStyle/>
-                    <a:p>
-                      <a:pPr algn="ctr" fontAlgn="b">
-                        <a:buNone/>
-                      </a:pPr>
-                      <a:r>
-                        <a:rPr lang="ja-JP" altLang="en-US" sz="2400" b="0" i="0" u="none" strike="noStrike" dirty="0">
-                          <a:solidFill>
-                            <a:srgbClr val="000000"/>
-                          </a:solidFill>
-                          <a:effectLst/>
-                          <a:latin typeface="Aptos Narrow" panose="020B0004020202020204" pitchFamily="34" charset="0"/>
-                        </a:rPr>
-                        <a:t>〇</a:t>
-                      </a:r>
-                      <a:endParaRPr lang="en-US" sz="2400" b="0" i="0" u="none" strike="noStrike" dirty="0">
-                        <a:solidFill>
-                          <a:srgbClr val="000000"/>
-                        </a:solidFill>
-                        <a:effectLst/>
-                        <a:latin typeface="Aptos Narrow" panose="020B0004020202020204" pitchFamily="34" charset="0"/>
-                      </a:endParaRPr>
-                    </a:p>
-                  </a:txBody>
-                  <a:tcPr marL="9525" marR="9525" marT="9525" marB="0" anchor="ctr">
-                    <a:lnL w="12700" cap="flat" cmpd="sng" algn="ctr">
-                      <a:solidFill>
-                        <a:schemeClr val="tx1"/>
-                      </a:solidFill>
-                      <a:prstDash val="solid"/>
-                      <a:round/>
-                      <a:headEnd type="none" w="med" len="med"/>
-                      <a:tailEnd type="none" w="med" len="med"/>
-                    </a:lnL>
-                    <a:lnR w="12700" cap="flat" cmpd="sng" algn="ctr">
-                      <a:solidFill>
-                        <a:schemeClr val="tx1"/>
-                      </a:solidFill>
-                      <a:prstDash val="solid"/>
-                      <a:round/>
-                      <a:headEnd type="none" w="med" len="med"/>
-                      <a:tailEnd type="none" w="med" len="med"/>
-                    </a:lnR>
-                    <a:lnT w="12700" cap="flat" cmpd="sng" algn="ctr">
-                      <a:solidFill>
-                        <a:schemeClr val="tx1"/>
-                      </a:solidFill>
-                      <a:prstDash val="solid"/>
-                      <a:round/>
-                      <a:headEnd type="none" w="med" len="med"/>
-                      <a:tailEnd type="none" w="med" len="med"/>
-                    </a:lnT>
-                    <a:lnB w="12700" cap="flat" cmpd="sng" algn="ctr">
-                      <a:solidFill>
-                        <a:schemeClr val="tx1"/>
-                      </a:solidFill>
-                      <a:prstDash val="solid"/>
-                      <a:round/>
-                      <a:headEnd type="none" w="med" len="med"/>
-                      <a:tailEnd type="none" w="med" len="med"/>
-                    </a:lnB>
-                  </a:tcPr>
-                </a:tc>
-                <a:tc>
-                  <a:txBody>
-                    <a:bodyPr/>
-                    <a:lstStyle/>
-                    <a:p>
-                      <a:pPr marL="0" marR="0" lvl="0" indent="0" algn="ctr" defTabSz="685800" rtl="0" eaLnBrk="1" fontAlgn="b" latinLnBrk="0" hangingPunct="1">
-                        <a:lnSpc>
-                          <a:spcPct val="100000"/>
-                        </a:lnSpc>
-                        <a:spcBef>
-                          <a:spcPts val="0"/>
-                        </a:spcBef>
-                        <a:spcAft>
-                          <a:spcPts val="0"/>
-                        </a:spcAft>
-                        <a:buClrTx/>
-                        <a:buSzTx/>
-                        <a:buFontTx/>
-                        <a:buNone/>
-                        <a:tabLst/>
-                        <a:defRPr/>
-                      </a:pPr>
-                      <a:endParaRPr lang="en-US" sz="2400" b="0" i="0" u="none" strike="noStrike" dirty="0">
-                        <a:solidFill>
-                          <a:srgbClr val="000000"/>
-                        </a:solidFill>
-                        <a:effectLst/>
-                        <a:latin typeface="Aptos Narrow" panose="020B0004020202020204" pitchFamily="34" charset="0"/>
-                      </a:endParaRPr>
-                    </a:p>
-                  </a:txBody>
-                  <a:tcPr marL="9525" marR="9525" marT="9525" marB="0" anchor="ctr">
-                    <a:lnL w="12700" cap="flat" cmpd="sng" algn="ctr">
-                      <a:solidFill>
-                        <a:schemeClr val="tx1"/>
-                      </a:solidFill>
-                      <a:prstDash val="solid"/>
-                      <a:round/>
-                      <a:headEnd type="none" w="med" len="med"/>
-                      <a:tailEnd type="none" w="med" len="med"/>
-                    </a:lnL>
-                    <a:lnR w="12700" cap="flat" cmpd="sng" algn="ctr">
-                      <a:solidFill>
-                        <a:schemeClr val="tx1"/>
-                      </a:solidFill>
-                      <a:prstDash val="solid"/>
-                      <a:round/>
-                      <a:headEnd type="none" w="med" len="med"/>
-                      <a:tailEnd type="none" w="med" len="med"/>
-                    </a:lnR>
-                    <a:lnT w="12700" cap="flat" cmpd="sng" algn="ctr">
-                      <a:solidFill>
-                        <a:schemeClr val="tx1"/>
-                      </a:solidFill>
-                      <a:prstDash val="solid"/>
-                      <a:round/>
-                      <a:headEnd type="none" w="med" len="med"/>
-                      <a:tailEnd type="none" w="med" len="med"/>
-                    </a:lnT>
-                    <a:lnB w="12700" cap="flat" cmpd="sng" algn="ctr">
-                      <a:solidFill>
-                        <a:schemeClr val="tx1"/>
-                      </a:solidFill>
-                      <a:prstDash val="solid"/>
-                      <a:round/>
-                      <a:headEnd type="none" w="med" len="med"/>
-                      <a:tailEnd type="none" w="med" len="med"/>
-                    </a:lnB>
-                  </a:tcPr>
-                </a:tc>
-                <a:tc>
-                  <a:txBody>
-                    <a:bodyPr/>
-                    <a:lstStyle/>
-                    <a:p>
-                      <a:pPr algn="ctr" fontAlgn="b">
-                        <a:buNone/>
-                      </a:pPr>
-                      <a:endParaRPr lang="en-US" sz="2400" b="0" i="0" u="none" strike="noStrike" dirty="0">
-                        <a:solidFill>
-                          <a:srgbClr val="000000"/>
-                        </a:solidFill>
-                        <a:effectLst/>
-                        <a:latin typeface="Aptos Narrow" panose="020B0004020202020204" pitchFamily="34" charset="0"/>
-                      </a:endParaRPr>
-                    </a:p>
-                  </a:txBody>
-                  <a:tcPr marL="9525" marR="9525" marT="9525" marB="0" anchor="ctr">
-                    <a:lnL w="12700" cap="flat" cmpd="sng" algn="ctr">
-                      <a:solidFill>
-                        <a:schemeClr val="tx1"/>
-                      </a:solidFill>
-                      <a:prstDash val="solid"/>
-                      <a:round/>
-                      <a:headEnd type="none" w="med" len="med"/>
-                      <a:tailEnd type="none" w="med" len="med"/>
-                    </a:lnL>
-                    <a:lnR w="28575" cap="flat" cmpd="sng" algn="ctr">
-                      <a:solidFill>
-                        <a:schemeClr val="tx1"/>
-                      </a:solidFill>
-                      <a:prstDash val="solid"/>
-                      <a:round/>
-                      <a:headEnd type="none" w="med" len="med"/>
-                      <a:tailEnd type="none" w="med" len="med"/>
-                    </a:lnR>
-                    <a:lnT w="12700" cap="flat" cmpd="sng" algn="ctr">
-                      <a:solidFill>
-                        <a:schemeClr val="tx1"/>
-                      </a:solidFill>
-                      <a:prstDash val="solid"/>
-                      <a:round/>
-                      <a:headEnd type="none" w="med" len="med"/>
-                      <a:tailEnd type="none" w="med" len="med"/>
-                    </a:lnT>
-                    <a:lnB w="12700" cap="flat" cmpd="sng" algn="ctr">
-                      <a:solidFill>
-                        <a:schemeClr val="tx1"/>
-                      </a:solidFill>
-                      <a:prstDash val="solid"/>
-                      <a:round/>
-                      <a:headEnd type="none" w="med" len="med"/>
-                      <a:tailEnd type="none" w="med" len="med"/>
-                    </a:lnB>
-                  </a:tcPr>
-                </a:tc>
-                <a:extLst>
-                  <a:ext uri="{0D108BD9-81ED-4DB2-BD59-A6C34878D82A}">
-                    <a16:rowId xmlns:a16="http://schemas.microsoft.com/office/drawing/2014/main" val="421517948"/>
-                  </a:ext>
-                </a:extLst>
-              </a:tr>
-              <a:tr h="190500">
-                <a:tc>
-                  <a:txBody>
-                    <a:bodyPr/>
-                    <a:lstStyle/>
-                    <a:p>
-                      <a:pPr algn="ctr" fontAlgn="b">
-                        <a:buNone/>
-                      </a:pPr>
-                      <a:r>
-                        <a:rPr lang="en-US" sz="2400" b="0" i="0" u="none" strike="noStrike" dirty="0">
-                          <a:solidFill>
-                            <a:srgbClr val="000000"/>
-                          </a:solidFill>
-                          <a:effectLst/>
-                          <a:latin typeface="Aptos Narrow" panose="020B0004020202020204" pitchFamily="34" charset="0"/>
-                        </a:rPr>
-                        <a:t>18</a:t>
-                      </a:r>
-                    </a:p>
-                  </a:txBody>
-                  <a:tcPr marL="9525" marR="9525" marT="9525" marB="0" anchor="ctr">
-                    <a:lnL w="28575" cap="flat" cmpd="sng" algn="ctr">
-                      <a:solidFill>
-                        <a:schemeClr val="tx1"/>
-                      </a:solidFill>
-                      <a:prstDash val="solid"/>
-                      <a:round/>
-                      <a:headEnd type="none" w="med" len="med"/>
-                      <a:tailEnd type="none" w="med" len="med"/>
-                    </a:lnL>
-                    <a:lnR w="28575" cap="flat" cmpd="sng" algn="ctr">
-                      <a:solidFill>
-                        <a:schemeClr val="tx1"/>
-                      </a:solidFill>
-                      <a:prstDash val="solid"/>
-                      <a:round/>
-                      <a:headEnd type="none" w="med" len="med"/>
-                      <a:tailEnd type="none" w="med" len="med"/>
-                    </a:lnR>
-                    <a:lnT w="12700" cap="flat" cmpd="sng" algn="ctr">
-                      <a:solidFill>
-                        <a:schemeClr val="tx1"/>
-                      </a:solidFill>
-                      <a:prstDash val="solid"/>
-                      <a:round/>
-                      <a:headEnd type="none" w="med" len="med"/>
-                      <a:tailEnd type="none" w="med" len="med"/>
-                    </a:lnT>
-                    <a:lnB w="12700" cap="flat" cmpd="sng" algn="ctr">
-                      <a:solidFill>
-                        <a:schemeClr val="tx1"/>
-                      </a:solidFill>
-                      <a:prstDash val="solid"/>
-                      <a:round/>
-                      <a:headEnd type="none" w="med" len="med"/>
-                      <a:tailEnd type="none" w="med" len="med"/>
-                    </a:lnB>
-                  </a:tcPr>
-                </a:tc>
-                <a:tc>
-                  <a:txBody>
-                    <a:bodyPr/>
-                    <a:lstStyle/>
-                    <a:p>
-                      <a:pPr algn="ctr" fontAlgn="b">
-                        <a:buNone/>
-                      </a:pPr>
-                      <a:endParaRPr lang="en-US" sz="2400" b="0" i="0" u="none" strike="noStrike">
-                        <a:solidFill>
-                          <a:srgbClr val="000000"/>
-                        </a:solidFill>
-                        <a:effectLst/>
-                        <a:latin typeface="Aptos Narrow" panose="020B0004020202020204" pitchFamily="34" charset="0"/>
-                      </a:endParaRPr>
-                    </a:p>
-                  </a:txBody>
-                  <a:tcPr marL="9525" marR="9525" marT="9525" marB="0" anchor="ctr">
-                    <a:lnL w="28575" cap="flat" cmpd="sng" algn="ctr">
-                      <a:solidFill>
-                        <a:schemeClr val="tx1"/>
-                      </a:solidFill>
-                      <a:prstDash val="solid"/>
-                      <a:round/>
-                      <a:headEnd type="none" w="med" len="med"/>
-                      <a:tailEnd type="none" w="med" len="med"/>
-                    </a:lnL>
-                    <a:lnR w="12700" cap="flat" cmpd="sng" algn="ctr">
-                      <a:solidFill>
-                        <a:schemeClr val="tx1"/>
-                      </a:solidFill>
-                      <a:prstDash val="solid"/>
-                      <a:round/>
-                      <a:headEnd type="none" w="med" len="med"/>
-                      <a:tailEnd type="none" w="med" len="med"/>
-                    </a:lnR>
-                    <a:lnT w="12700" cap="flat" cmpd="sng" algn="ctr">
-                      <a:solidFill>
-                        <a:schemeClr val="tx1"/>
-                      </a:solidFill>
-                      <a:prstDash val="solid"/>
-                      <a:round/>
-                      <a:headEnd type="none" w="med" len="med"/>
-                      <a:tailEnd type="none" w="med" len="med"/>
-                    </a:lnT>
-                    <a:lnB w="12700" cap="flat" cmpd="sng" algn="ctr">
-                      <a:solidFill>
-                        <a:schemeClr val="tx1"/>
-                      </a:solidFill>
-                      <a:prstDash val="solid"/>
-                      <a:round/>
-                      <a:headEnd type="none" w="med" len="med"/>
-                      <a:tailEnd type="none" w="med" len="med"/>
-                    </a:lnB>
-                  </a:tcPr>
-                </a:tc>
-                <a:tc>
-                  <a:txBody>
-                    <a:bodyPr/>
-                    <a:lstStyle/>
-                    <a:p>
-                      <a:pPr marL="0" marR="0" lvl="0" indent="0" algn="ctr" defTabSz="685800" rtl="0" eaLnBrk="1" fontAlgn="b" latinLnBrk="0" hangingPunct="1">
-                        <a:lnSpc>
-                          <a:spcPct val="100000"/>
-                        </a:lnSpc>
-                        <a:spcBef>
-                          <a:spcPts val="0"/>
-                        </a:spcBef>
-                        <a:spcAft>
-                          <a:spcPts val="0"/>
-                        </a:spcAft>
-                        <a:buClrTx/>
-                        <a:buSzTx/>
-                        <a:buFontTx/>
-                        <a:buNone/>
-                        <a:tabLst/>
-                        <a:defRPr/>
-                      </a:pPr>
-                      <a:r>
-                        <a:rPr lang="ja-JP" altLang="en-US" sz="2400" b="0" i="0" u="none" strike="noStrike" dirty="0">
-                          <a:solidFill>
-                            <a:srgbClr val="000000"/>
-                          </a:solidFill>
-                          <a:effectLst/>
-                          <a:latin typeface="Aptos Narrow" panose="020B0004020202020204" pitchFamily="34" charset="0"/>
-                        </a:rPr>
-                        <a:t>〇</a:t>
-                      </a:r>
-                      <a:endParaRPr lang="en-US" sz="2400" b="0" i="0" u="none" strike="noStrike" dirty="0">
-                        <a:solidFill>
-                          <a:srgbClr val="000000"/>
-                        </a:solidFill>
-                        <a:effectLst/>
-                        <a:latin typeface="Aptos Narrow" panose="020B0004020202020204" pitchFamily="34" charset="0"/>
-                      </a:endParaRPr>
-                    </a:p>
-                  </a:txBody>
-                  <a:tcPr marL="9525" marR="9525" marT="9525" marB="0" anchor="ctr">
-                    <a:lnL w="12700" cap="flat" cmpd="sng" algn="ctr">
-                      <a:solidFill>
-                        <a:schemeClr val="tx1"/>
-                      </a:solidFill>
-                      <a:prstDash val="solid"/>
-                      <a:round/>
-                      <a:headEnd type="none" w="med" len="med"/>
-                      <a:tailEnd type="none" w="med" len="med"/>
-                    </a:lnL>
-                    <a:lnR w="12700" cap="flat" cmpd="sng" algn="ctr">
-                      <a:solidFill>
-                        <a:schemeClr val="tx1"/>
-                      </a:solidFill>
-                      <a:prstDash val="solid"/>
-                      <a:round/>
-                      <a:headEnd type="none" w="med" len="med"/>
-                      <a:tailEnd type="none" w="med" len="med"/>
-                    </a:lnR>
-                    <a:lnT w="12700" cap="flat" cmpd="sng" algn="ctr">
-                      <a:solidFill>
-                        <a:schemeClr val="tx1"/>
-                      </a:solidFill>
-                      <a:prstDash val="solid"/>
-                      <a:round/>
-                      <a:headEnd type="none" w="med" len="med"/>
-                      <a:tailEnd type="none" w="med" len="med"/>
-                    </a:lnT>
-                    <a:lnB w="12700" cap="flat" cmpd="sng" algn="ctr">
-                      <a:solidFill>
-                        <a:schemeClr val="tx1"/>
-                      </a:solidFill>
-                      <a:prstDash val="solid"/>
-                      <a:round/>
-                      <a:headEnd type="none" w="med" len="med"/>
-                      <a:tailEnd type="none" w="med" len="med"/>
-                    </a:lnB>
-                  </a:tcPr>
-                </a:tc>
-                <a:tc>
-                  <a:txBody>
-                    <a:bodyPr/>
-                    <a:lstStyle/>
-                    <a:p>
-                      <a:pPr algn="ctr" fontAlgn="b">
-                        <a:buNone/>
-                      </a:pPr>
-                      <a:endParaRPr lang="en-US" sz="2400" b="0" i="0" u="none" strike="noStrike" dirty="0">
-                        <a:solidFill>
-                          <a:srgbClr val="000000"/>
-                        </a:solidFill>
-                        <a:effectLst/>
-                        <a:latin typeface="Aptos Narrow" panose="020B0004020202020204" pitchFamily="34" charset="0"/>
-                      </a:endParaRPr>
-                    </a:p>
-                  </a:txBody>
-                  <a:tcPr marL="9525" marR="9525" marT="9525" marB="0" anchor="ctr">
-                    <a:lnL w="12700" cap="flat" cmpd="sng" algn="ctr">
-                      <a:solidFill>
-                        <a:schemeClr val="tx1"/>
-                      </a:solidFill>
-                      <a:prstDash val="solid"/>
-                      <a:round/>
-                      <a:headEnd type="none" w="med" len="med"/>
-                      <a:tailEnd type="none" w="med" len="med"/>
-                    </a:lnL>
-                    <a:lnR w="12700" cap="flat" cmpd="sng" algn="ctr">
-                      <a:solidFill>
-                        <a:schemeClr val="tx1"/>
-                      </a:solidFill>
-                      <a:prstDash val="solid"/>
-                      <a:round/>
-                      <a:headEnd type="none" w="med" len="med"/>
-                      <a:tailEnd type="none" w="med" len="med"/>
-                    </a:lnR>
-                    <a:lnT w="12700" cap="flat" cmpd="sng" algn="ctr">
-                      <a:solidFill>
-                        <a:schemeClr val="tx1"/>
-                      </a:solidFill>
-                      <a:prstDash val="solid"/>
-                      <a:round/>
-                      <a:headEnd type="none" w="med" len="med"/>
-                      <a:tailEnd type="none" w="med" len="med"/>
-                    </a:lnT>
-                    <a:lnB w="12700" cap="flat" cmpd="sng" algn="ctr">
-                      <a:solidFill>
-                        <a:schemeClr val="tx1"/>
-                      </a:solidFill>
-                      <a:prstDash val="solid"/>
-                      <a:round/>
-                      <a:headEnd type="none" w="med" len="med"/>
-                      <a:tailEnd type="none" w="med" len="med"/>
-                    </a:lnB>
-                  </a:tcPr>
-                </a:tc>
-                <a:tc>
-                  <a:txBody>
-                    <a:bodyPr/>
-                    <a:lstStyle/>
-                    <a:p>
-                      <a:pPr algn="ctr" fontAlgn="b">
-                        <a:buNone/>
-                      </a:pPr>
-                      <a:endParaRPr lang="en-US" sz="2400" b="0" i="0" u="none" strike="noStrike" dirty="0">
-                        <a:solidFill>
-                          <a:srgbClr val="000000"/>
-                        </a:solidFill>
-                        <a:effectLst/>
-                        <a:latin typeface="Aptos Narrow" panose="020B0004020202020204" pitchFamily="34" charset="0"/>
-                      </a:endParaRPr>
-                    </a:p>
-                  </a:txBody>
-                  <a:tcPr marL="9525" marR="9525" marT="9525" marB="0" anchor="ctr">
-                    <a:lnL w="12700" cap="flat" cmpd="sng" algn="ctr">
-                      <a:solidFill>
-                        <a:schemeClr val="tx1"/>
-                      </a:solidFill>
-                      <a:prstDash val="solid"/>
-                      <a:round/>
-                      <a:headEnd type="none" w="med" len="med"/>
-                      <a:tailEnd type="none" w="med" len="med"/>
-                    </a:lnL>
-                    <a:lnR w="28575" cap="flat" cmpd="sng" algn="ctr">
-                      <a:solidFill>
-                        <a:schemeClr val="tx1"/>
-                      </a:solidFill>
-                      <a:prstDash val="solid"/>
-                      <a:round/>
-                      <a:headEnd type="none" w="med" len="med"/>
-                      <a:tailEnd type="none" w="med" len="med"/>
-                    </a:lnR>
-                    <a:lnT w="12700" cap="flat" cmpd="sng" algn="ctr">
-                      <a:solidFill>
-                        <a:schemeClr val="tx1"/>
-                      </a:solidFill>
-                      <a:prstDash val="solid"/>
-                      <a:round/>
-                      <a:headEnd type="none" w="med" len="med"/>
-                      <a:tailEnd type="none" w="med" len="med"/>
-                    </a:lnT>
-                    <a:lnB w="12700" cap="flat" cmpd="sng" algn="ctr">
-                      <a:solidFill>
-                        <a:schemeClr val="tx1"/>
-                      </a:solidFill>
-                      <a:prstDash val="solid"/>
-                      <a:round/>
-                      <a:headEnd type="none" w="med" len="med"/>
-                      <a:tailEnd type="none" w="med" len="med"/>
-                    </a:lnB>
-                  </a:tcPr>
-                </a:tc>
-                <a:extLst>
-                  <a:ext uri="{0D108BD9-81ED-4DB2-BD59-A6C34878D82A}">
-                    <a16:rowId xmlns:a16="http://schemas.microsoft.com/office/drawing/2014/main" val="464569289"/>
-                  </a:ext>
-                </a:extLst>
-              </a:tr>
-              <a:tr h="190500">
-                <a:tc>
-                  <a:txBody>
-                    <a:bodyPr/>
-                    <a:lstStyle/>
-                    <a:p>
-                      <a:pPr algn="ctr" fontAlgn="b">
-                        <a:buNone/>
-                      </a:pPr>
-                      <a:r>
-                        <a:rPr lang="en-US" sz="2400" b="0" i="0" u="none" strike="noStrike" dirty="0">
-                          <a:solidFill>
-                            <a:srgbClr val="000000"/>
-                          </a:solidFill>
-                          <a:effectLst/>
-                          <a:latin typeface="Aptos Narrow" panose="020B0004020202020204" pitchFamily="34" charset="0"/>
-                        </a:rPr>
-                        <a:t>26</a:t>
-                      </a:r>
-                    </a:p>
-                  </a:txBody>
-                  <a:tcPr marL="9525" marR="9525" marT="9525" marB="0" anchor="ctr">
-                    <a:lnL w="28575" cap="flat" cmpd="sng" algn="ctr">
-                      <a:solidFill>
-                        <a:schemeClr val="tx1"/>
-                      </a:solidFill>
-                      <a:prstDash val="solid"/>
-                      <a:round/>
-                      <a:headEnd type="none" w="med" len="med"/>
-                      <a:tailEnd type="none" w="med" len="med"/>
-                    </a:lnL>
-                    <a:lnR w="28575" cap="flat" cmpd="sng" algn="ctr">
-                      <a:solidFill>
-                        <a:schemeClr val="tx1"/>
-                      </a:solidFill>
-                      <a:prstDash val="solid"/>
-                      <a:round/>
-                      <a:headEnd type="none" w="med" len="med"/>
-                      <a:tailEnd type="none" w="med" len="med"/>
-                    </a:lnR>
-                    <a:lnT w="12700" cap="flat" cmpd="sng" algn="ctr">
-                      <a:solidFill>
-                        <a:schemeClr val="tx1"/>
-                      </a:solidFill>
-                      <a:prstDash val="solid"/>
-                      <a:round/>
-                      <a:headEnd type="none" w="med" len="med"/>
-                      <a:tailEnd type="none" w="med" len="med"/>
-                    </a:lnT>
-                    <a:lnB w="12700" cap="flat" cmpd="sng" algn="ctr">
-                      <a:solidFill>
-                        <a:schemeClr val="tx1"/>
-                      </a:solidFill>
-                      <a:prstDash val="solid"/>
-                      <a:round/>
-                      <a:headEnd type="none" w="med" len="med"/>
-                      <a:tailEnd type="none" w="med" len="med"/>
-                    </a:lnB>
-                  </a:tcPr>
-                </a:tc>
-                <a:tc>
-                  <a:txBody>
-                    <a:bodyPr/>
-                    <a:lstStyle/>
-                    <a:p>
-                      <a:pPr algn="ctr" fontAlgn="b">
-                        <a:buNone/>
-                      </a:pPr>
-                      <a:endParaRPr lang="en-US" sz="2400" b="0" i="0" u="none" strike="noStrike" dirty="0">
-                        <a:solidFill>
-                          <a:srgbClr val="000000"/>
-                        </a:solidFill>
-                        <a:effectLst/>
-                        <a:latin typeface="Aptos Narrow" panose="020B0004020202020204" pitchFamily="34" charset="0"/>
-                      </a:endParaRPr>
-                    </a:p>
-                  </a:txBody>
-                  <a:tcPr marL="9525" marR="9525" marT="9525" marB="0" anchor="ctr">
-                    <a:lnL w="28575" cap="flat" cmpd="sng" algn="ctr">
-                      <a:solidFill>
-                        <a:schemeClr val="tx1"/>
-                      </a:solidFill>
-                      <a:prstDash val="solid"/>
-                      <a:round/>
-                      <a:headEnd type="none" w="med" len="med"/>
-                      <a:tailEnd type="none" w="med" len="med"/>
-                    </a:lnL>
-                    <a:lnR w="12700" cap="flat" cmpd="sng" algn="ctr">
-                      <a:solidFill>
-                        <a:schemeClr val="tx1"/>
-                      </a:solidFill>
-                      <a:prstDash val="solid"/>
-                      <a:round/>
-                      <a:headEnd type="none" w="med" len="med"/>
-                      <a:tailEnd type="none" w="med" len="med"/>
-                    </a:lnR>
-                    <a:lnT w="12700" cap="flat" cmpd="sng" algn="ctr">
-                      <a:solidFill>
-                        <a:schemeClr val="tx1"/>
-                      </a:solidFill>
-                      <a:prstDash val="solid"/>
-                      <a:round/>
-                      <a:headEnd type="none" w="med" len="med"/>
-                      <a:tailEnd type="none" w="med" len="med"/>
-                    </a:lnT>
-                    <a:lnB w="12700" cap="flat" cmpd="sng" algn="ctr">
-                      <a:solidFill>
-                        <a:schemeClr val="tx1"/>
-                      </a:solidFill>
-                      <a:prstDash val="solid"/>
-                      <a:round/>
-                      <a:headEnd type="none" w="med" len="med"/>
-                      <a:tailEnd type="none" w="med" len="med"/>
-                    </a:lnB>
-                  </a:tcPr>
-                </a:tc>
-                <a:tc>
-                  <a:txBody>
-                    <a:bodyPr/>
-                    <a:lstStyle/>
-                    <a:p>
-                      <a:pPr marL="0" marR="0" lvl="0" indent="0" algn="ctr" defTabSz="685800" rtl="0" eaLnBrk="1" fontAlgn="b" latinLnBrk="0" hangingPunct="1">
-                        <a:lnSpc>
-                          <a:spcPct val="100000"/>
-                        </a:lnSpc>
-                        <a:spcBef>
-                          <a:spcPts val="0"/>
-                        </a:spcBef>
-                        <a:spcAft>
-                          <a:spcPts val="0"/>
-                        </a:spcAft>
-                        <a:buClrTx/>
-                        <a:buSzTx/>
-                        <a:buFontTx/>
-                        <a:buNone/>
-                        <a:tabLst/>
-                        <a:defRPr/>
-                      </a:pPr>
-                      <a:r>
-                        <a:rPr lang="ja-JP" altLang="en-US" sz="2400" b="0" i="0" u="none" strike="noStrike" dirty="0">
-                          <a:solidFill>
-                            <a:srgbClr val="000000"/>
-                          </a:solidFill>
-                          <a:effectLst/>
-                          <a:latin typeface="Aptos Narrow" panose="020B0004020202020204" pitchFamily="34" charset="0"/>
-                        </a:rPr>
-                        <a:t>〇</a:t>
-                      </a:r>
-                      <a:endParaRPr lang="en-US" sz="2400" b="0" i="0" u="none" strike="noStrike" dirty="0">
-                        <a:solidFill>
-                          <a:srgbClr val="000000"/>
-                        </a:solidFill>
-                        <a:effectLst/>
-                        <a:latin typeface="Aptos Narrow" panose="020B0004020202020204" pitchFamily="34" charset="0"/>
-                      </a:endParaRPr>
-                    </a:p>
-                  </a:txBody>
-                  <a:tcPr marL="9525" marR="9525" marT="9525" marB="0" anchor="ctr">
-                    <a:lnL w="12700" cap="flat" cmpd="sng" algn="ctr">
-                      <a:solidFill>
-                        <a:schemeClr val="tx1"/>
-                      </a:solidFill>
-                      <a:prstDash val="solid"/>
-                      <a:round/>
-                      <a:headEnd type="none" w="med" len="med"/>
-                      <a:tailEnd type="none" w="med" len="med"/>
-                    </a:lnL>
-                    <a:lnR w="12700" cap="flat" cmpd="sng" algn="ctr">
-                      <a:solidFill>
-                        <a:schemeClr val="tx1"/>
-                      </a:solidFill>
-                      <a:prstDash val="solid"/>
-                      <a:round/>
-                      <a:headEnd type="none" w="med" len="med"/>
-                      <a:tailEnd type="none" w="med" len="med"/>
-                    </a:lnR>
-                    <a:lnT w="12700" cap="flat" cmpd="sng" algn="ctr">
-                      <a:solidFill>
-                        <a:schemeClr val="tx1"/>
-                      </a:solidFill>
-                      <a:prstDash val="solid"/>
-                      <a:round/>
-                      <a:headEnd type="none" w="med" len="med"/>
-                      <a:tailEnd type="none" w="med" len="med"/>
-                    </a:lnT>
-                    <a:lnB w="12700" cap="flat" cmpd="sng" algn="ctr">
-                      <a:solidFill>
-                        <a:schemeClr val="tx1"/>
-                      </a:solidFill>
-                      <a:prstDash val="solid"/>
-                      <a:round/>
-                      <a:headEnd type="none" w="med" len="med"/>
-                      <a:tailEnd type="none" w="med" len="med"/>
-                    </a:lnB>
-                  </a:tcPr>
-                </a:tc>
-                <a:tc>
-                  <a:txBody>
-                    <a:bodyPr/>
-                    <a:lstStyle/>
-                    <a:p>
-                      <a:pPr algn="ctr" fontAlgn="b">
-                        <a:buNone/>
-                      </a:pPr>
-                      <a:endParaRPr lang="en-US" sz="2400" b="0" i="0" u="none" strike="noStrike" dirty="0">
-                        <a:solidFill>
-                          <a:srgbClr val="000000"/>
-                        </a:solidFill>
-                        <a:effectLst/>
-                        <a:latin typeface="Aptos Narrow" panose="020B0004020202020204" pitchFamily="34" charset="0"/>
-                      </a:endParaRPr>
-                    </a:p>
-                  </a:txBody>
-                  <a:tcPr marL="9525" marR="9525" marT="9525" marB="0" anchor="ctr">
-                    <a:lnL w="12700" cap="flat" cmpd="sng" algn="ctr">
-                      <a:solidFill>
-                        <a:schemeClr val="tx1"/>
-                      </a:solidFill>
-                      <a:prstDash val="solid"/>
-                      <a:round/>
-                      <a:headEnd type="none" w="med" len="med"/>
-                      <a:tailEnd type="none" w="med" len="med"/>
-                    </a:lnL>
-                    <a:lnR w="12700" cap="flat" cmpd="sng" algn="ctr">
-                      <a:solidFill>
-                        <a:schemeClr val="tx1"/>
-                      </a:solidFill>
-                      <a:prstDash val="solid"/>
-                      <a:round/>
-                      <a:headEnd type="none" w="med" len="med"/>
-                      <a:tailEnd type="none" w="med" len="med"/>
-                    </a:lnR>
-                    <a:lnT w="12700" cap="flat" cmpd="sng" algn="ctr">
-                      <a:solidFill>
-                        <a:schemeClr val="tx1"/>
-                      </a:solidFill>
-                      <a:prstDash val="solid"/>
-                      <a:round/>
-                      <a:headEnd type="none" w="med" len="med"/>
-                      <a:tailEnd type="none" w="med" len="med"/>
-                    </a:lnT>
-                    <a:lnB w="12700" cap="flat" cmpd="sng" algn="ctr">
-                      <a:solidFill>
-                        <a:schemeClr val="tx1"/>
-                      </a:solidFill>
-                      <a:prstDash val="solid"/>
-                      <a:round/>
-                      <a:headEnd type="none" w="med" len="med"/>
-                      <a:tailEnd type="none" w="med" len="med"/>
-                    </a:lnB>
-                  </a:tcPr>
-                </a:tc>
-                <a:tc>
-                  <a:txBody>
-                    <a:bodyPr/>
-                    <a:lstStyle/>
-                    <a:p>
-                      <a:pPr algn="ctr" fontAlgn="b">
-                        <a:buNone/>
-                      </a:pPr>
-                      <a:endParaRPr lang="en-US" sz="2400" b="0" i="0" u="none" strike="noStrike">
-                        <a:solidFill>
-                          <a:srgbClr val="000000"/>
-                        </a:solidFill>
-                        <a:effectLst/>
-                        <a:latin typeface="Aptos Narrow" panose="020B0004020202020204" pitchFamily="34" charset="0"/>
-                      </a:endParaRPr>
-                    </a:p>
-                  </a:txBody>
-                  <a:tcPr marL="9525" marR="9525" marT="9525" marB="0" anchor="ctr">
-                    <a:lnL w="12700" cap="flat" cmpd="sng" algn="ctr">
-                      <a:solidFill>
-                        <a:schemeClr val="tx1"/>
-                      </a:solidFill>
-                      <a:prstDash val="solid"/>
-                      <a:round/>
-                      <a:headEnd type="none" w="med" len="med"/>
-                      <a:tailEnd type="none" w="med" len="med"/>
-                    </a:lnL>
-                    <a:lnR w="28575" cap="flat" cmpd="sng" algn="ctr">
-                      <a:solidFill>
-                        <a:schemeClr val="tx1"/>
-                      </a:solidFill>
-                      <a:prstDash val="solid"/>
-                      <a:round/>
-                      <a:headEnd type="none" w="med" len="med"/>
-                      <a:tailEnd type="none" w="med" len="med"/>
-                    </a:lnR>
-                    <a:lnT w="12700" cap="flat" cmpd="sng" algn="ctr">
-                      <a:solidFill>
-                        <a:schemeClr val="tx1"/>
-                      </a:solidFill>
-                      <a:prstDash val="solid"/>
-                      <a:round/>
-                      <a:headEnd type="none" w="med" len="med"/>
-                      <a:tailEnd type="none" w="med" len="med"/>
-                    </a:lnT>
-                    <a:lnB w="12700" cap="flat" cmpd="sng" algn="ctr">
-                      <a:solidFill>
-                        <a:schemeClr val="tx1"/>
-                      </a:solidFill>
-                      <a:prstDash val="solid"/>
-                      <a:round/>
-                      <a:headEnd type="none" w="med" len="med"/>
-                      <a:tailEnd type="none" w="med" len="med"/>
-                    </a:lnB>
-                  </a:tcPr>
-                </a:tc>
-                <a:extLst>
-                  <a:ext uri="{0D108BD9-81ED-4DB2-BD59-A6C34878D82A}">
-                    <a16:rowId xmlns:a16="http://schemas.microsoft.com/office/drawing/2014/main" val="1337107798"/>
-                  </a:ext>
-                </a:extLst>
-              </a:tr>
-              <a:tr h="190500">
-                <a:tc>
-                  <a:txBody>
-                    <a:bodyPr/>
-                    <a:lstStyle/>
-                    <a:p>
-                      <a:pPr algn="ctr" fontAlgn="b">
-                        <a:buNone/>
-                      </a:pPr>
-                      <a:r>
-                        <a:rPr lang="en-US" sz="2400" b="0" i="0" u="none" strike="noStrike" dirty="0">
-                          <a:solidFill>
-                            <a:srgbClr val="000000"/>
-                          </a:solidFill>
-                          <a:effectLst/>
-                          <a:latin typeface="Aptos Narrow" panose="020B0004020202020204" pitchFamily="34" charset="0"/>
-                        </a:rPr>
-                        <a:t>34</a:t>
-                      </a:r>
-                    </a:p>
-                  </a:txBody>
-                  <a:tcPr marL="9525" marR="9525" marT="9525" marB="0" anchor="ctr">
-                    <a:lnL w="28575" cap="flat" cmpd="sng" algn="ctr">
-                      <a:solidFill>
-                        <a:schemeClr val="tx1"/>
-                      </a:solidFill>
-                      <a:prstDash val="solid"/>
-                      <a:round/>
-                      <a:headEnd type="none" w="med" len="med"/>
-                      <a:tailEnd type="none" w="med" len="med"/>
-                    </a:lnL>
-                    <a:lnR w="28575" cap="flat" cmpd="sng" algn="ctr">
-                      <a:solidFill>
-                        <a:schemeClr val="tx1"/>
-                      </a:solidFill>
-                      <a:prstDash val="solid"/>
-                      <a:round/>
-                      <a:headEnd type="none" w="med" len="med"/>
-                      <a:tailEnd type="none" w="med" len="med"/>
-                    </a:lnR>
-                    <a:lnT w="12700" cap="flat" cmpd="sng" algn="ctr">
-                      <a:solidFill>
-                        <a:schemeClr val="tx1"/>
-                      </a:solidFill>
-                      <a:prstDash val="solid"/>
-                      <a:round/>
-                      <a:headEnd type="none" w="med" len="med"/>
-                      <a:tailEnd type="none" w="med" len="med"/>
-                    </a:lnT>
-                    <a:lnB w="12700" cap="flat" cmpd="sng" algn="ctr">
-                      <a:solidFill>
-                        <a:schemeClr val="tx1"/>
-                      </a:solidFill>
-                      <a:prstDash val="solid"/>
-                      <a:round/>
-                      <a:headEnd type="none" w="med" len="med"/>
-                      <a:tailEnd type="none" w="med" len="med"/>
-                    </a:lnB>
-                  </a:tcPr>
-                </a:tc>
-                <a:tc>
-                  <a:txBody>
-                    <a:bodyPr/>
-                    <a:lstStyle/>
-                    <a:p>
-                      <a:pPr algn="ctr" fontAlgn="b">
-                        <a:buNone/>
-                      </a:pPr>
-                      <a:endParaRPr lang="en-US" sz="2400" b="0" i="0" u="none" strike="noStrike">
-                        <a:solidFill>
-                          <a:srgbClr val="000000"/>
-                        </a:solidFill>
-                        <a:effectLst/>
-                        <a:latin typeface="Aptos Narrow" panose="020B0004020202020204" pitchFamily="34" charset="0"/>
-                      </a:endParaRPr>
-                    </a:p>
-                  </a:txBody>
-                  <a:tcPr marL="9525" marR="9525" marT="9525" marB="0" anchor="ctr">
-                    <a:lnL w="28575" cap="flat" cmpd="sng" algn="ctr">
-                      <a:solidFill>
-                        <a:schemeClr val="tx1"/>
-                      </a:solidFill>
-                      <a:prstDash val="solid"/>
-                      <a:round/>
-                      <a:headEnd type="none" w="med" len="med"/>
-                      <a:tailEnd type="none" w="med" len="med"/>
-                    </a:lnL>
-                    <a:lnR w="12700" cap="flat" cmpd="sng" algn="ctr">
-                      <a:solidFill>
-                        <a:schemeClr val="tx1"/>
-                      </a:solidFill>
-                      <a:prstDash val="solid"/>
-                      <a:round/>
-                      <a:headEnd type="none" w="med" len="med"/>
-                      <a:tailEnd type="none" w="med" len="med"/>
-                    </a:lnR>
-                    <a:lnT w="12700" cap="flat" cmpd="sng" algn="ctr">
-                      <a:solidFill>
-                        <a:schemeClr val="tx1"/>
-                      </a:solidFill>
-                      <a:prstDash val="solid"/>
-                      <a:round/>
-                      <a:headEnd type="none" w="med" len="med"/>
-                      <a:tailEnd type="none" w="med" len="med"/>
-                    </a:lnT>
-                    <a:lnB w="12700" cap="flat" cmpd="sng" algn="ctr">
-                      <a:solidFill>
-                        <a:schemeClr val="tx1"/>
-                      </a:solidFill>
-                      <a:prstDash val="solid"/>
-                      <a:round/>
-                      <a:headEnd type="none" w="med" len="med"/>
-                      <a:tailEnd type="none" w="med" len="med"/>
-                    </a:lnB>
-                  </a:tcPr>
-                </a:tc>
-                <a:tc>
-                  <a:txBody>
-                    <a:bodyPr/>
-                    <a:lstStyle/>
-                    <a:p>
-                      <a:pPr algn="ctr" fontAlgn="b">
-                        <a:buNone/>
-                      </a:pPr>
-                      <a:r>
-                        <a:rPr lang="ja-JP" altLang="en-US" sz="2400" b="0" i="0" u="none" strike="noStrike" dirty="0">
-                          <a:solidFill>
-                            <a:srgbClr val="000000"/>
-                          </a:solidFill>
-                          <a:effectLst/>
-                          <a:latin typeface="Aptos Narrow" panose="020B0004020202020204" pitchFamily="34" charset="0"/>
-                        </a:rPr>
-                        <a:t>〇</a:t>
-                      </a:r>
-                      <a:endParaRPr lang="en-US" sz="2400" b="0" i="0" u="none" strike="noStrike" dirty="0">
-                        <a:solidFill>
-                          <a:srgbClr val="000000"/>
-                        </a:solidFill>
-                        <a:effectLst/>
-                        <a:latin typeface="Aptos Narrow" panose="020B0004020202020204" pitchFamily="34" charset="0"/>
-                      </a:endParaRPr>
-                    </a:p>
-                  </a:txBody>
-                  <a:tcPr marL="9525" marR="9525" marT="9525" marB="0" anchor="ctr">
-                    <a:lnL w="12700" cap="flat" cmpd="sng" algn="ctr">
-                      <a:solidFill>
-                        <a:schemeClr val="tx1"/>
-                      </a:solidFill>
-                      <a:prstDash val="solid"/>
-                      <a:round/>
-                      <a:headEnd type="none" w="med" len="med"/>
-                      <a:tailEnd type="none" w="med" len="med"/>
-                    </a:lnL>
-                    <a:lnR w="12700" cap="flat" cmpd="sng" algn="ctr">
-                      <a:solidFill>
-                        <a:schemeClr val="tx1"/>
-                      </a:solidFill>
-                      <a:prstDash val="solid"/>
-                      <a:round/>
-                      <a:headEnd type="none" w="med" len="med"/>
-                      <a:tailEnd type="none" w="med" len="med"/>
-                    </a:lnR>
-                    <a:lnT w="12700" cap="flat" cmpd="sng" algn="ctr">
-                      <a:solidFill>
-                        <a:schemeClr val="tx1"/>
-                      </a:solidFill>
-                      <a:prstDash val="solid"/>
-                      <a:round/>
-                      <a:headEnd type="none" w="med" len="med"/>
-                      <a:tailEnd type="none" w="med" len="med"/>
-                    </a:lnT>
-                    <a:lnB w="12700" cap="flat" cmpd="sng" algn="ctr">
-                      <a:solidFill>
-                        <a:schemeClr val="tx1"/>
-                      </a:solidFill>
-                      <a:prstDash val="solid"/>
-                      <a:round/>
-                      <a:headEnd type="none" w="med" len="med"/>
-                      <a:tailEnd type="none" w="med" len="med"/>
-                    </a:lnB>
-                  </a:tcPr>
-                </a:tc>
-                <a:tc>
-                  <a:txBody>
-                    <a:bodyPr/>
-                    <a:lstStyle/>
-                    <a:p>
-                      <a:pPr algn="ctr" fontAlgn="b">
-                        <a:buNone/>
-                      </a:pPr>
-                      <a:endParaRPr lang="en-US" sz="2400" b="0" i="0" u="none" strike="noStrike" dirty="0">
-                        <a:solidFill>
-                          <a:srgbClr val="000000"/>
-                        </a:solidFill>
-                        <a:effectLst/>
-                        <a:latin typeface="Aptos Narrow" panose="020B0004020202020204" pitchFamily="34" charset="0"/>
-                      </a:endParaRPr>
-                    </a:p>
-                  </a:txBody>
-                  <a:tcPr marL="9525" marR="9525" marT="9525" marB="0" anchor="ctr">
-                    <a:lnL w="12700" cap="flat" cmpd="sng" algn="ctr">
-                      <a:solidFill>
-                        <a:schemeClr val="tx1"/>
-                      </a:solidFill>
-                      <a:prstDash val="solid"/>
-                      <a:round/>
-                      <a:headEnd type="none" w="med" len="med"/>
-                      <a:tailEnd type="none" w="med" len="med"/>
-                    </a:lnL>
-                    <a:lnR w="12700" cap="flat" cmpd="sng" algn="ctr">
-                      <a:solidFill>
-                        <a:schemeClr val="tx1"/>
-                      </a:solidFill>
-                      <a:prstDash val="solid"/>
-                      <a:round/>
-                      <a:headEnd type="none" w="med" len="med"/>
-                      <a:tailEnd type="none" w="med" len="med"/>
-                    </a:lnR>
-                    <a:lnT w="12700" cap="flat" cmpd="sng" algn="ctr">
-                      <a:solidFill>
-                        <a:schemeClr val="tx1"/>
-                      </a:solidFill>
-                      <a:prstDash val="solid"/>
-                      <a:round/>
-                      <a:headEnd type="none" w="med" len="med"/>
-                      <a:tailEnd type="none" w="med" len="med"/>
-                    </a:lnT>
-                    <a:lnB w="12700" cap="flat" cmpd="sng" algn="ctr">
-                      <a:solidFill>
-                        <a:schemeClr val="tx1"/>
-                      </a:solidFill>
-                      <a:prstDash val="solid"/>
-                      <a:round/>
-                      <a:headEnd type="none" w="med" len="med"/>
-                      <a:tailEnd type="none" w="med" len="med"/>
-                    </a:lnB>
-                  </a:tcPr>
-                </a:tc>
-                <a:tc>
-                  <a:txBody>
-                    <a:bodyPr/>
-                    <a:lstStyle/>
-                    <a:p>
-                      <a:pPr algn="ctr" fontAlgn="b">
-                        <a:buNone/>
-                      </a:pPr>
-                      <a:endParaRPr lang="en-US" sz="2400" b="0" i="0" u="none" strike="noStrike" dirty="0">
-                        <a:solidFill>
-                          <a:srgbClr val="000000"/>
-                        </a:solidFill>
-                        <a:effectLst/>
-                        <a:latin typeface="Aptos Narrow" panose="020B0004020202020204" pitchFamily="34" charset="0"/>
-                      </a:endParaRPr>
-                    </a:p>
-                  </a:txBody>
-                  <a:tcPr marL="9525" marR="9525" marT="9525" marB="0" anchor="ctr">
-                    <a:lnL w="12700" cap="flat" cmpd="sng" algn="ctr">
-                      <a:solidFill>
-                        <a:schemeClr val="tx1"/>
-                      </a:solidFill>
-                      <a:prstDash val="solid"/>
-                      <a:round/>
-                      <a:headEnd type="none" w="med" len="med"/>
-                      <a:tailEnd type="none" w="med" len="med"/>
-                    </a:lnL>
-                    <a:lnR w="28575" cap="flat" cmpd="sng" algn="ctr">
-                      <a:solidFill>
-                        <a:schemeClr val="tx1"/>
-                      </a:solidFill>
-                      <a:prstDash val="solid"/>
-                      <a:round/>
-                      <a:headEnd type="none" w="med" len="med"/>
-                      <a:tailEnd type="none" w="med" len="med"/>
-                    </a:lnR>
-                    <a:lnT w="12700" cap="flat" cmpd="sng" algn="ctr">
-                      <a:solidFill>
-                        <a:schemeClr val="tx1"/>
-                      </a:solidFill>
-                      <a:prstDash val="solid"/>
-                      <a:round/>
-                      <a:headEnd type="none" w="med" len="med"/>
-                      <a:tailEnd type="none" w="med" len="med"/>
-                    </a:lnT>
-                    <a:lnB w="12700" cap="flat" cmpd="sng" algn="ctr">
-                      <a:solidFill>
-                        <a:schemeClr val="tx1"/>
-                      </a:solidFill>
-                      <a:prstDash val="solid"/>
-                      <a:round/>
-                      <a:headEnd type="none" w="med" len="med"/>
-                      <a:tailEnd type="none" w="med" len="med"/>
-                    </a:lnB>
-                  </a:tcPr>
-                </a:tc>
-                <a:extLst>
-                  <a:ext uri="{0D108BD9-81ED-4DB2-BD59-A6C34878D82A}">
-                    <a16:rowId xmlns:a16="http://schemas.microsoft.com/office/drawing/2014/main" val="3234998607"/>
-                  </a:ext>
-                </a:extLst>
-              </a:tr>
-              <a:tr h="190500">
-                <a:tc>
-                  <a:txBody>
-                    <a:bodyPr/>
-                    <a:lstStyle/>
-                    <a:p>
-                      <a:pPr algn="ctr" fontAlgn="b">
-                        <a:buNone/>
-                      </a:pPr>
-                      <a:r>
-                        <a:rPr lang="en-US" sz="2400" b="0" i="0" u="none" strike="noStrike" dirty="0">
-                          <a:solidFill>
-                            <a:srgbClr val="000000"/>
-                          </a:solidFill>
-                          <a:effectLst/>
-                          <a:latin typeface="Aptos Narrow" panose="020B0004020202020204" pitchFamily="34" charset="0"/>
-                        </a:rPr>
-                        <a:t>42</a:t>
-                      </a:r>
-                    </a:p>
-                  </a:txBody>
-                  <a:tcPr marL="9525" marR="9525" marT="9525" marB="0" anchor="ctr">
-                    <a:lnL w="28575" cap="flat" cmpd="sng" algn="ctr">
-                      <a:solidFill>
-                        <a:schemeClr val="tx1"/>
-                      </a:solidFill>
-                      <a:prstDash val="solid"/>
-                      <a:round/>
-                      <a:headEnd type="none" w="med" len="med"/>
-                      <a:tailEnd type="none" w="med" len="med"/>
-                    </a:lnL>
-                    <a:lnR w="28575" cap="flat" cmpd="sng" algn="ctr">
-                      <a:solidFill>
-                        <a:schemeClr val="tx1"/>
-                      </a:solidFill>
-                      <a:prstDash val="solid"/>
-                      <a:round/>
-                      <a:headEnd type="none" w="med" len="med"/>
-                      <a:tailEnd type="none" w="med" len="med"/>
-                    </a:lnR>
-                    <a:lnT w="12700" cap="flat" cmpd="sng" algn="ctr">
-                      <a:solidFill>
-                        <a:schemeClr val="tx1"/>
-                      </a:solidFill>
-                      <a:prstDash val="solid"/>
-                      <a:round/>
-                      <a:headEnd type="none" w="med" len="med"/>
-                      <a:tailEnd type="none" w="med" len="med"/>
-                    </a:lnT>
-                    <a:lnB w="12700" cap="flat" cmpd="sng" algn="ctr">
-                      <a:solidFill>
-                        <a:schemeClr val="tx1"/>
-                      </a:solidFill>
-                      <a:prstDash val="solid"/>
-                      <a:round/>
-                      <a:headEnd type="none" w="med" len="med"/>
-                      <a:tailEnd type="none" w="med" len="med"/>
-                    </a:lnB>
-                  </a:tcPr>
-                </a:tc>
-                <a:tc>
-                  <a:txBody>
-                    <a:bodyPr/>
-                    <a:lstStyle/>
-                    <a:p>
-                      <a:pPr algn="ctr" fontAlgn="b">
-                        <a:buNone/>
-                      </a:pPr>
-                      <a:endParaRPr lang="en-US" sz="2400" b="0" i="0" u="none" strike="noStrike">
-                        <a:solidFill>
-                          <a:srgbClr val="000000"/>
-                        </a:solidFill>
-                        <a:effectLst/>
-                        <a:latin typeface="Aptos Narrow" panose="020B0004020202020204" pitchFamily="34" charset="0"/>
-                      </a:endParaRPr>
-                    </a:p>
-                  </a:txBody>
-                  <a:tcPr marL="9525" marR="9525" marT="9525" marB="0" anchor="ctr">
-                    <a:lnL w="28575" cap="flat" cmpd="sng" algn="ctr">
-                      <a:solidFill>
-                        <a:schemeClr val="tx1"/>
-                      </a:solidFill>
-                      <a:prstDash val="solid"/>
-                      <a:round/>
-                      <a:headEnd type="none" w="med" len="med"/>
-                      <a:tailEnd type="none" w="med" len="med"/>
-                    </a:lnL>
-                    <a:lnR w="12700" cap="flat" cmpd="sng" algn="ctr">
-                      <a:solidFill>
-                        <a:schemeClr val="tx1"/>
-                      </a:solidFill>
-                      <a:prstDash val="solid"/>
-                      <a:round/>
-                      <a:headEnd type="none" w="med" len="med"/>
-                      <a:tailEnd type="none" w="med" len="med"/>
-                    </a:lnR>
-                    <a:lnT w="12700" cap="flat" cmpd="sng" algn="ctr">
-                      <a:solidFill>
-                        <a:schemeClr val="tx1"/>
-                      </a:solidFill>
-                      <a:prstDash val="solid"/>
-                      <a:round/>
-                      <a:headEnd type="none" w="med" len="med"/>
-                      <a:tailEnd type="none" w="med" len="med"/>
-                    </a:lnT>
-                    <a:lnB w="12700" cap="flat" cmpd="sng" algn="ctr">
-                      <a:solidFill>
-                        <a:schemeClr val="tx1"/>
-                      </a:solidFill>
-                      <a:prstDash val="solid"/>
-                      <a:round/>
-                      <a:headEnd type="none" w="med" len="med"/>
-                      <a:tailEnd type="none" w="med" len="med"/>
-                    </a:lnB>
-                  </a:tcPr>
-                </a:tc>
-                <a:tc>
-                  <a:txBody>
-                    <a:bodyPr/>
-                    <a:lstStyle/>
-                    <a:p>
-                      <a:pPr algn="ctr" fontAlgn="b">
-                        <a:buNone/>
-                      </a:pPr>
-                      <a:r>
-                        <a:rPr lang="ja-JP" altLang="en-US" sz="2400" b="0" i="0" u="none" strike="noStrike" dirty="0">
-                          <a:solidFill>
-                            <a:srgbClr val="000000"/>
-                          </a:solidFill>
-                          <a:effectLst/>
-                          <a:latin typeface="Aptos Narrow" panose="020B0004020202020204" pitchFamily="34" charset="0"/>
-                        </a:rPr>
-                        <a:t>〇</a:t>
-                      </a:r>
-                      <a:endParaRPr lang="en-US" sz="2400" b="0" i="0" u="none" strike="noStrike" dirty="0">
-                        <a:solidFill>
-                          <a:srgbClr val="000000"/>
-                        </a:solidFill>
-                        <a:effectLst/>
-                        <a:latin typeface="Aptos Narrow" panose="020B0004020202020204" pitchFamily="34" charset="0"/>
-                      </a:endParaRPr>
-                    </a:p>
-                  </a:txBody>
-                  <a:tcPr marL="9525" marR="9525" marT="9525" marB="0" anchor="ctr">
-                    <a:lnL w="12700" cap="flat" cmpd="sng" algn="ctr">
-                      <a:solidFill>
-                        <a:schemeClr val="tx1"/>
-                      </a:solidFill>
-                      <a:prstDash val="solid"/>
-                      <a:round/>
-                      <a:headEnd type="none" w="med" len="med"/>
-                      <a:tailEnd type="none" w="med" len="med"/>
-                    </a:lnL>
-                    <a:lnR w="12700" cap="flat" cmpd="sng" algn="ctr">
-                      <a:solidFill>
-                        <a:schemeClr val="tx1"/>
-                      </a:solidFill>
-                      <a:prstDash val="solid"/>
-                      <a:round/>
-                      <a:headEnd type="none" w="med" len="med"/>
-                      <a:tailEnd type="none" w="med" len="med"/>
-                    </a:lnR>
-                    <a:lnT w="12700" cap="flat" cmpd="sng" algn="ctr">
-                      <a:solidFill>
-                        <a:schemeClr val="tx1"/>
-                      </a:solidFill>
-                      <a:prstDash val="solid"/>
-                      <a:round/>
-                      <a:headEnd type="none" w="med" len="med"/>
-                      <a:tailEnd type="none" w="med" len="med"/>
-                    </a:lnT>
-                    <a:lnB w="12700" cap="flat" cmpd="sng" algn="ctr">
-                      <a:solidFill>
-                        <a:schemeClr val="tx1"/>
-                      </a:solidFill>
-                      <a:prstDash val="solid"/>
-                      <a:round/>
-                      <a:headEnd type="none" w="med" len="med"/>
-                      <a:tailEnd type="none" w="med" len="med"/>
-                    </a:lnB>
-                  </a:tcPr>
-                </a:tc>
-                <a:tc>
-                  <a:txBody>
-                    <a:bodyPr/>
-                    <a:lstStyle/>
-                    <a:p>
-                      <a:pPr algn="ctr" fontAlgn="b">
-                        <a:buNone/>
-                      </a:pPr>
-                      <a:endParaRPr lang="en-US" sz="2400" b="0" i="0" u="none" strike="noStrike" dirty="0">
-                        <a:solidFill>
-                          <a:srgbClr val="000000"/>
-                        </a:solidFill>
-                        <a:effectLst/>
-                        <a:latin typeface="Aptos Narrow" panose="020B0004020202020204" pitchFamily="34" charset="0"/>
-                      </a:endParaRPr>
-                    </a:p>
-                  </a:txBody>
-                  <a:tcPr marL="9525" marR="9525" marT="9525" marB="0" anchor="ctr">
-                    <a:lnL w="12700" cap="flat" cmpd="sng" algn="ctr">
-                      <a:solidFill>
-                        <a:schemeClr val="tx1"/>
-                      </a:solidFill>
-                      <a:prstDash val="solid"/>
-                      <a:round/>
-                      <a:headEnd type="none" w="med" len="med"/>
-                      <a:tailEnd type="none" w="med" len="med"/>
-                    </a:lnL>
-                    <a:lnR w="12700" cap="flat" cmpd="sng" algn="ctr">
-                      <a:solidFill>
-                        <a:schemeClr val="tx1"/>
-                      </a:solidFill>
-                      <a:prstDash val="solid"/>
-                      <a:round/>
-                      <a:headEnd type="none" w="med" len="med"/>
-                      <a:tailEnd type="none" w="med" len="med"/>
-                    </a:lnR>
-                    <a:lnT w="12700" cap="flat" cmpd="sng" algn="ctr">
-                      <a:solidFill>
-                        <a:schemeClr val="tx1"/>
-                      </a:solidFill>
-                      <a:prstDash val="solid"/>
-                      <a:round/>
-                      <a:headEnd type="none" w="med" len="med"/>
-                      <a:tailEnd type="none" w="med" len="med"/>
-                    </a:lnT>
-                    <a:lnB w="12700" cap="flat" cmpd="sng" algn="ctr">
-                      <a:solidFill>
-                        <a:schemeClr val="tx1"/>
-                      </a:solidFill>
-                      <a:prstDash val="solid"/>
-                      <a:round/>
-                      <a:headEnd type="none" w="med" len="med"/>
-                      <a:tailEnd type="none" w="med" len="med"/>
-                    </a:lnB>
-                  </a:tcPr>
-                </a:tc>
-                <a:tc>
-                  <a:txBody>
-                    <a:bodyPr/>
-                    <a:lstStyle/>
-                    <a:p>
-                      <a:pPr algn="ctr" fontAlgn="b">
-                        <a:buNone/>
-                      </a:pPr>
-                      <a:endParaRPr lang="en-US" sz="2400" b="0" i="0" u="none" strike="noStrike" dirty="0">
-                        <a:solidFill>
-                          <a:srgbClr val="000000"/>
-                        </a:solidFill>
-                        <a:effectLst/>
-                        <a:latin typeface="Aptos Narrow" panose="020B0004020202020204" pitchFamily="34" charset="0"/>
-                      </a:endParaRPr>
-                    </a:p>
-                  </a:txBody>
-                  <a:tcPr marL="9525" marR="9525" marT="9525" marB="0" anchor="ctr">
-                    <a:lnL w="12700" cap="flat" cmpd="sng" algn="ctr">
-                      <a:solidFill>
-                        <a:schemeClr val="tx1"/>
-                      </a:solidFill>
-                      <a:prstDash val="solid"/>
-                      <a:round/>
-                      <a:headEnd type="none" w="med" len="med"/>
-                      <a:tailEnd type="none" w="med" len="med"/>
-                    </a:lnL>
-                    <a:lnR w="28575" cap="flat" cmpd="sng" algn="ctr">
-                      <a:solidFill>
-                        <a:schemeClr val="tx1"/>
-                      </a:solidFill>
-                      <a:prstDash val="solid"/>
-                      <a:round/>
-                      <a:headEnd type="none" w="med" len="med"/>
-                      <a:tailEnd type="none" w="med" len="med"/>
-                    </a:lnR>
-                    <a:lnT w="12700" cap="flat" cmpd="sng" algn="ctr">
-                      <a:solidFill>
-                        <a:schemeClr val="tx1"/>
-                      </a:solidFill>
-                      <a:prstDash val="solid"/>
-                      <a:round/>
-                      <a:headEnd type="none" w="med" len="med"/>
-                      <a:tailEnd type="none" w="med" len="med"/>
-                    </a:lnT>
-                    <a:lnB w="12700" cap="flat" cmpd="sng" algn="ctr">
-                      <a:solidFill>
-                        <a:schemeClr val="tx1"/>
-                      </a:solidFill>
-                      <a:prstDash val="solid"/>
-                      <a:round/>
-                      <a:headEnd type="none" w="med" len="med"/>
-                      <a:tailEnd type="none" w="med" len="med"/>
-                    </a:lnB>
-                  </a:tcPr>
-                </a:tc>
-                <a:extLst>
-                  <a:ext uri="{0D108BD9-81ED-4DB2-BD59-A6C34878D82A}">
-                    <a16:rowId xmlns:a16="http://schemas.microsoft.com/office/drawing/2014/main" val="3012447469"/>
-                  </a:ext>
-                </a:extLst>
-              </a:tr>
-              <a:tr h="190500">
-                <a:tc>
-                  <a:txBody>
-                    <a:bodyPr/>
-                    <a:lstStyle/>
-                    <a:p>
-                      <a:pPr algn="ctr" fontAlgn="b">
-                        <a:buNone/>
-                      </a:pPr>
-                      <a:r>
-                        <a:rPr lang="en-US" sz="2400" b="0" i="0" u="none" strike="noStrike" dirty="0">
-                          <a:solidFill>
-                            <a:srgbClr val="000000"/>
-                          </a:solidFill>
-                          <a:effectLst/>
-                          <a:latin typeface="Aptos Narrow" panose="020B0004020202020204" pitchFamily="34" charset="0"/>
-                        </a:rPr>
-                        <a:t>50</a:t>
-                      </a:r>
-                    </a:p>
-                  </a:txBody>
-                  <a:tcPr marL="9525" marR="9525" marT="9525" marB="0" anchor="ctr">
-                    <a:lnL w="28575" cap="flat" cmpd="sng" algn="ctr">
-                      <a:solidFill>
-                        <a:schemeClr val="tx1"/>
-                      </a:solidFill>
-                      <a:prstDash val="solid"/>
-                      <a:round/>
-                      <a:headEnd type="none" w="med" len="med"/>
-                      <a:tailEnd type="none" w="med" len="med"/>
-                    </a:lnL>
-                    <a:lnR w="28575" cap="flat" cmpd="sng" algn="ctr">
-                      <a:solidFill>
-                        <a:schemeClr val="tx1"/>
-                      </a:solidFill>
-                      <a:prstDash val="solid"/>
-                      <a:round/>
-                      <a:headEnd type="none" w="med" len="med"/>
-                      <a:tailEnd type="none" w="med" len="med"/>
-                    </a:lnR>
-                    <a:lnT w="12700" cap="flat" cmpd="sng" algn="ctr">
-                      <a:solidFill>
-                        <a:schemeClr val="tx1"/>
-                      </a:solidFill>
-                      <a:prstDash val="solid"/>
-                      <a:round/>
-                      <a:headEnd type="none" w="med" len="med"/>
-                      <a:tailEnd type="none" w="med" len="med"/>
-                    </a:lnT>
-                    <a:lnB w="12700" cap="flat" cmpd="sng" algn="ctr">
-                      <a:solidFill>
-                        <a:schemeClr val="tx1"/>
-                      </a:solidFill>
-                      <a:prstDash val="solid"/>
-                      <a:round/>
-                      <a:headEnd type="none" w="med" len="med"/>
-                      <a:tailEnd type="none" w="med" len="med"/>
-                    </a:lnB>
-                  </a:tcPr>
-                </a:tc>
-                <a:tc>
-                  <a:txBody>
-                    <a:bodyPr/>
-                    <a:lstStyle/>
-                    <a:p>
-                      <a:pPr algn="ctr" fontAlgn="b">
-                        <a:buNone/>
-                      </a:pPr>
-                      <a:endParaRPr lang="en-US" sz="2400" b="0" i="0" u="none" strike="noStrike" dirty="0">
-                        <a:solidFill>
-                          <a:srgbClr val="000000"/>
-                        </a:solidFill>
-                        <a:effectLst/>
-                        <a:latin typeface="Aptos Narrow" panose="020B0004020202020204" pitchFamily="34" charset="0"/>
-                      </a:endParaRPr>
-                    </a:p>
-                  </a:txBody>
-                  <a:tcPr marL="9525" marR="9525" marT="9525" marB="0" anchor="ctr">
-                    <a:lnL w="28575" cap="flat" cmpd="sng" algn="ctr">
-                      <a:solidFill>
-                        <a:schemeClr val="tx1"/>
-                      </a:solidFill>
-                      <a:prstDash val="solid"/>
-                      <a:round/>
-                      <a:headEnd type="none" w="med" len="med"/>
-                      <a:tailEnd type="none" w="med" len="med"/>
-                    </a:lnL>
-                    <a:lnR w="12700" cap="flat" cmpd="sng" algn="ctr">
-                      <a:solidFill>
-                        <a:schemeClr val="tx1"/>
-                      </a:solidFill>
-                      <a:prstDash val="solid"/>
-                      <a:round/>
-                      <a:headEnd type="none" w="med" len="med"/>
-                      <a:tailEnd type="none" w="med" len="med"/>
-                    </a:lnR>
-                    <a:lnT w="12700" cap="flat" cmpd="sng" algn="ctr">
-                      <a:solidFill>
-                        <a:schemeClr val="tx1"/>
-                      </a:solidFill>
-                      <a:prstDash val="solid"/>
-                      <a:round/>
-                      <a:headEnd type="none" w="med" len="med"/>
-                      <a:tailEnd type="none" w="med" len="med"/>
-                    </a:lnT>
-                    <a:lnB w="12700" cap="flat" cmpd="sng" algn="ctr">
-                      <a:solidFill>
-                        <a:schemeClr val="tx1"/>
-                      </a:solidFill>
-                      <a:prstDash val="solid"/>
-                      <a:round/>
-                      <a:headEnd type="none" w="med" len="med"/>
-                      <a:tailEnd type="none" w="med" len="med"/>
-                    </a:lnB>
-                  </a:tcPr>
-                </a:tc>
-                <a:tc>
-                  <a:txBody>
-                    <a:bodyPr/>
-                    <a:lstStyle/>
-                    <a:p>
-                      <a:pPr algn="ctr" fontAlgn="b">
-                        <a:buNone/>
-                      </a:pPr>
-                      <a:r>
-                        <a:rPr lang="ja-JP" altLang="en-US" sz="2400" b="0" i="0" u="none" strike="noStrike" dirty="0">
-                          <a:solidFill>
-                            <a:srgbClr val="000000"/>
-                          </a:solidFill>
-                          <a:effectLst/>
-                          <a:latin typeface="Aptos Narrow" panose="020B0004020202020204" pitchFamily="34" charset="0"/>
-                        </a:rPr>
-                        <a:t>〇</a:t>
-                      </a:r>
-                      <a:endParaRPr lang="en-US" sz="2400" b="0" i="0" u="none" strike="noStrike" dirty="0">
-                        <a:solidFill>
-                          <a:srgbClr val="000000"/>
-                        </a:solidFill>
-                        <a:effectLst/>
-                        <a:latin typeface="Aptos Narrow" panose="020B0004020202020204" pitchFamily="34" charset="0"/>
-                      </a:endParaRPr>
-                    </a:p>
-                  </a:txBody>
-                  <a:tcPr marL="9525" marR="9525" marT="9525" marB="0" anchor="ctr">
-                    <a:lnL w="12700" cap="flat" cmpd="sng" algn="ctr">
-                      <a:solidFill>
-                        <a:schemeClr val="tx1"/>
-                      </a:solidFill>
-                      <a:prstDash val="solid"/>
-                      <a:round/>
-                      <a:headEnd type="none" w="med" len="med"/>
-                      <a:tailEnd type="none" w="med" len="med"/>
-                    </a:lnL>
-                    <a:lnR w="12700" cap="flat" cmpd="sng" algn="ctr">
-                      <a:solidFill>
-                        <a:schemeClr val="tx1"/>
-                      </a:solidFill>
-                      <a:prstDash val="solid"/>
-                      <a:round/>
-                      <a:headEnd type="none" w="med" len="med"/>
-                      <a:tailEnd type="none" w="med" len="med"/>
-                    </a:lnR>
-                    <a:lnT w="12700" cap="flat" cmpd="sng" algn="ctr">
-                      <a:solidFill>
-                        <a:schemeClr val="tx1"/>
-                      </a:solidFill>
-                      <a:prstDash val="solid"/>
-                      <a:round/>
-                      <a:headEnd type="none" w="med" len="med"/>
-                      <a:tailEnd type="none" w="med" len="med"/>
-                    </a:lnT>
-                    <a:lnB w="12700" cap="flat" cmpd="sng" algn="ctr">
-                      <a:solidFill>
-                        <a:schemeClr val="tx1"/>
-                      </a:solidFill>
-                      <a:prstDash val="solid"/>
-                      <a:round/>
-                      <a:headEnd type="none" w="med" len="med"/>
-                      <a:tailEnd type="none" w="med" len="med"/>
-                    </a:lnB>
-                  </a:tcPr>
-                </a:tc>
-                <a:tc>
-                  <a:txBody>
-                    <a:bodyPr/>
-                    <a:lstStyle/>
-                    <a:p>
-                      <a:pPr algn="ctr" fontAlgn="b">
-                        <a:buNone/>
-                      </a:pPr>
-                      <a:endParaRPr lang="en-US" sz="2400" b="0" i="0" u="none" strike="noStrike" dirty="0">
-                        <a:solidFill>
-                          <a:srgbClr val="000000"/>
-                        </a:solidFill>
-                        <a:effectLst/>
-                        <a:latin typeface="Aptos Narrow" panose="020B0004020202020204" pitchFamily="34" charset="0"/>
-                      </a:endParaRPr>
-                    </a:p>
-                  </a:txBody>
-                  <a:tcPr marL="9525" marR="9525" marT="9525" marB="0" anchor="ctr">
-                    <a:lnL w="12700" cap="flat" cmpd="sng" algn="ctr">
-                      <a:solidFill>
-                        <a:schemeClr val="tx1"/>
-                      </a:solidFill>
-                      <a:prstDash val="solid"/>
-                      <a:round/>
-                      <a:headEnd type="none" w="med" len="med"/>
-                      <a:tailEnd type="none" w="med" len="med"/>
-                    </a:lnL>
-                    <a:lnR w="12700" cap="flat" cmpd="sng" algn="ctr">
-                      <a:solidFill>
-                        <a:schemeClr val="tx1"/>
-                      </a:solidFill>
-                      <a:prstDash val="solid"/>
-                      <a:round/>
-                      <a:headEnd type="none" w="med" len="med"/>
-                      <a:tailEnd type="none" w="med" len="med"/>
-                    </a:lnR>
-                    <a:lnT w="12700" cap="flat" cmpd="sng" algn="ctr">
-                      <a:solidFill>
-                        <a:schemeClr val="tx1"/>
-                      </a:solidFill>
-                      <a:prstDash val="solid"/>
-                      <a:round/>
-                      <a:headEnd type="none" w="med" len="med"/>
-                      <a:tailEnd type="none" w="med" len="med"/>
-                    </a:lnT>
-                    <a:lnB w="12700" cap="flat" cmpd="sng" algn="ctr">
-                      <a:solidFill>
-                        <a:schemeClr val="tx1"/>
-                      </a:solidFill>
-                      <a:prstDash val="solid"/>
-                      <a:round/>
-                      <a:headEnd type="none" w="med" len="med"/>
-                      <a:tailEnd type="none" w="med" len="med"/>
-                    </a:lnB>
-                  </a:tcPr>
-                </a:tc>
-                <a:tc>
-                  <a:txBody>
-                    <a:bodyPr/>
-                    <a:lstStyle/>
-                    <a:p>
-                      <a:pPr algn="ctr" fontAlgn="b">
-                        <a:buNone/>
-                      </a:pPr>
-                      <a:endParaRPr lang="en-US" sz="2400" b="0" i="0" u="none" strike="noStrike" dirty="0">
-                        <a:solidFill>
-                          <a:srgbClr val="000000"/>
-                        </a:solidFill>
-                        <a:effectLst/>
-                        <a:latin typeface="Aptos Narrow" panose="020B0004020202020204" pitchFamily="34" charset="0"/>
-                      </a:endParaRPr>
-                    </a:p>
-                  </a:txBody>
-                  <a:tcPr marL="9525" marR="9525" marT="9525" marB="0" anchor="ctr">
-                    <a:lnL w="12700" cap="flat" cmpd="sng" algn="ctr">
-                      <a:solidFill>
-                        <a:schemeClr val="tx1"/>
-                      </a:solidFill>
-                      <a:prstDash val="solid"/>
-                      <a:round/>
-                      <a:headEnd type="none" w="med" len="med"/>
-                      <a:tailEnd type="none" w="med" len="med"/>
-                    </a:lnL>
-                    <a:lnR w="28575" cap="flat" cmpd="sng" algn="ctr">
-                      <a:solidFill>
-                        <a:schemeClr val="tx1"/>
-                      </a:solidFill>
-                      <a:prstDash val="solid"/>
-                      <a:round/>
-                      <a:headEnd type="none" w="med" len="med"/>
-                      <a:tailEnd type="none" w="med" len="med"/>
-                    </a:lnR>
-                    <a:lnT w="12700" cap="flat" cmpd="sng" algn="ctr">
-                      <a:solidFill>
-                        <a:schemeClr val="tx1"/>
-                      </a:solidFill>
-                      <a:prstDash val="solid"/>
-                      <a:round/>
-                      <a:headEnd type="none" w="med" len="med"/>
-                      <a:tailEnd type="none" w="med" len="med"/>
-                    </a:lnT>
-                    <a:lnB w="12700" cap="flat" cmpd="sng" algn="ctr">
-                      <a:solidFill>
-                        <a:schemeClr val="tx1"/>
-                      </a:solidFill>
-                      <a:prstDash val="solid"/>
-                      <a:round/>
-                      <a:headEnd type="none" w="med" len="med"/>
-                      <a:tailEnd type="none" w="med" len="med"/>
-                    </a:lnB>
-                  </a:tcPr>
-                </a:tc>
-                <a:extLst>
-                  <a:ext uri="{0D108BD9-81ED-4DB2-BD59-A6C34878D82A}">
-                    <a16:rowId xmlns:a16="http://schemas.microsoft.com/office/drawing/2014/main" val="1774132994"/>
-                  </a:ext>
-                </a:extLst>
-              </a:tr>
-              <a:tr h="190500">
-                <a:tc>
-                  <a:txBody>
-                    <a:bodyPr/>
-                    <a:lstStyle/>
-                    <a:p>
-                      <a:pPr algn="ctr" fontAlgn="b">
-                        <a:buNone/>
-                      </a:pPr>
-                      <a:r>
-                        <a:rPr lang="en-US" sz="2400" b="0" i="0" u="none" strike="noStrike" dirty="0">
-                          <a:solidFill>
-                            <a:srgbClr val="000000"/>
-                          </a:solidFill>
-                          <a:effectLst/>
-                          <a:latin typeface="Aptos Narrow" panose="020B0004020202020204" pitchFamily="34" charset="0"/>
-                        </a:rPr>
-                        <a:t>58</a:t>
-                      </a:r>
-                    </a:p>
-                  </a:txBody>
-                  <a:tcPr marL="9525" marR="9525" marT="9525" marB="0" anchor="ctr">
-                    <a:lnL w="28575" cap="flat" cmpd="sng" algn="ctr">
-                      <a:solidFill>
-                        <a:schemeClr val="tx1"/>
-                      </a:solidFill>
-                      <a:prstDash val="solid"/>
-                      <a:round/>
-                      <a:headEnd type="none" w="med" len="med"/>
-                      <a:tailEnd type="none" w="med" len="med"/>
-                    </a:lnL>
-                    <a:lnR w="28575" cap="flat" cmpd="sng" algn="ctr">
-                      <a:solidFill>
-                        <a:schemeClr val="tx1"/>
-                      </a:solidFill>
-                      <a:prstDash val="solid"/>
-                      <a:round/>
-                      <a:headEnd type="none" w="med" len="med"/>
-                      <a:tailEnd type="none" w="med" len="med"/>
-                    </a:lnR>
-                    <a:lnT w="12700" cap="flat" cmpd="sng" algn="ctr">
-                      <a:solidFill>
-                        <a:schemeClr val="tx1"/>
-                      </a:solidFill>
-                      <a:prstDash val="solid"/>
-                      <a:round/>
-                      <a:headEnd type="none" w="med" len="med"/>
-                      <a:tailEnd type="none" w="med" len="med"/>
-                    </a:lnT>
-                    <a:lnB w="12700" cap="flat" cmpd="sng" algn="ctr">
-                      <a:solidFill>
-                        <a:schemeClr val="tx1"/>
-                      </a:solidFill>
-                      <a:prstDash val="solid"/>
-                      <a:round/>
-                      <a:headEnd type="none" w="med" len="med"/>
-                      <a:tailEnd type="none" w="med" len="med"/>
-                    </a:lnB>
-                  </a:tcPr>
-                </a:tc>
-                <a:tc>
-                  <a:txBody>
-                    <a:bodyPr/>
-                    <a:lstStyle/>
-                    <a:p>
-                      <a:pPr algn="ctr" fontAlgn="b">
-                        <a:buNone/>
-                      </a:pPr>
-                      <a:endParaRPr lang="en-US" sz="2400" b="0" i="0" u="none" strike="noStrike" dirty="0">
-                        <a:solidFill>
-                          <a:srgbClr val="000000"/>
-                        </a:solidFill>
-                        <a:effectLst/>
-                        <a:latin typeface="Aptos Narrow" panose="020B0004020202020204" pitchFamily="34" charset="0"/>
-                      </a:endParaRPr>
-                    </a:p>
-                  </a:txBody>
-                  <a:tcPr marL="9525" marR="9525" marT="9525" marB="0" anchor="ctr">
-                    <a:lnL w="28575" cap="flat" cmpd="sng" algn="ctr">
-                      <a:solidFill>
-                        <a:schemeClr val="tx1"/>
-                      </a:solidFill>
-                      <a:prstDash val="solid"/>
-                      <a:round/>
-                      <a:headEnd type="none" w="med" len="med"/>
-                      <a:tailEnd type="none" w="med" len="med"/>
-                    </a:lnL>
-                    <a:lnR w="12700" cap="flat" cmpd="sng" algn="ctr">
-                      <a:solidFill>
-                        <a:schemeClr val="tx1"/>
-                      </a:solidFill>
-                      <a:prstDash val="solid"/>
-                      <a:round/>
-                      <a:headEnd type="none" w="med" len="med"/>
-                      <a:tailEnd type="none" w="med" len="med"/>
-                    </a:lnR>
-                    <a:lnT w="12700" cap="flat" cmpd="sng" algn="ctr">
-                      <a:solidFill>
-                        <a:schemeClr val="tx1"/>
-                      </a:solidFill>
-                      <a:prstDash val="solid"/>
-                      <a:round/>
-                      <a:headEnd type="none" w="med" len="med"/>
-                      <a:tailEnd type="none" w="med" len="med"/>
-                    </a:lnT>
-                    <a:lnB w="12700" cap="flat" cmpd="sng" algn="ctr">
-                      <a:solidFill>
-                        <a:schemeClr val="tx1"/>
-                      </a:solidFill>
-                      <a:prstDash val="solid"/>
-                      <a:round/>
-                      <a:headEnd type="none" w="med" len="med"/>
-                      <a:tailEnd type="none" w="med" len="med"/>
-                    </a:lnB>
-                  </a:tcPr>
-                </a:tc>
-                <a:tc>
-                  <a:txBody>
-                    <a:bodyPr/>
-                    <a:lstStyle/>
-                    <a:p>
-                      <a:pPr algn="ctr" fontAlgn="b">
-                        <a:buNone/>
-                      </a:pPr>
-                      <a:endParaRPr lang="en-US" sz="2400" b="0" i="0" u="none" strike="noStrike" dirty="0">
-                        <a:solidFill>
-                          <a:srgbClr val="000000"/>
-                        </a:solidFill>
-                        <a:effectLst/>
-                        <a:latin typeface="Aptos Narrow" panose="020B0004020202020204" pitchFamily="34" charset="0"/>
-                      </a:endParaRPr>
-                    </a:p>
-                  </a:txBody>
-                  <a:tcPr marL="9525" marR="9525" marT="9525" marB="0" anchor="ctr">
-                    <a:lnL w="12700" cap="flat" cmpd="sng" algn="ctr">
-                      <a:solidFill>
-                        <a:schemeClr val="tx1"/>
-                      </a:solidFill>
-                      <a:prstDash val="solid"/>
-                      <a:round/>
-                      <a:headEnd type="none" w="med" len="med"/>
-                      <a:tailEnd type="none" w="med" len="med"/>
-                    </a:lnL>
-                    <a:lnR w="12700" cap="flat" cmpd="sng" algn="ctr">
-                      <a:solidFill>
-                        <a:schemeClr val="tx1"/>
-                      </a:solidFill>
-                      <a:prstDash val="solid"/>
-                      <a:round/>
-                      <a:headEnd type="none" w="med" len="med"/>
-                      <a:tailEnd type="none" w="med" len="med"/>
-                    </a:lnR>
-                    <a:lnT w="12700" cap="flat" cmpd="sng" algn="ctr">
-                      <a:solidFill>
-                        <a:schemeClr val="tx1"/>
-                      </a:solidFill>
-                      <a:prstDash val="solid"/>
-                      <a:round/>
-                      <a:headEnd type="none" w="med" len="med"/>
-                      <a:tailEnd type="none" w="med" len="med"/>
-                    </a:lnT>
-                    <a:lnB w="12700" cap="flat" cmpd="sng" algn="ctr">
-                      <a:solidFill>
-                        <a:schemeClr val="tx1"/>
-                      </a:solidFill>
-                      <a:prstDash val="solid"/>
-                      <a:round/>
-                      <a:headEnd type="none" w="med" len="med"/>
-                      <a:tailEnd type="none" w="med" len="med"/>
-                    </a:lnB>
-                  </a:tcPr>
-                </a:tc>
-                <a:tc>
-                  <a:txBody>
-                    <a:bodyPr/>
-                    <a:lstStyle/>
-                    <a:p>
-                      <a:pPr algn="ctr" fontAlgn="b">
-                        <a:buNone/>
-                      </a:pPr>
-                      <a:r>
-                        <a:rPr lang="ja-JP" altLang="en-US" sz="2400" b="0" i="0" u="none" strike="noStrike" dirty="0">
-                          <a:solidFill>
-                            <a:srgbClr val="000000"/>
-                          </a:solidFill>
-                          <a:effectLst/>
-                          <a:latin typeface="Aptos Narrow" panose="020B0004020202020204" pitchFamily="34" charset="0"/>
-                        </a:rPr>
-                        <a:t>〇</a:t>
-                      </a:r>
-                      <a:endParaRPr lang="en-US" sz="2400" b="0" i="0" u="none" strike="noStrike" dirty="0">
-                        <a:solidFill>
-                          <a:srgbClr val="000000"/>
-                        </a:solidFill>
-                        <a:effectLst/>
-                        <a:latin typeface="Aptos Narrow" panose="020B0004020202020204" pitchFamily="34" charset="0"/>
-                      </a:endParaRPr>
-                    </a:p>
-                  </a:txBody>
-                  <a:tcPr marL="9525" marR="9525" marT="9525" marB="0" anchor="ctr">
-                    <a:lnL w="12700" cap="flat" cmpd="sng" algn="ctr">
-                      <a:solidFill>
-                        <a:schemeClr val="tx1"/>
-                      </a:solidFill>
-                      <a:prstDash val="solid"/>
-                      <a:round/>
-                      <a:headEnd type="none" w="med" len="med"/>
-                      <a:tailEnd type="none" w="med" len="med"/>
-                    </a:lnL>
-                    <a:lnR w="12700" cap="flat" cmpd="sng" algn="ctr">
-                      <a:solidFill>
-                        <a:schemeClr val="tx1"/>
-                      </a:solidFill>
-                      <a:prstDash val="solid"/>
-                      <a:round/>
-                      <a:headEnd type="none" w="med" len="med"/>
-                      <a:tailEnd type="none" w="med" len="med"/>
-                    </a:lnR>
-                    <a:lnT w="12700" cap="flat" cmpd="sng" algn="ctr">
-                      <a:solidFill>
-                        <a:schemeClr val="tx1"/>
-                      </a:solidFill>
-                      <a:prstDash val="solid"/>
-                      <a:round/>
-                      <a:headEnd type="none" w="med" len="med"/>
-                      <a:tailEnd type="none" w="med" len="med"/>
-                    </a:lnT>
-                    <a:lnB w="12700" cap="flat" cmpd="sng" algn="ctr">
-                      <a:solidFill>
-                        <a:schemeClr val="tx1"/>
-                      </a:solidFill>
-                      <a:prstDash val="solid"/>
-                      <a:round/>
-                      <a:headEnd type="none" w="med" len="med"/>
-                      <a:tailEnd type="none" w="med" len="med"/>
-                    </a:lnB>
-                  </a:tcPr>
-                </a:tc>
-                <a:tc>
-                  <a:txBody>
-                    <a:bodyPr/>
-                    <a:lstStyle/>
-                    <a:p>
-                      <a:pPr algn="ctr" fontAlgn="b">
-                        <a:buNone/>
-                      </a:pPr>
-                      <a:endParaRPr lang="en-US" sz="2400" b="0" i="0" u="none" strike="noStrike" dirty="0">
-                        <a:solidFill>
-                          <a:srgbClr val="000000"/>
-                        </a:solidFill>
-                        <a:effectLst/>
-                        <a:latin typeface="Aptos Narrow" panose="020B0004020202020204" pitchFamily="34" charset="0"/>
-                      </a:endParaRPr>
-                    </a:p>
-                  </a:txBody>
-                  <a:tcPr marL="9525" marR="9525" marT="9525" marB="0" anchor="ctr">
-                    <a:lnL w="12700" cap="flat" cmpd="sng" algn="ctr">
-                      <a:solidFill>
-                        <a:schemeClr val="tx1"/>
-                      </a:solidFill>
-                      <a:prstDash val="solid"/>
-                      <a:round/>
-                      <a:headEnd type="none" w="med" len="med"/>
-                      <a:tailEnd type="none" w="med" len="med"/>
-                    </a:lnL>
-                    <a:lnR w="28575" cap="flat" cmpd="sng" algn="ctr">
-                      <a:solidFill>
-                        <a:schemeClr val="tx1"/>
-                      </a:solidFill>
-                      <a:prstDash val="solid"/>
-                      <a:round/>
-                      <a:headEnd type="none" w="med" len="med"/>
-                      <a:tailEnd type="none" w="med" len="med"/>
-                    </a:lnR>
-                    <a:lnT w="12700" cap="flat" cmpd="sng" algn="ctr">
-                      <a:solidFill>
-                        <a:schemeClr val="tx1"/>
-                      </a:solidFill>
-                      <a:prstDash val="solid"/>
-                      <a:round/>
-                      <a:headEnd type="none" w="med" len="med"/>
-                      <a:tailEnd type="none" w="med" len="med"/>
-                    </a:lnT>
-                    <a:lnB w="12700" cap="flat" cmpd="sng" algn="ctr">
-                      <a:solidFill>
-                        <a:schemeClr val="tx1"/>
-                      </a:solidFill>
-                      <a:prstDash val="solid"/>
-                      <a:round/>
-                      <a:headEnd type="none" w="med" len="med"/>
-                      <a:tailEnd type="none" w="med" len="med"/>
-                    </a:lnB>
-                  </a:tcPr>
-                </a:tc>
-                <a:extLst>
-                  <a:ext uri="{0D108BD9-81ED-4DB2-BD59-A6C34878D82A}">
-                    <a16:rowId xmlns:a16="http://schemas.microsoft.com/office/drawing/2014/main" val="3955450642"/>
-                  </a:ext>
-                </a:extLst>
-              </a:tr>
-              <a:tr h="190500">
-                <a:tc>
-                  <a:txBody>
-                    <a:bodyPr/>
-                    <a:lstStyle/>
-                    <a:p>
-                      <a:pPr algn="ctr" fontAlgn="b">
-                        <a:buNone/>
-                      </a:pPr>
-                      <a:endParaRPr lang="en-US" sz="2400" b="0" i="0" u="none" strike="noStrike" dirty="0">
-                        <a:solidFill>
-                          <a:srgbClr val="000000"/>
-                        </a:solidFill>
-                        <a:effectLst/>
-                        <a:latin typeface="Aptos Narrow" panose="020B0004020202020204" pitchFamily="34" charset="0"/>
-                      </a:endParaRPr>
-                    </a:p>
-                  </a:txBody>
-                  <a:tcPr marL="9525" marR="9525" marT="9525" marB="0" anchor="ctr">
-                    <a:lnL w="28575" cap="flat" cmpd="sng" algn="ctr">
-                      <a:solidFill>
-                        <a:schemeClr val="tx1"/>
-                      </a:solidFill>
-                      <a:prstDash val="solid"/>
-                      <a:round/>
-                      <a:headEnd type="none" w="med" len="med"/>
-                      <a:tailEnd type="none" w="med" len="med"/>
-                    </a:lnL>
-                    <a:lnR w="28575" cap="flat" cmpd="sng" algn="ctr">
-                      <a:solidFill>
-                        <a:schemeClr val="tx1"/>
-                      </a:solidFill>
-                      <a:prstDash val="solid"/>
-                      <a:round/>
-                      <a:headEnd type="none" w="med" len="med"/>
-                      <a:tailEnd type="none" w="med" len="med"/>
-                    </a:lnR>
-                    <a:lnT w="12700" cap="flat" cmpd="sng" algn="ctr">
-                      <a:solidFill>
-                        <a:schemeClr val="tx1"/>
-                      </a:solidFill>
-                      <a:prstDash val="solid"/>
-                      <a:round/>
-                      <a:headEnd type="none" w="med" len="med"/>
-                      <a:tailEnd type="none" w="med" len="med"/>
-                    </a:lnT>
-                    <a:lnB w="28575" cap="flat" cmpd="sng" algn="ctr">
-                      <a:solidFill>
-                        <a:schemeClr val="tx1"/>
-                      </a:solidFill>
-                      <a:prstDash val="solid"/>
-                      <a:round/>
-                      <a:headEnd type="none" w="med" len="med"/>
-                      <a:tailEnd type="none" w="med" len="med"/>
-                    </a:lnB>
-                  </a:tcPr>
-                </a:tc>
-                <a:tc>
-                  <a:txBody>
-                    <a:bodyPr/>
-                    <a:lstStyle/>
-                    <a:p>
-                      <a:pPr algn="ctr" fontAlgn="b">
-                        <a:buNone/>
-                      </a:pPr>
-                      <a:endParaRPr lang="en-US" sz="2400" b="0" i="0" u="none" strike="noStrike">
-                        <a:solidFill>
-                          <a:srgbClr val="000000"/>
-                        </a:solidFill>
-                        <a:effectLst/>
-                        <a:latin typeface="Aptos Narrow" panose="020B0004020202020204" pitchFamily="34" charset="0"/>
-                      </a:endParaRPr>
-                    </a:p>
-                  </a:txBody>
-                  <a:tcPr marL="9525" marR="9525" marT="9525" marB="0" anchor="ctr">
-                    <a:lnL w="28575" cap="flat" cmpd="sng" algn="ctr">
-                      <a:solidFill>
-                        <a:schemeClr val="tx1"/>
-                      </a:solidFill>
-                      <a:prstDash val="solid"/>
-                      <a:round/>
-                      <a:headEnd type="none" w="med" len="med"/>
-                      <a:tailEnd type="none" w="med" len="med"/>
-                    </a:lnL>
-                    <a:lnR w="12700" cap="flat" cmpd="sng" algn="ctr">
-                      <a:solidFill>
-                        <a:schemeClr val="tx1"/>
-                      </a:solidFill>
-                      <a:prstDash val="solid"/>
-                      <a:round/>
-                      <a:headEnd type="none" w="med" len="med"/>
-                      <a:tailEnd type="none" w="med" len="med"/>
-                    </a:lnR>
-                    <a:lnT w="12700" cap="flat" cmpd="sng" algn="ctr">
-                      <a:solidFill>
-                        <a:schemeClr val="tx1"/>
-                      </a:solidFill>
-                      <a:prstDash val="solid"/>
-                      <a:round/>
-                      <a:headEnd type="none" w="med" len="med"/>
-                      <a:tailEnd type="none" w="med" len="med"/>
-                    </a:lnT>
-                    <a:lnB w="28575" cap="flat" cmpd="sng" algn="ctr">
-                      <a:solidFill>
-                        <a:schemeClr val="tx1"/>
-                      </a:solidFill>
-                      <a:prstDash val="solid"/>
-                      <a:round/>
-                      <a:headEnd type="none" w="med" len="med"/>
-                      <a:tailEnd type="none" w="med" len="med"/>
-                    </a:lnB>
-                  </a:tcPr>
-                </a:tc>
-                <a:tc>
-                  <a:txBody>
-                    <a:bodyPr/>
-                    <a:lstStyle/>
-                    <a:p>
-                      <a:pPr algn="ctr" fontAlgn="b">
-                        <a:buNone/>
-                      </a:pPr>
-                      <a:endParaRPr lang="en-US" sz="2400" b="0" i="0" u="none" strike="noStrike" dirty="0">
-                        <a:solidFill>
-                          <a:srgbClr val="000000"/>
-                        </a:solidFill>
-                        <a:effectLst/>
-                        <a:latin typeface="Aptos Narrow" panose="020B0004020202020204" pitchFamily="34" charset="0"/>
-                      </a:endParaRPr>
-                    </a:p>
-                  </a:txBody>
-                  <a:tcPr marL="9525" marR="9525" marT="9525" marB="0" anchor="ctr">
-                    <a:lnL w="12700" cap="flat" cmpd="sng" algn="ctr">
-                      <a:solidFill>
-                        <a:schemeClr val="tx1"/>
-                      </a:solidFill>
-                      <a:prstDash val="solid"/>
-                      <a:round/>
-                      <a:headEnd type="none" w="med" len="med"/>
-                      <a:tailEnd type="none" w="med" len="med"/>
-                    </a:lnL>
-                    <a:lnR w="12700" cap="flat" cmpd="sng" algn="ctr">
-                      <a:solidFill>
-                        <a:schemeClr val="tx1"/>
-                      </a:solidFill>
-                      <a:prstDash val="solid"/>
-                      <a:round/>
-                      <a:headEnd type="none" w="med" len="med"/>
-                      <a:tailEnd type="none" w="med" len="med"/>
-                    </a:lnR>
-                    <a:lnT w="12700" cap="flat" cmpd="sng" algn="ctr">
-                      <a:solidFill>
-                        <a:schemeClr val="tx1"/>
-                      </a:solidFill>
-                      <a:prstDash val="solid"/>
-                      <a:round/>
-                      <a:headEnd type="none" w="med" len="med"/>
-                      <a:tailEnd type="none" w="med" len="med"/>
-                    </a:lnT>
-                    <a:lnB w="28575" cap="flat" cmpd="sng" algn="ctr">
-                      <a:solidFill>
-                        <a:schemeClr val="tx1"/>
-                      </a:solidFill>
-                      <a:prstDash val="solid"/>
-                      <a:round/>
-                      <a:headEnd type="none" w="med" len="med"/>
-                      <a:tailEnd type="none" w="med" len="med"/>
-                    </a:lnB>
-                  </a:tcPr>
-                </a:tc>
-                <a:tc>
-                  <a:txBody>
-                    <a:bodyPr/>
-                    <a:lstStyle/>
-                    <a:p>
-                      <a:pPr algn="ctr" fontAlgn="b">
-                        <a:buNone/>
-                      </a:pPr>
-                      <a:endParaRPr lang="en-US" sz="2400" b="0" i="0" u="none" strike="noStrike" dirty="0">
-                        <a:solidFill>
-                          <a:srgbClr val="000000"/>
-                        </a:solidFill>
-                        <a:effectLst/>
-                        <a:latin typeface="Aptos Narrow" panose="020B0004020202020204" pitchFamily="34" charset="0"/>
-                      </a:endParaRPr>
-                    </a:p>
-                  </a:txBody>
-                  <a:tcPr marL="9525" marR="9525" marT="9525" marB="0" anchor="ctr">
-                    <a:lnL w="12700" cap="flat" cmpd="sng" algn="ctr">
-                      <a:solidFill>
-                        <a:schemeClr val="tx1"/>
-                      </a:solidFill>
-                      <a:prstDash val="solid"/>
-                      <a:round/>
-                      <a:headEnd type="none" w="med" len="med"/>
-                      <a:tailEnd type="none" w="med" len="med"/>
-                    </a:lnL>
-                    <a:lnR w="12700" cap="flat" cmpd="sng" algn="ctr">
-                      <a:solidFill>
-                        <a:schemeClr val="tx1"/>
-                      </a:solidFill>
-                      <a:prstDash val="solid"/>
-                      <a:round/>
-                      <a:headEnd type="none" w="med" len="med"/>
-                      <a:tailEnd type="none" w="med" len="med"/>
-                    </a:lnR>
-                    <a:lnT w="12700" cap="flat" cmpd="sng" algn="ctr">
-                      <a:solidFill>
-                        <a:schemeClr val="tx1"/>
-                      </a:solidFill>
-                      <a:prstDash val="solid"/>
-                      <a:round/>
-                      <a:headEnd type="none" w="med" len="med"/>
-                      <a:tailEnd type="none" w="med" len="med"/>
-                    </a:lnT>
-                    <a:lnB w="28575" cap="flat" cmpd="sng" algn="ctr">
-                      <a:solidFill>
-                        <a:schemeClr val="tx1"/>
-                      </a:solidFill>
-                      <a:prstDash val="solid"/>
-                      <a:round/>
-                      <a:headEnd type="none" w="med" len="med"/>
-                      <a:tailEnd type="none" w="med" len="med"/>
-                    </a:lnB>
-                  </a:tcPr>
-                </a:tc>
-                <a:tc>
-                  <a:txBody>
-                    <a:bodyPr/>
-                    <a:lstStyle/>
-                    <a:p>
-                      <a:pPr algn="ctr" fontAlgn="b">
-                        <a:buNone/>
-                      </a:pPr>
-                      <a:endParaRPr lang="en-US" sz="2400" b="0" i="0" u="none" strike="noStrike" dirty="0">
-                        <a:solidFill>
-                          <a:srgbClr val="000000"/>
-                        </a:solidFill>
-                        <a:effectLst/>
-                        <a:latin typeface="Aptos Narrow" panose="020B0004020202020204" pitchFamily="34" charset="0"/>
-                      </a:endParaRPr>
-                    </a:p>
-                  </a:txBody>
-                  <a:tcPr marL="9525" marR="9525" marT="9525" marB="0" anchor="ctr">
-                    <a:lnL w="12700" cap="flat" cmpd="sng" algn="ctr">
-                      <a:solidFill>
-                        <a:schemeClr val="tx1"/>
-                      </a:solidFill>
-                      <a:prstDash val="solid"/>
-                      <a:round/>
-                      <a:headEnd type="none" w="med" len="med"/>
-                      <a:tailEnd type="none" w="med" len="med"/>
-                    </a:lnL>
-                    <a:lnR w="28575" cap="flat" cmpd="sng" algn="ctr">
-                      <a:solidFill>
-                        <a:schemeClr val="tx1"/>
-                      </a:solidFill>
-                      <a:prstDash val="solid"/>
-                      <a:round/>
-                      <a:headEnd type="none" w="med" len="med"/>
-                      <a:tailEnd type="none" w="med" len="med"/>
-                    </a:lnR>
-                    <a:lnT w="12700" cap="flat" cmpd="sng" algn="ctr">
-                      <a:solidFill>
-                        <a:schemeClr val="tx1"/>
-                      </a:solidFill>
-                      <a:prstDash val="solid"/>
-                      <a:round/>
-                      <a:headEnd type="none" w="med" len="med"/>
-                      <a:tailEnd type="none" w="med" len="med"/>
-                    </a:lnT>
-                    <a:lnB w="28575" cap="flat" cmpd="sng" algn="ctr">
-                      <a:solidFill>
-                        <a:schemeClr val="tx1"/>
-                      </a:solidFill>
-                      <a:prstDash val="solid"/>
-                      <a:round/>
-                      <a:headEnd type="none" w="med" len="med"/>
-                      <a:tailEnd type="none" w="med" len="med"/>
-                    </a:lnB>
-                  </a:tcPr>
-                </a:tc>
-                <a:extLst>
-                  <a:ext uri="{0D108BD9-81ED-4DB2-BD59-A6C34878D82A}">
-                    <a16:rowId xmlns:a16="http://schemas.microsoft.com/office/drawing/2014/main" val="2499049853"/>
-                  </a:ext>
-                </a:extLst>
-              </a:tr>
-            </a:tbl>
-          </a:graphicData>
-        </a:graphic>
-      </p:graphicFrame>
-    </p:spTree>
-    <p:extLst>
-      <p:ext uri="{BB962C8B-B14F-4D97-AF65-F5344CB8AC3E}">
-        <p14:creationId xmlns:p14="http://schemas.microsoft.com/office/powerpoint/2010/main" val="1537417627"/>
-      </p:ext>
-    </p:extLst>
-  </p:cSld>
-  <p:clrMapOvr>
-    <a:masterClrMapping/>
-  </p:clrMapOvr>
-</p:sld>
-</file>
-
-<file path=ppt/slides/slide14.xml><?xml version="1.0" encoding="utf-8"?>
-<p:sld xmlns:a="http://schemas.openxmlformats.org/drawingml/2006/main" xmlns:r="http://schemas.openxmlformats.org/officeDocument/2006/relationships" xmlns:p="http://schemas.openxmlformats.org/presentationml/2006/main">
-  <p:cSld>
-    <p:spTree>
-      <p:nvGrpSpPr>
-        <p:cNvPr id="1" name="">
-          <a:extLst>
-            <a:ext uri="{FF2B5EF4-FFF2-40B4-BE49-F238E27FC236}">
               <a16:creationId xmlns:a16="http://schemas.microsoft.com/office/drawing/2014/main" id="{BEC11A8F-9EF3-FF73-79AF-77850827A4C9}"/>
             </a:ext>
           </a:extLst>
@@ -27117,7 +20881,7 @@
             <a:fld id="{CBD12358-51D2-46B3-9BDE-DF29528B9454}" type="slidenum">
               <a:rPr lang="en-US" smtClean="0"/>
               <a:pPr/>
-              <a:t>14</a:t>
+              <a:t>13</a:t>
             </a:fld>
             <a:endParaRPr lang="en-US" dirty="0"/>
           </a:p>
@@ -27551,7 +21315,7 @@
 </p:sld>
 </file>
 
-<file path=ppt/slides/slide15.xml><?xml version="1.0" encoding="utf-8"?>
+<file path=ppt/slides/slide14.xml><?xml version="1.0" encoding="utf-8"?>
 <p:sld xmlns:a="http://schemas.openxmlformats.org/drawingml/2006/main" xmlns:r="http://schemas.openxmlformats.org/officeDocument/2006/relationships" xmlns:p="http://schemas.openxmlformats.org/presentationml/2006/main">
   <p:cSld>
     <p:spTree>
@@ -27802,7 +21566,7 @@
             <a:fld id="{CBD12358-51D2-46B3-9BDE-DF29528B9454}" type="slidenum">
               <a:rPr lang="en-US" smtClean="0"/>
               <a:pPr/>
-              <a:t>15</a:t>
+              <a:t>14</a:t>
             </a:fld>
             <a:endParaRPr lang="en-US" dirty="0"/>
           </a:p>
@@ -27849,7 +21613,7 @@
 </p:sld>
 </file>
 
-<file path=ppt/slides/slide16.xml><?xml version="1.0" encoding="utf-8"?>
+<file path=ppt/slides/slide15.xml><?xml version="1.0" encoding="utf-8"?>
 <p:sld xmlns:a="http://schemas.openxmlformats.org/drawingml/2006/main" xmlns:r="http://schemas.openxmlformats.org/officeDocument/2006/relationships" xmlns:p="http://schemas.openxmlformats.org/presentationml/2006/main">
   <p:cSld>
     <p:spTree>
@@ -28016,7 +21780,7 @@
             <a:fld id="{CBD12358-51D2-46B3-9BDE-DF29528B9454}" type="slidenum">
               <a:rPr lang="en-US" smtClean="0"/>
               <a:pPr/>
-              <a:t>16</a:t>
+              <a:t>15</a:t>
             </a:fld>
             <a:endParaRPr lang="en-US" dirty="0"/>
           </a:p>
@@ -28623,7 +22387,7 @@
 </p:sld>
 </file>
 
-<file path=ppt/slides/slide17.xml><?xml version="1.0" encoding="utf-8"?>
+<file path=ppt/slides/slide16.xml><?xml version="1.0" encoding="utf-8"?>
 <p:sld xmlns:a="http://schemas.openxmlformats.org/drawingml/2006/main" xmlns:r="http://schemas.openxmlformats.org/officeDocument/2006/relationships" xmlns:p="http://schemas.openxmlformats.org/presentationml/2006/main">
   <p:cSld>
     <p:spTree>
@@ -28746,7 +22510,7 @@
             <a:fld id="{CBD12358-51D2-46B3-9BDE-DF29528B9454}" type="slidenum">
               <a:rPr lang="en-US" smtClean="0"/>
               <a:pPr/>
-              <a:t>17</a:t>
+              <a:t>16</a:t>
             </a:fld>
             <a:endParaRPr lang="en-US" dirty="0"/>
           </a:p>
@@ -31124,7 +24888,7 @@
 </p:sld>
 </file>
 
-<file path=ppt/slides/slide18.xml><?xml version="1.0" encoding="utf-8"?>
+<file path=ppt/slides/slide17.xml><?xml version="1.0" encoding="utf-8"?>
 <p:sld xmlns:a="http://schemas.openxmlformats.org/drawingml/2006/main" xmlns:r="http://schemas.openxmlformats.org/officeDocument/2006/relationships" xmlns:p="http://schemas.openxmlformats.org/presentationml/2006/main">
   <p:cSld>
     <p:spTree>
@@ -31174,8 +24938,8 @@
           </a:p>
         </p:txBody>
       </p:sp>
-      <mc:AlternateContent xmlns:mc="http://schemas.openxmlformats.org/markup-compatibility/2006">
-        <mc:Choice xmlns:a14="http://schemas.microsoft.com/office/drawing/2010/main" Requires="a14">
+      <mc:AlternateContent xmlns:mc="http://schemas.openxmlformats.org/markup-compatibility/2006" xmlns:a14="http://schemas.microsoft.com/office/drawing/2010/main">
+        <mc:Choice Requires="a14">
           <p:sp>
             <p:nvSpPr>
               <p:cNvPr id="3" name="Text Placeholder 2">
@@ -31550,7 +25314,7 @@
             </p:txBody>
           </p:sp>
         </mc:Choice>
-        <mc:Fallback>
+        <mc:Fallback xmlns="">
           <p:sp>
             <p:nvSpPr>
               <p:cNvPr id="3" name="Text Placeholder 2">
@@ -31618,7 +25382,7 @@
             <a:fld id="{CBD12358-51D2-46B3-9BDE-DF29528B9454}" type="slidenum">
               <a:rPr lang="en-US" smtClean="0"/>
               <a:pPr/>
-              <a:t>18</a:t>
+              <a:t>17</a:t>
             </a:fld>
             <a:endParaRPr lang="en-US" dirty="0"/>
           </a:p>
@@ -33044,8 +26808,8 @@
           </a:p>
         </p:txBody>
       </p:sp>
-      <mc:AlternateContent xmlns:mc="http://schemas.openxmlformats.org/markup-compatibility/2006">
-        <mc:Choice xmlns:a14="http://schemas.microsoft.com/office/drawing/2010/main" Requires="a14">
+      <mc:AlternateContent xmlns:mc="http://schemas.openxmlformats.org/markup-compatibility/2006" xmlns:a14="http://schemas.microsoft.com/office/drawing/2010/main">
+        <mc:Choice Requires="a14">
           <p:sp>
             <p:nvSpPr>
               <p:cNvPr id="82" name="Speech Bubble: Rectangle with Corners Rounded 81">
@@ -33305,7 +27069,7 @@
             </p:txBody>
           </p:sp>
         </mc:Choice>
-        <mc:Fallback>
+        <mc:Fallback xmlns="">
           <p:sp>
             <p:nvSpPr>
               <p:cNvPr id="82" name="Speech Bubble: Rectangle with Corners Rounded 81">
@@ -33519,7 +27283,7 @@
     </p:spTree>
     <p:extLst>
       <p:ext uri="{BB962C8B-B14F-4D97-AF65-F5344CB8AC3E}">
-        <p14:creationId xmlns:p14="http://schemas.microsoft.com/office/powerpoint/2010/main" val="1522849761"/>
+        <p14:creationId xmlns:p14="http://schemas.microsoft.com/office/powerpoint/2010/main" val="2523321702"/>
       </p:ext>
     </p:extLst>
   </p:cSld>
@@ -33938,7 +27702,7 @@
 </p:sld>
 </file>
 
-<file path=ppt/slides/slide19.xml><?xml version="1.0" encoding="utf-8"?>
+<file path=ppt/slides/slide18.xml><?xml version="1.0" encoding="utf-8"?>
 <p:sld xmlns:a="http://schemas.openxmlformats.org/drawingml/2006/main" xmlns:r="http://schemas.openxmlformats.org/officeDocument/2006/relationships" xmlns:p="http://schemas.openxmlformats.org/presentationml/2006/main">
   <p:cSld>
     <p:spTree>
@@ -34158,7 +27922,7 @@
             <a:fld id="{CBD12358-51D2-46B3-9BDE-DF29528B9454}" type="slidenum">
               <a:rPr lang="en-US" smtClean="0"/>
               <a:pPr/>
-              <a:t>19</a:t>
+              <a:t>18</a:t>
             </a:fld>
             <a:endParaRPr lang="en-US" dirty="0"/>
           </a:p>
@@ -34376,590 +28140,7 @@
 </p:sld>
 </file>
 
-<file path=ppt/slides/slide2.xml><?xml version="1.0" encoding="utf-8"?>
-<p:sld xmlns:a="http://schemas.openxmlformats.org/drawingml/2006/main" xmlns:r="http://schemas.openxmlformats.org/officeDocument/2006/relationships" xmlns:p="http://schemas.openxmlformats.org/presentationml/2006/main">
-  <p:cSld>
-    <p:spTree>
-      <p:nvGrpSpPr>
-        <p:cNvPr id="1" name=""/>
-        <p:cNvGrpSpPr/>
-        <p:nvPr/>
-      </p:nvGrpSpPr>
-      <p:grpSpPr>
-        <a:xfrm>
-          <a:off x="0" y="0"/>
-          <a:ext cx="0" cy="0"/>
-          <a:chOff x="0" y="0"/>
-          <a:chExt cx="0" cy="0"/>
-        </a:xfrm>
-      </p:grpSpPr>
-      <p:sp>
-        <p:nvSpPr>
-          <p:cNvPr id="6" name="Text Placeholder 5">
-            <a:extLst>
-              <a:ext uri="{FF2B5EF4-FFF2-40B4-BE49-F238E27FC236}">
-                <a16:creationId xmlns:a16="http://schemas.microsoft.com/office/drawing/2014/main" id="{DABF8F09-E3BE-26B5-DED6-9C131156EA8E}"/>
-              </a:ext>
-            </a:extLst>
-          </p:cNvPr>
-          <p:cNvSpPr>
-            <a:spLocks noGrp="1"/>
-          </p:cNvSpPr>
-          <p:nvPr>
-            <p:ph type="body" sz="quarter" idx="11"/>
-          </p:nvPr>
-        </p:nvSpPr>
-        <p:spPr/>
-        <p:txBody>
-          <a:bodyPr/>
-          <a:lstStyle/>
-          <a:p>
-            <a:r>
-              <a:rPr lang="en-US" altLang="ja-JP" dirty="0"/>
-              <a:t>1-1 </a:t>
-            </a:r>
-            <a:r>
-              <a:rPr lang="ja-JP" altLang="en-US" dirty="0"/>
-              <a:t>この中で、</a:t>
-            </a:r>
-            <a:r>
-              <a:rPr lang="en-US" altLang="ja-JP" dirty="0"/>
-              <a:t>AI</a:t>
-            </a:r>
-            <a:r>
-              <a:rPr lang="ja-JP" altLang="en-US" dirty="0"/>
-              <a:t>（人工知能）はどれ？</a:t>
-            </a:r>
-          </a:p>
-        </p:txBody>
-      </p:sp>
-      <p:sp>
-        <p:nvSpPr>
-          <p:cNvPr id="5" name="Title 4">
-            <a:extLst>
-              <a:ext uri="{FF2B5EF4-FFF2-40B4-BE49-F238E27FC236}">
-                <a16:creationId xmlns:a16="http://schemas.microsoft.com/office/drawing/2014/main" id="{217F5B5B-410F-6732-970F-1877F90F2FDD}"/>
-              </a:ext>
-            </a:extLst>
-          </p:cNvPr>
-          <p:cNvSpPr>
-            <a:spLocks noGrp="1"/>
-          </p:cNvSpPr>
-          <p:nvPr>
-            <p:ph type="title"/>
-          </p:nvPr>
-        </p:nvSpPr>
-        <p:spPr/>
-        <p:txBody>
-          <a:bodyPr/>
-          <a:lstStyle/>
-          <a:p>
-            <a:r>
-              <a:rPr lang="en-US" dirty="0"/>
-              <a:t>1 </a:t>
-            </a:r>
-            <a:r>
-              <a:rPr lang="ja-JP" altLang="en-US" dirty="0"/>
-              <a:t>概要</a:t>
-            </a:r>
-            <a:endParaRPr lang="en-US" dirty="0"/>
-          </a:p>
-        </p:txBody>
-      </p:sp>
-      <p:sp>
-        <p:nvSpPr>
-          <p:cNvPr id="7" name="Text Placeholder 6">
-            <a:extLst>
-              <a:ext uri="{FF2B5EF4-FFF2-40B4-BE49-F238E27FC236}">
-                <a16:creationId xmlns:a16="http://schemas.microsoft.com/office/drawing/2014/main" id="{016C750F-DBC7-D1E3-79FF-536632ACF00F}"/>
-              </a:ext>
-            </a:extLst>
-          </p:cNvPr>
-          <p:cNvSpPr>
-            <a:spLocks noGrp="1"/>
-          </p:cNvSpPr>
-          <p:nvPr>
-            <p:ph type="body" sz="quarter" idx="13"/>
-          </p:nvPr>
-        </p:nvSpPr>
-        <p:spPr>
-          <a:xfrm>
-            <a:off x="85833" y="5763994"/>
-            <a:ext cx="8972332" cy="699456"/>
-          </a:xfrm>
-        </p:spPr>
-        <p:txBody>
-          <a:bodyPr>
-            <a:normAutofit lnSpcReduction="10000"/>
-          </a:bodyPr>
-          <a:lstStyle/>
-          <a:p>
-            <a:pPr marL="0" indent="0">
-              <a:buNone/>
-            </a:pPr>
-            <a:r>
-              <a:rPr lang="ja-JP" altLang="en-US" dirty="0"/>
-              <a:t>コンピュータは</a:t>
-            </a:r>
-            <a:r>
-              <a:rPr lang="ja-JP" altLang="en-US" dirty="0">
-                <a:solidFill>
-                  <a:srgbClr val="FF0000"/>
-                </a:solidFill>
-              </a:rPr>
-              <a:t>決められた指示に従っている</a:t>
-            </a:r>
-            <a:r>
-              <a:rPr lang="ja-JP" altLang="en-US" dirty="0"/>
-              <a:t>のか、それとも</a:t>
-            </a:r>
-            <a:r>
-              <a:rPr lang="ja-JP" altLang="en-US" dirty="0">
-                <a:solidFill>
-                  <a:srgbClr val="22BA67"/>
-                </a:solidFill>
-              </a:rPr>
-              <a:t>経験から学習している</a:t>
-            </a:r>
-            <a:r>
-              <a:rPr lang="ja-JP" altLang="en-US" dirty="0"/>
-              <a:t>のか？</a:t>
-            </a:r>
-            <a:endParaRPr lang="en-US" dirty="0"/>
-          </a:p>
-        </p:txBody>
-      </p:sp>
-      <p:sp>
-        <p:nvSpPr>
-          <p:cNvPr id="4" name="Slide Number Placeholder 3">
-            <a:extLst>
-              <a:ext uri="{FF2B5EF4-FFF2-40B4-BE49-F238E27FC236}">
-                <a16:creationId xmlns:a16="http://schemas.microsoft.com/office/drawing/2014/main" id="{6D7D1FA0-4073-D0BB-A7A3-11B1784BC8AA}"/>
-              </a:ext>
-            </a:extLst>
-          </p:cNvPr>
-          <p:cNvSpPr>
-            <a:spLocks noGrp="1"/>
-          </p:cNvSpPr>
-          <p:nvPr>
-            <p:ph type="sldNum" sz="quarter" idx="15"/>
-          </p:nvPr>
-        </p:nvSpPr>
-        <p:spPr/>
-        <p:txBody>
-          <a:bodyPr/>
-          <a:lstStyle/>
-          <a:p>
-            <a:fld id="{CBD12358-51D2-46B3-9BDE-DF29528B9454}" type="slidenum">
-              <a:rPr lang="en-US" smtClean="0"/>
-              <a:pPr/>
-              <a:t>2</a:t>
-            </a:fld>
-            <a:endParaRPr lang="en-US" dirty="0"/>
-          </a:p>
-        </p:txBody>
-      </p:sp>
-      <p:pic>
-        <p:nvPicPr>
-          <p:cNvPr id="11" name="Graphic 10">
-            <a:extLst>
-              <a:ext uri="{FF2B5EF4-FFF2-40B4-BE49-F238E27FC236}">
-                <a16:creationId xmlns:a16="http://schemas.microsoft.com/office/drawing/2014/main" id="{AF099447-0039-3F40-C292-11359CB3DB23}"/>
-              </a:ext>
-            </a:extLst>
-          </p:cNvPr>
-          <p:cNvPicPr>
-            <a:picLocks noChangeAspect="1"/>
-          </p:cNvPicPr>
-          <p:nvPr/>
-        </p:nvPicPr>
-        <p:blipFill>
-          <a:blip>
-            <a:extLst>
-              <a:ext uri="{96DAC541-7B7A-43D3-8B79-37D633B846F1}">
-                <asvg:svgBlip xmlns:asvg="http://schemas.microsoft.com/office/drawing/2016/SVG/main" r:embed="rId2"/>
-              </a:ext>
-            </a:extLst>
-          </a:blip>
-          <a:stretch>
-            <a:fillRect/>
-          </a:stretch>
-        </p:blipFill>
-        <p:spPr>
-          <a:xfrm>
-            <a:off x="468853" y="2104709"/>
-            <a:ext cx="1790252" cy="1790252"/>
-          </a:xfrm>
-          <a:prstGeom prst="rect">
-            <a:avLst/>
-          </a:prstGeom>
-        </p:spPr>
-      </p:pic>
-      <p:pic>
-        <p:nvPicPr>
-          <p:cNvPr id="13" name="Graphic 12">
-            <a:extLst>
-              <a:ext uri="{FF2B5EF4-FFF2-40B4-BE49-F238E27FC236}">
-                <a16:creationId xmlns:a16="http://schemas.microsoft.com/office/drawing/2014/main" id="{E53DC56C-2E93-ED58-BFC2-DC48D427D6F0}"/>
-              </a:ext>
-            </a:extLst>
-          </p:cNvPr>
-          <p:cNvPicPr>
-            <a:picLocks noChangeAspect="1"/>
-          </p:cNvPicPr>
-          <p:nvPr/>
-        </p:nvPicPr>
-        <p:blipFill>
-          <a:blip>
-            <a:extLst>
-              <a:ext uri="{96DAC541-7B7A-43D3-8B79-37D633B846F1}">
-                <asvg:svgBlip xmlns:asvg="http://schemas.microsoft.com/office/drawing/2016/SVG/main" r:embed="rId3"/>
-              </a:ext>
-            </a:extLst>
-          </a:blip>
-          <a:stretch>
-            <a:fillRect/>
-          </a:stretch>
-        </p:blipFill>
-        <p:spPr>
-          <a:xfrm>
-            <a:off x="2375200" y="2104709"/>
-            <a:ext cx="1790252" cy="1790252"/>
-          </a:xfrm>
-          <a:prstGeom prst="rect">
-            <a:avLst/>
-          </a:prstGeom>
-        </p:spPr>
-      </p:pic>
-      <p:pic>
-        <p:nvPicPr>
-          <p:cNvPr id="15" name="Graphic 14">
-            <a:extLst>
-              <a:ext uri="{FF2B5EF4-FFF2-40B4-BE49-F238E27FC236}">
-                <a16:creationId xmlns:a16="http://schemas.microsoft.com/office/drawing/2014/main" id="{93FFA03F-2853-BEF3-8FD3-A31983AEA2F7}"/>
-              </a:ext>
-            </a:extLst>
-          </p:cNvPr>
-          <p:cNvPicPr>
-            <a:picLocks noChangeAspect="1"/>
-          </p:cNvPicPr>
-          <p:nvPr/>
-        </p:nvPicPr>
-        <p:blipFill>
-          <a:blip>
-            <a:extLst>
-              <a:ext uri="{96DAC541-7B7A-43D3-8B79-37D633B846F1}">
-                <asvg:svgBlip xmlns:asvg="http://schemas.microsoft.com/office/drawing/2016/SVG/main" r:embed="rId4"/>
-              </a:ext>
-            </a:extLst>
-          </a:blip>
-          <a:stretch>
-            <a:fillRect/>
-          </a:stretch>
-        </p:blipFill>
-        <p:spPr>
-          <a:xfrm>
-            <a:off x="4629040" y="2104709"/>
-            <a:ext cx="1790253" cy="1790253"/>
-          </a:xfrm>
-          <a:prstGeom prst="rect">
-            <a:avLst/>
-          </a:prstGeom>
-        </p:spPr>
-      </p:pic>
-      <p:pic>
-        <p:nvPicPr>
-          <p:cNvPr id="17" name="Graphic 16">
-            <a:extLst>
-              <a:ext uri="{FF2B5EF4-FFF2-40B4-BE49-F238E27FC236}">
-                <a16:creationId xmlns:a16="http://schemas.microsoft.com/office/drawing/2014/main" id="{5B33EDA2-7B3E-D3CD-039B-84ED70E80305}"/>
-              </a:ext>
-            </a:extLst>
-          </p:cNvPr>
-          <p:cNvPicPr>
-            <a:picLocks noChangeAspect="1"/>
-          </p:cNvPicPr>
-          <p:nvPr/>
-        </p:nvPicPr>
-        <p:blipFill>
-          <a:blip>
-            <a:extLst>
-              <a:ext uri="{96DAC541-7B7A-43D3-8B79-37D633B846F1}">
-                <asvg:svgBlip xmlns:asvg="http://schemas.microsoft.com/office/drawing/2016/SVG/main" r:embed="rId5"/>
-              </a:ext>
-            </a:extLst>
-          </a:blip>
-          <a:stretch>
-            <a:fillRect/>
-          </a:stretch>
-        </p:blipFill>
-        <p:spPr>
-          <a:xfrm>
-            <a:off x="6882881" y="2096677"/>
-            <a:ext cx="1790252" cy="1790252"/>
-          </a:xfrm>
-          <a:prstGeom prst="rect">
-            <a:avLst/>
-          </a:prstGeom>
-        </p:spPr>
-      </p:pic>
-      <p:sp>
-        <p:nvSpPr>
-          <p:cNvPr id="18" name="TextBox 17">
-            <a:extLst>
-              <a:ext uri="{FF2B5EF4-FFF2-40B4-BE49-F238E27FC236}">
-                <a16:creationId xmlns:a16="http://schemas.microsoft.com/office/drawing/2014/main" id="{E05863FC-20A6-B28A-373A-F6511172C165}"/>
-              </a:ext>
-            </a:extLst>
-          </p:cNvPr>
-          <p:cNvSpPr txBox="1"/>
-          <p:nvPr/>
-        </p:nvSpPr>
-        <p:spPr>
-          <a:xfrm>
-            <a:off x="873299" y="4108360"/>
-            <a:ext cx="981359" cy="369332"/>
-          </a:xfrm>
-          <a:prstGeom prst="rect">
-            <a:avLst/>
-          </a:prstGeom>
-          <a:noFill/>
-        </p:spPr>
-        <p:txBody>
-          <a:bodyPr wrap="none" rtlCol="0">
-            <a:spAutoFit/>
-          </a:bodyPr>
-          <a:lstStyle/>
-          <a:p>
-            <a:r>
-              <a:rPr lang="ja-JP" altLang="en-US" dirty="0"/>
-              <a:t>① 電卓</a:t>
-            </a:r>
-            <a:endParaRPr lang="en-US" dirty="0"/>
-          </a:p>
-        </p:txBody>
-      </p:sp>
-      <p:sp>
-        <p:nvSpPr>
-          <p:cNvPr id="20" name="TextBox 19">
-            <a:extLst>
-              <a:ext uri="{FF2B5EF4-FFF2-40B4-BE49-F238E27FC236}">
-                <a16:creationId xmlns:a16="http://schemas.microsoft.com/office/drawing/2014/main" id="{6A19DB01-88A9-D5A1-02ED-68439B8B960C}"/>
-              </a:ext>
-            </a:extLst>
-          </p:cNvPr>
-          <p:cNvSpPr txBox="1"/>
-          <p:nvPr/>
-        </p:nvSpPr>
-        <p:spPr>
-          <a:xfrm>
-            <a:off x="2664230" y="4108360"/>
-            <a:ext cx="1212191" cy="369332"/>
-          </a:xfrm>
-          <a:prstGeom prst="rect">
-            <a:avLst/>
-          </a:prstGeom>
-          <a:noFill/>
-        </p:spPr>
-        <p:txBody>
-          <a:bodyPr wrap="none" rtlCol="0">
-            <a:spAutoFit/>
-          </a:bodyPr>
-          <a:lstStyle/>
-          <a:p>
-            <a:r>
-              <a:rPr lang="ja-JP" altLang="en-US" dirty="0"/>
-              <a:t>② 顔認証</a:t>
-            </a:r>
-            <a:endParaRPr lang="en-US" dirty="0"/>
-          </a:p>
-        </p:txBody>
-      </p:sp>
-      <p:sp>
-        <p:nvSpPr>
-          <p:cNvPr id="22" name="TextBox 21">
-            <a:extLst>
-              <a:ext uri="{FF2B5EF4-FFF2-40B4-BE49-F238E27FC236}">
-                <a16:creationId xmlns:a16="http://schemas.microsoft.com/office/drawing/2014/main" id="{0484DD36-B5E5-3029-7B07-F2B8D88E817A}"/>
-              </a:ext>
-            </a:extLst>
-          </p:cNvPr>
-          <p:cNvSpPr txBox="1"/>
-          <p:nvPr/>
-        </p:nvSpPr>
-        <p:spPr>
-          <a:xfrm>
-            <a:off x="4340989" y="3969860"/>
-            <a:ext cx="2366353" cy="646331"/>
-          </a:xfrm>
-          <a:prstGeom prst="rect">
-            <a:avLst/>
-          </a:prstGeom>
-          <a:noFill/>
-        </p:spPr>
-        <p:txBody>
-          <a:bodyPr wrap="none" rtlCol="0">
-            <a:spAutoFit/>
-          </a:bodyPr>
-          <a:lstStyle/>
-          <a:p>
-            <a:r>
-              <a:rPr lang="ja-JP" altLang="en-US" dirty="0"/>
-              <a:t>③ 決められたルール</a:t>
-            </a:r>
-            <a:endParaRPr lang="en-US" altLang="ja-JP" dirty="0"/>
-          </a:p>
-          <a:p>
-            <a:pPr algn="ctr"/>
-            <a:r>
-              <a:rPr lang="ja-JP" altLang="en-US" dirty="0"/>
-              <a:t>で動くゲームの敵</a:t>
-            </a:r>
-            <a:endParaRPr lang="en-US" dirty="0"/>
-          </a:p>
-        </p:txBody>
-      </p:sp>
-      <p:sp>
-        <p:nvSpPr>
-          <p:cNvPr id="24" name="TextBox 23">
-            <a:extLst>
-              <a:ext uri="{FF2B5EF4-FFF2-40B4-BE49-F238E27FC236}">
-                <a16:creationId xmlns:a16="http://schemas.microsoft.com/office/drawing/2014/main" id="{E7987BDF-0F3A-099A-816B-536FE6CF5107}"/>
-              </a:ext>
-            </a:extLst>
-          </p:cNvPr>
-          <p:cNvSpPr txBox="1"/>
-          <p:nvPr/>
-        </p:nvSpPr>
-        <p:spPr>
-          <a:xfrm>
-            <a:off x="6825662" y="3969860"/>
-            <a:ext cx="1904689" cy="646331"/>
-          </a:xfrm>
-          <a:prstGeom prst="rect">
-            <a:avLst/>
-          </a:prstGeom>
-          <a:noFill/>
-        </p:spPr>
-        <p:txBody>
-          <a:bodyPr wrap="none" rtlCol="0">
-            <a:spAutoFit/>
-          </a:bodyPr>
-          <a:lstStyle/>
-          <a:p>
-            <a:pPr algn="ctr"/>
-            <a:r>
-              <a:rPr lang="ja-JP" altLang="en-US" dirty="0"/>
-              <a:t>④ 歩き方を学習</a:t>
-            </a:r>
-            <a:endParaRPr lang="en-US" altLang="ja-JP" dirty="0"/>
-          </a:p>
-          <a:p>
-            <a:pPr algn="ctr"/>
-            <a:r>
-              <a:rPr lang="ja-JP" altLang="en-US" dirty="0"/>
-              <a:t>するロボット</a:t>
-            </a:r>
-            <a:endParaRPr lang="en-US" dirty="0"/>
-          </a:p>
-        </p:txBody>
-      </p:sp>
-    </p:spTree>
-    <p:extLst>
-      <p:ext uri="{BB962C8B-B14F-4D97-AF65-F5344CB8AC3E}">
-        <p14:creationId xmlns:p14="http://schemas.microsoft.com/office/powerpoint/2010/main" val="1814170624"/>
-      </p:ext>
-    </p:extLst>
-  </p:cSld>
-  <p:clrMapOvr>
-    <a:masterClrMapping/>
-  </p:clrMapOvr>
-  <p:timing>
-    <p:tnLst>
-      <p:par>
-        <p:cTn id="1" dur="indefinite" restart="never" nodeType="tmRoot">
-          <p:childTnLst>
-            <p:seq concurrent="1" nextAc="seek">
-              <p:cTn id="2" dur="indefinite" nodeType="mainSeq">
-                <p:childTnLst>
-                  <p:par>
-                    <p:cTn id="3" fill="hold">
-                      <p:stCondLst>
-                        <p:cond delay="indefinite"/>
-                      </p:stCondLst>
-                      <p:childTnLst>
-                        <p:par>
-                          <p:cTn id="4" fill="hold">
-                            <p:stCondLst>
-                              <p:cond delay="0"/>
-                            </p:stCondLst>
-                            <p:childTnLst>
-                              <p:par>
-                                <p:cTn id="5" presetID="1" presetClass="entr" presetSubtype="0" fill="hold" grpId="0" nodeType="clickEffect">
-                                  <p:stCondLst>
-                                    <p:cond delay="0"/>
-                                  </p:stCondLst>
-                                  <p:childTnLst>
-                                    <p:set>
-                                      <p:cBhvr>
-                                        <p:cTn id="6" dur="1" fill="hold">
-                                          <p:stCondLst>
-                                            <p:cond delay="0"/>
-                                          </p:stCondLst>
-                                        </p:cTn>
-                                        <p:tgtEl>
-                                          <p:spTgt spid="7">
-                                            <p:txEl>
-                                              <p:pRg st="0" end="0"/>
-                                            </p:txEl>
-                                          </p:spTgt>
-                                        </p:tgtEl>
-                                        <p:attrNameLst>
-                                          <p:attrName>style.visibility</p:attrName>
-                                        </p:attrNameLst>
-                                      </p:cBhvr>
-                                      <p:to>
-                                        <p:strVal val="visible"/>
-                                      </p:to>
-                                    </p:set>
-                                  </p:childTnLst>
-                                </p:cTn>
-                              </p:par>
-                            </p:childTnLst>
-                          </p:cTn>
-                        </p:par>
-                      </p:childTnLst>
-                    </p:cTn>
-                  </p:par>
-                </p:childTnLst>
-              </p:cTn>
-              <p:prevCondLst>
-                <p:cond evt="onPrev" delay="0">
-                  <p:tgtEl>
-                    <p:sldTgt/>
-                  </p:tgtEl>
-                </p:cond>
-              </p:prevCondLst>
-              <p:nextCondLst>
-                <p:cond evt="onNext" delay="0">
-                  <p:tgtEl>
-                    <p:sldTgt/>
-                  </p:tgtEl>
-                </p:cond>
-              </p:nextCondLst>
-            </p:seq>
-          </p:childTnLst>
-        </p:cTn>
-      </p:par>
-    </p:tnLst>
-    <p:bldLst>
-      <p:bldP spid="7" grpId="0" build="p"/>
-    </p:bldLst>
-  </p:timing>
-</p:sld>
-</file>
-
-<file path=ppt/slides/slide20.xml><?xml version="1.0" encoding="utf-8"?>
+<file path=ppt/slides/slide19.xml><?xml version="1.0" encoding="utf-8"?>
 <p:sld xmlns:a="http://schemas.openxmlformats.org/drawingml/2006/main" xmlns:r="http://schemas.openxmlformats.org/officeDocument/2006/relationships" xmlns:p="http://schemas.openxmlformats.org/presentationml/2006/main">
   <p:cSld>
     <p:spTree>
@@ -35074,7 +28255,7 @@
             <a:fld id="{CBD12358-51D2-46B3-9BDE-DF29528B9454}" type="slidenum">
               <a:rPr lang="en-US" smtClean="0"/>
               <a:pPr/>
-              <a:t>20</a:t>
+              <a:t>19</a:t>
             </a:fld>
             <a:endParaRPr lang="en-US" dirty="0"/>
           </a:p>
@@ -35864,7 +29045,590 @@
 </p:sld>
 </file>
 
-<file path=ppt/slides/slide21.xml><?xml version="1.0" encoding="utf-8"?>
+<file path=ppt/slides/slide2.xml><?xml version="1.0" encoding="utf-8"?>
+<p:sld xmlns:a="http://schemas.openxmlformats.org/drawingml/2006/main" xmlns:r="http://schemas.openxmlformats.org/officeDocument/2006/relationships" xmlns:p="http://schemas.openxmlformats.org/presentationml/2006/main">
+  <p:cSld>
+    <p:spTree>
+      <p:nvGrpSpPr>
+        <p:cNvPr id="1" name=""/>
+        <p:cNvGrpSpPr/>
+        <p:nvPr/>
+      </p:nvGrpSpPr>
+      <p:grpSpPr>
+        <a:xfrm>
+          <a:off x="0" y="0"/>
+          <a:ext cx="0" cy="0"/>
+          <a:chOff x="0" y="0"/>
+          <a:chExt cx="0" cy="0"/>
+        </a:xfrm>
+      </p:grpSpPr>
+      <p:sp>
+        <p:nvSpPr>
+          <p:cNvPr id="6" name="Text Placeholder 5">
+            <a:extLst>
+              <a:ext uri="{FF2B5EF4-FFF2-40B4-BE49-F238E27FC236}">
+                <a16:creationId xmlns:a16="http://schemas.microsoft.com/office/drawing/2014/main" id="{DABF8F09-E3BE-26B5-DED6-9C131156EA8E}"/>
+              </a:ext>
+            </a:extLst>
+          </p:cNvPr>
+          <p:cNvSpPr>
+            <a:spLocks noGrp="1"/>
+          </p:cNvSpPr>
+          <p:nvPr>
+            <p:ph type="body" sz="quarter" idx="11"/>
+          </p:nvPr>
+        </p:nvSpPr>
+        <p:spPr/>
+        <p:txBody>
+          <a:bodyPr/>
+          <a:lstStyle/>
+          <a:p>
+            <a:r>
+              <a:rPr lang="en-US" altLang="ja-JP" dirty="0"/>
+              <a:t>1-1 </a:t>
+            </a:r>
+            <a:r>
+              <a:rPr lang="ja-JP" altLang="en-US" dirty="0"/>
+              <a:t>この中で、</a:t>
+            </a:r>
+            <a:r>
+              <a:rPr lang="en-US" altLang="ja-JP" dirty="0"/>
+              <a:t>AI</a:t>
+            </a:r>
+            <a:r>
+              <a:rPr lang="ja-JP" altLang="en-US" dirty="0"/>
+              <a:t>（人工知能）はどれ？</a:t>
+            </a:r>
+          </a:p>
+        </p:txBody>
+      </p:sp>
+      <p:sp>
+        <p:nvSpPr>
+          <p:cNvPr id="5" name="Title 4">
+            <a:extLst>
+              <a:ext uri="{FF2B5EF4-FFF2-40B4-BE49-F238E27FC236}">
+                <a16:creationId xmlns:a16="http://schemas.microsoft.com/office/drawing/2014/main" id="{217F5B5B-410F-6732-970F-1877F90F2FDD}"/>
+              </a:ext>
+            </a:extLst>
+          </p:cNvPr>
+          <p:cNvSpPr>
+            <a:spLocks noGrp="1"/>
+          </p:cNvSpPr>
+          <p:nvPr>
+            <p:ph type="title"/>
+          </p:nvPr>
+        </p:nvSpPr>
+        <p:spPr/>
+        <p:txBody>
+          <a:bodyPr/>
+          <a:lstStyle/>
+          <a:p>
+            <a:r>
+              <a:rPr lang="en-US" dirty="0"/>
+              <a:t>1 </a:t>
+            </a:r>
+            <a:r>
+              <a:rPr lang="ja-JP" altLang="en-US" dirty="0"/>
+              <a:t>概要</a:t>
+            </a:r>
+            <a:endParaRPr lang="en-US" dirty="0"/>
+          </a:p>
+        </p:txBody>
+      </p:sp>
+      <p:sp>
+        <p:nvSpPr>
+          <p:cNvPr id="7" name="Text Placeholder 6">
+            <a:extLst>
+              <a:ext uri="{FF2B5EF4-FFF2-40B4-BE49-F238E27FC236}">
+                <a16:creationId xmlns:a16="http://schemas.microsoft.com/office/drawing/2014/main" id="{016C750F-DBC7-D1E3-79FF-536632ACF00F}"/>
+              </a:ext>
+            </a:extLst>
+          </p:cNvPr>
+          <p:cNvSpPr>
+            <a:spLocks noGrp="1"/>
+          </p:cNvSpPr>
+          <p:nvPr>
+            <p:ph type="body" sz="quarter" idx="13"/>
+          </p:nvPr>
+        </p:nvSpPr>
+        <p:spPr>
+          <a:xfrm>
+            <a:off x="85833" y="5763994"/>
+            <a:ext cx="8972332" cy="699456"/>
+          </a:xfrm>
+        </p:spPr>
+        <p:txBody>
+          <a:bodyPr>
+            <a:normAutofit lnSpcReduction="10000"/>
+          </a:bodyPr>
+          <a:lstStyle/>
+          <a:p>
+            <a:pPr marL="0" indent="0">
+              <a:buNone/>
+            </a:pPr>
+            <a:r>
+              <a:rPr lang="ja-JP" altLang="en-US" dirty="0"/>
+              <a:t>コンピュータは</a:t>
+            </a:r>
+            <a:r>
+              <a:rPr lang="ja-JP" altLang="en-US" dirty="0">
+                <a:solidFill>
+                  <a:srgbClr val="FF0000"/>
+                </a:solidFill>
+              </a:rPr>
+              <a:t>決められた指示に従っている</a:t>
+            </a:r>
+            <a:r>
+              <a:rPr lang="ja-JP" altLang="en-US" dirty="0"/>
+              <a:t>のか、それとも</a:t>
+            </a:r>
+            <a:r>
+              <a:rPr lang="ja-JP" altLang="en-US" dirty="0">
+                <a:solidFill>
+                  <a:srgbClr val="22BA67"/>
+                </a:solidFill>
+              </a:rPr>
+              <a:t>経験から学習している</a:t>
+            </a:r>
+            <a:r>
+              <a:rPr lang="ja-JP" altLang="en-US" dirty="0"/>
+              <a:t>のか？</a:t>
+            </a:r>
+            <a:endParaRPr lang="en-US" dirty="0"/>
+          </a:p>
+        </p:txBody>
+      </p:sp>
+      <p:sp>
+        <p:nvSpPr>
+          <p:cNvPr id="4" name="Slide Number Placeholder 3">
+            <a:extLst>
+              <a:ext uri="{FF2B5EF4-FFF2-40B4-BE49-F238E27FC236}">
+                <a16:creationId xmlns:a16="http://schemas.microsoft.com/office/drawing/2014/main" id="{6D7D1FA0-4073-D0BB-A7A3-11B1784BC8AA}"/>
+              </a:ext>
+            </a:extLst>
+          </p:cNvPr>
+          <p:cNvSpPr>
+            <a:spLocks noGrp="1"/>
+          </p:cNvSpPr>
+          <p:nvPr>
+            <p:ph type="sldNum" sz="quarter" idx="15"/>
+          </p:nvPr>
+        </p:nvSpPr>
+        <p:spPr/>
+        <p:txBody>
+          <a:bodyPr/>
+          <a:lstStyle/>
+          <a:p>
+            <a:fld id="{CBD12358-51D2-46B3-9BDE-DF29528B9454}" type="slidenum">
+              <a:rPr lang="en-US" smtClean="0"/>
+              <a:pPr/>
+              <a:t>2</a:t>
+            </a:fld>
+            <a:endParaRPr lang="en-US" dirty="0"/>
+          </a:p>
+        </p:txBody>
+      </p:sp>
+      <p:pic>
+        <p:nvPicPr>
+          <p:cNvPr id="11" name="Graphic 10">
+            <a:extLst>
+              <a:ext uri="{FF2B5EF4-FFF2-40B4-BE49-F238E27FC236}">
+                <a16:creationId xmlns:a16="http://schemas.microsoft.com/office/drawing/2014/main" id="{AF099447-0039-3F40-C292-11359CB3DB23}"/>
+              </a:ext>
+            </a:extLst>
+          </p:cNvPr>
+          <p:cNvPicPr>
+            <a:picLocks noChangeAspect="1"/>
+          </p:cNvPicPr>
+          <p:nvPr/>
+        </p:nvPicPr>
+        <p:blipFill>
+          <a:blip>
+            <a:extLst>
+              <a:ext uri="{96DAC541-7B7A-43D3-8B79-37D633B846F1}">
+                <asvg:svgBlip xmlns:asvg="http://schemas.microsoft.com/office/drawing/2016/SVG/main" r:embed="rId2"/>
+              </a:ext>
+            </a:extLst>
+          </a:blip>
+          <a:stretch>
+            <a:fillRect/>
+          </a:stretch>
+        </p:blipFill>
+        <p:spPr>
+          <a:xfrm>
+            <a:off x="468853" y="2104709"/>
+            <a:ext cx="1790252" cy="1790252"/>
+          </a:xfrm>
+          <a:prstGeom prst="rect">
+            <a:avLst/>
+          </a:prstGeom>
+        </p:spPr>
+      </p:pic>
+      <p:pic>
+        <p:nvPicPr>
+          <p:cNvPr id="13" name="Graphic 12">
+            <a:extLst>
+              <a:ext uri="{FF2B5EF4-FFF2-40B4-BE49-F238E27FC236}">
+                <a16:creationId xmlns:a16="http://schemas.microsoft.com/office/drawing/2014/main" id="{E53DC56C-2E93-ED58-BFC2-DC48D427D6F0}"/>
+              </a:ext>
+            </a:extLst>
+          </p:cNvPr>
+          <p:cNvPicPr>
+            <a:picLocks noChangeAspect="1"/>
+          </p:cNvPicPr>
+          <p:nvPr/>
+        </p:nvPicPr>
+        <p:blipFill>
+          <a:blip>
+            <a:extLst>
+              <a:ext uri="{96DAC541-7B7A-43D3-8B79-37D633B846F1}">
+                <asvg:svgBlip xmlns:asvg="http://schemas.microsoft.com/office/drawing/2016/SVG/main" r:embed="rId3"/>
+              </a:ext>
+            </a:extLst>
+          </a:blip>
+          <a:stretch>
+            <a:fillRect/>
+          </a:stretch>
+        </p:blipFill>
+        <p:spPr>
+          <a:xfrm>
+            <a:off x="2375200" y="2104709"/>
+            <a:ext cx="1790252" cy="1790252"/>
+          </a:xfrm>
+          <a:prstGeom prst="rect">
+            <a:avLst/>
+          </a:prstGeom>
+        </p:spPr>
+      </p:pic>
+      <p:pic>
+        <p:nvPicPr>
+          <p:cNvPr id="15" name="Graphic 14">
+            <a:extLst>
+              <a:ext uri="{FF2B5EF4-FFF2-40B4-BE49-F238E27FC236}">
+                <a16:creationId xmlns:a16="http://schemas.microsoft.com/office/drawing/2014/main" id="{93FFA03F-2853-BEF3-8FD3-A31983AEA2F7}"/>
+              </a:ext>
+            </a:extLst>
+          </p:cNvPr>
+          <p:cNvPicPr>
+            <a:picLocks noChangeAspect="1"/>
+          </p:cNvPicPr>
+          <p:nvPr/>
+        </p:nvPicPr>
+        <p:blipFill>
+          <a:blip>
+            <a:extLst>
+              <a:ext uri="{96DAC541-7B7A-43D3-8B79-37D633B846F1}">
+                <asvg:svgBlip xmlns:asvg="http://schemas.microsoft.com/office/drawing/2016/SVG/main" r:embed="rId4"/>
+              </a:ext>
+            </a:extLst>
+          </a:blip>
+          <a:stretch>
+            <a:fillRect/>
+          </a:stretch>
+        </p:blipFill>
+        <p:spPr>
+          <a:xfrm>
+            <a:off x="4629040" y="2104709"/>
+            <a:ext cx="1790253" cy="1790253"/>
+          </a:xfrm>
+          <a:prstGeom prst="rect">
+            <a:avLst/>
+          </a:prstGeom>
+        </p:spPr>
+      </p:pic>
+      <p:pic>
+        <p:nvPicPr>
+          <p:cNvPr id="17" name="Graphic 16">
+            <a:extLst>
+              <a:ext uri="{FF2B5EF4-FFF2-40B4-BE49-F238E27FC236}">
+                <a16:creationId xmlns:a16="http://schemas.microsoft.com/office/drawing/2014/main" id="{5B33EDA2-7B3E-D3CD-039B-84ED70E80305}"/>
+              </a:ext>
+            </a:extLst>
+          </p:cNvPr>
+          <p:cNvPicPr>
+            <a:picLocks noChangeAspect="1"/>
+          </p:cNvPicPr>
+          <p:nvPr/>
+        </p:nvPicPr>
+        <p:blipFill>
+          <a:blip>
+            <a:extLst>
+              <a:ext uri="{96DAC541-7B7A-43D3-8B79-37D633B846F1}">
+                <asvg:svgBlip xmlns:asvg="http://schemas.microsoft.com/office/drawing/2016/SVG/main" r:embed="rId5"/>
+              </a:ext>
+            </a:extLst>
+          </a:blip>
+          <a:stretch>
+            <a:fillRect/>
+          </a:stretch>
+        </p:blipFill>
+        <p:spPr>
+          <a:xfrm>
+            <a:off x="6882881" y="2096677"/>
+            <a:ext cx="1790252" cy="1790252"/>
+          </a:xfrm>
+          <a:prstGeom prst="rect">
+            <a:avLst/>
+          </a:prstGeom>
+        </p:spPr>
+      </p:pic>
+      <p:sp>
+        <p:nvSpPr>
+          <p:cNvPr id="18" name="TextBox 17">
+            <a:extLst>
+              <a:ext uri="{FF2B5EF4-FFF2-40B4-BE49-F238E27FC236}">
+                <a16:creationId xmlns:a16="http://schemas.microsoft.com/office/drawing/2014/main" id="{E05863FC-20A6-B28A-373A-F6511172C165}"/>
+              </a:ext>
+            </a:extLst>
+          </p:cNvPr>
+          <p:cNvSpPr txBox="1"/>
+          <p:nvPr/>
+        </p:nvSpPr>
+        <p:spPr>
+          <a:xfrm>
+            <a:off x="873299" y="4108360"/>
+            <a:ext cx="981359" cy="369332"/>
+          </a:xfrm>
+          <a:prstGeom prst="rect">
+            <a:avLst/>
+          </a:prstGeom>
+          <a:noFill/>
+        </p:spPr>
+        <p:txBody>
+          <a:bodyPr wrap="none" rtlCol="0">
+            <a:spAutoFit/>
+          </a:bodyPr>
+          <a:lstStyle/>
+          <a:p>
+            <a:r>
+              <a:rPr lang="ja-JP" altLang="en-US" dirty="0"/>
+              <a:t>① 電卓</a:t>
+            </a:r>
+            <a:endParaRPr lang="en-US" dirty="0"/>
+          </a:p>
+        </p:txBody>
+      </p:sp>
+      <p:sp>
+        <p:nvSpPr>
+          <p:cNvPr id="20" name="TextBox 19">
+            <a:extLst>
+              <a:ext uri="{FF2B5EF4-FFF2-40B4-BE49-F238E27FC236}">
+                <a16:creationId xmlns:a16="http://schemas.microsoft.com/office/drawing/2014/main" id="{6A19DB01-88A9-D5A1-02ED-68439B8B960C}"/>
+              </a:ext>
+            </a:extLst>
+          </p:cNvPr>
+          <p:cNvSpPr txBox="1"/>
+          <p:nvPr/>
+        </p:nvSpPr>
+        <p:spPr>
+          <a:xfrm>
+            <a:off x="2664230" y="4108360"/>
+            <a:ext cx="1212191" cy="369332"/>
+          </a:xfrm>
+          <a:prstGeom prst="rect">
+            <a:avLst/>
+          </a:prstGeom>
+          <a:noFill/>
+        </p:spPr>
+        <p:txBody>
+          <a:bodyPr wrap="none" rtlCol="0">
+            <a:spAutoFit/>
+          </a:bodyPr>
+          <a:lstStyle/>
+          <a:p>
+            <a:r>
+              <a:rPr lang="ja-JP" altLang="en-US" dirty="0"/>
+              <a:t>② 顔認証</a:t>
+            </a:r>
+            <a:endParaRPr lang="en-US" dirty="0"/>
+          </a:p>
+        </p:txBody>
+      </p:sp>
+      <p:sp>
+        <p:nvSpPr>
+          <p:cNvPr id="22" name="TextBox 21">
+            <a:extLst>
+              <a:ext uri="{FF2B5EF4-FFF2-40B4-BE49-F238E27FC236}">
+                <a16:creationId xmlns:a16="http://schemas.microsoft.com/office/drawing/2014/main" id="{0484DD36-B5E5-3029-7B07-F2B8D88E817A}"/>
+              </a:ext>
+            </a:extLst>
+          </p:cNvPr>
+          <p:cNvSpPr txBox="1"/>
+          <p:nvPr/>
+        </p:nvSpPr>
+        <p:spPr>
+          <a:xfrm>
+            <a:off x="4340989" y="3969860"/>
+            <a:ext cx="2366353" cy="646331"/>
+          </a:xfrm>
+          <a:prstGeom prst="rect">
+            <a:avLst/>
+          </a:prstGeom>
+          <a:noFill/>
+        </p:spPr>
+        <p:txBody>
+          <a:bodyPr wrap="none" rtlCol="0">
+            <a:spAutoFit/>
+          </a:bodyPr>
+          <a:lstStyle/>
+          <a:p>
+            <a:r>
+              <a:rPr lang="ja-JP" altLang="en-US" dirty="0"/>
+              <a:t>③ 決められたルール</a:t>
+            </a:r>
+            <a:endParaRPr lang="en-US" altLang="ja-JP" dirty="0"/>
+          </a:p>
+          <a:p>
+            <a:pPr algn="ctr"/>
+            <a:r>
+              <a:rPr lang="ja-JP" altLang="en-US" dirty="0"/>
+              <a:t>で動くゲームの敵</a:t>
+            </a:r>
+            <a:endParaRPr lang="en-US" dirty="0"/>
+          </a:p>
+        </p:txBody>
+      </p:sp>
+      <p:sp>
+        <p:nvSpPr>
+          <p:cNvPr id="24" name="TextBox 23">
+            <a:extLst>
+              <a:ext uri="{FF2B5EF4-FFF2-40B4-BE49-F238E27FC236}">
+                <a16:creationId xmlns:a16="http://schemas.microsoft.com/office/drawing/2014/main" id="{E7987BDF-0F3A-099A-816B-536FE6CF5107}"/>
+              </a:ext>
+            </a:extLst>
+          </p:cNvPr>
+          <p:cNvSpPr txBox="1"/>
+          <p:nvPr/>
+        </p:nvSpPr>
+        <p:spPr>
+          <a:xfrm>
+            <a:off x="6825662" y="3969860"/>
+            <a:ext cx="1904689" cy="646331"/>
+          </a:xfrm>
+          <a:prstGeom prst="rect">
+            <a:avLst/>
+          </a:prstGeom>
+          <a:noFill/>
+        </p:spPr>
+        <p:txBody>
+          <a:bodyPr wrap="none" rtlCol="0">
+            <a:spAutoFit/>
+          </a:bodyPr>
+          <a:lstStyle/>
+          <a:p>
+            <a:pPr algn="ctr"/>
+            <a:r>
+              <a:rPr lang="ja-JP" altLang="en-US" dirty="0"/>
+              <a:t>④ 歩き方を学習</a:t>
+            </a:r>
+            <a:endParaRPr lang="en-US" altLang="ja-JP" dirty="0"/>
+          </a:p>
+          <a:p>
+            <a:pPr algn="ctr"/>
+            <a:r>
+              <a:rPr lang="ja-JP" altLang="en-US" dirty="0"/>
+              <a:t>するロボット</a:t>
+            </a:r>
+            <a:endParaRPr lang="en-US" dirty="0"/>
+          </a:p>
+        </p:txBody>
+      </p:sp>
+    </p:spTree>
+    <p:extLst>
+      <p:ext uri="{BB962C8B-B14F-4D97-AF65-F5344CB8AC3E}">
+        <p14:creationId xmlns:p14="http://schemas.microsoft.com/office/powerpoint/2010/main" val="1814170624"/>
+      </p:ext>
+    </p:extLst>
+  </p:cSld>
+  <p:clrMapOvr>
+    <a:masterClrMapping/>
+  </p:clrMapOvr>
+  <p:timing>
+    <p:tnLst>
+      <p:par>
+        <p:cTn id="1" dur="indefinite" restart="never" nodeType="tmRoot">
+          <p:childTnLst>
+            <p:seq concurrent="1" nextAc="seek">
+              <p:cTn id="2" dur="indefinite" nodeType="mainSeq">
+                <p:childTnLst>
+                  <p:par>
+                    <p:cTn id="3" fill="hold">
+                      <p:stCondLst>
+                        <p:cond delay="indefinite"/>
+                      </p:stCondLst>
+                      <p:childTnLst>
+                        <p:par>
+                          <p:cTn id="4" fill="hold">
+                            <p:stCondLst>
+                              <p:cond delay="0"/>
+                            </p:stCondLst>
+                            <p:childTnLst>
+                              <p:par>
+                                <p:cTn id="5" presetID="1" presetClass="entr" presetSubtype="0" fill="hold" grpId="0" nodeType="clickEffect">
+                                  <p:stCondLst>
+                                    <p:cond delay="0"/>
+                                  </p:stCondLst>
+                                  <p:childTnLst>
+                                    <p:set>
+                                      <p:cBhvr>
+                                        <p:cTn id="6" dur="1" fill="hold">
+                                          <p:stCondLst>
+                                            <p:cond delay="0"/>
+                                          </p:stCondLst>
+                                        </p:cTn>
+                                        <p:tgtEl>
+                                          <p:spTgt spid="7">
+                                            <p:txEl>
+                                              <p:pRg st="0" end="0"/>
+                                            </p:txEl>
+                                          </p:spTgt>
+                                        </p:tgtEl>
+                                        <p:attrNameLst>
+                                          <p:attrName>style.visibility</p:attrName>
+                                        </p:attrNameLst>
+                                      </p:cBhvr>
+                                      <p:to>
+                                        <p:strVal val="visible"/>
+                                      </p:to>
+                                    </p:set>
+                                  </p:childTnLst>
+                                </p:cTn>
+                              </p:par>
+                            </p:childTnLst>
+                          </p:cTn>
+                        </p:par>
+                      </p:childTnLst>
+                    </p:cTn>
+                  </p:par>
+                </p:childTnLst>
+              </p:cTn>
+              <p:prevCondLst>
+                <p:cond evt="onPrev" delay="0">
+                  <p:tgtEl>
+                    <p:sldTgt/>
+                  </p:tgtEl>
+                </p:cond>
+              </p:prevCondLst>
+              <p:nextCondLst>
+                <p:cond evt="onNext" delay="0">
+                  <p:tgtEl>
+                    <p:sldTgt/>
+                  </p:tgtEl>
+                </p:cond>
+              </p:nextCondLst>
+            </p:seq>
+          </p:childTnLst>
+        </p:cTn>
+      </p:par>
+    </p:tnLst>
+    <p:bldLst>
+      <p:bldP spid="7" grpId="0" build="p"/>
+    </p:bldLst>
+  </p:timing>
+</p:sld>
+</file>
+
+<file path=ppt/slides/slide20.xml><?xml version="1.0" encoding="utf-8"?>
 <p:sld xmlns:a="http://schemas.openxmlformats.org/drawingml/2006/main" xmlns:r="http://schemas.openxmlformats.org/officeDocument/2006/relationships" xmlns:p="http://schemas.openxmlformats.org/presentationml/2006/main">
   <p:cSld>
     <p:spTree>
@@ -35954,7 +29718,7 @@
             <a:fld id="{CBD12358-51D2-46B3-9BDE-DF29528B9454}" type="slidenum">
               <a:rPr lang="en-US" smtClean="0"/>
               <a:pPr/>
-              <a:t>21</a:t>
+              <a:t>20</a:t>
             </a:fld>
             <a:endParaRPr lang="en-US" dirty="0"/>
           </a:p>
@@ -36222,7 +29986,7 @@
 </p:sld>
 </file>
 
-<file path=ppt/slides/slide22.xml><?xml version="1.0" encoding="utf-8"?>
+<file path=ppt/slides/slide21.xml><?xml version="1.0" encoding="utf-8"?>
 <p:sld xmlns:a="http://schemas.openxmlformats.org/drawingml/2006/main" xmlns:r="http://schemas.openxmlformats.org/officeDocument/2006/relationships" xmlns:p="http://schemas.openxmlformats.org/presentationml/2006/main">
   <p:cSld>
     <p:spTree>
@@ -36312,7 +30076,7 @@
             <a:fld id="{CBD12358-51D2-46B3-9BDE-DF29528B9454}" type="slidenum">
               <a:rPr lang="en-US" smtClean="0"/>
               <a:pPr/>
-              <a:t>22</a:t>
+              <a:t>21</a:t>
             </a:fld>
             <a:endParaRPr lang="en-US" dirty="0"/>
           </a:p>
@@ -36568,7 +30332,7 @@
 </p:sld>
 </file>
 
-<file path=ppt/slides/slide23.xml><?xml version="1.0" encoding="utf-8"?>
+<file path=ppt/slides/slide22.xml><?xml version="1.0" encoding="utf-8"?>
 <p:sld xmlns:a="http://schemas.openxmlformats.org/drawingml/2006/main" xmlns:r="http://schemas.openxmlformats.org/officeDocument/2006/relationships" xmlns:p="http://schemas.openxmlformats.org/presentationml/2006/main">
   <p:cSld>
     <p:spTree>
@@ -36709,7 +30473,7 @@
             <a:fld id="{CBD12358-51D2-46B3-9BDE-DF29528B9454}" type="slidenum">
               <a:rPr lang="en-US" smtClean="0"/>
               <a:pPr/>
-              <a:t>23</a:t>
+              <a:t>22</a:t>
             </a:fld>
             <a:endParaRPr lang="en-US" dirty="0"/>
           </a:p>
@@ -36758,7 +30522,7 @@
 </p:sld>
 </file>
 
-<file path=ppt/slides/slide24.xml><?xml version="1.0" encoding="utf-8"?>
+<file path=ppt/slides/slide23.xml><?xml version="1.0" encoding="utf-8"?>
 <p:sld xmlns:a="http://schemas.openxmlformats.org/drawingml/2006/main" xmlns:r="http://schemas.openxmlformats.org/officeDocument/2006/relationships" xmlns:p="http://schemas.openxmlformats.org/presentationml/2006/main">
   <p:cSld>
     <p:spTree>
@@ -36889,7 +30653,7 @@
             <a:fld id="{CBD12358-51D2-46B3-9BDE-DF29528B9454}" type="slidenum">
               <a:rPr lang="en-US" smtClean="0"/>
               <a:pPr/>
-              <a:t>24</a:t>
+              <a:t>23</a:t>
             </a:fld>
             <a:endParaRPr lang="en-US" dirty="0"/>
           </a:p>
@@ -36943,7 +30707,7 @@
 </p:sld>
 </file>
 
-<file path=ppt/slides/slide25.xml><?xml version="1.0" encoding="utf-8"?>
+<file path=ppt/slides/slide24.xml><?xml version="1.0" encoding="utf-8"?>
 <p:sld xmlns:a="http://schemas.openxmlformats.org/drawingml/2006/main" xmlns:r="http://schemas.openxmlformats.org/officeDocument/2006/relationships" xmlns:p="http://schemas.openxmlformats.org/presentationml/2006/main">
   <p:cSld>
     <p:spTree>
@@ -37074,7 +30838,7 @@
             <a:fld id="{CBD12358-51D2-46B3-9BDE-DF29528B9454}" type="slidenum">
               <a:rPr lang="en-US" smtClean="0"/>
               <a:pPr/>
-              <a:t>25</a:t>
+              <a:t>24</a:t>
             </a:fld>
             <a:endParaRPr lang="en-US" dirty="0"/>
           </a:p>
@@ -37128,7 +30892,7 @@
 </p:sld>
 </file>
 
-<file path=ppt/slides/slide26.xml><?xml version="1.0" encoding="utf-8"?>
+<file path=ppt/slides/slide25.xml><?xml version="1.0" encoding="utf-8"?>
 <p:sld xmlns:a="http://schemas.openxmlformats.org/drawingml/2006/main" xmlns:r="http://schemas.openxmlformats.org/officeDocument/2006/relationships" xmlns:p="http://schemas.openxmlformats.org/presentationml/2006/main">
   <p:cSld>
     <p:spTree>
@@ -37252,7 +31016,7 @@
                   <a:srgbClr val="EE7660"/>
                 </a:solidFill>
               </a:rPr>
-              <a:t>－1.1</a:t>
+              <a:t>－1.5</a:t>
             </a:r>
             <a:r>
               <a:rPr lang="en-US" dirty="0"/>
@@ -37285,7 +31049,7 @@
                   <a:srgbClr val="EE7660"/>
                 </a:solidFill>
               </a:rPr>
-              <a:t>－1.1</a:t>
+              <a:t>－1.5</a:t>
             </a:r>
             <a:r>
               <a:rPr lang="en-US" dirty="0"/>
@@ -37297,11 +31061,11 @@
                   <a:srgbClr val="EE7660"/>
                 </a:solidFill>
               </a:rPr>
-              <a:t>－40.0</a:t>
+              <a:t>－50.0</a:t>
             </a:r>
             <a:r>
               <a:rPr lang="en-US" dirty="0"/>
-              <a:t>にしたとき、訓練エピソード数をどこまで減らせるか調べてみよう（500回ずつ減らす）</a:t>
+              <a:t>にしたとき、訓練エピソード数をどこまで減らせるか調べてみよう（100回ずつ減らす）</a:t>
             </a:r>
             <a:r>
               <a:rPr lang="ja-JP" altLang="en-US" dirty="0"/>
@@ -37367,9 +31131,141 @@
             <a:fld id="{CBD12358-51D2-46B3-9BDE-DF29528B9454}" type="slidenum">
               <a:rPr lang="en-US" smtClean="0"/>
               <a:pPr/>
-              <a:t>26</a:t>
+              <a:t>25</a:t>
             </a:fld>
             <a:endParaRPr lang="en-US" dirty="0"/>
+          </a:p>
+        </p:txBody>
+      </p:sp>
+      <p:sp>
+        <p:nvSpPr>
+          <p:cNvPr id="5" name="TextBox 4">
+            <a:extLst>
+              <a:ext uri="{FF2B5EF4-FFF2-40B4-BE49-F238E27FC236}">
+                <a16:creationId xmlns:a16="http://schemas.microsoft.com/office/drawing/2014/main" id="{0C5C169A-CD52-E630-A80A-E718793238BA}"/>
+              </a:ext>
+            </a:extLst>
+          </p:cNvPr>
+          <p:cNvSpPr txBox="1"/>
+          <p:nvPr/>
+        </p:nvSpPr>
+        <p:spPr>
+          <a:xfrm>
+            <a:off x="3780115" y="1866900"/>
+            <a:ext cx="716863" cy="369332"/>
+          </a:xfrm>
+          <a:prstGeom prst="rect">
+            <a:avLst/>
+          </a:prstGeom>
+          <a:noFill/>
+        </p:spPr>
+        <p:txBody>
+          <a:bodyPr wrap="none" rtlCol="0">
+            <a:spAutoFit/>
+          </a:bodyPr>
+          <a:lstStyle/>
+          <a:p>
+            <a:r>
+              <a:rPr lang="en-US" altLang="ja-JP" dirty="0">
+                <a:solidFill>
+                  <a:srgbClr val="EE7660"/>
+                </a:solidFill>
+              </a:rPr>
+              <a:t>4000</a:t>
+            </a:r>
+            <a:endParaRPr lang="en-US" dirty="0">
+              <a:solidFill>
+                <a:srgbClr val="EE7660"/>
+              </a:solidFill>
+            </a:endParaRPr>
+          </a:p>
+        </p:txBody>
+      </p:sp>
+      <p:sp>
+        <p:nvSpPr>
+          <p:cNvPr id="7" name="TextBox 6">
+            <a:extLst>
+              <a:ext uri="{FF2B5EF4-FFF2-40B4-BE49-F238E27FC236}">
+                <a16:creationId xmlns:a16="http://schemas.microsoft.com/office/drawing/2014/main" id="{F89F0F2C-6167-27FE-8519-32CFE9237327}"/>
+              </a:ext>
+            </a:extLst>
+          </p:cNvPr>
+          <p:cNvSpPr txBox="1"/>
+          <p:nvPr/>
+        </p:nvSpPr>
+        <p:spPr>
+          <a:xfrm>
+            <a:off x="3780115" y="3059668"/>
+            <a:ext cx="716863" cy="369332"/>
+          </a:xfrm>
+          <a:prstGeom prst="rect">
+            <a:avLst/>
+          </a:prstGeom>
+          <a:noFill/>
+        </p:spPr>
+        <p:txBody>
+          <a:bodyPr wrap="none" rtlCol="0">
+            <a:spAutoFit/>
+          </a:bodyPr>
+          <a:lstStyle/>
+          <a:p>
+            <a:r>
+              <a:rPr lang="en-US" altLang="ja-JP" dirty="0">
+                <a:solidFill>
+                  <a:srgbClr val="EE7660"/>
+                </a:solidFill>
+              </a:rPr>
+              <a:t>3000</a:t>
+            </a:r>
+            <a:endParaRPr lang="en-US" dirty="0">
+              <a:solidFill>
+                <a:srgbClr val="EE7660"/>
+              </a:solidFill>
+            </a:endParaRPr>
+          </a:p>
+        </p:txBody>
+      </p:sp>
+      <p:sp>
+        <p:nvSpPr>
+          <p:cNvPr id="9" name="TextBox 8">
+            <a:extLst>
+              <a:ext uri="{FF2B5EF4-FFF2-40B4-BE49-F238E27FC236}">
+                <a16:creationId xmlns:a16="http://schemas.microsoft.com/office/drawing/2014/main" id="{F8A3559F-6C2F-8D67-E3A6-22411983FBF7}"/>
+              </a:ext>
+            </a:extLst>
+          </p:cNvPr>
+          <p:cNvSpPr txBox="1"/>
+          <p:nvPr/>
+        </p:nvSpPr>
+        <p:spPr>
+          <a:xfrm>
+            <a:off x="3780115" y="4570969"/>
+            <a:ext cx="716863" cy="369332"/>
+          </a:xfrm>
+          <a:prstGeom prst="rect">
+            <a:avLst/>
+          </a:prstGeom>
+          <a:noFill/>
+        </p:spPr>
+        <p:txBody>
+          <a:bodyPr wrap="none" rtlCol="0">
+            <a:spAutoFit/>
+          </a:bodyPr>
+          <a:lstStyle/>
+          <a:p>
+            <a:r>
+              <a:rPr lang="en-US" altLang="ja-JP" dirty="0">
+                <a:solidFill>
+                  <a:srgbClr val="EE7660"/>
+                </a:solidFill>
+              </a:rPr>
+              <a:t>2500</a:t>
+            </a:r>
+            <a:endParaRPr lang="en-US" dirty="0">
+              <a:solidFill>
+                <a:srgbClr val="EE7660"/>
+              </a:solidFill>
+            </a:endParaRPr>
           </a:p>
         </p:txBody>
       </p:sp>
@@ -37404,7 +31300,7 @@
                             </p:stCondLst>
                             <p:childTnLst>
                               <p:par>
-                                <p:cTn id="5" presetID="10" presetClass="entr" presetSubtype="0" fill="hold" nodeType="clickEffect">
+                                <p:cTn id="5" presetID="10" presetClass="entr" presetSubtype="0" fill="hold" grpId="0" nodeType="clickEffect">
                                   <p:stCondLst>
                                     <p:cond delay="0"/>
                                   </p:stCondLst>
@@ -37412,6 +31308,165 @@
                                     <p:set>
                                       <p:cBhvr>
                                         <p:cTn id="6" dur="1" fill="hold">
+                                          <p:stCondLst>
+                                            <p:cond delay="0"/>
+                                          </p:stCondLst>
+                                        </p:cTn>
+                                        <p:tgtEl>
+                                          <p:spTgt spid="5"/>
+                                        </p:tgtEl>
+                                        <p:attrNameLst>
+                                          <p:attrName>style.visibility</p:attrName>
+                                        </p:attrNameLst>
+                                      </p:cBhvr>
+                                      <p:to>
+                                        <p:strVal val="visible"/>
+                                      </p:to>
+                                    </p:set>
+                                    <p:animEffect transition="in" filter="fade">
+                                      <p:cBhvr>
+                                        <p:cTn id="7" dur="500"/>
+                                        <p:tgtEl>
+                                          <p:spTgt spid="5"/>
+                                        </p:tgtEl>
+                                      </p:cBhvr>
+                                    </p:animEffect>
+                                  </p:childTnLst>
+                                </p:cTn>
+                              </p:par>
+                            </p:childTnLst>
+                          </p:cTn>
+                        </p:par>
+                      </p:childTnLst>
+                    </p:cTn>
+                  </p:par>
+                  <p:par>
+                    <p:cTn id="8" fill="hold">
+                      <p:stCondLst>
+                        <p:cond delay="indefinite"/>
+                      </p:stCondLst>
+                      <p:childTnLst>
+                        <p:par>
+                          <p:cTn id="9" fill="hold">
+                            <p:stCondLst>
+                              <p:cond delay="0"/>
+                            </p:stCondLst>
+                            <p:childTnLst>
+                              <p:par>
+                                <p:cTn id="10" presetID="10" presetClass="entr" presetSubtype="0" fill="hold" grpId="0" nodeType="clickEffect">
+                                  <p:stCondLst>
+                                    <p:cond delay="0"/>
+                                  </p:stCondLst>
+                                  <p:childTnLst>
+                                    <p:set>
+                                      <p:cBhvr>
+                                        <p:cTn id="11" dur="1" fill="hold">
+                                          <p:stCondLst>
+                                            <p:cond delay="0"/>
+                                          </p:stCondLst>
+                                        </p:cTn>
+                                        <p:tgtEl>
+                                          <p:spTgt spid="7"/>
+                                        </p:tgtEl>
+                                        <p:attrNameLst>
+                                          <p:attrName>style.visibility</p:attrName>
+                                        </p:attrNameLst>
+                                      </p:cBhvr>
+                                      <p:to>
+                                        <p:strVal val="visible"/>
+                                      </p:to>
+                                    </p:set>
+                                    <p:animEffect transition="in" filter="fade">
+                                      <p:cBhvr>
+                                        <p:cTn id="12" dur="500"/>
+                                        <p:tgtEl>
+                                          <p:spTgt spid="7"/>
+                                        </p:tgtEl>
+                                      </p:cBhvr>
+                                    </p:animEffect>
+                                  </p:childTnLst>
+                                </p:cTn>
+                              </p:par>
+                            </p:childTnLst>
+                          </p:cTn>
+                        </p:par>
+                      </p:childTnLst>
+                    </p:cTn>
+                  </p:par>
+                  <p:par>
+                    <p:cTn id="13" fill="hold">
+                      <p:stCondLst>
+                        <p:cond delay="indefinite"/>
+                      </p:stCondLst>
+                      <p:childTnLst>
+                        <p:par>
+                          <p:cTn id="14" fill="hold">
+                            <p:stCondLst>
+                              <p:cond delay="0"/>
+                            </p:stCondLst>
+                            <p:childTnLst>
+                              <p:par>
+                                <p:cTn id="15" presetID="10" presetClass="entr" presetSubtype="0" fill="hold" grpId="0" nodeType="clickEffect">
+                                  <p:stCondLst>
+                                    <p:cond delay="0"/>
+                                  </p:stCondLst>
+                                  <p:childTnLst>
+                                    <p:set>
+                                      <p:cBhvr>
+                                        <p:cTn id="16" dur="1" fill="hold">
+                                          <p:stCondLst>
+                                            <p:cond delay="0"/>
+                                          </p:stCondLst>
+                                        </p:cTn>
+                                        <p:tgtEl>
+                                          <p:spTgt spid="9"/>
+                                        </p:tgtEl>
+                                        <p:attrNameLst>
+                                          <p:attrName>style.visibility</p:attrName>
+                                        </p:attrNameLst>
+                                      </p:cBhvr>
+                                      <p:to>
+                                        <p:strVal val="visible"/>
+                                      </p:to>
+                                    </p:set>
+                                    <p:animEffect transition="in" filter="fade">
+                                      <p:cBhvr>
+                                        <p:cTn id="17" dur="500"/>
+                                        <p:tgtEl>
+                                          <p:spTgt spid="9"/>
+                                        </p:tgtEl>
+                                      </p:cBhvr>
+                                    </p:animEffect>
+                                  </p:childTnLst>
+                                </p:cTn>
+                              </p:par>
+                            </p:childTnLst>
+                          </p:cTn>
+                        </p:par>
+                      </p:childTnLst>
+                    </p:cTn>
+                  </p:par>
+                  <p:par>
+                    <p:cTn id="18" fill="hold">
+                      <p:stCondLst>
+                        <p:cond delay="indefinite"/>
+                      </p:stCondLst>
+                      <p:childTnLst>
+                        <p:par>
+                          <p:cTn id="19" fill="hold">
+                            <p:stCondLst>
+                              <p:cond delay="0"/>
+                            </p:stCondLst>
+                            <p:childTnLst>
+                              <p:par>
+                                <p:cTn id="20" presetID="10" presetClass="entr" presetSubtype="0" fill="hold" nodeType="clickEffect">
+                                  <p:stCondLst>
+                                    <p:cond delay="0"/>
+                                  </p:stCondLst>
+                                  <p:childTnLst>
+                                    <p:set>
+                                      <p:cBhvr>
+                                        <p:cTn id="21" dur="1" fill="hold">
                                           <p:stCondLst>
                                             <p:cond delay="0"/>
                                           </p:stCondLst>
@@ -37433,7 +31488,7 @@
                                     </p:set>
                                     <p:animEffect transition="in" filter="fade">
                                       <p:cBhvr>
-                                        <p:cTn id="7" dur="500"/>
+                                        <p:cTn id="22" dur="500"/>
                                         <p:tgtEl>
                                           <p:spTgt spid="3">
                                             <p:txEl>
@@ -37473,11 +31528,16 @@
         </p:cTn>
       </p:par>
     </p:tnLst>
+    <p:bldLst>
+      <p:bldP spid="5" grpId="0"/>
+      <p:bldP spid="7" grpId="0"/>
+      <p:bldP spid="9" grpId="0"/>
+    </p:bldLst>
   </p:timing>
 </p:sld>
 </file>
 
-<file path=ppt/slides/slide27.xml><?xml version="1.0" encoding="utf-8"?>
+<file path=ppt/slides/slide26.xml><?xml version="1.0" encoding="utf-8"?>
 <p:sld xmlns:a="http://schemas.openxmlformats.org/drawingml/2006/main" xmlns:r="http://schemas.openxmlformats.org/officeDocument/2006/relationships" xmlns:p="http://schemas.openxmlformats.org/presentationml/2006/main">
   <p:cSld>
     <p:spTree>
@@ -37582,13 +31642,6 @@
             <a:r>
               <a:rPr lang="ja-JP" altLang="en-US" dirty="0"/>
               <a:t>がよりよい答え方を学ぶ</a:t>
-            </a:r>
-          </a:p>
-          <a:p>
-            <a:pPr algn="just"/>
-            <a:r>
-              <a:rPr lang="ja-JP" altLang="en-US" dirty="0"/>
-              <a:t>ゲームで勝つ方法を学ぶ</a:t>
             </a:r>
           </a:p>
           <a:p>
@@ -37649,7 +31702,7 @@
             <a:fld id="{CBD12358-51D2-46B3-9BDE-DF29528B9454}" type="slidenum">
               <a:rPr lang="en-US" smtClean="0"/>
               <a:pPr/>
-              <a:t>27</a:t>
+              <a:t>26</a:t>
             </a:fld>
             <a:endParaRPr lang="en-US" dirty="0"/>
           </a:p>
@@ -37699,8 +31752,8 @@
         </p:nvSpPr>
         <p:spPr>
           <a:xfrm>
-            <a:off x="6575802" y="3283289"/>
-            <a:ext cx="2164375" cy="646331"/>
+            <a:off x="6873159" y="3283289"/>
+            <a:ext cx="1569660" cy="646331"/>
           </a:xfrm>
           <a:prstGeom prst="rect">
             <a:avLst/>
@@ -37716,21 +31769,16 @@
             <a:pPr algn="ctr"/>
             <a:r>
               <a:rPr lang="ja-JP" altLang="en-US" dirty="0"/>
-              <a:t>ソースコードは</a:t>
+              <a:t>ソースコード</a:t>
             </a:r>
             <a:endParaRPr lang="en-US" altLang="ja-JP" dirty="0"/>
           </a:p>
           <a:p>
             <a:pPr algn="ctr"/>
             <a:r>
-              <a:rPr lang="en-US" altLang="ja-JP" dirty="0"/>
-              <a:t>9</a:t>
-            </a:r>
-            <a:r>
               <a:rPr lang="ja-JP" altLang="en-US" dirty="0"/>
-              <a:t>月に公開する予定</a:t>
-            </a:r>
-            <a:endParaRPr lang="en-US" dirty="0"/>
+              <a:t>のリンク</a:t>
+            </a:r>
           </a:p>
         </p:txBody>
       </p:sp>
@@ -37865,120 +31913,6 @@
       <p:bldP spid="11" grpId="0"/>
     </p:bldLst>
   </p:timing>
-</p:sld>
-</file>
-
-<file path=ppt/slides/slide28.xml><?xml version="1.0" encoding="utf-8"?>
-<p:sld xmlns:a="http://schemas.openxmlformats.org/drawingml/2006/main" xmlns:r="http://schemas.openxmlformats.org/officeDocument/2006/relationships" xmlns:p="http://schemas.openxmlformats.org/presentationml/2006/main">
-  <p:cSld>
-    <p:spTree>
-      <p:nvGrpSpPr>
-        <p:cNvPr id="1" name=""/>
-        <p:cNvGrpSpPr/>
-        <p:nvPr/>
-      </p:nvGrpSpPr>
-      <p:grpSpPr>
-        <a:xfrm>
-          <a:off x="0" y="0"/>
-          <a:ext cx="0" cy="0"/>
-          <a:chOff x="0" y="0"/>
-          <a:chExt cx="0" cy="0"/>
-        </a:xfrm>
-      </p:grpSpPr>
-      <p:sp>
-        <p:nvSpPr>
-          <p:cNvPr id="5" name="Title 4">
-            <a:extLst>
-              <a:ext uri="{FF2B5EF4-FFF2-40B4-BE49-F238E27FC236}">
-                <a16:creationId xmlns:a16="http://schemas.microsoft.com/office/drawing/2014/main" id="{118B84FC-F4C7-B7CD-04AE-1C30DA462C5B}"/>
-              </a:ext>
-            </a:extLst>
-          </p:cNvPr>
-          <p:cNvSpPr>
-            <a:spLocks noGrp="1"/>
-          </p:cNvSpPr>
-          <p:nvPr>
-            <p:ph type="title"/>
-          </p:nvPr>
-        </p:nvSpPr>
-        <p:spPr/>
-        <p:txBody>
-          <a:bodyPr/>
-          <a:lstStyle/>
-          <a:p>
-            <a:r>
-              <a:rPr lang="ja-JP" altLang="en-US" dirty="0"/>
-              <a:t>メモ</a:t>
-            </a:r>
-            <a:endParaRPr lang="en-US" dirty="0"/>
-          </a:p>
-        </p:txBody>
-      </p:sp>
-      <p:sp>
-        <p:nvSpPr>
-          <p:cNvPr id="6" name="Text Placeholder 5">
-            <a:extLst>
-              <a:ext uri="{FF2B5EF4-FFF2-40B4-BE49-F238E27FC236}">
-                <a16:creationId xmlns:a16="http://schemas.microsoft.com/office/drawing/2014/main" id="{913958F9-3945-BC58-578D-C4AD6D0F4002}"/>
-              </a:ext>
-            </a:extLst>
-          </p:cNvPr>
-          <p:cNvSpPr>
-            <a:spLocks noGrp="1"/>
-          </p:cNvSpPr>
-          <p:nvPr>
-            <p:ph type="body" sz="quarter" idx="13"/>
-          </p:nvPr>
-        </p:nvSpPr>
-        <p:spPr/>
-        <p:txBody>
-          <a:bodyPr/>
-          <a:lstStyle/>
-          <a:p>
-            <a:endParaRPr lang="en-US"/>
-          </a:p>
-        </p:txBody>
-      </p:sp>
-      <p:sp>
-        <p:nvSpPr>
-          <p:cNvPr id="4" name="Slide Number Placeholder 3">
-            <a:extLst>
-              <a:ext uri="{FF2B5EF4-FFF2-40B4-BE49-F238E27FC236}">
-                <a16:creationId xmlns:a16="http://schemas.microsoft.com/office/drawing/2014/main" id="{D4E83C38-99CD-C51C-D6F9-5B90AD1C8777}"/>
-              </a:ext>
-            </a:extLst>
-          </p:cNvPr>
-          <p:cNvSpPr>
-            <a:spLocks noGrp="1"/>
-          </p:cNvSpPr>
-          <p:nvPr>
-            <p:ph type="sldNum" sz="quarter" idx="15"/>
-          </p:nvPr>
-        </p:nvSpPr>
-        <p:spPr/>
-        <p:txBody>
-          <a:bodyPr/>
-          <a:lstStyle/>
-          <a:p>
-            <a:fld id="{CBD12358-51D2-46B3-9BDE-DF29528B9454}" type="slidenum">
-              <a:rPr lang="en-US" smtClean="0"/>
-              <a:pPr/>
-              <a:t>28</a:t>
-            </a:fld>
-            <a:endParaRPr lang="en-US" dirty="0"/>
-          </a:p>
-        </p:txBody>
-      </p:sp>
-    </p:spTree>
-    <p:extLst>
-      <p:ext uri="{BB962C8B-B14F-4D97-AF65-F5344CB8AC3E}">
-        <p14:creationId xmlns:p14="http://schemas.microsoft.com/office/powerpoint/2010/main" val="3316858625"/>
-      </p:ext>
-    </p:extLst>
-  </p:cSld>
-  <p:clrMapOvr>
-    <a:masterClrMapping/>
-  </p:clrMapOvr>
 </p:sld>
 </file>
 
@@ -43296,6 +37230,15 @@
 </file>
 
 <file path=customXml/item1.xml><?xml version="1.0" encoding="utf-8"?>
+<?mso-contentType ?>
+<FormTemplates xmlns="http://schemas.microsoft.com/sharepoint/v3/contenttype/forms">
+  <Display>DocumentLibraryForm</Display>
+  <Edit>DocumentLibraryForm</Edit>
+  <New>DocumentLibraryForm</New>
+</FormTemplates>
+</file>
+
+<file path=customXml/item2.xml><?xml version="1.0" encoding="utf-8"?>
 <p:properties xmlns:p="http://schemas.microsoft.com/office/2006/metadata/properties" xmlns:xsi="http://www.w3.org/2001/XMLSchema-instance" xmlns:pc="http://schemas.microsoft.com/office/infopath/2007/PartnerControls">
   <documentManagement>
     <_ip_UnifiedCompliancePolicyUIAction xmlns="http://schemas.microsoft.com/sharepoint/v3" xsi:nil="true"/>
@@ -43313,15 +37256,6 @@
     <MediaServiceKeyPoints xmlns="71af3243-3dd4-4a8d-8c0d-dd76da1f02a5" xsi:nil="true"/>
   </documentManagement>
 </p:properties>
-</file>
-
-<file path=customXml/item2.xml><?xml version="1.0" encoding="utf-8"?>
-<?mso-contentType ?>
-<FormTemplates xmlns="http://schemas.microsoft.com/sharepoint/v3/contenttype/forms">
-  <Display>DocumentLibraryForm</Display>
-  <Edit>DocumentLibraryForm</Edit>
-  <New>DocumentLibraryForm</New>
-</FormTemplates>
 </file>
 
 <file path=customXml/item3.xml><?xml version="1.0" encoding="utf-8"?>
@@ -43637,28 +37571,28 @@
 </file>
 
 <file path=customXml/itemProps1.xml><?xml version="1.0" encoding="utf-8"?>
-<ds:datastoreItem xmlns:ds="http://schemas.openxmlformats.org/officeDocument/2006/customXml" ds:itemID="{A3165DE6-2DCE-44FC-94B7-A499559DBF88}">
+<ds:datastoreItem xmlns:ds="http://schemas.openxmlformats.org/officeDocument/2006/customXml" ds:itemID="{67FFD73E-D96B-4428-99CD-717A4897D3B4}">
   <ds:schemaRefs>
-    <ds:schemaRef ds:uri="http://purl.org/dc/terms/"/>
-    <ds:schemaRef ds:uri="16c05727-aa75-4e4a-9b5f-8a80a1165891"/>
-    <ds:schemaRef ds:uri="http://schemas.microsoft.com/office/2006/documentManagement/types"/>
-    <ds:schemaRef ds:uri="http://schemas.microsoft.com/office/2006/metadata/properties"/>
-    <ds:schemaRef ds:uri="http://schemas.openxmlformats.org/package/2006/metadata/core-properties"/>
-    <ds:schemaRef ds:uri="http://purl.org/dc/elements/1.1/"/>
-    <ds:schemaRef ds:uri="http://purl.org/dc/dcmitype/"/>
-    <ds:schemaRef ds:uri="http://schemas.microsoft.com/office/infopath/2007/PartnerControls"/>
-    <ds:schemaRef ds:uri="230e9df3-be65-4c73-a93b-d1236ebd677e"/>
-    <ds:schemaRef ds:uri="71af3243-3dd4-4a8d-8c0d-dd76da1f02a5"/>
-    <ds:schemaRef ds:uri="http://schemas.microsoft.com/sharepoint/v3"/>
-    <ds:schemaRef ds:uri="http://www.w3.org/XML/1998/namespace"/>
+    <ds:schemaRef ds:uri="http://schemas.microsoft.com/sharepoint/v3/contenttype/forms"/>
   </ds:schemaRefs>
 </ds:datastoreItem>
 </file>
 
 <file path=customXml/itemProps2.xml><?xml version="1.0" encoding="utf-8"?>
-<ds:datastoreItem xmlns:ds="http://schemas.openxmlformats.org/officeDocument/2006/customXml" ds:itemID="{67FFD73E-D96B-4428-99CD-717A4897D3B4}">
+<ds:datastoreItem xmlns:ds="http://schemas.openxmlformats.org/officeDocument/2006/customXml" ds:itemID="{A3165DE6-2DCE-44FC-94B7-A499559DBF88}">
   <ds:schemaRefs>
-    <ds:schemaRef ds:uri="http://schemas.microsoft.com/sharepoint/v3/contenttype/forms"/>
+    <ds:schemaRef ds:uri="http://purl.org/dc/terms/"/>
+    <ds:schemaRef ds:uri="230e9df3-be65-4c73-a93b-d1236ebd677e"/>
+    <ds:schemaRef ds:uri="http://purl.org/dc/dcmitype/"/>
+    <ds:schemaRef ds:uri="71af3243-3dd4-4a8d-8c0d-dd76da1f02a5"/>
+    <ds:schemaRef ds:uri="http://schemas.microsoft.com/sharepoint/v3"/>
+    <ds:schemaRef ds:uri="http://schemas.microsoft.com/office/2006/documentManagement/types"/>
+    <ds:schemaRef ds:uri="http://purl.org/dc/elements/1.1/"/>
+    <ds:schemaRef ds:uri="http://schemas.microsoft.com/office/infopath/2007/PartnerControls"/>
+    <ds:schemaRef ds:uri="16c05727-aa75-4e4a-9b5f-8a80a1165891"/>
+    <ds:schemaRef ds:uri="http://schemas.openxmlformats.org/package/2006/metadata/core-properties"/>
+    <ds:schemaRef ds:uri="http://schemas.microsoft.com/office/2006/metadata/properties"/>
+    <ds:schemaRef ds:uri="http://www.w3.org/XML/1998/namespace"/>
   </ds:schemaRefs>
 </ds:datastoreItem>
 </file>
